--- a/Тезис_для_конференции/Anfimov_tezis.pptx
+++ b/Тезис_для_конференции/Anfimov_tezis.pptx
@@ -16,8 +16,8 @@
     <p:sldId id="272" r:id="rId7"/>
     <p:sldId id="273" r:id="rId8"/>
     <p:sldId id="275" r:id="rId9"/>
-    <p:sldId id="276" r:id="rId10"/>
-    <p:sldId id="267" r:id="rId11"/>
+    <p:sldId id="267" r:id="rId10"/>
+    <p:sldId id="276" r:id="rId11"/>
   </p:sldIdLst>
   <p:sldSz cx="12192000" cy="6858000"/>
   <p:notesSz cx="6858000" cy="9144000"/>
@@ -206,7 +206,7 @@
           <a:p>
             <a:fld id="{C5626634-CE2F-4DD7-8FF3-A2AF8CEFAA4F}" type="datetimeFigureOut">
               <a:rPr lang="ru-RU" smtClean="0"/>
-              <a:t>20.03.2026</a:t>
+              <a:t>02.04.2026</a:t>
             </a:fld>
             <a:endParaRPr lang="ru-RU"/>
           </a:p>
@@ -473,6 +473,90 @@
 </p:notesMaster>
 </file>
 
+<file path=ppt/notesSlides/notesSlide1.xml><?xml version="1.0" encoding="utf-8"?>
+<p:notes xmlns:a="http://schemas.openxmlformats.org/drawingml/2006/main" xmlns:r="http://schemas.openxmlformats.org/officeDocument/2006/relationships" xmlns:p="http://schemas.openxmlformats.org/presentationml/2006/main">
+  <p:cSld>
+    <p:spTree>
+      <p:nvGrpSpPr>
+        <p:cNvPr id="1" name=""/>
+        <p:cNvGrpSpPr/>
+        <p:nvPr/>
+      </p:nvGrpSpPr>
+      <p:grpSpPr>
+        <a:xfrm>
+          <a:off x="0" y="0"/>
+          <a:ext cx="0" cy="0"/>
+          <a:chOff x="0" y="0"/>
+          <a:chExt cx="0" cy="0"/>
+        </a:xfrm>
+      </p:grpSpPr>
+      <p:sp>
+        <p:nvSpPr>
+          <p:cNvPr id="2" name="Образ слайда 1"/>
+          <p:cNvSpPr>
+            <a:spLocks noGrp="1" noRot="1" noChangeAspect="1"/>
+          </p:cNvSpPr>
+          <p:nvPr>
+            <p:ph type="sldImg"/>
+          </p:nvPr>
+        </p:nvSpPr>
+        <p:spPr/>
+      </p:sp>
+      <p:sp>
+        <p:nvSpPr>
+          <p:cNvPr id="3" name="Заметки 2"/>
+          <p:cNvSpPr>
+            <a:spLocks noGrp="1"/>
+          </p:cNvSpPr>
+          <p:nvPr>
+            <p:ph type="body" idx="1"/>
+          </p:nvPr>
+        </p:nvSpPr>
+        <p:spPr/>
+        <p:txBody>
+          <a:bodyPr/>
+          <a:lstStyle/>
+          <a:p>
+            <a:endParaRPr lang="ru-RU" dirty="0"/>
+          </a:p>
+        </p:txBody>
+      </p:sp>
+      <p:sp>
+        <p:nvSpPr>
+          <p:cNvPr id="4" name="Номер слайда 3"/>
+          <p:cNvSpPr>
+            <a:spLocks noGrp="1"/>
+          </p:cNvSpPr>
+          <p:nvPr>
+            <p:ph type="sldNum" sz="quarter" idx="5"/>
+          </p:nvPr>
+        </p:nvSpPr>
+        <p:spPr/>
+        <p:txBody>
+          <a:bodyPr/>
+          <a:lstStyle/>
+          <a:p>
+            <a:fld id="{6A6371D2-86CC-402C-A2D2-EB78B925299E}" type="slidenum">
+              <a:rPr lang="ru-RU" smtClean="0"/>
+              <a:t>1</a:t>
+            </a:fld>
+            <a:endParaRPr lang="ru-RU"/>
+          </a:p>
+        </p:txBody>
+      </p:sp>
+    </p:spTree>
+    <p:extLst>
+      <p:ext uri="{BB962C8B-B14F-4D97-AF65-F5344CB8AC3E}">
+        <p14:creationId xmlns:p14="http://schemas.microsoft.com/office/powerpoint/2010/main" val="1754304575"/>
+      </p:ext>
+    </p:extLst>
+  </p:cSld>
+  <p:clrMapOvr>
+    <a:masterClrMapping/>
+  </p:clrMapOvr>
+</p:notes>
+</file>
+
 <file path=ppt/slideLayouts/slideLayout1.xml><?xml version="1.0" encoding="utf-8"?>
 <p:sldLayout xmlns:a="http://schemas.openxmlformats.org/drawingml/2006/main" xmlns:r="http://schemas.openxmlformats.org/officeDocument/2006/relationships" xmlns:p="http://schemas.openxmlformats.org/presentationml/2006/main" type="title" preserve="1">
   <p:cSld name="Титульный слайд">
@@ -636,7 +720,7 @@
           <a:p>
             <a:fld id="{D4C78990-BC74-4702-B11E-A02B45A34803}" type="datetimeFigureOut">
               <a:rPr lang="ru-RU" smtClean="0"/>
-              <a:t>20.03.2026</a:t>
+              <a:t>02.04.2026</a:t>
             </a:fld>
             <a:endParaRPr lang="ru-RU"/>
           </a:p>
@@ -806,7 +890,7 @@
           <a:p>
             <a:fld id="{D4C78990-BC74-4702-B11E-A02B45A34803}" type="datetimeFigureOut">
               <a:rPr lang="ru-RU" smtClean="0"/>
-              <a:t>20.03.2026</a:t>
+              <a:t>02.04.2026</a:t>
             </a:fld>
             <a:endParaRPr lang="ru-RU"/>
           </a:p>
@@ -986,7 +1070,7 @@
           <a:p>
             <a:fld id="{D4C78990-BC74-4702-B11E-A02B45A34803}" type="datetimeFigureOut">
               <a:rPr lang="ru-RU" smtClean="0"/>
-              <a:t>20.03.2026</a:t>
+              <a:t>02.04.2026</a:t>
             </a:fld>
             <a:endParaRPr lang="ru-RU"/>
           </a:p>
@@ -1156,7 +1240,7 @@
           <a:p>
             <a:fld id="{D4C78990-BC74-4702-B11E-A02B45A34803}" type="datetimeFigureOut">
               <a:rPr lang="ru-RU" smtClean="0"/>
-              <a:t>20.03.2026</a:t>
+              <a:t>02.04.2026</a:t>
             </a:fld>
             <a:endParaRPr lang="ru-RU"/>
           </a:p>
@@ -1424,7 +1508,7 @@
           <a:p>
             <a:fld id="{D4C78990-BC74-4702-B11E-A02B45A34803}" type="datetimeFigureOut">
               <a:rPr lang="ru-RU" smtClean="0"/>
-              <a:t>20.03.2026</a:t>
+              <a:t>02.04.2026</a:t>
             </a:fld>
             <a:endParaRPr lang="ru-RU"/>
           </a:p>
@@ -1656,7 +1740,7 @@
           <a:p>
             <a:fld id="{D4C78990-BC74-4702-B11E-A02B45A34803}" type="datetimeFigureOut">
               <a:rPr lang="ru-RU" smtClean="0"/>
-              <a:t>20.03.2026</a:t>
+              <a:t>02.04.2026</a:t>
             </a:fld>
             <a:endParaRPr lang="ru-RU"/>
           </a:p>
@@ -2015,7 +2099,7 @@
           <a:p>
             <a:fld id="{D4C78990-BC74-4702-B11E-A02B45A34803}" type="datetimeFigureOut">
               <a:rPr lang="ru-RU" smtClean="0"/>
-              <a:t>20.03.2026</a:t>
+              <a:t>02.04.2026</a:t>
             </a:fld>
             <a:endParaRPr lang="ru-RU"/>
           </a:p>
@@ -2156,7 +2240,7 @@
           <a:p>
             <a:fld id="{D4C78990-BC74-4702-B11E-A02B45A34803}" type="datetimeFigureOut">
               <a:rPr lang="ru-RU" smtClean="0"/>
-              <a:t>20.03.2026</a:t>
+              <a:t>02.04.2026</a:t>
             </a:fld>
             <a:endParaRPr lang="ru-RU"/>
           </a:p>
@@ -2251,7 +2335,7 @@
           <a:p>
             <a:fld id="{D4C78990-BC74-4702-B11E-A02B45A34803}" type="datetimeFigureOut">
               <a:rPr lang="ru-RU" smtClean="0"/>
-              <a:t>20.03.2026</a:t>
+              <a:t>02.04.2026</a:t>
             </a:fld>
             <a:endParaRPr lang="ru-RU"/>
           </a:p>
@@ -2608,7 +2692,7 @@
           <a:p>
             <a:fld id="{D4C78990-BC74-4702-B11E-A02B45A34803}" type="datetimeFigureOut">
               <a:rPr lang="ru-RU" smtClean="0"/>
-              <a:t>20.03.2026</a:t>
+              <a:t>02.04.2026</a:t>
             </a:fld>
             <a:endParaRPr lang="ru-RU"/>
           </a:p>
@@ -2965,7 +3049,7 @@
           <a:p>
             <a:fld id="{D4C78990-BC74-4702-B11E-A02B45A34803}" type="datetimeFigureOut">
               <a:rPr lang="ru-RU" smtClean="0"/>
-              <a:t>20.03.2026</a:t>
+              <a:t>02.04.2026</a:t>
             </a:fld>
             <a:endParaRPr lang="ru-RU"/>
           </a:p>
@@ -3207,7 +3291,7 @@
           <a:p>
             <a:fld id="{D4C78990-BC74-4702-B11E-A02B45A34803}" type="datetimeFigureOut">
               <a:rPr lang="ru-RU" smtClean="0"/>
-              <a:t>20.03.2026</a:t>
+              <a:t>02.04.2026</a:t>
             </a:fld>
             <a:endParaRPr lang="ru-RU"/>
           </a:p>
@@ -3937,7 +4021,7 @@
                 <a:latin typeface="Times New Roman" panose="02020603050405020304" pitchFamily="18" charset="0"/>
                 <a:cs typeface="Times New Roman" panose="02020603050405020304" pitchFamily="18" charset="0"/>
               </a:rPr>
-              <a:t>Дата: 01.04.2026</a:t>
+              <a:t>Дата: 04.04.2026</a:t>
             </a:r>
           </a:p>
         </p:txBody>
@@ -3958,20 +4042,12 @@
 <file path=ppt/slides/slide10.xml><?xml version="1.0" encoding="utf-8"?>
 <p:sld xmlns:a="http://schemas.openxmlformats.org/drawingml/2006/main" xmlns:r="http://schemas.openxmlformats.org/officeDocument/2006/relationships" xmlns:p="http://schemas.openxmlformats.org/presentationml/2006/main">
   <p:cSld>
-    <p:bg>
-      <p:bgPr>
-        <a:solidFill>
-          <a:schemeClr val="accent2"/>
-        </a:solidFill>
-        <a:effectLst/>
-      </p:bgPr>
-    </p:bg>
     <p:spTree>
       <p:nvGrpSpPr>
         <p:cNvPr id="1" name="">
           <a:extLst>
             <a:ext uri="{FF2B5EF4-FFF2-40B4-BE49-F238E27FC236}">
-              <a16:creationId xmlns:a16="http://schemas.microsoft.com/office/drawing/2014/main" id="{07F67235-B120-5DC2-02D3-EDE466B4EA3C}"/>
+              <a16:creationId xmlns:a16="http://schemas.microsoft.com/office/drawing/2014/main" id="{6EE088B1-270F-467A-485B-FE41C3B705F8}"/>
             </a:ext>
           </a:extLst>
         </p:cNvPr>
@@ -3988,231 +4064,219 @@
       </p:grpSpPr>
       <p:sp>
         <p:nvSpPr>
-          <p:cNvPr id="8" name="Rectangle 7">
+          <p:cNvPr id="2" name="TextBox 1">
             <a:extLst>
               <a:ext uri="{FF2B5EF4-FFF2-40B4-BE49-F238E27FC236}">
-                <a16:creationId xmlns:a16="http://schemas.microsoft.com/office/drawing/2014/main" id="{2CD6835F-F652-25A6-F645-2290179685E3}"/>
-              </a:ext>
-              <a:ext uri="{C183D7F6-B498-43B3-948B-1728B52AA6E4}">
-                <adec:decorative xmlns:adec="http://schemas.microsoft.com/office/drawing/2017/decorative" val="1"/>
+                <a16:creationId xmlns:a16="http://schemas.microsoft.com/office/drawing/2014/main" id="{CA506851-A264-79D0-5147-2CE6E03FBAAF}"/>
               </a:ext>
             </a:extLst>
           </p:cNvPr>
-          <p:cNvSpPr>
-            <a:spLocks noGrp="1" noRot="1" noChangeAspect="1" noMove="1" noResize="1" noEditPoints="1" noAdjustHandles="1" noChangeArrowheads="1" noChangeShapeType="1" noTextEdit="1"/>
-          </p:cNvSpPr>
-          <p:nvPr>
-            <p:extLst>
-              <p:ext uri="{386F3935-93C4-4BCD-93E2-E3B085C9AB24}">
-                <p16:designElem xmlns:p16="http://schemas.microsoft.com/office/powerpoint/2015/main" val="1"/>
-              </p:ext>
-            </p:extLst>
-          </p:nvPr>
+          <p:cNvSpPr txBox="1"/>
+          <p:nvPr/>
         </p:nvSpPr>
         <p:spPr>
           <a:xfrm>
-            <a:off x="640068" y="640080"/>
-            <a:ext cx="10911865" cy="4626864"/>
+            <a:off x="4376426" y="0"/>
+            <a:ext cx="3439147" cy="523220"/>
           </a:xfrm>
           <a:prstGeom prst="rect">
             <a:avLst/>
           </a:prstGeom>
           <a:noFill/>
-          <a:ln w="31750" cap="sq">
-            <a:solidFill>
-              <a:srgbClr val="FFFFFF"/>
-            </a:solidFill>
-            <a:miter lim="800000"/>
-          </a:ln>
         </p:spPr>
-        <p:style>
-          <a:lnRef idx="2">
-            <a:schemeClr val="accent1">
-              <a:shade val="50000"/>
-            </a:schemeClr>
-          </a:lnRef>
-          <a:fillRef idx="1">
-            <a:schemeClr val="accent1"/>
-          </a:fillRef>
-          <a:effectRef idx="0">
-            <a:schemeClr val="accent1"/>
-          </a:effectRef>
-          <a:fontRef idx="minor">
-            <a:schemeClr val="lt1"/>
-          </a:fontRef>
-        </p:style>
         <p:txBody>
-          <a:bodyPr rtlCol="0" anchor="ctr"/>
+          <a:bodyPr wrap="none" rtlCol="0">
+            <a:spAutoFit/>
+          </a:bodyPr>
           <a:lstStyle/>
           <a:p>
-            <a:pPr marL="0" marR="0" lvl="0" indent="0" algn="ctr" defTabSz="457200" rtl="0" eaLnBrk="1" fontAlgn="auto" latinLnBrk="0" hangingPunct="1">
-              <a:lnSpc>
-                <a:spcPct val="100000"/>
-              </a:lnSpc>
-              <a:spcBef>
-                <a:spcPts val="0"/>
-              </a:spcBef>
-              <a:spcAft>
-                <a:spcPts val="0"/>
-              </a:spcAft>
-              <a:buClrTx/>
-              <a:buSzTx/>
-              <a:buFontTx/>
-              <a:buNone/>
-              <a:tabLst/>
-              <a:defRPr/>
-            </a:pPr>
-            <a:endParaRPr kumimoji="0" lang="en-US" sz="1800" b="0" i="0" u="none" strike="noStrike" kern="1200" cap="none" spc="0" normalizeH="0" baseline="0" noProof="0" dirty="0">
-              <a:ln>
-                <a:noFill/>
-              </a:ln>
-              <a:solidFill>
-                <a:srgbClr val="FFFFFF"/>
-              </a:solidFill>
-              <a:effectLst/>
-              <a:uLnTx/>
-              <a:uFillTx/>
-              <a:latin typeface="Gill Sans MT" panose="020B0502020104020203"/>
-              <a:ea typeface="+mn-ea"/>
-              <a:cs typeface="+mn-cs"/>
-            </a:endParaRPr>
+            <a:r>
+              <a:rPr lang="ru-RU" sz="2800" b="1" dirty="0">
+                <a:latin typeface="Times New Roman" panose="02020603050405020304" pitchFamily="18" charset="0"/>
+                <a:cs typeface="Times New Roman" panose="02020603050405020304" pitchFamily="18" charset="0"/>
+              </a:rPr>
+              <a:t>Список литературы</a:t>
+            </a:r>
           </a:p>
         </p:txBody>
       </p:sp>
       <p:sp>
         <p:nvSpPr>
-          <p:cNvPr id="10" name="Rectangle 9">
+          <p:cNvPr id="3" name="TextBox 2">
             <a:extLst>
               <a:ext uri="{FF2B5EF4-FFF2-40B4-BE49-F238E27FC236}">
-                <a16:creationId xmlns:a16="http://schemas.microsoft.com/office/drawing/2014/main" id="{9612F587-5BFE-2158-1B6E-84D728510F17}"/>
-              </a:ext>
-              <a:ext uri="{C183D7F6-B498-43B3-948B-1728B52AA6E4}">
-                <adec:decorative xmlns:adec="http://schemas.microsoft.com/office/drawing/2017/decorative" val="1"/>
+                <a16:creationId xmlns:a16="http://schemas.microsoft.com/office/drawing/2014/main" id="{6837EB01-75EB-F47F-3EB8-B95AA247CC82}"/>
               </a:ext>
             </a:extLst>
           </p:cNvPr>
-          <p:cNvSpPr>
-            <a:spLocks noGrp="1" noRot="1" noChangeAspect="1" noMove="1" noResize="1" noEditPoints="1" noAdjustHandles="1" noChangeArrowheads="1" noChangeShapeType="1" noTextEdit="1"/>
-          </p:cNvSpPr>
-          <p:nvPr>
-            <p:extLst>
-              <p:ext uri="{386F3935-93C4-4BCD-93E2-E3B085C9AB24}">
-                <p16:designElem xmlns:p16="http://schemas.microsoft.com/office/powerpoint/2015/main" val="1"/>
-              </p:ext>
-            </p:extLst>
-          </p:nvPr>
+          <p:cNvSpPr txBox="1"/>
+          <p:nvPr/>
         </p:nvSpPr>
         <p:spPr>
           <a:xfrm>
-            <a:off x="806196" y="804672"/>
-            <a:ext cx="10579608" cy="4297680"/>
+            <a:off x="387790" y="523220"/>
+            <a:ext cx="11416420" cy="6211316"/>
           </a:xfrm>
           <a:prstGeom prst="rect">
             <a:avLst/>
           </a:prstGeom>
-          <a:solidFill>
-            <a:srgbClr val="FFFFFF"/>
-          </a:solidFill>
-          <a:ln>
-            <a:noFill/>
-          </a:ln>
-        </p:spPr>
-        <p:style>
-          <a:lnRef idx="2">
-            <a:schemeClr val="accent1">
-              <a:shade val="50000"/>
-            </a:schemeClr>
-          </a:lnRef>
-          <a:fillRef idx="1">
-            <a:schemeClr val="accent1"/>
-          </a:fillRef>
-          <a:effectRef idx="0">
-            <a:schemeClr val="accent1"/>
-          </a:effectRef>
-          <a:fontRef idx="minor">
-            <a:schemeClr val="lt1"/>
-          </a:fontRef>
-        </p:style>
-        <p:txBody>
-          <a:bodyPr rtlCol="0" anchor="ctr"/>
-          <a:lstStyle/>
-          <a:p>
-            <a:pPr marL="0" marR="0" lvl="0" indent="0" algn="ctr" defTabSz="457200" rtl="0" eaLnBrk="1" fontAlgn="auto" latinLnBrk="0" hangingPunct="1">
-              <a:lnSpc>
-                <a:spcPct val="100000"/>
-              </a:lnSpc>
-              <a:spcBef>
-                <a:spcPts val="0"/>
-              </a:spcBef>
-              <a:spcAft>
-                <a:spcPts val="0"/>
-              </a:spcAft>
-              <a:buClrTx/>
-              <a:buSzTx/>
-              <a:buFontTx/>
-              <a:buNone/>
-              <a:tabLst/>
-              <a:defRPr/>
-            </a:pPr>
-            <a:endParaRPr kumimoji="0" lang="en-US" sz="1800" b="0" i="0" u="none" strike="noStrike" kern="1200" cap="none" spc="0" normalizeH="0" baseline="0" noProof="0">
-              <a:ln>
-                <a:noFill/>
-              </a:ln>
-              <a:solidFill>
-                <a:srgbClr val="FFFFFF"/>
-              </a:solidFill>
-              <a:effectLst/>
-              <a:uLnTx/>
-              <a:uFillTx/>
-              <a:latin typeface="Gill Sans MT" panose="020B0502020104020203"/>
-              <a:ea typeface="+mn-ea"/>
-              <a:cs typeface="+mn-cs"/>
-            </a:endParaRPr>
-          </a:p>
-        </p:txBody>
-      </p:sp>
-      <p:sp>
-        <p:nvSpPr>
-          <p:cNvPr id="2" name="Заголовок 1">
-            <a:extLst>
-              <a:ext uri="{FF2B5EF4-FFF2-40B4-BE49-F238E27FC236}">
-                <a16:creationId xmlns:a16="http://schemas.microsoft.com/office/drawing/2014/main" id="{2ABE410B-DACE-F062-AFA8-296F905A2251}"/>
-              </a:ext>
-            </a:extLst>
-          </p:cNvPr>
-          <p:cNvSpPr>
-            <a:spLocks noGrp="1"/>
-          </p:cNvSpPr>
-          <p:nvPr>
-            <p:ph type="title"/>
-          </p:nvPr>
-        </p:nvSpPr>
-        <p:spPr>
-          <a:xfrm>
-            <a:off x="1262729" y="1289303"/>
-            <a:ext cx="9638443" cy="3339303"/>
-          </a:xfrm>
-          <a:ln>
-            <a:noFill/>
-          </a:ln>
+          <a:noFill/>
         </p:spPr>
         <p:txBody>
-          <a:bodyPr vert="horz" lIns="274320" tIns="182880" rIns="274320" bIns="182880" rtlCol="0" anchor="ctr" anchorCtr="1">
-            <a:noAutofit/>
+          <a:bodyPr wrap="square" rtlCol="0">
+            <a:spAutoFit/>
           </a:bodyPr>
           <a:lstStyle/>
           <a:p>
-            <a:r>
-              <a:rPr lang="ru-RU" sz="3200" dirty="0"/>
-              <a:t>Спасибо за внимание</a:t>
-            </a:r>
-            <a:endParaRPr lang="en-US" sz="3200" kern="1200" cap="all" spc="200" baseline="0" dirty="0">
-              <a:solidFill>
-                <a:srgbClr val="262626"/>
-              </a:solidFill>
-              <a:latin typeface="+mj-lt"/>
-              <a:ea typeface="+mj-ea"/>
-              <a:cs typeface="+mj-cs"/>
+            <a:pPr marL="342900" indent="-342900">
+              <a:lnSpc>
+                <a:spcPct val="250000"/>
+              </a:lnSpc>
+              <a:buFont typeface="+mj-lt"/>
+              <a:buAutoNum type="arabicPeriod"/>
+            </a:pPr>
+            <a:r>
+              <a:rPr lang="ru-RU" i="1" dirty="0">
+                <a:latin typeface="Times New Roman" panose="02020603050405020304" pitchFamily="18" charset="0"/>
+                <a:cs typeface="Times New Roman" panose="02020603050405020304" pitchFamily="18" charset="0"/>
+              </a:rPr>
+              <a:t>Дубнов Ю. А., Булычев А. В. </a:t>
+            </a:r>
+            <a:r>
+              <a:rPr lang="ru-RU" dirty="0">
+                <a:latin typeface="Times New Roman" panose="02020603050405020304" pitchFamily="18" charset="0"/>
+                <a:cs typeface="Times New Roman" panose="02020603050405020304" pitchFamily="18" charset="0"/>
+              </a:rPr>
+              <a:t>Приближенное оценивание с помощью ускоренного метода наибольшей энтропии. Часть 1. Постановка задачи и реализация для задачи регрессии // Информационные технологии и вычислительные системы. 2022. </a:t>
+            </a:r>
+            <a:r>
+              <a:rPr lang="en-US" dirty="0">
+                <a:latin typeface="Times New Roman" panose="02020603050405020304" pitchFamily="18" charset="0"/>
+                <a:cs typeface="Times New Roman" panose="02020603050405020304" pitchFamily="18" charset="0"/>
+              </a:rPr>
+              <a:t>№ 4. С. 69–80.</a:t>
+            </a:r>
+            <a:endParaRPr lang="ru-RU" dirty="0">
+              <a:latin typeface="Times New Roman" panose="02020603050405020304" pitchFamily="18" charset="0"/>
+              <a:cs typeface="Times New Roman" panose="02020603050405020304" pitchFamily="18" charset="0"/>
+            </a:endParaRPr>
+          </a:p>
+          <a:p>
+            <a:pPr marL="342900" indent="-342900">
+              <a:lnSpc>
+                <a:spcPct val="250000"/>
+              </a:lnSpc>
+              <a:buFont typeface="+mj-lt"/>
+              <a:buAutoNum type="arabicPeriod"/>
+            </a:pPr>
+            <a:r>
+              <a:rPr lang="en-US" i="1" dirty="0">
+                <a:latin typeface="Times New Roman" panose="02020603050405020304" pitchFamily="18" charset="0"/>
+                <a:cs typeface="Times New Roman" panose="02020603050405020304" pitchFamily="18" charset="0"/>
+              </a:rPr>
+              <a:t>Golan A., Judge G. G., Miller D. </a:t>
+            </a:r>
+            <a:r>
+              <a:rPr lang="en-US" dirty="0">
+                <a:latin typeface="Times New Roman" panose="02020603050405020304" pitchFamily="18" charset="0"/>
+                <a:cs typeface="Times New Roman" panose="02020603050405020304" pitchFamily="18" charset="0"/>
+              </a:rPr>
+              <a:t>Maximum Entropy Econometrics: Robust Estimation with Limited Data. — Chichester: John Wiley and Sons Ltd., 1996.</a:t>
+            </a:r>
+            <a:endParaRPr lang="ru-RU" dirty="0">
+              <a:latin typeface="Times New Roman" panose="02020603050405020304" pitchFamily="18" charset="0"/>
+              <a:cs typeface="Times New Roman" panose="02020603050405020304" pitchFamily="18" charset="0"/>
+            </a:endParaRPr>
+          </a:p>
+          <a:p>
+            <a:pPr marL="342900" indent="-342900">
+              <a:lnSpc>
+                <a:spcPct val="250000"/>
+              </a:lnSpc>
+              <a:buFont typeface="+mj-lt"/>
+              <a:buAutoNum type="arabicPeriod"/>
+            </a:pPr>
+            <a:r>
+              <a:rPr lang="ru-RU" i="1" dirty="0">
+                <a:latin typeface="Times New Roman" panose="02020603050405020304" pitchFamily="18" charset="0"/>
+                <a:cs typeface="Times New Roman" panose="02020603050405020304" pitchFamily="18" charset="0"/>
+              </a:rPr>
+              <a:t>Воеводин В. В., Кузнецов Ю. А. </a:t>
+            </a:r>
+            <a:r>
+              <a:rPr lang="ru-RU" dirty="0">
+                <a:latin typeface="Times New Roman" panose="02020603050405020304" pitchFamily="18" charset="0"/>
+                <a:cs typeface="Times New Roman" panose="02020603050405020304" pitchFamily="18" charset="0"/>
+              </a:rPr>
+              <a:t>Матрицы и вычисления. — М.: Наука, 1984.</a:t>
+            </a:r>
+          </a:p>
+          <a:p>
+            <a:pPr marL="342900" indent="-342900">
+              <a:lnSpc>
+                <a:spcPct val="250000"/>
+              </a:lnSpc>
+              <a:buFont typeface="+mj-lt"/>
+              <a:buAutoNum type="arabicPeriod"/>
+            </a:pPr>
+            <a:r>
+              <a:rPr lang="ru-RU" i="1" dirty="0">
+                <a:latin typeface="Times New Roman" panose="02020603050405020304" pitchFamily="18" charset="0"/>
+                <a:cs typeface="Times New Roman" panose="02020603050405020304" pitchFamily="18" charset="0"/>
+              </a:rPr>
+              <a:t>Цыпкин Я. З. </a:t>
+            </a:r>
+            <a:r>
+              <a:rPr lang="ru-RU" dirty="0">
+                <a:latin typeface="Times New Roman" panose="02020603050405020304" pitchFamily="18" charset="0"/>
+                <a:cs typeface="Times New Roman" panose="02020603050405020304" pitchFamily="18" charset="0"/>
+              </a:rPr>
+              <a:t>Основы теории обучающихся систем. — М.: Наука, 1970.</a:t>
+            </a:r>
+            <a:endParaRPr lang="en-US" dirty="0">
+              <a:latin typeface="Times New Roman" panose="02020603050405020304" pitchFamily="18" charset="0"/>
+              <a:cs typeface="Times New Roman" panose="02020603050405020304" pitchFamily="18" charset="0"/>
+            </a:endParaRPr>
+          </a:p>
+          <a:p>
+            <a:pPr marL="342900" indent="-342900">
+              <a:lnSpc>
+                <a:spcPct val="250000"/>
+              </a:lnSpc>
+              <a:buFont typeface="+mj-lt"/>
+              <a:buAutoNum type="arabicPeriod"/>
+            </a:pPr>
+            <a:r>
+              <a:rPr lang="en-US" i="1" dirty="0">
+                <a:latin typeface="Times New Roman" panose="02020603050405020304" pitchFamily="18" charset="0"/>
+                <a:cs typeface="Times New Roman" panose="02020603050405020304" pitchFamily="18" charset="0"/>
+              </a:rPr>
+              <a:t>Efron B., </a:t>
+            </a:r>
+            <a:r>
+              <a:rPr lang="en-US" i="1" dirty="0" err="1">
+                <a:latin typeface="Times New Roman" panose="02020603050405020304" pitchFamily="18" charset="0"/>
+                <a:cs typeface="Times New Roman" panose="02020603050405020304" pitchFamily="18" charset="0"/>
+              </a:rPr>
+              <a:t>Tibshirani</a:t>
+            </a:r>
+            <a:r>
+              <a:rPr lang="en-US" i="1" dirty="0">
+                <a:latin typeface="Times New Roman" panose="02020603050405020304" pitchFamily="18" charset="0"/>
+                <a:cs typeface="Times New Roman" panose="02020603050405020304" pitchFamily="18" charset="0"/>
+              </a:rPr>
+              <a:t> R. </a:t>
+            </a:r>
+            <a:r>
+              <a:rPr lang="en-US" dirty="0">
+                <a:latin typeface="Times New Roman" panose="02020603050405020304" pitchFamily="18" charset="0"/>
+                <a:cs typeface="Times New Roman" panose="02020603050405020304" pitchFamily="18" charset="0"/>
+              </a:rPr>
+              <a:t>Improvements on cross-validation: the 632+ bootstrap method // J. Am. Stat. Assoc. 1997. V. 92(438). P. 548–560.</a:t>
+            </a:r>
+            <a:endParaRPr lang="ru-RU" dirty="0">
+              <a:latin typeface="Times New Roman" panose="02020603050405020304" pitchFamily="18" charset="0"/>
+              <a:cs typeface="Times New Roman" panose="02020603050405020304" pitchFamily="18" charset="0"/>
             </a:endParaRPr>
           </a:p>
         </p:txBody>
@@ -4220,7 +4284,7 @@
     </p:spTree>
     <p:extLst>
       <p:ext uri="{BB962C8B-B14F-4D97-AF65-F5344CB8AC3E}">
-        <p14:creationId xmlns:p14="http://schemas.microsoft.com/office/powerpoint/2010/main" val="1282713940"/>
+        <p14:creationId xmlns:p14="http://schemas.microsoft.com/office/powerpoint/2010/main" val="611517564"/>
       </p:ext>
     </p:extLst>
   </p:cSld>
@@ -4300,7 +4364,7 @@
         <p:spPr>
           <a:xfrm>
             <a:off x="387790" y="523220"/>
-            <a:ext cx="11416420" cy="5513304"/>
+            <a:ext cx="11416420" cy="4820807"/>
           </a:xfrm>
           <a:prstGeom prst="rect">
             <a:avLst/>
@@ -4357,26 +4421,6 @@
               </a:rPr>
               <a:t>Непараметрические методы (ядерная регрессия) не эффективны при малом количестве точек</a:t>
             </a:r>
-          </a:p>
-          <a:p>
-            <a:pPr marL="285750" indent="-285750">
-              <a:lnSpc>
-                <a:spcPct val="250000"/>
-              </a:lnSpc>
-              <a:buFont typeface="Arial" panose="020B0604020202020204" pitchFamily="34" charset="0"/>
-              <a:buChar char="•"/>
-            </a:pPr>
-            <a:r>
-              <a:rPr lang="ru-RU" dirty="0">
-                <a:latin typeface="Times New Roman" panose="02020603050405020304" pitchFamily="18" charset="0"/>
-                <a:cs typeface="Times New Roman" panose="02020603050405020304" pitchFamily="18" charset="0"/>
-              </a:rPr>
-              <a:t>В реальности часто объем данных ограничен и ошибки не нормальны</a:t>
-            </a:r>
-            <a:endParaRPr lang="en-US" dirty="0">
-              <a:latin typeface="Times New Roman" panose="02020603050405020304" pitchFamily="18" charset="0"/>
-              <a:cs typeface="Times New Roman" panose="02020603050405020304" pitchFamily="18" charset="0"/>
-            </a:endParaRPr>
           </a:p>
           <a:p>
             <a:pPr>
@@ -4632,7 +4676,7 @@
                 <a:latin typeface="Times New Roman" panose="02020603050405020304" pitchFamily="18" charset="0"/>
                 <a:cs typeface="Times New Roman" panose="02020603050405020304" pitchFamily="18" charset="0"/>
               </a:rPr>
-              <a:t>Оценить чувствительность решения к различным видам шума</a:t>
+              <a:t>Оценить чувствительность решения к различным уровням шума</a:t>
             </a:r>
             <a:endParaRPr lang="ru-RU" b="1" dirty="0">
               <a:latin typeface="Times New Roman" panose="02020603050405020304" pitchFamily="18" charset="0"/>
@@ -4715,8 +4759,8 @@
           </a:p>
         </p:txBody>
       </p:sp>
-      <mc:AlternateContent xmlns:mc="http://schemas.openxmlformats.org/markup-compatibility/2006">
-        <mc:Choice xmlns:a14="http://schemas.microsoft.com/office/drawing/2010/main" Requires="a14">
+      <mc:AlternateContent xmlns:mc="http://schemas.openxmlformats.org/markup-compatibility/2006" xmlns:a14="http://schemas.microsoft.com/office/drawing/2010/main">
+        <mc:Choice Requires="a14">
           <p:sp>
             <p:nvSpPr>
               <p:cNvPr id="3" name="TextBox 2">
@@ -5747,7 +5791,7 @@
             </p:txBody>
           </p:sp>
         </mc:Choice>
-        <mc:Fallback>
+        <mc:Fallback xmlns="">
           <p:sp>
             <p:nvSpPr>
               <p:cNvPr id="3" name="TextBox 2">
@@ -5866,8 +5910,8 @@
           </a:p>
         </p:txBody>
       </p:sp>
-      <mc:AlternateContent xmlns:mc="http://schemas.openxmlformats.org/markup-compatibility/2006">
-        <mc:Choice xmlns:a14="http://schemas.microsoft.com/office/drawing/2010/main" Requires="a14">
+      <mc:AlternateContent xmlns:mc="http://schemas.openxmlformats.org/markup-compatibility/2006" xmlns:a14="http://schemas.microsoft.com/office/drawing/2010/main">
+        <mc:Choice Requires="a14">
           <p:sp>
             <p:nvSpPr>
               <p:cNvPr id="3" name="TextBox 2">
@@ -7664,7 +7708,7 @@
             </p:txBody>
           </p:sp>
         </mc:Choice>
-        <mc:Fallback>
+        <mc:Fallback xmlns="">
           <p:sp>
             <p:nvSpPr>
               <p:cNvPr id="3" name="TextBox 2">
@@ -9766,161 +9810,289 @@
           </a:p>
         </p:txBody>
       </p:sp>
-      <p:sp>
-        <p:nvSpPr>
-          <p:cNvPr id="3" name="TextBox 2">
-            <a:extLst>
-              <a:ext uri="{FF2B5EF4-FFF2-40B4-BE49-F238E27FC236}">
-                <a16:creationId xmlns:a16="http://schemas.microsoft.com/office/drawing/2014/main" id="{5C119950-4F22-A952-AE41-BFD3A317FB05}"/>
-              </a:ext>
-            </a:extLst>
-          </p:cNvPr>
-          <p:cNvSpPr txBox="1"/>
-          <p:nvPr/>
-        </p:nvSpPr>
-        <p:spPr>
-          <a:xfrm>
-            <a:off x="387790" y="523220"/>
-            <a:ext cx="11416420" cy="4135106"/>
-          </a:xfrm>
-          <a:prstGeom prst="rect">
-            <a:avLst/>
-          </a:prstGeom>
-          <a:noFill/>
-        </p:spPr>
-        <p:txBody>
-          <a:bodyPr wrap="square" rtlCol="0">
-            <a:spAutoFit/>
-          </a:bodyPr>
-          <a:lstStyle/>
-          <a:p>
-            <a:pPr>
-              <a:lnSpc>
-                <a:spcPct val="250000"/>
-              </a:lnSpc>
-            </a:pPr>
-            <a:r>
-              <a:rPr lang="ru-RU" b="1" dirty="0">
-                <a:latin typeface="Times New Roman" panose="02020603050405020304" pitchFamily="18" charset="0"/>
-                <a:cs typeface="Times New Roman" panose="02020603050405020304" pitchFamily="18" charset="0"/>
-              </a:rPr>
-              <a:t>Выводы:</a:t>
-            </a:r>
-          </a:p>
-          <a:p>
-            <a:pPr marL="285750" indent="-285750">
-              <a:lnSpc>
-                <a:spcPct val="250000"/>
-              </a:lnSpc>
-              <a:buFont typeface="Arial" panose="020B0604020202020204" pitchFamily="34" charset="0"/>
-              <a:buChar char="•"/>
-            </a:pPr>
-            <a:r>
-              <a:rPr lang="ru-RU" dirty="0"/>
-              <a:t>На малых выборках (n=30) кросс-валидация </a:t>
-            </a:r>
-            <a:r>
-              <a:rPr lang="ru-RU" b="1" dirty="0"/>
-              <a:t>нестабильна</a:t>
-            </a:r>
-            <a:r>
-              <a:rPr lang="en-US" dirty="0"/>
-              <a:t>;</a:t>
-            </a:r>
-          </a:p>
-          <a:p>
-            <a:pPr marL="285750" indent="-285750">
-              <a:lnSpc>
-                <a:spcPct val="250000"/>
-              </a:lnSpc>
-              <a:buFont typeface="Arial" panose="020B0604020202020204" pitchFamily="34" charset="0"/>
-              <a:buChar char="•"/>
-            </a:pPr>
-            <a:r>
-              <a:rPr lang="ru-RU" dirty="0"/>
-              <a:t>Энтропийный метод статистически эффективнее в </a:t>
-            </a:r>
-            <a:r>
-              <a:rPr lang="ru-RU" b="1" dirty="0"/>
-              <a:t>большинстве конфигураций</a:t>
-            </a:r>
-            <a:endParaRPr lang="en-US" b="1" dirty="0"/>
-          </a:p>
-          <a:p>
-            <a:pPr marL="285750" indent="-285750">
-              <a:lnSpc>
-                <a:spcPct val="250000"/>
-              </a:lnSpc>
-              <a:buFont typeface="Arial" panose="020B0604020202020204" pitchFamily="34" charset="0"/>
-              <a:buChar char="•"/>
-            </a:pPr>
-            <a:r>
-              <a:rPr lang="ru-RU" dirty="0"/>
-              <a:t>Метод </a:t>
-            </a:r>
-            <a:r>
-              <a:rPr lang="ru-RU" b="1" dirty="0"/>
-              <a:t>робастен</a:t>
-            </a:r>
-            <a:r>
-              <a:rPr lang="ru-RU" dirty="0"/>
-              <a:t> к распределению ошибок (не требует нормальности)</a:t>
-            </a:r>
-            <a:endParaRPr lang="en-US" dirty="0"/>
-          </a:p>
-          <a:p>
-            <a:pPr marL="285750" indent="-285750">
-              <a:lnSpc>
-                <a:spcPct val="250000"/>
-              </a:lnSpc>
-              <a:buFont typeface="Arial" panose="020B0604020202020204" pitchFamily="34" charset="0"/>
-              <a:buChar char="•"/>
-            </a:pPr>
-            <a:r>
-              <a:rPr lang="ru-RU" dirty="0"/>
-              <a:t>Работает устойчиво при </a:t>
-            </a:r>
-            <a:r>
-              <a:rPr lang="ru-RU" b="1" dirty="0"/>
-              <a:t>малом объёме выборки</a:t>
-            </a:r>
-            <a:r>
-              <a:rPr lang="ru-RU" dirty="0"/>
-              <a:t> (n=30)</a:t>
-            </a:r>
-            <a:endParaRPr lang="en-US" dirty="0"/>
-          </a:p>
-          <a:p>
-            <a:pPr marL="285750" indent="-285750">
-              <a:lnSpc>
-                <a:spcPct val="250000"/>
-              </a:lnSpc>
-              <a:buFont typeface="Arial" panose="020B0604020202020204" pitchFamily="34" charset="0"/>
-              <a:buChar char="•"/>
-            </a:pPr>
-            <a:r>
-              <a:rPr lang="ru-RU" dirty="0"/>
-              <a:t>Наибольший выигрыш для существенно ненормального </a:t>
-            </a:r>
-            <a:r>
-              <a:rPr lang="ru-RU" b="1" dirty="0"/>
-              <a:t>шума </a:t>
-            </a:r>
-            <a:r>
-              <a:rPr lang="ru-RU" dirty="0"/>
-              <a:t>и</a:t>
-            </a:r>
-            <a:r>
-              <a:rPr lang="ru-RU" b="1" dirty="0"/>
-              <a:t> полиномов низкой степени</a:t>
-            </a:r>
-            <a:r>
-              <a:rPr lang="ru-RU" dirty="0"/>
-              <a:t> (1–3)</a:t>
-            </a:r>
-          </a:p>
-        </p:txBody>
-      </p:sp>
+      <mc:AlternateContent xmlns:mc="http://schemas.openxmlformats.org/markup-compatibility/2006" xmlns:a14="http://schemas.microsoft.com/office/drawing/2010/main">
+        <mc:Choice Requires="a14">
+          <p:sp>
+            <p:nvSpPr>
+              <p:cNvPr id="3" name="TextBox 2">
+                <a:extLst>
+                  <a:ext uri="{FF2B5EF4-FFF2-40B4-BE49-F238E27FC236}">
+                    <a16:creationId xmlns:a16="http://schemas.microsoft.com/office/drawing/2014/main" id="{5C119950-4F22-A952-AE41-BFD3A317FB05}"/>
+                  </a:ext>
+                </a:extLst>
+              </p:cNvPr>
+              <p:cNvSpPr txBox="1"/>
+              <p:nvPr/>
+            </p:nvSpPr>
+            <p:spPr>
+              <a:xfrm>
+                <a:off x="387790" y="523220"/>
+                <a:ext cx="11416420" cy="4214615"/>
+              </a:xfrm>
+              <a:prstGeom prst="rect">
+                <a:avLst/>
+              </a:prstGeom>
+              <a:noFill/>
+            </p:spPr>
+            <p:txBody>
+              <a:bodyPr wrap="square" rtlCol="0">
+                <a:spAutoFit/>
+              </a:bodyPr>
+              <a:lstStyle/>
+              <a:p>
+                <a:pPr>
+                  <a:lnSpc>
+                    <a:spcPct val="250000"/>
+                  </a:lnSpc>
+                </a:pPr>
+                <a:r>
+                  <a:rPr lang="ru-RU" b="1" dirty="0">
+                    <a:latin typeface="Times New Roman" panose="02020603050405020304" pitchFamily="18" charset="0"/>
+                    <a:cs typeface="Times New Roman" panose="02020603050405020304" pitchFamily="18" charset="0"/>
+                  </a:rPr>
+                  <a:t>Выводы:</a:t>
+                </a:r>
+              </a:p>
+              <a:p>
+                <a:pPr marL="285750" indent="-285750">
+                  <a:lnSpc>
+                    <a:spcPct val="250000"/>
+                  </a:lnSpc>
+                  <a:buFont typeface="Arial" panose="020B0604020202020204" pitchFamily="34" charset="0"/>
+                  <a:buChar char="•"/>
+                </a:pPr>
+                <a:r>
+                  <a:rPr lang="ru-RU" dirty="0"/>
+                  <a:t>На малых выборках (n=30) кросс-валидация </a:t>
+                </a:r>
+                <a:r>
+                  <a:rPr lang="ru-RU" b="1" dirty="0"/>
+                  <a:t>нестабильна</a:t>
+                </a:r>
+                <a:r>
+                  <a:rPr lang="en-US" dirty="0"/>
+                  <a:t>;</a:t>
+                </a:r>
+              </a:p>
+              <a:p>
+                <a:pPr marL="285750" indent="-285750">
+                  <a:lnSpc>
+                    <a:spcPct val="250000"/>
+                  </a:lnSpc>
+                  <a:buFont typeface="Arial" panose="020B0604020202020204" pitchFamily="34" charset="0"/>
+                  <a:buChar char="•"/>
+                </a:pPr>
+                <a:r>
+                  <a:rPr lang="ru-RU" dirty="0"/>
+                  <a:t>Энтропийный метод статистически эффективнее в </a:t>
+                </a:r>
+                <a:r>
+                  <a:rPr lang="ru-RU" b="1" dirty="0"/>
+                  <a:t>большинстве конфигураций</a:t>
+                </a:r>
+                <a:endParaRPr lang="en-US" b="1" dirty="0"/>
+              </a:p>
+              <a:p>
+                <a:pPr marL="285750" indent="-285750">
+                  <a:lnSpc>
+                    <a:spcPct val="250000"/>
+                  </a:lnSpc>
+                  <a:buFont typeface="Arial" panose="020B0604020202020204" pitchFamily="34" charset="0"/>
+                  <a:buChar char="•"/>
+                </a:pPr>
+                <a:r>
+                  <a:rPr lang="ru-RU" dirty="0"/>
+                  <a:t>Метод </a:t>
+                </a:r>
+                <a:r>
+                  <a:rPr lang="ru-RU" b="1" dirty="0"/>
+                  <a:t>робастен</a:t>
+                </a:r>
+                <a:r>
+                  <a:rPr lang="ru-RU" dirty="0"/>
+                  <a:t> к распределению ошибок (не требует нормальности)</a:t>
+                </a:r>
+                <a:endParaRPr lang="en-US" dirty="0"/>
+              </a:p>
+              <a:p>
+                <a:pPr marL="285750" indent="-285750">
+                  <a:lnSpc>
+                    <a:spcPct val="250000"/>
+                  </a:lnSpc>
+                  <a:buFont typeface="Arial" panose="020B0604020202020204" pitchFamily="34" charset="0"/>
+                  <a:buChar char="•"/>
+                </a:pPr>
+                <a:r>
+                  <a:rPr lang="ru-RU" dirty="0"/>
+                  <a:t>Работает устойчиво при </a:t>
+                </a:r>
+                <a:r>
+                  <a:rPr lang="ru-RU" b="1" dirty="0"/>
+                  <a:t>малом объёме выборки</a:t>
+                </a:r>
+                <a:r>
+                  <a:rPr lang="ru-RU" dirty="0"/>
+                  <a:t> (n=30)</a:t>
+                </a:r>
+                <a:endParaRPr lang="en-US" dirty="0"/>
+              </a:p>
+              <a:p>
+                <a:pPr marL="285750" indent="-285750">
+                  <a:lnSpc>
+                    <a:spcPct val="250000"/>
+                  </a:lnSpc>
+                  <a:buFont typeface="Arial" panose="020B0604020202020204" pitchFamily="34" charset="0"/>
+                  <a:buChar char="•"/>
+                </a:pPr>
+                <a:r>
+                  <a:rPr lang="ru-RU" dirty="0"/>
+                  <a:t>Наибольший выигрыш для </a:t>
+                </a:r>
+                <a:r>
+                  <a:rPr lang="ru-RU" b="1" dirty="0"/>
+                  <a:t>низкого уровня шума </a:t>
+                </a:r>
+                <a14:m>
+                  <m:oMath xmlns:m="http://schemas.openxmlformats.org/officeDocument/2006/math">
+                    <m:d>
+                      <m:dPr>
+                        <m:ctrlPr>
+                          <a:rPr lang="en-US" b="1" i="1" smtClean="0">
+                            <a:latin typeface="Cambria Math" panose="02040503050406030204" pitchFamily="18" charset="0"/>
+                          </a:rPr>
+                        </m:ctrlPr>
+                      </m:dPr>
+                      <m:e>
+                        <m:sSup>
+                          <m:sSupPr>
+                            <m:ctrlPr>
+                              <a:rPr lang="en-US" b="1" i="1" smtClean="0">
+                                <a:latin typeface="Cambria Math" panose="02040503050406030204" pitchFamily="18" charset="0"/>
+                              </a:rPr>
+                            </m:ctrlPr>
+                          </m:sSupPr>
+                          <m:e>
+                            <m:r>
+                              <a:rPr lang="en-US" b="1" i="1" smtClean="0">
+                                <a:latin typeface="Cambria Math" panose="02040503050406030204" pitchFamily="18" charset="0"/>
+                              </a:rPr>
+                              <m:t>𝑹</m:t>
+                            </m:r>
+                          </m:e>
+                          <m:sup>
+                            <m:r>
+                              <a:rPr lang="en-US" b="1" i="1" smtClean="0">
+                                <a:latin typeface="Cambria Math" panose="02040503050406030204" pitchFamily="18" charset="0"/>
+                              </a:rPr>
+                              <m:t>𝟐</m:t>
+                            </m:r>
+                          </m:sup>
+                        </m:sSup>
+                        <m:r>
+                          <a:rPr lang="en-US" b="1" i="1" smtClean="0">
+                            <a:latin typeface="Cambria Math" panose="02040503050406030204" pitchFamily="18" charset="0"/>
+                          </a:rPr>
+                          <m:t>=</m:t>
+                        </m:r>
+                        <m:r>
+                          <a:rPr lang="en-US" b="1" i="1" smtClean="0">
+                            <a:latin typeface="Cambria Math" panose="02040503050406030204" pitchFamily="18" charset="0"/>
+                          </a:rPr>
+                          <m:t>𝟎</m:t>
+                        </m:r>
+                        <m:r>
+                          <a:rPr lang="en-US" b="1" i="1" smtClean="0">
+                            <a:latin typeface="Cambria Math" panose="02040503050406030204" pitchFamily="18" charset="0"/>
+                          </a:rPr>
+                          <m:t>.</m:t>
+                        </m:r>
+                        <m:r>
+                          <a:rPr lang="en-US" b="1" i="1" smtClean="0">
+                            <a:latin typeface="Cambria Math" panose="02040503050406030204" pitchFamily="18" charset="0"/>
+                          </a:rPr>
+                          <m:t>𝟗𝟓</m:t>
+                        </m:r>
+                      </m:e>
+                    </m:d>
+                  </m:oMath>
+                </a14:m>
+                <a:r>
+                  <a:rPr lang="ru-RU" b="1" dirty="0"/>
+                  <a:t> </a:t>
+                </a:r>
+                <a:r>
+                  <a:rPr lang="ru-RU" dirty="0"/>
+                  <a:t>и</a:t>
+                </a:r>
+                <a:r>
+                  <a:rPr lang="ru-RU" b="1" dirty="0"/>
+                  <a:t> полиномов низкой степени</a:t>
+                </a:r>
+                <a:r>
+                  <a:rPr lang="ru-RU" dirty="0"/>
+                  <a:t> </a:t>
+                </a:r>
+                <a:r>
+                  <a:rPr lang="ru-RU" b="1" dirty="0"/>
+                  <a:t>(</a:t>
+                </a:r>
+                <a:r>
+                  <a:rPr lang="en-US" b="1" dirty="0"/>
+                  <a:t>2-3</a:t>
+                </a:r>
+                <a:r>
+                  <a:rPr lang="ru-RU" b="1" dirty="0"/>
+                  <a:t>)</a:t>
+                </a:r>
+              </a:p>
+            </p:txBody>
+          </p:sp>
+        </mc:Choice>
+        <mc:Fallback xmlns="">
+          <p:sp>
+            <p:nvSpPr>
+              <p:cNvPr id="3" name="TextBox 2">
+                <a:extLst>
+                  <a:ext uri="{FF2B5EF4-FFF2-40B4-BE49-F238E27FC236}">
+                    <a16:creationId xmlns:a16="http://schemas.microsoft.com/office/drawing/2014/main" id="{5C119950-4F22-A952-AE41-BFD3A317FB05}"/>
+                  </a:ext>
+                </a:extLst>
+              </p:cNvPr>
+              <p:cNvSpPr txBox="1">
+                <a:spLocks noRot="1" noChangeAspect="1" noMove="1" noResize="1" noEditPoints="1" noAdjustHandles="1" noChangeArrowheads="1" noChangeShapeType="1" noTextEdit="1"/>
+              </p:cNvSpPr>
+              <p:nvPr/>
+            </p:nvSpPr>
+            <p:spPr>
+              <a:xfrm>
+                <a:off x="387790" y="523220"/>
+                <a:ext cx="11416420" cy="4214615"/>
+              </a:xfrm>
+              <a:prstGeom prst="rect">
+                <a:avLst/>
+              </a:prstGeom>
+              <a:blipFill>
+                <a:blip r:embed="rId2"/>
+                <a:stretch>
+                  <a:fillRect l="-481" b="-1158"/>
+                </a:stretch>
+              </a:blipFill>
+            </p:spPr>
+            <p:txBody>
+              <a:bodyPr/>
+              <a:lstStyle/>
+              <a:p>
+                <a:r>
+                  <a:rPr lang="ru-RU">
+                    <a:noFill/>
+                  </a:rPr>
+                  <a:t> </a:t>
+                </a:r>
+              </a:p>
+            </p:txBody>
+          </p:sp>
+        </mc:Fallback>
+      </mc:AlternateContent>
     </p:spTree>
     <p:extLst>
       <p:ext uri="{BB962C8B-B14F-4D97-AF65-F5344CB8AC3E}">
@@ -9937,12 +10109,20 @@
 <file path=ppt/slides/slide9.xml><?xml version="1.0" encoding="utf-8"?>
 <p:sld xmlns:a="http://schemas.openxmlformats.org/drawingml/2006/main" xmlns:r="http://schemas.openxmlformats.org/officeDocument/2006/relationships" xmlns:p="http://schemas.openxmlformats.org/presentationml/2006/main">
   <p:cSld>
+    <p:bg>
+      <p:bgPr>
+        <a:solidFill>
+          <a:schemeClr val="accent2"/>
+        </a:solidFill>
+        <a:effectLst/>
+      </p:bgPr>
+    </p:bg>
     <p:spTree>
       <p:nvGrpSpPr>
         <p:cNvPr id="1" name="">
           <a:extLst>
             <a:ext uri="{FF2B5EF4-FFF2-40B4-BE49-F238E27FC236}">
-              <a16:creationId xmlns:a16="http://schemas.microsoft.com/office/drawing/2014/main" id="{6EE088B1-270F-467A-485B-FE41C3B705F8}"/>
+              <a16:creationId xmlns:a16="http://schemas.microsoft.com/office/drawing/2014/main" id="{07F67235-B120-5DC2-02D3-EDE466B4EA3C}"/>
             </a:ext>
           </a:extLst>
         </p:cNvPr>
@@ -9959,219 +10139,231 @@
       </p:grpSpPr>
       <p:sp>
         <p:nvSpPr>
-          <p:cNvPr id="2" name="TextBox 1">
+          <p:cNvPr id="8" name="Rectangle 7">
             <a:extLst>
               <a:ext uri="{FF2B5EF4-FFF2-40B4-BE49-F238E27FC236}">
-                <a16:creationId xmlns:a16="http://schemas.microsoft.com/office/drawing/2014/main" id="{CA506851-A264-79D0-5147-2CE6E03FBAAF}"/>
+                <a16:creationId xmlns:a16="http://schemas.microsoft.com/office/drawing/2014/main" id="{2CD6835F-F652-25A6-F645-2290179685E3}"/>
+              </a:ext>
+              <a:ext uri="{C183D7F6-B498-43B3-948B-1728B52AA6E4}">
+                <adec:decorative xmlns:adec="http://schemas.microsoft.com/office/drawing/2017/decorative" val="1"/>
               </a:ext>
             </a:extLst>
           </p:cNvPr>
-          <p:cNvSpPr txBox="1"/>
-          <p:nvPr/>
+          <p:cNvSpPr>
+            <a:spLocks noGrp="1" noRot="1" noChangeAspect="1" noMove="1" noResize="1" noEditPoints="1" noAdjustHandles="1" noChangeArrowheads="1" noChangeShapeType="1" noTextEdit="1"/>
+          </p:cNvSpPr>
+          <p:nvPr>
+            <p:extLst>
+              <p:ext uri="{386F3935-93C4-4BCD-93E2-E3B085C9AB24}">
+                <p16:designElem xmlns:p16="http://schemas.microsoft.com/office/powerpoint/2015/main" val="1"/>
+              </p:ext>
+            </p:extLst>
+          </p:nvPr>
         </p:nvSpPr>
         <p:spPr>
           <a:xfrm>
-            <a:off x="4376426" y="0"/>
-            <a:ext cx="3439147" cy="523220"/>
+            <a:off x="640068" y="640080"/>
+            <a:ext cx="10911865" cy="4626864"/>
           </a:xfrm>
           <a:prstGeom prst="rect">
             <a:avLst/>
           </a:prstGeom>
           <a:noFill/>
+          <a:ln w="31750" cap="sq">
+            <a:solidFill>
+              <a:srgbClr val="FFFFFF"/>
+            </a:solidFill>
+            <a:miter lim="800000"/>
+          </a:ln>
         </p:spPr>
+        <p:style>
+          <a:lnRef idx="2">
+            <a:schemeClr val="accent1">
+              <a:shade val="50000"/>
+            </a:schemeClr>
+          </a:lnRef>
+          <a:fillRef idx="1">
+            <a:schemeClr val="accent1"/>
+          </a:fillRef>
+          <a:effectRef idx="0">
+            <a:schemeClr val="accent1"/>
+          </a:effectRef>
+          <a:fontRef idx="minor">
+            <a:schemeClr val="lt1"/>
+          </a:fontRef>
+        </p:style>
         <p:txBody>
-          <a:bodyPr wrap="none" rtlCol="0">
-            <a:spAutoFit/>
-          </a:bodyPr>
+          <a:bodyPr rtlCol="0" anchor="ctr"/>
           <a:lstStyle/>
           <a:p>
-            <a:r>
-              <a:rPr lang="ru-RU" sz="2800" b="1" dirty="0">
-                <a:latin typeface="Times New Roman" panose="02020603050405020304" pitchFamily="18" charset="0"/>
-                <a:cs typeface="Times New Roman" panose="02020603050405020304" pitchFamily="18" charset="0"/>
-              </a:rPr>
-              <a:t>Список литературы</a:t>
-            </a:r>
+            <a:pPr marL="0" marR="0" lvl="0" indent="0" algn="ctr" defTabSz="457200" rtl="0" eaLnBrk="1" fontAlgn="auto" latinLnBrk="0" hangingPunct="1">
+              <a:lnSpc>
+                <a:spcPct val="100000"/>
+              </a:lnSpc>
+              <a:spcBef>
+                <a:spcPts val="0"/>
+              </a:spcBef>
+              <a:spcAft>
+                <a:spcPts val="0"/>
+              </a:spcAft>
+              <a:buClrTx/>
+              <a:buSzTx/>
+              <a:buFontTx/>
+              <a:buNone/>
+              <a:tabLst/>
+              <a:defRPr/>
+            </a:pPr>
+            <a:endParaRPr kumimoji="0" lang="en-US" sz="1800" b="0" i="0" u="none" strike="noStrike" kern="1200" cap="none" spc="0" normalizeH="0" baseline="0" noProof="0" dirty="0">
+              <a:ln>
+                <a:noFill/>
+              </a:ln>
+              <a:solidFill>
+                <a:srgbClr val="FFFFFF"/>
+              </a:solidFill>
+              <a:effectLst/>
+              <a:uLnTx/>
+              <a:uFillTx/>
+              <a:latin typeface="Gill Sans MT" panose="020B0502020104020203"/>
+              <a:ea typeface="+mn-ea"/>
+              <a:cs typeface="+mn-cs"/>
+            </a:endParaRPr>
           </a:p>
         </p:txBody>
       </p:sp>
       <p:sp>
         <p:nvSpPr>
-          <p:cNvPr id="3" name="TextBox 2">
+          <p:cNvPr id="10" name="Rectangle 9">
             <a:extLst>
               <a:ext uri="{FF2B5EF4-FFF2-40B4-BE49-F238E27FC236}">
-                <a16:creationId xmlns:a16="http://schemas.microsoft.com/office/drawing/2014/main" id="{6837EB01-75EB-F47F-3EB8-B95AA247CC82}"/>
+                <a16:creationId xmlns:a16="http://schemas.microsoft.com/office/drawing/2014/main" id="{9612F587-5BFE-2158-1B6E-84D728510F17}"/>
+              </a:ext>
+              <a:ext uri="{C183D7F6-B498-43B3-948B-1728B52AA6E4}">
+                <adec:decorative xmlns:adec="http://schemas.microsoft.com/office/drawing/2017/decorative" val="1"/>
               </a:ext>
             </a:extLst>
           </p:cNvPr>
-          <p:cNvSpPr txBox="1"/>
-          <p:nvPr/>
+          <p:cNvSpPr>
+            <a:spLocks noGrp="1" noRot="1" noChangeAspect="1" noMove="1" noResize="1" noEditPoints="1" noAdjustHandles="1" noChangeArrowheads="1" noChangeShapeType="1" noTextEdit="1"/>
+          </p:cNvSpPr>
+          <p:nvPr>
+            <p:extLst>
+              <p:ext uri="{386F3935-93C4-4BCD-93E2-E3B085C9AB24}">
+                <p16:designElem xmlns:p16="http://schemas.microsoft.com/office/powerpoint/2015/main" val="1"/>
+              </p:ext>
+            </p:extLst>
+          </p:nvPr>
         </p:nvSpPr>
         <p:spPr>
           <a:xfrm>
-            <a:off x="387790" y="523220"/>
-            <a:ext cx="11416420" cy="6211316"/>
+            <a:off x="806196" y="804672"/>
+            <a:ext cx="10579608" cy="4297680"/>
           </a:xfrm>
           <a:prstGeom prst="rect">
             <a:avLst/>
           </a:prstGeom>
-          <a:noFill/>
+          <a:solidFill>
+            <a:srgbClr val="FFFFFF"/>
+          </a:solidFill>
+          <a:ln>
+            <a:noFill/>
+          </a:ln>
+        </p:spPr>
+        <p:style>
+          <a:lnRef idx="2">
+            <a:schemeClr val="accent1">
+              <a:shade val="50000"/>
+            </a:schemeClr>
+          </a:lnRef>
+          <a:fillRef idx="1">
+            <a:schemeClr val="accent1"/>
+          </a:fillRef>
+          <a:effectRef idx="0">
+            <a:schemeClr val="accent1"/>
+          </a:effectRef>
+          <a:fontRef idx="minor">
+            <a:schemeClr val="lt1"/>
+          </a:fontRef>
+        </p:style>
+        <p:txBody>
+          <a:bodyPr rtlCol="0" anchor="ctr"/>
+          <a:lstStyle/>
+          <a:p>
+            <a:pPr marL="0" marR="0" lvl="0" indent="0" algn="ctr" defTabSz="457200" rtl="0" eaLnBrk="1" fontAlgn="auto" latinLnBrk="0" hangingPunct="1">
+              <a:lnSpc>
+                <a:spcPct val="100000"/>
+              </a:lnSpc>
+              <a:spcBef>
+                <a:spcPts val="0"/>
+              </a:spcBef>
+              <a:spcAft>
+                <a:spcPts val="0"/>
+              </a:spcAft>
+              <a:buClrTx/>
+              <a:buSzTx/>
+              <a:buFontTx/>
+              <a:buNone/>
+              <a:tabLst/>
+              <a:defRPr/>
+            </a:pPr>
+            <a:endParaRPr kumimoji="0" lang="en-US" sz="1800" b="0" i="0" u="none" strike="noStrike" kern="1200" cap="none" spc="0" normalizeH="0" baseline="0" noProof="0">
+              <a:ln>
+                <a:noFill/>
+              </a:ln>
+              <a:solidFill>
+                <a:srgbClr val="FFFFFF"/>
+              </a:solidFill>
+              <a:effectLst/>
+              <a:uLnTx/>
+              <a:uFillTx/>
+              <a:latin typeface="Gill Sans MT" panose="020B0502020104020203"/>
+              <a:ea typeface="+mn-ea"/>
+              <a:cs typeface="+mn-cs"/>
+            </a:endParaRPr>
+          </a:p>
+        </p:txBody>
+      </p:sp>
+      <p:sp>
+        <p:nvSpPr>
+          <p:cNvPr id="2" name="Заголовок 1">
+            <a:extLst>
+              <a:ext uri="{FF2B5EF4-FFF2-40B4-BE49-F238E27FC236}">
+                <a16:creationId xmlns:a16="http://schemas.microsoft.com/office/drawing/2014/main" id="{2ABE410B-DACE-F062-AFA8-296F905A2251}"/>
+              </a:ext>
+            </a:extLst>
+          </p:cNvPr>
+          <p:cNvSpPr>
+            <a:spLocks noGrp="1"/>
+          </p:cNvSpPr>
+          <p:nvPr>
+            <p:ph type="title"/>
+          </p:nvPr>
+        </p:nvSpPr>
+        <p:spPr>
+          <a:xfrm>
+            <a:off x="1262729" y="1289303"/>
+            <a:ext cx="9638443" cy="3339303"/>
+          </a:xfrm>
+          <a:ln>
+            <a:noFill/>
+          </a:ln>
         </p:spPr>
         <p:txBody>
-          <a:bodyPr wrap="square" rtlCol="0">
-            <a:spAutoFit/>
+          <a:bodyPr vert="horz" lIns="274320" tIns="182880" rIns="274320" bIns="182880" rtlCol="0" anchor="ctr" anchorCtr="1">
+            <a:noAutofit/>
           </a:bodyPr>
           <a:lstStyle/>
           <a:p>
-            <a:pPr marL="342900" indent="-342900">
-              <a:lnSpc>
-                <a:spcPct val="250000"/>
-              </a:lnSpc>
-              <a:buFont typeface="+mj-lt"/>
-              <a:buAutoNum type="arabicPeriod"/>
-            </a:pPr>
-            <a:r>
-              <a:rPr lang="ru-RU" i="1" dirty="0">
-                <a:latin typeface="Times New Roman" panose="02020603050405020304" pitchFamily="18" charset="0"/>
-                <a:cs typeface="Times New Roman" panose="02020603050405020304" pitchFamily="18" charset="0"/>
-              </a:rPr>
-              <a:t>Дубнов Ю. А., Булычев А. В. </a:t>
-            </a:r>
-            <a:r>
-              <a:rPr lang="ru-RU" dirty="0">
-                <a:latin typeface="Times New Roman" panose="02020603050405020304" pitchFamily="18" charset="0"/>
-                <a:cs typeface="Times New Roman" panose="02020603050405020304" pitchFamily="18" charset="0"/>
-              </a:rPr>
-              <a:t>Приближенное оценивание с помощью ускоренного метода наибольшей энтропии. Часть 1. Постановка задачи и реализация для задачи регрессии // Информационные технологии и вычислительные системы. 2022. </a:t>
-            </a:r>
-            <a:r>
-              <a:rPr lang="en-US" dirty="0">
-                <a:latin typeface="Times New Roman" panose="02020603050405020304" pitchFamily="18" charset="0"/>
-                <a:cs typeface="Times New Roman" panose="02020603050405020304" pitchFamily="18" charset="0"/>
-              </a:rPr>
-              <a:t>№ 4. С. 69–80.</a:t>
-            </a:r>
-            <a:endParaRPr lang="ru-RU" dirty="0">
-              <a:latin typeface="Times New Roman" panose="02020603050405020304" pitchFamily="18" charset="0"/>
-              <a:cs typeface="Times New Roman" panose="02020603050405020304" pitchFamily="18" charset="0"/>
-            </a:endParaRPr>
-          </a:p>
-          <a:p>
-            <a:pPr marL="342900" indent="-342900">
-              <a:lnSpc>
-                <a:spcPct val="250000"/>
-              </a:lnSpc>
-              <a:buFont typeface="+mj-lt"/>
-              <a:buAutoNum type="arabicPeriod"/>
-            </a:pPr>
-            <a:r>
-              <a:rPr lang="en-US" i="1" dirty="0">
-                <a:latin typeface="Times New Roman" panose="02020603050405020304" pitchFamily="18" charset="0"/>
-                <a:cs typeface="Times New Roman" panose="02020603050405020304" pitchFamily="18" charset="0"/>
-              </a:rPr>
-              <a:t>Golan A., Judge G. G., Miller D. </a:t>
-            </a:r>
-            <a:r>
-              <a:rPr lang="en-US" dirty="0">
-                <a:latin typeface="Times New Roman" panose="02020603050405020304" pitchFamily="18" charset="0"/>
-                <a:cs typeface="Times New Roman" panose="02020603050405020304" pitchFamily="18" charset="0"/>
-              </a:rPr>
-              <a:t>Maximum Entropy Econometrics: Robust Estimation with Limited Data. — Chichester: John Wiley and Sons Ltd., 1996.</a:t>
-            </a:r>
-            <a:endParaRPr lang="ru-RU" dirty="0">
-              <a:latin typeface="Times New Roman" panose="02020603050405020304" pitchFamily="18" charset="0"/>
-              <a:cs typeface="Times New Roman" panose="02020603050405020304" pitchFamily="18" charset="0"/>
-            </a:endParaRPr>
-          </a:p>
-          <a:p>
-            <a:pPr marL="342900" indent="-342900">
-              <a:lnSpc>
-                <a:spcPct val="250000"/>
-              </a:lnSpc>
-              <a:buFont typeface="+mj-lt"/>
-              <a:buAutoNum type="arabicPeriod"/>
-            </a:pPr>
-            <a:r>
-              <a:rPr lang="ru-RU" i="1" dirty="0">
-                <a:latin typeface="Times New Roman" panose="02020603050405020304" pitchFamily="18" charset="0"/>
-                <a:cs typeface="Times New Roman" panose="02020603050405020304" pitchFamily="18" charset="0"/>
-              </a:rPr>
-              <a:t>Воеводин В. В., Кузнецов Ю. А. </a:t>
-            </a:r>
-            <a:r>
-              <a:rPr lang="ru-RU" dirty="0">
-                <a:latin typeface="Times New Roman" panose="02020603050405020304" pitchFamily="18" charset="0"/>
-                <a:cs typeface="Times New Roman" panose="02020603050405020304" pitchFamily="18" charset="0"/>
-              </a:rPr>
-              <a:t>Матрицы и вычисления. — М.: Наука, 1984.</a:t>
-            </a:r>
-          </a:p>
-          <a:p>
-            <a:pPr marL="342900" indent="-342900">
-              <a:lnSpc>
-                <a:spcPct val="250000"/>
-              </a:lnSpc>
-              <a:buFont typeface="+mj-lt"/>
-              <a:buAutoNum type="arabicPeriod"/>
-            </a:pPr>
-            <a:r>
-              <a:rPr lang="ru-RU" i="1" dirty="0">
-                <a:latin typeface="Times New Roman" panose="02020603050405020304" pitchFamily="18" charset="0"/>
-                <a:cs typeface="Times New Roman" panose="02020603050405020304" pitchFamily="18" charset="0"/>
-              </a:rPr>
-              <a:t>Цыпкин Я. З. </a:t>
-            </a:r>
-            <a:r>
-              <a:rPr lang="ru-RU" dirty="0">
-                <a:latin typeface="Times New Roman" panose="02020603050405020304" pitchFamily="18" charset="0"/>
-                <a:cs typeface="Times New Roman" panose="02020603050405020304" pitchFamily="18" charset="0"/>
-              </a:rPr>
-              <a:t>Основы теории обучающихся систем. — М.: Наука, 1970.</a:t>
-            </a:r>
-            <a:endParaRPr lang="en-US" dirty="0">
-              <a:latin typeface="Times New Roman" panose="02020603050405020304" pitchFamily="18" charset="0"/>
-              <a:cs typeface="Times New Roman" panose="02020603050405020304" pitchFamily="18" charset="0"/>
-            </a:endParaRPr>
-          </a:p>
-          <a:p>
-            <a:pPr marL="342900" indent="-342900">
-              <a:lnSpc>
-                <a:spcPct val="250000"/>
-              </a:lnSpc>
-              <a:buFont typeface="+mj-lt"/>
-              <a:buAutoNum type="arabicPeriod"/>
-            </a:pPr>
-            <a:r>
-              <a:rPr lang="en-US" i="1" dirty="0">
-                <a:latin typeface="Times New Roman" panose="02020603050405020304" pitchFamily="18" charset="0"/>
-                <a:cs typeface="Times New Roman" panose="02020603050405020304" pitchFamily="18" charset="0"/>
-              </a:rPr>
-              <a:t>Efron B., </a:t>
-            </a:r>
-            <a:r>
-              <a:rPr lang="en-US" i="1" dirty="0" err="1">
-                <a:latin typeface="Times New Roman" panose="02020603050405020304" pitchFamily="18" charset="0"/>
-                <a:cs typeface="Times New Roman" panose="02020603050405020304" pitchFamily="18" charset="0"/>
-              </a:rPr>
-              <a:t>Tibshirani</a:t>
-            </a:r>
-            <a:r>
-              <a:rPr lang="en-US" i="1" dirty="0">
-                <a:latin typeface="Times New Roman" panose="02020603050405020304" pitchFamily="18" charset="0"/>
-                <a:cs typeface="Times New Roman" panose="02020603050405020304" pitchFamily="18" charset="0"/>
-              </a:rPr>
-              <a:t> R. </a:t>
-            </a:r>
-            <a:r>
-              <a:rPr lang="en-US" dirty="0">
-                <a:latin typeface="Times New Roman" panose="02020603050405020304" pitchFamily="18" charset="0"/>
-                <a:cs typeface="Times New Roman" panose="02020603050405020304" pitchFamily="18" charset="0"/>
-              </a:rPr>
-              <a:t>Improvements on cross-validation: the 632+ bootstrap method // J. Am. Stat. Assoc. 1997. V. 92(438). P. 548–560.</a:t>
-            </a:r>
-            <a:endParaRPr lang="ru-RU" dirty="0">
-              <a:latin typeface="Times New Roman" panose="02020603050405020304" pitchFamily="18" charset="0"/>
-              <a:cs typeface="Times New Roman" panose="02020603050405020304" pitchFamily="18" charset="0"/>
+            <a:r>
+              <a:rPr lang="ru-RU" sz="3200" dirty="0"/>
+              <a:t>Спасибо за внимание</a:t>
+            </a:r>
+            <a:endParaRPr lang="en-US" sz="3200" kern="1200" cap="all" spc="200" baseline="0" dirty="0">
+              <a:solidFill>
+                <a:srgbClr val="262626"/>
+              </a:solidFill>
+              <a:latin typeface="+mj-lt"/>
+              <a:ea typeface="+mj-ea"/>
+              <a:cs typeface="+mj-cs"/>
             </a:endParaRPr>
           </a:p>
         </p:txBody>
@@ -10179,7 +10371,7 @@
     </p:spTree>
     <p:extLst>
       <p:ext uri="{BB962C8B-B14F-4D97-AF65-F5344CB8AC3E}">
-        <p14:creationId xmlns:p14="http://schemas.microsoft.com/office/powerpoint/2010/main" val="611517564"/>
+        <p14:creationId xmlns:p14="http://schemas.microsoft.com/office/powerpoint/2010/main" val="1282713940"/>
       </p:ext>
     </p:extLst>
   </p:cSld>

--- a/Тезис_для_конференции/Anfimov_tezis.pptx
+++ b/Тезис_для_конференции/Anfimov_tezis.pptx
@@ -5,19 +5,29 @@
     <p:sldMasterId id="2147483678" r:id="rId1"/>
   </p:sldMasterIdLst>
   <p:notesMasterIdLst>
-    <p:notesMasterId r:id="rId12"/>
+    <p:notesMasterId r:id="rId22"/>
   </p:notesMasterIdLst>
   <p:sldIdLst>
     <p:sldId id="256" r:id="rId2"/>
     <p:sldId id="257" r:id="rId3"/>
     <p:sldId id="269" r:id="rId4"/>
-    <p:sldId id="271" r:id="rId5"/>
-    <p:sldId id="274" r:id="rId6"/>
-    <p:sldId id="272" r:id="rId7"/>
-    <p:sldId id="273" r:id="rId8"/>
-    <p:sldId id="275" r:id="rId9"/>
-    <p:sldId id="267" r:id="rId10"/>
-    <p:sldId id="276" r:id="rId11"/>
+    <p:sldId id="278" r:id="rId5"/>
+    <p:sldId id="279" r:id="rId6"/>
+    <p:sldId id="271" r:id="rId7"/>
+    <p:sldId id="274" r:id="rId8"/>
+    <p:sldId id="272" r:id="rId9"/>
+    <p:sldId id="285" r:id="rId10"/>
+    <p:sldId id="277" r:id="rId11"/>
+    <p:sldId id="281" r:id="rId12"/>
+    <p:sldId id="273" r:id="rId13"/>
+    <p:sldId id="282" r:id="rId14"/>
+    <p:sldId id="283" r:id="rId15"/>
+    <p:sldId id="284" r:id="rId16"/>
+    <p:sldId id="286" r:id="rId17"/>
+    <p:sldId id="275" r:id="rId18"/>
+    <p:sldId id="287" r:id="rId19"/>
+    <p:sldId id="267" r:id="rId20"/>
+    <p:sldId id="276" r:id="rId21"/>
   </p:sldIdLst>
   <p:sldSz cx="12192000" cy="6858000"/>
   <p:notesSz cx="6858000" cy="9144000"/>
@@ -206,7 +216,7 @@
           <a:p>
             <a:fld id="{C5626634-CE2F-4DD7-8FF3-A2AF8CEFAA4F}" type="datetimeFigureOut">
               <a:rPr lang="ru-RU" smtClean="0"/>
-              <a:t>02.04.2026</a:t>
+              <a:t>16.04.2026</a:t>
             </a:fld>
             <a:endParaRPr lang="ru-RU"/>
           </a:p>
@@ -720,7 +730,7 @@
           <a:p>
             <a:fld id="{D4C78990-BC74-4702-B11E-A02B45A34803}" type="datetimeFigureOut">
               <a:rPr lang="ru-RU" smtClean="0"/>
-              <a:t>02.04.2026</a:t>
+              <a:t>16.04.2026</a:t>
             </a:fld>
             <a:endParaRPr lang="ru-RU"/>
           </a:p>
@@ -890,7 +900,7 @@
           <a:p>
             <a:fld id="{D4C78990-BC74-4702-B11E-A02B45A34803}" type="datetimeFigureOut">
               <a:rPr lang="ru-RU" smtClean="0"/>
-              <a:t>02.04.2026</a:t>
+              <a:t>16.04.2026</a:t>
             </a:fld>
             <a:endParaRPr lang="ru-RU"/>
           </a:p>
@@ -1070,7 +1080,7 @@
           <a:p>
             <a:fld id="{D4C78990-BC74-4702-B11E-A02B45A34803}" type="datetimeFigureOut">
               <a:rPr lang="ru-RU" smtClean="0"/>
-              <a:t>02.04.2026</a:t>
+              <a:t>16.04.2026</a:t>
             </a:fld>
             <a:endParaRPr lang="ru-RU"/>
           </a:p>
@@ -1240,7 +1250,7 @@
           <a:p>
             <a:fld id="{D4C78990-BC74-4702-B11E-A02B45A34803}" type="datetimeFigureOut">
               <a:rPr lang="ru-RU" smtClean="0"/>
-              <a:t>02.04.2026</a:t>
+              <a:t>16.04.2026</a:t>
             </a:fld>
             <a:endParaRPr lang="ru-RU"/>
           </a:p>
@@ -1508,7 +1518,7 @@
           <a:p>
             <a:fld id="{D4C78990-BC74-4702-B11E-A02B45A34803}" type="datetimeFigureOut">
               <a:rPr lang="ru-RU" smtClean="0"/>
-              <a:t>02.04.2026</a:t>
+              <a:t>16.04.2026</a:t>
             </a:fld>
             <a:endParaRPr lang="ru-RU"/>
           </a:p>
@@ -1740,7 +1750,7 @@
           <a:p>
             <a:fld id="{D4C78990-BC74-4702-B11E-A02B45A34803}" type="datetimeFigureOut">
               <a:rPr lang="ru-RU" smtClean="0"/>
-              <a:t>02.04.2026</a:t>
+              <a:t>16.04.2026</a:t>
             </a:fld>
             <a:endParaRPr lang="ru-RU"/>
           </a:p>
@@ -2099,7 +2109,7 @@
           <a:p>
             <a:fld id="{D4C78990-BC74-4702-B11E-A02B45A34803}" type="datetimeFigureOut">
               <a:rPr lang="ru-RU" smtClean="0"/>
-              <a:t>02.04.2026</a:t>
+              <a:t>16.04.2026</a:t>
             </a:fld>
             <a:endParaRPr lang="ru-RU"/>
           </a:p>
@@ -2240,7 +2250,7 @@
           <a:p>
             <a:fld id="{D4C78990-BC74-4702-B11E-A02B45A34803}" type="datetimeFigureOut">
               <a:rPr lang="ru-RU" smtClean="0"/>
-              <a:t>02.04.2026</a:t>
+              <a:t>16.04.2026</a:t>
             </a:fld>
             <a:endParaRPr lang="ru-RU"/>
           </a:p>
@@ -2335,7 +2345,7 @@
           <a:p>
             <a:fld id="{D4C78990-BC74-4702-B11E-A02B45A34803}" type="datetimeFigureOut">
               <a:rPr lang="ru-RU" smtClean="0"/>
-              <a:t>02.04.2026</a:t>
+              <a:t>16.04.2026</a:t>
             </a:fld>
             <a:endParaRPr lang="ru-RU"/>
           </a:p>
@@ -2692,7 +2702,7 @@
           <a:p>
             <a:fld id="{D4C78990-BC74-4702-B11E-A02B45A34803}" type="datetimeFigureOut">
               <a:rPr lang="ru-RU" smtClean="0"/>
-              <a:t>02.04.2026</a:t>
+              <a:t>16.04.2026</a:t>
             </a:fld>
             <a:endParaRPr lang="ru-RU"/>
           </a:p>
@@ -3049,7 +3059,7 @@
           <a:p>
             <a:fld id="{D4C78990-BC74-4702-B11E-A02B45A34803}" type="datetimeFigureOut">
               <a:rPr lang="ru-RU" smtClean="0"/>
-              <a:t>02.04.2026</a:t>
+              <a:t>16.04.2026</a:t>
             </a:fld>
             <a:endParaRPr lang="ru-RU"/>
           </a:p>
@@ -3291,7 +3301,7 @@
           <a:p>
             <a:fld id="{D4C78990-BC74-4702-B11E-A02B45A34803}" type="datetimeFigureOut">
               <a:rPr lang="ru-RU" smtClean="0"/>
-              <a:t>02.04.2026</a:t>
+              <a:t>16.04.2026</a:t>
             </a:fld>
             <a:endParaRPr lang="ru-RU"/>
           </a:p>
@@ -3910,46 +3920,14 @@
           <a:lstStyle/>
           <a:p>
             <a:r>
-              <a:rPr lang="ru-RU" sz="3200" dirty="0" err="1">
+              <a:rPr lang="ru-RU" sz="3200" kern="1200" cap="all" spc="200" baseline="0" dirty="0">
+                <a:solidFill>
+                  <a:srgbClr val="262626"/>
+                </a:solidFill>
                 <a:latin typeface="Times New Roman" panose="02020603050405020304" pitchFamily="18" charset="0"/>
                 <a:cs typeface="Times New Roman" panose="02020603050405020304" pitchFamily="18" charset="0"/>
               </a:rPr>
-              <a:t>энтропийныЙ</a:t>
-            </a:r>
-            <a:r>
-              <a:rPr lang="ru-RU" sz="3200" dirty="0">
-                <a:latin typeface="Times New Roman" panose="02020603050405020304" pitchFamily="18" charset="0"/>
-                <a:cs typeface="Times New Roman" panose="02020603050405020304" pitchFamily="18" charset="0"/>
-              </a:rPr>
-              <a:t> ПОДХОД ДЛЯ </a:t>
-            </a:r>
-            <a:r>
-              <a:rPr lang="ru-RU" sz="3200" dirty="0" err="1">
-                <a:latin typeface="Times New Roman" panose="02020603050405020304" pitchFamily="18" charset="0"/>
-                <a:cs typeface="Times New Roman" panose="02020603050405020304" pitchFamily="18" charset="0"/>
-              </a:rPr>
-              <a:t>робастноГО</a:t>
-            </a:r>
-            <a:r>
-              <a:rPr lang="ru-RU" sz="3200" dirty="0">
-                <a:latin typeface="Times New Roman" panose="02020603050405020304" pitchFamily="18" charset="0"/>
-                <a:cs typeface="Times New Roman" panose="02020603050405020304" pitchFamily="18" charset="0"/>
-              </a:rPr>
-              <a:t> </a:t>
-            </a:r>
-            <a:r>
-              <a:rPr lang="ru-RU" sz="3200" dirty="0" err="1">
-                <a:latin typeface="Times New Roman" panose="02020603050405020304" pitchFamily="18" charset="0"/>
-                <a:cs typeface="Times New Roman" panose="02020603050405020304" pitchFamily="18" charset="0"/>
-              </a:rPr>
-              <a:t>ОцениваниЯ</a:t>
-            </a:r>
-            <a:r>
-              <a:rPr lang="ru-RU" sz="3200" dirty="0">
-                <a:latin typeface="Times New Roman" panose="02020603050405020304" pitchFamily="18" charset="0"/>
-                <a:cs typeface="Times New Roman" panose="02020603050405020304" pitchFamily="18" charset="0"/>
-              </a:rPr>
-              <a:t> регрессионных зависимостей</a:t>
+              <a:t>Оценивание регрессии: сравнение непараметрического и информационного подходов</a:t>
             </a:r>
             <a:endParaRPr lang="en-US" sz="3200" kern="1200" cap="all" spc="200" baseline="0" dirty="0">
               <a:solidFill>
@@ -3975,8 +3953,8 @@
         </p:nvSpPr>
         <p:spPr>
           <a:xfrm>
-            <a:off x="662255" y="5591663"/>
-            <a:ext cx="10828862" cy="923330"/>
+            <a:off x="539516" y="5431536"/>
+            <a:ext cx="7082003" cy="1200329"/>
           </a:xfrm>
           <a:prstGeom prst="rect">
             <a:avLst/>
@@ -4009,7 +3987,7 @@
                 <a:latin typeface="Times New Roman" panose="02020603050405020304" pitchFamily="18" charset="0"/>
                 <a:cs typeface="Times New Roman" panose="02020603050405020304" pitchFamily="18" charset="0"/>
               </a:rPr>
-              <a:t>Организация: Московский физико-технический институт (национальный исследовательский университет)</a:t>
+              <a:t>Научный руководитель: Булычёв А. В.</a:t>
             </a:r>
           </a:p>
           <a:p>
@@ -4021,8 +3999,34 @@
                 <a:latin typeface="Times New Roman" panose="02020603050405020304" pitchFamily="18" charset="0"/>
                 <a:cs typeface="Times New Roman" panose="02020603050405020304" pitchFamily="18" charset="0"/>
               </a:rPr>
-              <a:t>Дата: 04.04.2026</a:t>
-            </a:r>
+              <a:t>Направление: «Системный анализ и управление в больших системах»</a:t>
+            </a:r>
+            <a:endParaRPr lang="en-US" dirty="0">
+              <a:solidFill>
+                <a:schemeClr val="bg1"/>
+              </a:solidFill>
+              <a:latin typeface="Times New Roman" panose="02020603050405020304" pitchFamily="18" charset="0"/>
+              <a:cs typeface="Times New Roman" panose="02020603050405020304" pitchFamily="18" charset="0"/>
+            </a:endParaRPr>
+          </a:p>
+          <a:p>
+            <a:r>
+              <a:rPr lang="ru-RU" dirty="0">
+                <a:solidFill>
+                  <a:schemeClr val="bg1"/>
+                </a:solidFill>
+                <a:latin typeface="Times New Roman" panose="02020603050405020304" pitchFamily="18" charset="0"/>
+                <a:cs typeface="Times New Roman" panose="02020603050405020304" pitchFamily="18" charset="0"/>
+              </a:rPr>
+              <a:t>Дата: 23.05.2026</a:t>
+            </a:r>
+            <a:endParaRPr lang="en-US" dirty="0">
+              <a:solidFill>
+                <a:schemeClr val="bg1"/>
+              </a:solidFill>
+              <a:latin typeface="Times New Roman" panose="02020603050405020304" pitchFamily="18" charset="0"/>
+              <a:cs typeface="Times New Roman" panose="02020603050405020304" pitchFamily="18" charset="0"/>
+            </a:endParaRPr>
           </a:p>
         </p:txBody>
       </p:sp>
@@ -4047,7 +4051,7 @@
         <p:cNvPr id="1" name="">
           <a:extLst>
             <a:ext uri="{FF2B5EF4-FFF2-40B4-BE49-F238E27FC236}">
-              <a16:creationId xmlns:a16="http://schemas.microsoft.com/office/drawing/2014/main" id="{6EE088B1-270F-467A-485B-FE41C3B705F8}"/>
+              <a16:creationId xmlns:a16="http://schemas.microsoft.com/office/drawing/2014/main" id="{0C52211F-D840-3878-739B-16E35221D39E}"/>
             </a:ext>
           </a:extLst>
         </p:cNvPr>
@@ -4067,7 +4071,7 @@
           <p:cNvPr id="2" name="TextBox 1">
             <a:extLst>
               <a:ext uri="{FF2B5EF4-FFF2-40B4-BE49-F238E27FC236}">
-                <a16:creationId xmlns:a16="http://schemas.microsoft.com/office/drawing/2014/main" id="{CA506851-A264-79D0-5147-2CE6E03FBAAF}"/>
+                <a16:creationId xmlns:a16="http://schemas.microsoft.com/office/drawing/2014/main" id="{8995A710-51E0-CE7A-E81F-72C3AEBEF811}"/>
               </a:ext>
             </a:extLst>
           </p:cNvPr>
@@ -4076,8 +4080,8 @@
         </p:nvSpPr>
         <p:spPr>
           <a:xfrm>
-            <a:off x="4376426" y="0"/>
-            <a:ext cx="3439147" cy="523220"/>
+            <a:off x="3485827" y="0"/>
+            <a:ext cx="5494966" cy="523220"/>
           </a:xfrm>
           <a:prstGeom prst="rect">
             <a:avLst/>
@@ -4095,7 +4099,7 @@
                 <a:latin typeface="Times New Roman" panose="02020603050405020304" pitchFamily="18" charset="0"/>
                 <a:cs typeface="Times New Roman" panose="02020603050405020304" pitchFamily="18" charset="0"/>
               </a:rPr>
-              <a:t>Список литературы</a:t>
+              <a:t>Методология сравнения методов</a:t>
             </a:r>
           </a:p>
         </p:txBody>
@@ -4105,7 +4109,7 @@
           <p:cNvPr id="3" name="TextBox 2">
             <a:extLst>
               <a:ext uri="{FF2B5EF4-FFF2-40B4-BE49-F238E27FC236}">
-                <a16:creationId xmlns:a16="http://schemas.microsoft.com/office/drawing/2014/main" id="{6837EB01-75EB-F47F-3EB8-B95AA247CC82}"/>
+                <a16:creationId xmlns:a16="http://schemas.microsoft.com/office/drawing/2014/main" id="{06E52EA5-F14C-5529-A879-73D9A7899A90}"/>
               </a:ext>
             </a:extLst>
           </p:cNvPr>
@@ -4114,8 +4118,8 @@
         </p:nvSpPr>
         <p:spPr>
           <a:xfrm>
-            <a:off x="387790" y="523220"/>
-            <a:ext cx="11416420" cy="6211316"/>
+            <a:off x="525101" y="932507"/>
+            <a:ext cx="11416420" cy="3331938"/>
           </a:xfrm>
           <a:prstGeom prst="rect">
             <a:avLst/>
@@ -4128,153 +4132,253 @@
           </a:bodyPr>
           <a:lstStyle/>
           <a:p>
-            <a:pPr marL="342900" indent="-342900">
+            <a:pPr>
               <a:lnSpc>
-                <a:spcPct val="250000"/>
+                <a:spcPct val="200000"/>
               </a:lnSpc>
-              <a:buFont typeface="+mj-lt"/>
-              <a:buAutoNum type="arabicPeriod"/>
             </a:pPr>
             <a:r>
-              <a:rPr lang="ru-RU" i="1" dirty="0">
+              <a:rPr lang="ru-RU" b="1" dirty="0">
                 <a:latin typeface="Times New Roman" panose="02020603050405020304" pitchFamily="18" charset="0"/>
                 <a:cs typeface="Times New Roman" panose="02020603050405020304" pitchFamily="18" charset="0"/>
               </a:rPr>
-              <a:t>Дубнов Ю. А., Булычев А. В. </a:t>
-            </a:r>
-            <a:r>
-              <a:rPr lang="ru-RU" dirty="0">
+              <a:t>Используемые статистические подходы:  </a:t>
+            </a:r>
+          </a:p>
+          <a:p>
+            <a:pPr marL="285750" indent="-285750">
+              <a:lnSpc>
+                <a:spcPct val="200000"/>
+              </a:lnSpc>
+              <a:buFont typeface="Arial" panose="020B0604020202020204" pitchFamily="34" charset="0"/>
+              <a:buChar char="•"/>
+            </a:pPr>
+            <a:r>
+              <a:rPr lang="ru-RU" i="0" dirty="0">
+                <a:solidFill>
+                  <a:srgbClr val="1D1D1F"/>
+                </a:solidFill>
+                <a:effectLst/>
                 <a:latin typeface="Times New Roman" panose="02020603050405020304" pitchFamily="18" charset="0"/>
                 <a:cs typeface="Times New Roman" panose="02020603050405020304" pitchFamily="18" charset="0"/>
               </a:rPr>
-              <a:t>Приближенное оценивание с помощью ускоренного метода наибольшей энтропии. Часть 1. Постановка задачи и реализация для задачи регрессии // Информационные технологии и вычислительные системы. 2022. </a:t>
-            </a:r>
-            <a:r>
-              <a:rPr lang="en-US" dirty="0">
+              <a:t>Для сравнения ядерных методов друг с другом использовался </a:t>
+            </a:r>
+            <a:r>
+              <a:rPr lang="ru-RU" b="1" i="0" dirty="0">
+                <a:solidFill>
+                  <a:srgbClr val="1D1D1F"/>
+                </a:solidFill>
+                <a:effectLst/>
                 <a:latin typeface="Times New Roman" panose="02020603050405020304" pitchFamily="18" charset="0"/>
                 <a:cs typeface="Times New Roman" panose="02020603050405020304" pitchFamily="18" charset="0"/>
               </a:rPr>
-              <a:t>№ 4. С. 69–80.</a:t>
-            </a:r>
-            <a:endParaRPr lang="ru-RU" dirty="0">
-              <a:latin typeface="Times New Roman" panose="02020603050405020304" pitchFamily="18" charset="0"/>
-              <a:cs typeface="Times New Roman" panose="02020603050405020304" pitchFamily="18" charset="0"/>
-            </a:endParaRPr>
-          </a:p>
-          <a:p>
-            <a:pPr marL="342900" indent="-342900">
-              <a:lnSpc>
-                <a:spcPct val="250000"/>
-              </a:lnSpc>
-              <a:buFont typeface="+mj-lt"/>
-              <a:buAutoNum type="arabicPeriod"/>
-            </a:pPr>
-            <a:r>
-              <a:rPr lang="en-US" i="1" dirty="0">
+              <a:t>тест Фридмана с поправкой </a:t>
+            </a:r>
+            <a:r>
+              <a:rPr lang="ru-RU" b="1" i="0" dirty="0" err="1">
+                <a:solidFill>
+                  <a:srgbClr val="1D1D1F"/>
+                </a:solidFill>
+                <a:effectLst/>
                 <a:latin typeface="Times New Roman" panose="02020603050405020304" pitchFamily="18" charset="0"/>
                 <a:cs typeface="Times New Roman" panose="02020603050405020304" pitchFamily="18" charset="0"/>
               </a:rPr>
-              <a:t>Golan A., Judge G. G., Miller D. </a:t>
-            </a:r>
-            <a:r>
-              <a:rPr lang="en-US" dirty="0">
+              <a:t>Бонферрони</a:t>
+            </a:r>
+            <a:r>
+              <a:rPr lang="ru-RU" i="0" dirty="0">
+                <a:solidFill>
+                  <a:srgbClr val="1D1D1F"/>
+                </a:solidFill>
+                <a:effectLst/>
                 <a:latin typeface="Times New Roman" panose="02020603050405020304" pitchFamily="18" charset="0"/>
                 <a:cs typeface="Times New Roman" panose="02020603050405020304" pitchFamily="18" charset="0"/>
               </a:rPr>
-              <a:t>Maximum Entropy Econometrics: Robust Estimation with Limited Data. — Chichester: John Wiley and Sons Ltd., 1996.</a:t>
-            </a:r>
-            <a:endParaRPr lang="ru-RU" dirty="0">
-              <a:latin typeface="Times New Roman" panose="02020603050405020304" pitchFamily="18" charset="0"/>
-              <a:cs typeface="Times New Roman" panose="02020603050405020304" pitchFamily="18" charset="0"/>
-            </a:endParaRPr>
-          </a:p>
-          <a:p>
-            <a:pPr marL="342900" indent="-342900">
+              <a:t>;</a:t>
+            </a:r>
+          </a:p>
+          <a:p>
+            <a:pPr marL="285750" indent="-285750">
               <a:lnSpc>
-                <a:spcPct val="250000"/>
+                <a:spcPct val="200000"/>
               </a:lnSpc>
-              <a:buFont typeface="+mj-lt"/>
-              <a:buAutoNum type="arabicPeriod"/>
+              <a:buFont typeface="Arial" panose="020B0604020202020204" pitchFamily="34" charset="0"/>
+              <a:buChar char="•"/>
             </a:pPr>
             <a:r>
-              <a:rPr lang="ru-RU" i="1" dirty="0">
+              <a:rPr lang="ru-RU" i="0" dirty="0">
+                <a:solidFill>
+                  <a:srgbClr val="1D1D1F"/>
+                </a:solidFill>
+                <a:effectLst/>
                 <a:latin typeface="Times New Roman" panose="02020603050405020304" pitchFamily="18" charset="0"/>
                 <a:cs typeface="Times New Roman" panose="02020603050405020304" pitchFamily="18" charset="0"/>
               </a:rPr>
-              <a:t>Воеводин В. В., Кузнецов Ю. А. </a:t>
-            </a:r>
-            <a:r>
-              <a:rPr lang="ru-RU" dirty="0">
+              <a:t>Для сравнения</a:t>
+            </a:r>
+            <a:r>
+              <a:rPr lang="en-US" i="0" dirty="0">
+                <a:solidFill>
+                  <a:srgbClr val="1D1D1F"/>
+                </a:solidFill>
+                <a:effectLst/>
                 <a:latin typeface="Times New Roman" panose="02020603050405020304" pitchFamily="18" charset="0"/>
                 <a:cs typeface="Times New Roman" panose="02020603050405020304" pitchFamily="18" charset="0"/>
               </a:rPr>
-              <a:t>Матрицы и вычисления. — М.: Наука, 1984.</a:t>
-            </a:r>
-          </a:p>
-          <a:p>
-            <a:pPr marL="342900" indent="-342900">
-              <a:lnSpc>
-                <a:spcPct val="250000"/>
-              </a:lnSpc>
-              <a:buFont typeface="+mj-lt"/>
-              <a:buAutoNum type="arabicPeriod"/>
-            </a:pPr>
-            <a:r>
-              <a:rPr lang="ru-RU" i="1" dirty="0">
+              <a:t> </a:t>
+            </a:r>
+            <a:r>
+              <a:rPr lang="ru-RU" i="0" dirty="0">
+                <a:solidFill>
+                  <a:srgbClr val="1D1D1F"/>
+                </a:solidFill>
+                <a:effectLst/>
                 <a:latin typeface="Times New Roman" panose="02020603050405020304" pitchFamily="18" charset="0"/>
                 <a:cs typeface="Times New Roman" panose="02020603050405020304" pitchFamily="18" charset="0"/>
               </a:rPr>
-              <a:t>Цыпкин Я. З. </a:t>
-            </a:r>
-            <a:r>
-              <a:rPr lang="ru-RU" dirty="0">
+              <a:t>энтропийного подхода с непараметрическими использовался </a:t>
+            </a:r>
+            <a:r>
+              <a:rPr lang="ru-RU" b="1" i="0" dirty="0">
+                <a:solidFill>
+                  <a:srgbClr val="1D1D1F"/>
+                </a:solidFill>
+                <a:effectLst/>
                 <a:latin typeface="Times New Roman" panose="02020603050405020304" pitchFamily="18" charset="0"/>
                 <a:cs typeface="Times New Roman" panose="02020603050405020304" pitchFamily="18" charset="0"/>
               </a:rPr>
-              <a:t>Основы теории обучающихся систем. — М.: Наука, 1970.</a:t>
-            </a:r>
-            <a:endParaRPr lang="en-US" dirty="0">
-              <a:latin typeface="Times New Roman" panose="02020603050405020304" pitchFamily="18" charset="0"/>
-              <a:cs typeface="Times New Roman" panose="02020603050405020304" pitchFamily="18" charset="0"/>
-            </a:endParaRPr>
-          </a:p>
-          <a:p>
-            <a:pPr marL="342900" indent="-342900">
-              <a:lnSpc>
-                <a:spcPct val="250000"/>
-              </a:lnSpc>
-              <a:buFont typeface="+mj-lt"/>
-              <a:buAutoNum type="arabicPeriod"/>
-            </a:pPr>
-            <a:r>
-              <a:rPr lang="en-US" i="1" dirty="0">
+              <a:t>тест </a:t>
+            </a:r>
+            <a:r>
+              <a:rPr lang="ru-RU" b="1" i="0" dirty="0" err="1">
+                <a:solidFill>
+                  <a:srgbClr val="1D1D1F"/>
+                </a:solidFill>
+                <a:effectLst/>
                 <a:latin typeface="Times New Roman" panose="02020603050405020304" pitchFamily="18" charset="0"/>
                 <a:cs typeface="Times New Roman" panose="02020603050405020304" pitchFamily="18" charset="0"/>
               </a:rPr>
-              <a:t>Efron B., </a:t>
-            </a:r>
-            <a:r>
-              <a:rPr lang="en-US" i="1" dirty="0" err="1">
+              <a:t>Уилкоксона</a:t>
+            </a:r>
+            <a:r>
+              <a:rPr lang="ru-RU" i="0" dirty="0">
+                <a:solidFill>
+                  <a:srgbClr val="1D1D1F"/>
+                </a:solidFill>
+                <a:effectLst/>
                 <a:latin typeface="Times New Roman" panose="02020603050405020304" pitchFamily="18" charset="0"/>
                 <a:cs typeface="Times New Roman" panose="02020603050405020304" pitchFamily="18" charset="0"/>
               </a:rPr>
-              <a:t>Tibshirani</a:t>
-            </a:r>
-            <a:r>
-              <a:rPr lang="en-US" i="1" dirty="0">
+              <a:t> </a:t>
+            </a:r>
+            <a:r>
+              <a:rPr lang="ru-RU" b="1" i="0" dirty="0">
+                <a:solidFill>
+                  <a:srgbClr val="1D1D1F"/>
+                </a:solidFill>
+                <a:effectLst/>
                 <a:latin typeface="Times New Roman" panose="02020603050405020304" pitchFamily="18" charset="0"/>
                 <a:cs typeface="Times New Roman" panose="02020603050405020304" pitchFamily="18" charset="0"/>
               </a:rPr>
-              <a:t> R. </a:t>
-            </a:r>
-            <a:r>
-              <a:rPr lang="en-US" dirty="0">
+              <a:t>с поправкой Холма</a:t>
+            </a:r>
+            <a:r>
+              <a:rPr lang="ru-RU" i="0" dirty="0">
+                <a:solidFill>
+                  <a:srgbClr val="1D1D1F"/>
+                </a:solidFill>
+                <a:effectLst/>
                 <a:latin typeface="Times New Roman" panose="02020603050405020304" pitchFamily="18" charset="0"/>
                 <a:cs typeface="Times New Roman" panose="02020603050405020304" pitchFamily="18" charset="0"/>
               </a:rPr>
-              <a:t>Improvements on cross-validation: the 632+ bootstrap method // J. Am. Stat. Assoc. 1997. V. 92(438). P. 548–560.</a:t>
-            </a:r>
-            <a:endParaRPr lang="ru-RU" dirty="0">
+              <a:t>;</a:t>
+            </a:r>
+          </a:p>
+          <a:p>
+            <a:pPr marL="285750" indent="-285750">
+              <a:lnSpc>
+                <a:spcPct val="200000"/>
+              </a:lnSpc>
+              <a:buFont typeface="Arial" panose="020B0604020202020204" pitchFamily="34" charset="0"/>
+              <a:buChar char="•"/>
+            </a:pPr>
+            <a:r>
+              <a:rPr lang="ru-RU" i="0" dirty="0">
+                <a:solidFill>
+                  <a:srgbClr val="1D1D1F"/>
+                </a:solidFill>
+                <a:effectLst/>
+                <a:latin typeface="Times New Roman" panose="02020603050405020304" pitchFamily="18" charset="0"/>
+                <a:cs typeface="Times New Roman" panose="02020603050405020304" pitchFamily="18" charset="0"/>
+              </a:rPr>
+              <a:t>Для проверки устойчивости </a:t>
+            </a:r>
+            <a:r>
+              <a:rPr lang="ru-RU" dirty="0">
+                <a:solidFill>
+                  <a:srgbClr val="1D1D1F"/>
+                </a:solidFill>
+                <a:latin typeface="Times New Roman" panose="02020603050405020304" pitchFamily="18" charset="0"/>
+                <a:cs typeface="Times New Roman" panose="02020603050405020304" pitchFamily="18" charset="0"/>
+              </a:rPr>
+              <a:t>результаты дополнительно сравнивались на наборе </a:t>
+            </a:r>
+            <a:r>
+              <a:rPr lang="ru-RU" dirty="0" err="1">
+                <a:solidFill>
+                  <a:srgbClr val="1D1D1F"/>
+                </a:solidFill>
+                <a:latin typeface="Times New Roman" panose="02020603050405020304" pitchFamily="18" charset="0"/>
+                <a:cs typeface="Times New Roman" panose="02020603050405020304" pitchFamily="18" charset="0"/>
+              </a:rPr>
+              <a:t>датасетов</a:t>
+            </a:r>
+            <a:r>
+              <a:rPr lang="ru-RU" dirty="0">
+                <a:solidFill>
+                  <a:srgbClr val="1D1D1F"/>
+                </a:solidFill>
+                <a:latin typeface="Times New Roman" panose="02020603050405020304" pitchFamily="18" charset="0"/>
+                <a:cs typeface="Times New Roman" panose="02020603050405020304" pitchFamily="18" charset="0"/>
+              </a:rPr>
+              <a:t>, очищенном от выбросов по методу </a:t>
+            </a:r>
+            <a:r>
+              <a:rPr lang="ru-RU" b="1" dirty="0">
+                <a:solidFill>
+                  <a:srgbClr val="1D1D1F"/>
+                </a:solidFill>
+                <a:latin typeface="Times New Roman" panose="02020603050405020304" pitchFamily="18" charset="0"/>
+                <a:cs typeface="Times New Roman" panose="02020603050405020304" pitchFamily="18" charset="0"/>
+              </a:rPr>
+              <a:t>1,5 </a:t>
+            </a:r>
+            <a:r>
+              <a:rPr lang="en-US" b="1" dirty="0">
+                <a:solidFill>
+                  <a:srgbClr val="1D1D1F"/>
+                </a:solidFill>
+                <a:latin typeface="Times New Roman" panose="02020603050405020304" pitchFamily="18" charset="0"/>
+                <a:cs typeface="Times New Roman" panose="02020603050405020304" pitchFamily="18" charset="0"/>
+              </a:rPr>
+              <a:t>IQR</a:t>
+            </a:r>
+            <a:r>
+              <a:rPr lang="ru-RU" dirty="0">
+                <a:solidFill>
+                  <a:srgbClr val="1D1D1F"/>
+                </a:solidFill>
+                <a:latin typeface="Times New Roman" panose="02020603050405020304" pitchFamily="18" charset="0"/>
+                <a:cs typeface="Times New Roman" panose="02020603050405020304" pitchFamily="18" charset="0"/>
+              </a:rPr>
+              <a:t>.</a:t>
+            </a:r>
+            <a:endParaRPr lang="ru-RU" i="0" dirty="0">
+              <a:solidFill>
+                <a:srgbClr val="1D1D1F"/>
+              </a:solidFill>
+              <a:effectLst/>
               <a:latin typeface="Times New Roman" panose="02020603050405020304" pitchFamily="18" charset="0"/>
               <a:cs typeface="Times New Roman" panose="02020603050405020304" pitchFamily="18" charset="0"/>
             </a:endParaRPr>
@@ -4284,7 +4388,4108 @@
     </p:spTree>
     <p:extLst>
       <p:ext uri="{BB962C8B-B14F-4D97-AF65-F5344CB8AC3E}">
-        <p14:creationId xmlns:p14="http://schemas.microsoft.com/office/powerpoint/2010/main" val="611517564"/>
+        <p14:creationId xmlns:p14="http://schemas.microsoft.com/office/powerpoint/2010/main" val="105563953"/>
+      </p:ext>
+    </p:extLst>
+  </p:cSld>
+  <p:clrMapOvr>
+    <a:masterClrMapping/>
+  </p:clrMapOvr>
+</p:sld>
+</file>
+
+<file path=ppt/slides/slide11.xml><?xml version="1.0" encoding="utf-8"?>
+<p:sld xmlns:a="http://schemas.openxmlformats.org/drawingml/2006/main" xmlns:r="http://schemas.openxmlformats.org/officeDocument/2006/relationships" xmlns:p="http://schemas.openxmlformats.org/presentationml/2006/main">
+  <p:cSld>
+    <p:spTree>
+      <p:nvGrpSpPr>
+        <p:cNvPr id="1" name="">
+          <a:extLst>
+            <a:ext uri="{FF2B5EF4-FFF2-40B4-BE49-F238E27FC236}">
+              <a16:creationId xmlns:a16="http://schemas.microsoft.com/office/drawing/2014/main" id="{0C52211F-D840-3878-739B-16E35221D39E}"/>
+            </a:ext>
+          </a:extLst>
+        </p:cNvPr>
+        <p:cNvGrpSpPr/>
+        <p:nvPr/>
+      </p:nvGrpSpPr>
+      <p:grpSpPr>
+        <a:xfrm>
+          <a:off x="0" y="0"/>
+          <a:ext cx="0" cy="0"/>
+          <a:chOff x="0" y="0"/>
+          <a:chExt cx="0" cy="0"/>
+        </a:xfrm>
+      </p:grpSpPr>
+      <p:sp>
+        <p:nvSpPr>
+          <p:cNvPr id="2" name="TextBox 1">
+            <a:extLst>
+              <a:ext uri="{FF2B5EF4-FFF2-40B4-BE49-F238E27FC236}">
+                <a16:creationId xmlns:a16="http://schemas.microsoft.com/office/drawing/2014/main" id="{8995A710-51E0-CE7A-E81F-72C3AEBEF811}"/>
+              </a:ext>
+            </a:extLst>
+          </p:cNvPr>
+          <p:cNvSpPr txBox="1"/>
+          <p:nvPr/>
+        </p:nvSpPr>
+        <p:spPr>
+          <a:xfrm>
+            <a:off x="3030444" y="0"/>
+            <a:ext cx="6405728" cy="523220"/>
+          </a:xfrm>
+          <a:prstGeom prst="rect">
+            <a:avLst/>
+          </a:prstGeom>
+          <a:noFill/>
+        </p:spPr>
+        <p:txBody>
+          <a:bodyPr wrap="none" rtlCol="0">
+            <a:spAutoFit/>
+          </a:bodyPr>
+          <a:lstStyle/>
+          <a:p>
+            <a:r>
+              <a:rPr lang="ru-RU" sz="2800" b="1" dirty="0">
+                <a:latin typeface="Times New Roman" panose="02020603050405020304" pitchFamily="18" charset="0"/>
+                <a:cs typeface="Times New Roman" panose="02020603050405020304" pitchFamily="18" charset="0"/>
+              </a:rPr>
+              <a:t>Результаты: полиномиальные данные</a:t>
+            </a:r>
+          </a:p>
+        </p:txBody>
+      </p:sp>
+      <p:sp>
+        <p:nvSpPr>
+          <p:cNvPr id="3" name="TextBox 2">
+            <a:extLst>
+              <a:ext uri="{FF2B5EF4-FFF2-40B4-BE49-F238E27FC236}">
+                <a16:creationId xmlns:a16="http://schemas.microsoft.com/office/drawing/2014/main" id="{06E52EA5-F14C-5529-A879-73D9A7899A90}"/>
+              </a:ext>
+            </a:extLst>
+          </p:cNvPr>
+          <p:cNvSpPr txBox="1"/>
+          <p:nvPr/>
+        </p:nvSpPr>
+        <p:spPr>
+          <a:xfrm>
+            <a:off x="525101" y="932507"/>
+            <a:ext cx="11416420" cy="1289071"/>
+          </a:xfrm>
+          <a:prstGeom prst="rect">
+            <a:avLst/>
+          </a:prstGeom>
+          <a:noFill/>
+        </p:spPr>
+        <p:txBody>
+          <a:bodyPr wrap="square" rtlCol="0">
+            <a:spAutoFit/>
+          </a:bodyPr>
+          <a:lstStyle/>
+          <a:p>
+            <a:pPr>
+              <a:lnSpc>
+                <a:spcPct val="150000"/>
+              </a:lnSpc>
+            </a:pPr>
+            <a:r>
+              <a:rPr lang="ru-RU" b="1" dirty="0">
+                <a:latin typeface="Times New Roman" panose="02020603050405020304" pitchFamily="18" charset="0"/>
+                <a:cs typeface="Times New Roman" panose="02020603050405020304" pitchFamily="18" charset="0"/>
+              </a:rPr>
+              <a:t>Основные наблюдения по сравнению ядерных методов:  </a:t>
+            </a:r>
+          </a:p>
+          <a:p>
+            <a:pPr marL="285750" indent="-285750">
+              <a:lnSpc>
+                <a:spcPct val="150000"/>
+              </a:lnSpc>
+              <a:buFont typeface="Arial" panose="020B0604020202020204" pitchFamily="34" charset="0"/>
+              <a:buChar char="•"/>
+            </a:pPr>
+            <a:r>
+              <a:rPr lang="ru-RU" dirty="0">
+                <a:latin typeface="Times New Roman" panose="02020603050405020304" pitchFamily="18" charset="0"/>
+                <a:cs typeface="Times New Roman" panose="02020603050405020304" pitchFamily="18" charset="0"/>
+              </a:rPr>
+              <a:t>Преимущество методов кросс-валидации перед эмпирическим наблюдается только для низкого шума и высоких степеней.</a:t>
+            </a:r>
+          </a:p>
+        </p:txBody>
+      </p:sp>
+      <p:sp>
+        <p:nvSpPr>
+          <p:cNvPr id="6" name="TextBox 5">
+            <a:extLst>
+              <a:ext uri="{FF2B5EF4-FFF2-40B4-BE49-F238E27FC236}">
+                <a16:creationId xmlns:a16="http://schemas.microsoft.com/office/drawing/2014/main" id="{AFE6FE7F-F128-49D0-1F99-DF46F2CF9BD3}"/>
+              </a:ext>
+            </a:extLst>
+          </p:cNvPr>
+          <p:cNvSpPr txBox="1"/>
+          <p:nvPr/>
+        </p:nvSpPr>
+        <p:spPr>
+          <a:xfrm>
+            <a:off x="262549" y="6228721"/>
+            <a:ext cx="11929451" cy="369332"/>
+          </a:xfrm>
+          <a:prstGeom prst="rect">
+            <a:avLst/>
+          </a:prstGeom>
+          <a:noFill/>
+        </p:spPr>
+        <p:txBody>
+          <a:bodyPr wrap="square">
+            <a:spAutoFit/>
+          </a:bodyPr>
+          <a:lstStyle/>
+          <a:p>
+            <a:r>
+              <a:rPr lang="ru-RU" sz="1800" dirty="0">
+                <a:effectLst/>
+                <a:latin typeface="Times New Roman" panose="02020603050405020304" pitchFamily="18" charset="0"/>
+                <a:ea typeface="Times New Roman" panose="02020603050405020304" pitchFamily="18" charset="0"/>
+              </a:rPr>
+              <a:t>Рис. 2. Сравнение методов ядерного сглаживания по </a:t>
+            </a:r>
+            <a:r>
+              <a:rPr lang="en-US" sz="1800" dirty="0">
+                <a:effectLst/>
+                <a:latin typeface="Times New Roman" panose="02020603050405020304" pitchFamily="18" charset="0"/>
+                <a:ea typeface="Times New Roman" panose="02020603050405020304" pitchFamily="18" charset="0"/>
+              </a:rPr>
+              <a:t>IMSE</a:t>
+            </a:r>
+            <a:r>
+              <a:rPr lang="ru-RU" sz="1800" dirty="0">
+                <a:effectLst/>
+                <a:latin typeface="Times New Roman" panose="02020603050405020304" pitchFamily="18" charset="0"/>
+                <a:ea typeface="Times New Roman" panose="02020603050405020304" pitchFamily="18" charset="0"/>
+              </a:rPr>
+              <a:t> на полиномиальных данных после очистки от выбросов</a:t>
+            </a:r>
+            <a:endParaRPr lang="ru-RU" dirty="0"/>
+          </a:p>
+        </p:txBody>
+      </p:sp>
+      <p:pic>
+        <p:nvPicPr>
+          <p:cNvPr id="7" name="Рисунок 6">
+            <a:extLst>
+              <a:ext uri="{FF2B5EF4-FFF2-40B4-BE49-F238E27FC236}">
+                <a16:creationId xmlns:a16="http://schemas.microsoft.com/office/drawing/2014/main" id="{460FE115-C1AE-4C5C-90FF-073C589792C1}"/>
+              </a:ext>
+            </a:extLst>
+          </p:cNvPr>
+          <p:cNvPicPr/>
+          <p:nvPr/>
+        </p:nvPicPr>
+        <p:blipFill>
+          <a:blip r:embed="rId2"/>
+          <a:stretch>
+            <a:fillRect/>
+          </a:stretch>
+        </p:blipFill>
+        <p:spPr>
+          <a:xfrm>
+            <a:off x="125239" y="2455545"/>
+            <a:ext cx="11941521" cy="3723875"/>
+          </a:xfrm>
+          <a:prstGeom prst="rect">
+            <a:avLst/>
+          </a:prstGeom>
+        </p:spPr>
+      </p:pic>
+    </p:spTree>
+    <p:extLst>
+      <p:ext uri="{BB962C8B-B14F-4D97-AF65-F5344CB8AC3E}">
+        <p14:creationId xmlns:p14="http://schemas.microsoft.com/office/powerpoint/2010/main" val="2928486534"/>
+      </p:ext>
+    </p:extLst>
+  </p:cSld>
+  <p:clrMapOvr>
+    <a:masterClrMapping/>
+  </p:clrMapOvr>
+</p:sld>
+</file>
+
+<file path=ppt/slides/slide12.xml><?xml version="1.0" encoding="utf-8"?>
+<p:sld xmlns:a="http://schemas.openxmlformats.org/drawingml/2006/main" xmlns:r="http://schemas.openxmlformats.org/officeDocument/2006/relationships" xmlns:p="http://schemas.openxmlformats.org/presentationml/2006/main">
+  <p:cSld>
+    <p:spTree>
+      <p:nvGrpSpPr>
+        <p:cNvPr id="1" name="">
+          <a:extLst>
+            <a:ext uri="{FF2B5EF4-FFF2-40B4-BE49-F238E27FC236}">
+              <a16:creationId xmlns:a16="http://schemas.microsoft.com/office/drawing/2014/main" id="{0C52211F-D840-3878-739B-16E35221D39E}"/>
+            </a:ext>
+          </a:extLst>
+        </p:cNvPr>
+        <p:cNvGrpSpPr/>
+        <p:nvPr/>
+      </p:nvGrpSpPr>
+      <p:grpSpPr>
+        <a:xfrm>
+          <a:off x="0" y="0"/>
+          <a:ext cx="0" cy="0"/>
+          <a:chOff x="0" y="0"/>
+          <a:chExt cx="0" cy="0"/>
+        </a:xfrm>
+      </p:grpSpPr>
+      <mc:AlternateContent xmlns:mc="http://schemas.openxmlformats.org/markup-compatibility/2006" xmlns:a14="http://schemas.microsoft.com/office/drawing/2010/main">
+        <mc:Choice Requires="a14">
+          <p:sp>
+            <p:nvSpPr>
+              <p:cNvPr id="3" name="TextBox 2">
+                <a:extLst>
+                  <a:ext uri="{FF2B5EF4-FFF2-40B4-BE49-F238E27FC236}">
+                    <a16:creationId xmlns:a16="http://schemas.microsoft.com/office/drawing/2014/main" id="{06E52EA5-F14C-5529-A879-73D9A7899A90}"/>
+                  </a:ext>
+                </a:extLst>
+              </p:cNvPr>
+              <p:cNvSpPr txBox="1"/>
+              <p:nvPr/>
+            </p:nvSpPr>
+            <p:spPr>
+              <a:xfrm>
+                <a:off x="525098" y="730490"/>
+                <a:ext cx="11416420" cy="2120068"/>
+              </a:xfrm>
+              <a:prstGeom prst="rect">
+                <a:avLst/>
+              </a:prstGeom>
+              <a:noFill/>
+            </p:spPr>
+            <p:txBody>
+              <a:bodyPr wrap="square" rtlCol="0">
+                <a:spAutoFit/>
+              </a:bodyPr>
+              <a:lstStyle/>
+              <a:p>
+                <a:pPr>
+                  <a:lnSpc>
+                    <a:spcPct val="150000"/>
+                  </a:lnSpc>
+                </a:pPr>
+                <a:r>
+                  <a:rPr lang="ru-RU" b="1" dirty="0">
+                    <a:latin typeface="Times New Roman" panose="02020603050405020304" pitchFamily="18" charset="0"/>
+                    <a:cs typeface="Times New Roman" panose="02020603050405020304" pitchFamily="18" charset="0"/>
+                  </a:rPr>
+                  <a:t>Основные наблюдения:  </a:t>
+                </a:r>
+              </a:p>
+              <a:p>
+                <a:pPr marL="285750" indent="-285750">
+                  <a:lnSpc>
+                    <a:spcPct val="150000"/>
+                  </a:lnSpc>
+                  <a:buFont typeface="Arial" panose="020B0604020202020204" pitchFamily="34" charset="0"/>
+                  <a:buChar char="•"/>
+                </a:pPr>
+                <a:r>
+                  <a:rPr lang="ru-RU" dirty="0">
+                    <a:latin typeface="Times New Roman" panose="02020603050405020304" pitchFamily="18" charset="0"/>
+                    <a:cs typeface="Times New Roman" panose="02020603050405020304" pitchFamily="18" charset="0"/>
+                  </a:rPr>
+                  <a:t>Энтропийный метод демонстрирует эффективность во всех конфигурациях по всем метрикам;</a:t>
+                </a:r>
+              </a:p>
+              <a:p>
+                <a:pPr marL="285750" indent="-285750">
+                  <a:lnSpc>
+                    <a:spcPct val="150000"/>
+                  </a:lnSpc>
+                  <a:buFont typeface="Arial" panose="020B0604020202020204" pitchFamily="34" charset="0"/>
+                  <a:buChar char="•"/>
+                </a:pPr>
+                <a:r>
+                  <a:rPr lang="ru-RU" sz="1800" dirty="0">
+                    <a:effectLst/>
+                    <a:latin typeface="Times New Roman" panose="02020603050405020304" pitchFamily="18" charset="0"/>
+                    <a:ea typeface="Calibri" panose="020F0502020204030204" pitchFamily="34" charset="0"/>
+                  </a:rPr>
+                  <a:t>В 96% конфигураций различия статистически значимы на уровне 0,1%;</a:t>
+                </a:r>
+                <a:endParaRPr lang="ru-RU" sz="1800" dirty="0">
+                  <a:effectLst/>
+                  <a:latin typeface="Times New Roman" panose="02020603050405020304" pitchFamily="18" charset="0"/>
+                  <a:ea typeface="Calibri" panose="020F0502020204030204" pitchFamily="34" charset="0"/>
+                  <a:cs typeface="Times New Roman" panose="02020603050405020304" pitchFamily="18" charset="0"/>
+                </a:endParaRPr>
+              </a:p>
+              <a:p>
+                <a:pPr marL="285750" indent="-285750">
+                  <a:lnSpc>
+                    <a:spcPct val="150000"/>
+                  </a:lnSpc>
+                  <a:buFont typeface="Arial" panose="020B0604020202020204" pitchFamily="34" charset="0"/>
+                  <a:buChar char="•"/>
+                </a:pPr>
+                <a:r>
+                  <a:rPr lang="ru-RU" dirty="0">
+                    <a:latin typeface="Times New Roman" panose="02020603050405020304" pitchFamily="18" charset="0"/>
+                    <a:ea typeface="Calibri" panose="020F0502020204030204" pitchFamily="34" charset="0"/>
+                    <a:cs typeface="Times New Roman" panose="02020603050405020304" pitchFamily="18" charset="0"/>
+                  </a:rPr>
+                  <a:t>Размер эффекта (</a:t>
+                </a:r>
+                <a:r>
+                  <a:rPr lang="en-US" sz="1800" dirty="0">
+                    <a:effectLst/>
+                    <a:latin typeface="Times New Roman" panose="02020603050405020304" pitchFamily="18" charset="0"/>
+                    <a:ea typeface="Calibri" panose="020F0502020204030204" pitchFamily="34" charset="0"/>
+                  </a:rPr>
+                  <a:t>rank-</a:t>
+                </a:r>
+                <a:r>
+                  <a:rPr lang="en-US" sz="1800" dirty="0" err="1">
+                    <a:effectLst/>
+                    <a:latin typeface="Times New Roman" panose="02020603050405020304" pitchFamily="18" charset="0"/>
+                    <a:ea typeface="Calibri" panose="020F0502020204030204" pitchFamily="34" charset="0"/>
+                  </a:rPr>
+                  <a:t>biseral</a:t>
+                </a:r>
+                <a:r>
+                  <a:rPr lang="ru-RU" sz="1800" dirty="0">
+                    <a:effectLst/>
+                    <a:latin typeface="Times New Roman" panose="02020603050405020304" pitchFamily="18" charset="0"/>
+                    <a:ea typeface="Calibri" panose="020F0502020204030204" pitchFamily="34" charset="0"/>
+                  </a:rPr>
+                  <a:t>) в большинстве случаев умеренный </a:t>
+                </a:r>
+                <a14:m>
+                  <m:oMath xmlns:m="http://schemas.openxmlformats.org/officeDocument/2006/math">
+                    <m:r>
+                      <a:rPr lang="ru-RU" sz="1800" i="1" smtClean="0">
+                        <a:effectLst/>
+                        <a:latin typeface="Cambria Math" panose="02040503050406030204" pitchFamily="18" charset="0"/>
+                        <a:ea typeface="Calibri" panose="020F0502020204030204" pitchFamily="34" charset="0"/>
+                        <a:cs typeface="Times New Roman" panose="02020603050405020304" pitchFamily="18" charset="0"/>
+                      </a:rPr>
+                      <m:t>𝑟</m:t>
+                    </m:r>
+                    <m:r>
+                      <a:rPr lang="ru-RU" sz="1800" i="1" smtClean="0">
+                        <a:effectLst/>
+                        <a:latin typeface="Cambria Math" panose="02040503050406030204" pitchFamily="18" charset="0"/>
+                        <a:ea typeface="Calibri" panose="020F0502020204030204" pitchFamily="34" charset="0"/>
+                        <a:cs typeface="Times New Roman" panose="02020603050405020304" pitchFamily="18" charset="0"/>
+                      </a:rPr>
+                      <m:t>∈</m:t>
+                    </m:r>
+                    <m:d>
+                      <m:dPr>
+                        <m:begChr m:val="["/>
+                        <m:endChr m:val="]"/>
+                        <m:ctrlPr>
+                          <a:rPr lang="ru-RU" i="1">
+                            <a:effectLst/>
+                            <a:latin typeface="Cambria Math" panose="02040503050406030204" pitchFamily="18" charset="0"/>
+                          </a:rPr>
+                        </m:ctrlPr>
+                      </m:dPr>
+                      <m:e>
+                        <m:r>
+                          <a:rPr lang="ru-RU" sz="1800" i="1">
+                            <a:effectLst/>
+                            <a:latin typeface="Cambria Math" panose="02040503050406030204" pitchFamily="18" charset="0"/>
+                            <a:ea typeface="Calibri" panose="020F0502020204030204" pitchFamily="34" charset="0"/>
+                            <a:cs typeface="Times New Roman" panose="02020603050405020304" pitchFamily="18" charset="0"/>
+                          </a:rPr>
+                          <m:t>0.3, 0.5</m:t>
+                        </m:r>
+                      </m:e>
+                    </m:d>
+                  </m:oMath>
+                </a14:m>
+                <a:r>
+                  <a:rPr lang="ru-RU" dirty="0">
+                    <a:latin typeface="Times New Roman" panose="02020603050405020304" pitchFamily="18" charset="0"/>
+                    <a:cs typeface="Times New Roman" panose="02020603050405020304" pitchFamily="18" charset="0"/>
+                  </a:rPr>
+                  <a:t>;</a:t>
+                </a:r>
+              </a:p>
+              <a:p>
+                <a:pPr marL="285750" indent="-285750">
+                  <a:lnSpc>
+                    <a:spcPct val="150000"/>
+                  </a:lnSpc>
+                  <a:buFont typeface="Arial" panose="020B0604020202020204" pitchFamily="34" charset="0"/>
+                  <a:buChar char="•"/>
+                </a:pPr>
+                <a:r>
+                  <a:rPr lang="ru-RU" dirty="0">
+                    <a:latin typeface="Times New Roman" panose="02020603050405020304" pitchFamily="18" charset="0"/>
+                    <a:cs typeface="Times New Roman" panose="02020603050405020304" pitchFamily="18" charset="0"/>
+                  </a:rPr>
+                  <a:t>Наибольшее улучшение по </a:t>
+                </a:r>
+                <a:r>
+                  <a:rPr lang="en-US" dirty="0">
+                    <a:latin typeface="Times New Roman" panose="02020603050405020304" pitchFamily="18" charset="0"/>
+                    <a:cs typeface="Times New Roman" panose="02020603050405020304" pitchFamily="18" charset="0"/>
+                  </a:rPr>
+                  <a:t>IMSE</a:t>
+                </a:r>
+                <a:r>
+                  <a:rPr lang="ru-RU" dirty="0">
+                    <a:latin typeface="Times New Roman" panose="02020603050405020304" pitchFamily="18" charset="0"/>
+                    <a:cs typeface="Times New Roman" panose="02020603050405020304" pitchFamily="18" charset="0"/>
+                  </a:rPr>
+                  <a:t> достигнуто для полинома 2-й степени (-47,8% к ядерной регрессии).</a:t>
+                </a:r>
+              </a:p>
+            </p:txBody>
+          </p:sp>
+        </mc:Choice>
+        <mc:Fallback xmlns="">
+          <p:sp>
+            <p:nvSpPr>
+              <p:cNvPr id="3" name="TextBox 2">
+                <a:extLst>
+                  <a:ext uri="{FF2B5EF4-FFF2-40B4-BE49-F238E27FC236}">
+                    <a16:creationId xmlns:a16="http://schemas.microsoft.com/office/drawing/2014/main" id="{06E52EA5-F14C-5529-A879-73D9A7899A90}"/>
+                  </a:ext>
+                </a:extLst>
+              </p:cNvPr>
+              <p:cNvSpPr txBox="1">
+                <a:spLocks noRot="1" noChangeAspect="1" noMove="1" noResize="1" noEditPoints="1" noAdjustHandles="1" noChangeArrowheads="1" noChangeShapeType="1" noTextEdit="1"/>
+              </p:cNvSpPr>
+              <p:nvPr/>
+            </p:nvSpPr>
+            <p:spPr>
+              <a:xfrm>
+                <a:off x="525098" y="730490"/>
+                <a:ext cx="11416420" cy="2120068"/>
+              </a:xfrm>
+              <a:prstGeom prst="rect">
+                <a:avLst/>
+              </a:prstGeom>
+              <a:blipFill>
+                <a:blip r:embed="rId2"/>
+                <a:stretch>
+                  <a:fillRect l="-427" b="-3736"/>
+                </a:stretch>
+              </a:blipFill>
+            </p:spPr>
+            <p:txBody>
+              <a:bodyPr/>
+              <a:lstStyle/>
+              <a:p>
+                <a:r>
+                  <a:rPr lang="ru-RU">
+                    <a:noFill/>
+                  </a:rPr>
+                  <a:t> </a:t>
+                </a:r>
+              </a:p>
+            </p:txBody>
+          </p:sp>
+        </mc:Fallback>
+      </mc:AlternateContent>
+      <p:sp>
+        <p:nvSpPr>
+          <p:cNvPr id="6" name="TextBox 5">
+            <a:extLst>
+              <a:ext uri="{FF2B5EF4-FFF2-40B4-BE49-F238E27FC236}">
+                <a16:creationId xmlns:a16="http://schemas.microsoft.com/office/drawing/2014/main" id="{AFE6FE7F-F128-49D0-1F99-DF46F2CF9BD3}"/>
+              </a:ext>
+            </a:extLst>
+          </p:cNvPr>
+          <p:cNvSpPr txBox="1"/>
+          <p:nvPr/>
+        </p:nvSpPr>
+        <p:spPr>
+          <a:xfrm>
+            <a:off x="579645" y="6304110"/>
+            <a:ext cx="11032709" cy="369332"/>
+          </a:xfrm>
+          <a:prstGeom prst="rect">
+            <a:avLst/>
+          </a:prstGeom>
+          <a:noFill/>
+        </p:spPr>
+        <p:txBody>
+          <a:bodyPr wrap="square">
+            <a:spAutoFit/>
+          </a:bodyPr>
+          <a:lstStyle/>
+          <a:p>
+            <a:r>
+              <a:rPr lang="ru-RU" sz="1800" dirty="0">
+                <a:effectLst/>
+                <a:latin typeface="Times New Roman" panose="02020603050405020304" pitchFamily="18" charset="0"/>
+                <a:ea typeface="Times New Roman" panose="02020603050405020304" pitchFamily="18" charset="0"/>
+              </a:rPr>
+              <a:t>Рис. 3. Сравнение лучших оценок ядерного и энтропийного подходов по </a:t>
+            </a:r>
+            <a:r>
+              <a:rPr lang="en-US" sz="1800" dirty="0">
+                <a:effectLst/>
+                <a:latin typeface="Times New Roman" panose="02020603050405020304" pitchFamily="18" charset="0"/>
+                <a:ea typeface="Times New Roman" panose="02020603050405020304" pitchFamily="18" charset="0"/>
+              </a:rPr>
+              <a:t>IMSE</a:t>
+            </a:r>
+            <a:r>
+              <a:rPr lang="ru-RU" sz="1800" dirty="0">
+                <a:effectLst/>
+                <a:latin typeface="Times New Roman" panose="02020603050405020304" pitchFamily="18" charset="0"/>
+                <a:ea typeface="Times New Roman" panose="02020603050405020304" pitchFamily="18" charset="0"/>
+              </a:rPr>
+              <a:t> на полиномиальных данных</a:t>
+            </a:r>
+            <a:endParaRPr lang="ru-RU" dirty="0"/>
+          </a:p>
+        </p:txBody>
+      </p:sp>
+      <p:pic>
+        <p:nvPicPr>
+          <p:cNvPr id="7" name="Рисунок 6">
+            <a:extLst>
+              <a:ext uri="{FF2B5EF4-FFF2-40B4-BE49-F238E27FC236}">
+                <a16:creationId xmlns:a16="http://schemas.microsoft.com/office/drawing/2014/main" id="{4D290710-C6FA-4004-ADF3-EA8F9C4A93EE}"/>
+              </a:ext>
+            </a:extLst>
+          </p:cNvPr>
+          <p:cNvPicPr/>
+          <p:nvPr/>
+        </p:nvPicPr>
+        <p:blipFill>
+          <a:blip r:embed="rId3"/>
+          <a:stretch>
+            <a:fillRect/>
+          </a:stretch>
+        </p:blipFill>
+        <p:spPr>
+          <a:xfrm>
+            <a:off x="579645" y="3165362"/>
+            <a:ext cx="11032709" cy="2931478"/>
+          </a:xfrm>
+          <a:prstGeom prst="rect">
+            <a:avLst/>
+          </a:prstGeom>
+        </p:spPr>
+      </p:pic>
+      <p:sp>
+        <p:nvSpPr>
+          <p:cNvPr id="8" name="TextBox 7">
+            <a:extLst>
+              <a:ext uri="{FF2B5EF4-FFF2-40B4-BE49-F238E27FC236}">
+                <a16:creationId xmlns:a16="http://schemas.microsoft.com/office/drawing/2014/main" id="{8728353B-CDBF-4943-B93E-8C7A426BB39D}"/>
+              </a:ext>
+            </a:extLst>
+          </p:cNvPr>
+          <p:cNvSpPr txBox="1"/>
+          <p:nvPr/>
+        </p:nvSpPr>
+        <p:spPr>
+          <a:xfrm>
+            <a:off x="3030444" y="0"/>
+            <a:ext cx="6405728" cy="523220"/>
+          </a:xfrm>
+          <a:prstGeom prst="rect">
+            <a:avLst/>
+          </a:prstGeom>
+          <a:noFill/>
+        </p:spPr>
+        <p:txBody>
+          <a:bodyPr wrap="none" rtlCol="0">
+            <a:spAutoFit/>
+          </a:bodyPr>
+          <a:lstStyle/>
+          <a:p>
+            <a:r>
+              <a:rPr lang="ru-RU" sz="2800" b="1" dirty="0">
+                <a:latin typeface="Times New Roman" panose="02020603050405020304" pitchFamily="18" charset="0"/>
+                <a:cs typeface="Times New Roman" panose="02020603050405020304" pitchFamily="18" charset="0"/>
+              </a:rPr>
+              <a:t>Результаты: полиномиальные данные</a:t>
+            </a:r>
+          </a:p>
+        </p:txBody>
+      </p:sp>
+    </p:spTree>
+    <p:extLst>
+      <p:ext uri="{BB962C8B-B14F-4D97-AF65-F5344CB8AC3E}">
+        <p14:creationId xmlns:p14="http://schemas.microsoft.com/office/powerpoint/2010/main" val="236382567"/>
+      </p:ext>
+    </p:extLst>
+  </p:cSld>
+  <p:clrMapOvr>
+    <a:masterClrMapping/>
+  </p:clrMapOvr>
+</p:sld>
+</file>
+
+<file path=ppt/slides/slide13.xml><?xml version="1.0" encoding="utf-8"?>
+<p:sld xmlns:a="http://schemas.openxmlformats.org/drawingml/2006/main" xmlns:r="http://schemas.openxmlformats.org/officeDocument/2006/relationships" xmlns:p="http://schemas.openxmlformats.org/presentationml/2006/main">
+  <p:cSld>
+    <p:spTree>
+      <p:nvGrpSpPr>
+        <p:cNvPr id="1" name="">
+          <a:extLst>
+            <a:ext uri="{FF2B5EF4-FFF2-40B4-BE49-F238E27FC236}">
+              <a16:creationId xmlns:a16="http://schemas.microsoft.com/office/drawing/2014/main" id="{0C52211F-D840-3878-739B-16E35221D39E}"/>
+            </a:ext>
+          </a:extLst>
+        </p:cNvPr>
+        <p:cNvGrpSpPr/>
+        <p:nvPr/>
+      </p:nvGrpSpPr>
+      <p:grpSpPr>
+        <a:xfrm>
+          <a:off x="0" y="0"/>
+          <a:ext cx="0" cy="0"/>
+          <a:chOff x="0" y="0"/>
+          <a:chExt cx="0" cy="0"/>
+        </a:xfrm>
+      </p:grpSpPr>
+      <p:sp>
+        <p:nvSpPr>
+          <p:cNvPr id="2" name="TextBox 1">
+            <a:extLst>
+              <a:ext uri="{FF2B5EF4-FFF2-40B4-BE49-F238E27FC236}">
+                <a16:creationId xmlns:a16="http://schemas.microsoft.com/office/drawing/2014/main" id="{8995A710-51E0-CE7A-E81F-72C3AEBEF811}"/>
+              </a:ext>
+            </a:extLst>
+          </p:cNvPr>
+          <p:cNvSpPr txBox="1"/>
+          <p:nvPr/>
+        </p:nvSpPr>
+        <p:spPr>
+          <a:xfrm>
+            <a:off x="3540172" y="0"/>
+            <a:ext cx="5111656" cy="523220"/>
+          </a:xfrm>
+          <a:prstGeom prst="rect">
+            <a:avLst/>
+          </a:prstGeom>
+          <a:noFill/>
+        </p:spPr>
+        <p:txBody>
+          <a:bodyPr wrap="none" rtlCol="0">
+            <a:spAutoFit/>
+          </a:bodyPr>
+          <a:lstStyle/>
+          <a:p>
+            <a:r>
+              <a:rPr lang="ru-RU" sz="2800" b="1" dirty="0">
+                <a:latin typeface="Times New Roman" panose="02020603050405020304" pitchFamily="18" charset="0"/>
+                <a:cs typeface="Times New Roman" panose="02020603050405020304" pitchFamily="18" charset="0"/>
+              </a:rPr>
+              <a:t>Результаты: смесевые данные</a:t>
+            </a:r>
+          </a:p>
+        </p:txBody>
+      </p:sp>
+      <p:sp>
+        <p:nvSpPr>
+          <p:cNvPr id="3" name="TextBox 2">
+            <a:extLst>
+              <a:ext uri="{FF2B5EF4-FFF2-40B4-BE49-F238E27FC236}">
+                <a16:creationId xmlns:a16="http://schemas.microsoft.com/office/drawing/2014/main" id="{06E52EA5-F14C-5529-A879-73D9A7899A90}"/>
+              </a:ext>
+            </a:extLst>
+          </p:cNvPr>
+          <p:cNvSpPr txBox="1"/>
+          <p:nvPr/>
+        </p:nvSpPr>
+        <p:spPr>
+          <a:xfrm>
+            <a:off x="525101" y="932507"/>
+            <a:ext cx="11416420" cy="1289071"/>
+          </a:xfrm>
+          <a:prstGeom prst="rect">
+            <a:avLst/>
+          </a:prstGeom>
+          <a:noFill/>
+        </p:spPr>
+        <p:txBody>
+          <a:bodyPr wrap="square" rtlCol="0">
+            <a:spAutoFit/>
+          </a:bodyPr>
+          <a:lstStyle/>
+          <a:p>
+            <a:pPr>
+              <a:lnSpc>
+                <a:spcPct val="150000"/>
+              </a:lnSpc>
+            </a:pPr>
+            <a:r>
+              <a:rPr lang="ru-RU" b="1" dirty="0">
+                <a:latin typeface="Times New Roman" panose="02020603050405020304" pitchFamily="18" charset="0"/>
+                <a:cs typeface="Times New Roman" panose="02020603050405020304" pitchFamily="18" charset="0"/>
+              </a:rPr>
+              <a:t>Основные наблюдения по сравнению ядерных методов:  </a:t>
+            </a:r>
+          </a:p>
+          <a:p>
+            <a:pPr marL="285750" indent="-285750">
+              <a:lnSpc>
+                <a:spcPct val="150000"/>
+              </a:lnSpc>
+              <a:buFont typeface="Arial" panose="020B0604020202020204" pitchFamily="34" charset="0"/>
+              <a:buChar char="•"/>
+            </a:pPr>
+            <a:r>
+              <a:rPr lang="ru-RU" dirty="0">
+                <a:latin typeface="Times New Roman" panose="02020603050405020304" pitchFamily="18" charset="0"/>
+                <a:cs typeface="Times New Roman" panose="02020603050405020304" pitchFamily="18" charset="0"/>
+              </a:rPr>
+              <a:t>Преимущество методов кросс-валидации перед эмпирическим правилом наблюдается по всем метрикам, кроме максимальной ошибки.</a:t>
+            </a:r>
+          </a:p>
+        </p:txBody>
+      </p:sp>
+      <p:sp>
+        <p:nvSpPr>
+          <p:cNvPr id="6" name="TextBox 5">
+            <a:extLst>
+              <a:ext uri="{FF2B5EF4-FFF2-40B4-BE49-F238E27FC236}">
+                <a16:creationId xmlns:a16="http://schemas.microsoft.com/office/drawing/2014/main" id="{AFE6FE7F-F128-49D0-1F99-DF46F2CF9BD3}"/>
+              </a:ext>
+            </a:extLst>
+          </p:cNvPr>
+          <p:cNvSpPr txBox="1"/>
+          <p:nvPr/>
+        </p:nvSpPr>
+        <p:spPr>
+          <a:xfrm>
+            <a:off x="525101" y="6228721"/>
+            <a:ext cx="11136771" cy="369332"/>
+          </a:xfrm>
+          <a:prstGeom prst="rect">
+            <a:avLst/>
+          </a:prstGeom>
+          <a:noFill/>
+        </p:spPr>
+        <p:txBody>
+          <a:bodyPr wrap="square">
+            <a:spAutoFit/>
+          </a:bodyPr>
+          <a:lstStyle/>
+          <a:p>
+            <a:r>
+              <a:rPr lang="ru-RU" sz="1800" dirty="0">
+                <a:effectLst/>
+                <a:latin typeface="Times New Roman" panose="02020603050405020304" pitchFamily="18" charset="0"/>
+                <a:ea typeface="Times New Roman" panose="02020603050405020304" pitchFamily="18" charset="0"/>
+              </a:rPr>
+              <a:t>Рис. 4. Сравнение методов ядерного сглаживания по </a:t>
+            </a:r>
+            <a:r>
+              <a:rPr lang="en-US" sz="1800" dirty="0">
+                <a:effectLst/>
+                <a:latin typeface="Times New Roman" panose="02020603050405020304" pitchFamily="18" charset="0"/>
+                <a:ea typeface="Times New Roman" panose="02020603050405020304" pitchFamily="18" charset="0"/>
+              </a:rPr>
+              <a:t>IMSE</a:t>
+            </a:r>
+            <a:r>
+              <a:rPr lang="ru-RU" sz="1800" dirty="0">
+                <a:effectLst/>
+                <a:latin typeface="Times New Roman" panose="02020603050405020304" pitchFamily="18" charset="0"/>
+                <a:ea typeface="Times New Roman" panose="02020603050405020304" pitchFamily="18" charset="0"/>
+              </a:rPr>
+              <a:t> на смесевых данных после очистки от выбросов</a:t>
+            </a:r>
+            <a:endParaRPr lang="ru-RU" dirty="0"/>
+          </a:p>
+        </p:txBody>
+      </p:sp>
+      <p:pic>
+        <p:nvPicPr>
+          <p:cNvPr id="8" name="Рисунок 7">
+            <a:extLst>
+              <a:ext uri="{FF2B5EF4-FFF2-40B4-BE49-F238E27FC236}">
+                <a16:creationId xmlns:a16="http://schemas.microsoft.com/office/drawing/2014/main" id="{E582F3F2-1895-4183-A0CE-186182ED5A61}"/>
+              </a:ext>
+            </a:extLst>
+          </p:cNvPr>
+          <p:cNvPicPr/>
+          <p:nvPr/>
+        </p:nvPicPr>
+        <p:blipFill>
+          <a:blip r:embed="rId2"/>
+          <a:stretch>
+            <a:fillRect/>
+          </a:stretch>
+        </p:blipFill>
+        <p:spPr>
+          <a:xfrm>
+            <a:off x="525101" y="2449262"/>
+            <a:ext cx="11136772" cy="3648830"/>
+          </a:xfrm>
+          <a:prstGeom prst="rect">
+            <a:avLst/>
+          </a:prstGeom>
+        </p:spPr>
+      </p:pic>
+    </p:spTree>
+    <p:extLst>
+      <p:ext uri="{BB962C8B-B14F-4D97-AF65-F5344CB8AC3E}">
+        <p14:creationId xmlns:p14="http://schemas.microsoft.com/office/powerpoint/2010/main" val="1294266524"/>
+      </p:ext>
+    </p:extLst>
+  </p:cSld>
+  <p:clrMapOvr>
+    <a:masterClrMapping/>
+  </p:clrMapOvr>
+</p:sld>
+</file>
+
+<file path=ppt/slides/slide14.xml><?xml version="1.0" encoding="utf-8"?>
+<p:sld xmlns:a="http://schemas.openxmlformats.org/drawingml/2006/main" xmlns:r="http://schemas.openxmlformats.org/officeDocument/2006/relationships" xmlns:p="http://schemas.openxmlformats.org/presentationml/2006/main">
+  <p:cSld>
+    <p:spTree>
+      <p:nvGrpSpPr>
+        <p:cNvPr id="1" name="">
+          <a:extLst>
+            <a:ext uri="{FF2B5EF4-FFF2-40B4-BE49-F238E27FC236}">
+              <a16:creationId xmlns:a16="http://schemas.microsoft.com/office/drawing/2014/main" id="{0C52211F-D840-3878-739B-16E35221D39E}"/>
+            </a:ext>
+          </a:extLst>
+        </p:cNvPr>
+        <p:cNvGrpSpPr/>
+        <p:nvPr/>
+      </p:nvGrpSpPr>
+      <p:grpSpPr>
+        <a:xfrm>
+          <a:off x="0" y="0"/>
+          <a:ext cx="0" cy="0"/>
+          <a:chOff x="0" y="0"/>
+          <a:chExt cx="0" cy="0"/>
+        </a:xfrm>
+      </p:grpSpPr>
+      <mc:AlternateContent xmlns:mc="http://schemas.openxmlformats.org/markup-compatibility/2006" xmlns:a14="http://schemas.microsoft.com/office/drawing/2010/main">
+        <mc:Choice Requires="a14">
+          <p:sp>
+            <p:nvSpPr>
+              <p:cNvPr id="3" name="TextBox 2">
+                <a:extLst>
+                  <a:ext uri="{FF2B5EF4-FFF2-40B4-BE49-F238E27FC236}">
+                    <a16:creationId xmlns:a16="http://schemas.microsoft.com/office/drawing/2014/main" id="{06E52EA5-F14C-5529-A879-73D9A7899A90}"/>
+                  </a:ext>
+                </a:extLst>
+              </p:cNvPr>
+              <p:cNvSpPr txBox="1"/>
+              <p:nvPr/>
+            </p:nvSpPr>
+            <p:spPr>
+              <a:xfrm>
+                <a:off x="525098" y="730490"/>
+                <a:ext cx="11416420" cy="2120068"/>
+              </a:xfrm>
+              <a:prstGeom prst="rect">
+                <a:avLst/>
+              </a:prstGeom>
+              <a:noFill/>
+            </p:spPr>
+            <p:txBody>
+              <a:bodyPr wrap="square" rtlCol="0">
+                <a:spAutoFit/>
+              </a:bodyPr>
+              <a:lstStyle/>
+              <a:p>
+                <a:pPr>
+                  <a:lnSpc>
+                    <a:spcPct val="150000"/>
+                  </a:lnSpc>
+                </a:pPr>
+                <a:r>
+                  <a:rPr lang="ru-RU" b="1" dirty="0">
+                    <a:latin typeface="Times New Roman" panose="02020603050405020304" pitchFamily="18" charset="0"/>
+                    <a:cs typeface="Times New Roman" panose="02020603050405020304" pitchFamily="18" charset="0"/>
+                  </a:rPr>
+                  <a:t>Основные наблюдения:  </a:t>
+                </a:r>
+              </a:p>
+              <a:p>
+                <a:pPr marL="285750" indent="-285750">
+                  <a:lnSpc>
+                    <a:spcPct val="150000"/>
+                  </a:lnSpc>
+                  <a:buFont typeface="Arial" panose="020B0604020202020204" pitchFamily="34" charset="0"/>
+                  <a:buChar char="•"/>
+                </a:pPr>
+                <a:r>
+                  <a:rPr lang="ru-RU" dirty="0">
+                    <a:latin typeface="Times New Roman" panose="02020603050405020304" pitchFamily="18" charset="0"/>
+                    <a:cs typeface="Times New Roman" panose="02020603050405020304" pitchFamily="18" charset="0"/>
+                  </a:rPr>
+                  <a:t>Энтропийный метод демонстрирует сильное преимущество во всех конфигурациях по всем метрикам;</a:t>
+                </a:r>
+              </a:p>
+              <a:p>
+                <a:pPr marL="285750" indent="-285750">
+                  <a:lnSpc>
+                    <a:spcPct val="150000"/>
+                  </a:lnSpc>
+                  <a:buFont typeface="Arial" panose="020B0604020202020204" pitchFamily="34" charset="0"/>
+                  <a:buChar char="•"/>
+                </a:pPr>
+                <a:r>
+                  <a:rPr lang="ru-RU" sz="1800" dirty="0">
+                    <a:effectLst/>
+                    <a:latin typeface="Times New Roman" panose="02020603050405020304" pitchFamily="18" charset="0"/>
+                    <a:ea typeface="Calibri" panose="020F0502020204030204" pitchFamily="34" charset="0"/>
+                  </a:rPr>
+                  <a:t>Все различия значимы на уровне 0,1% как до, так и после очистки от выбросов;</a:t>
+                </a:r>
+                <a:endParaRPr lang="ru-RU" sz="1800" dirty="0">
+                  <a:effectLst/>
+                  <a:latin typeface="Times New Roman" panose="02020603050405020304" pitchFamily="18" charset="0"/>
+                  <a:ea typeface="Calibri" panose="020F0502020204030204" pitchFamily="34" charset="0"/>
+                  <a:cs typeface="Times New Roman" panose="02020603050405020304" pitchFamily="18" charset="0"/>
+                </a:endParaRPr>
+              </a:p>
+              <a:p>
+                <a:pPr marL="285750" indent="-285750">
+                  <a:lnSpc>
+                    <a:spcPct val="150000"/>
+                  </a:lnSpc>
+                  <a:buFont typeface="Arial" panose="020B0604020202020204" pitchFamily="34" charset="0"/>
+                  <a:buChar char="•"/>
+                </a:pPr>
+                <a:r>
+                  <a:rPr lang="ru-RU" dirty="0">
+                    <a:latin typeface="Times New Roman" panose="02020603050405020304" pitchFamily="18" charset="0"/>
+                    <a:ea typeface="Calibri" panose="020F0502020204030204" pitchFamily="34" charset="0"/>
+                    <a:cs typeface="Times New Roman" panose="02020603050405020304" pitchFamily="18" charset="0"/>
+                  </a:rPr>
+                  <a:t>Размер эффекта (</a:t>
+                </a:r>
+                <a:r>
+                  <a:rPr lang="en-US" sz="1800" dirty="0">
+                    <a:effectLst/>
+                    <a:latin typeface="Times New Roman" panose="02020603050405020304" pitchFamily="18" charset="0"/>
+                    <a:ea typeface="Calibri" panose="020F0502020204030204" pitchFamily="34" charset="0"/>
+                  </a:rPr>
+                  <a:t>rank-</a:t>
+                </a:r>
+                <a:r>
+                  <a:rPr lang="en-US" sz="1800" dirty="0" err="1">
+                    <a:effectLst/>
+                    <a:latin typeface="Times New Roman" panose="02020603050405020304" pitchFamily="18" charset="0"/>
+                    <a:ea typeface="Calibri" panose="020F0502020204030204" pitchFamily="34" charset="0"/>
+                  </a:rPr>
+                  <a:t>biseral</a:t>
+                </a:r>
+                <a:r>
+                  <a:rPr lang="ru-RU" sz="1800" dirty="0">
+                    <a:effectLst/>
+                    <a:latin typeface="Times New Roman" panose="02020603050405020304" pitchFamily="18" charset="0"/>
+                    <a:ea typeface="Calibri" panose="020F0502020204030204" pitchFamily="34" charset="0"/>
+                  </a:rPr>
+                  <a:t>) большой во всех случаях </a:t>
+                </a:r>
+                <a14:m>
+                  <m:oMath xmlns:m="http://schemas.openxmlformats.org/officeDocument/2006/math">
+                    <m:r>
+                      <a:rPr lang="ru-RU" sz="1800" i="1" smtClean="0">
+                        <a:effectLst/>
+                        <a:latin typeface="Cambria Math" panose="02040503050406030204" pitchFamily="18" charset="0"/>
+                        <a:ea typeface="Calibri" panose="020F0502020204030204" pitchFamily="34" charset="0"/>
+                        <a:cs typeface="Times New Roman" panose="02020603050405020304" pitchFamily="18" charset="0"/>
+                      </a:rPr>
+                      <m:t>𝑟</m:t>
+                    </m:r>
+                    <m:r>
+                      <a:rPr lang="en-US" sz="1800" b="0" i="1" smtClean="0">
+                        <a:effectLst/>
+                        <a:latin typeface="Cambria Math" panose="02040503050406030204" pitchFamily="18" charset="0"/>
+                        <a:ea typeface="Calibri" panose="020F0502020204030204" pitchFamily="34" charset="0"/>
+                        <a:cs typeface="Times New Roman" panose="02020603050405020304" pitchFamily="18" charset="0"/>
+                      </a:rPr>
+                      <m:t>&gt;0</m:t>
+                    </m:r>
+                    <m:r>
+                      <a:rPr lang="ru-RU" sz="1800" b="0" i="1" smtClean="0">
+                        <a:effectLst/>
+                        <a:latin typeface="Cambria Math" panose="02040503050406030204" pitchFamily="18" charset="0"/>
+                        <a:ea typeface="Calibri" panose="020F0502020204030204" pitchFamily="34" charset="0"/>
+                        <a:cs typeface="Times New Roman" panose="02020603050405020304" pitchFamily="18" charset="0"/>
+                      </a:rPr>
+                      <m:t>,</m:t>
+                    </m:r>
+                    <m:r>
+                      <a:rPr lang="en-US" sz="1800" b="0" i="1" smtClean="0">
+                        <a:effectLst/>
+                        <a:latin typeface="Cambria Math" panose="02040503050406030204" pitchFamily="18" charset="0"/>
+                        <a:ea typeface="Calibri" panose="020F0502020204030204" pitchFamily="34" charset="0"/>
+                        <a:cs typeface="Times New Roman" panose="02020603050405020304" pitchFamily="18" charset="0"/>
+                      </a:rPr>
+                      <m:t>5</m:t>
+                    </m:r>
+                  </m:oMath>
+                </a14:m>
+                <a:r>
+                  <a:rPr lang="en-US" dirty="0">
+                    <a:latin typeface="Times New Roman" panose="02020603050405020304" pitchFamily="18" charset="0"/>
+                    <a:cs typeface="Times New Roman" panose="02020603050405020304" pitchFamily="18" charset="0"/>
+                  </a:rPr>
+                  <a:t>. </a:t>
+                </a:r>
+                <a:r>
+                  <a:rPr lang="ru-RU" dirty="0">
+                    <a:latin typeface="Times New Roman" panose="02020603050405020304" pitchFamily="18" charset="0"/>
+                    <a:cs typeface="Times New Roman" panose="02020603050405020304" pitchFamily="18" charset="0"/>
+                  </a:rPr>
+                  <a:t>После очистки достигает </a:t>
+                </a:r>
+                <a14:m>
+                  <m:oMath xmlns:m="http://schemas.openxmlformats.org/officeDocument/2006/math">
+                    <m:r>
+                      <a:rPr lang="ru-RU" i="1" dirty="0" smtClean="0">
+                        <a:latin typeface="Cambria Math" panose="02040503050406030204" pitchFamily="18" charset="0"/>
+                        <a:cs typeface="Times New Roman" panose="02020603050405020304" pitchFamily="18" charset="0"/>
+                      </a:rPr>
+                      <m:t>0,86</m:t>
+                    </m:r>
+                  </m:oMath>
+                </a14:m>
+                <a:r>
+                  <a:rPr lang="ru-RU" dirty="0">
+                    <a:cs typeface="Times New Roman" panose="02020603050405020304" pitchFamily="18" charset="0"/>
+                  </a:rPr>
+                  <a:t>-</a:t>
+                </a:r>
+                <a14:m>
+                  <m:oMath xmlns:m="http://schemas.openxmlformats.org/officeDocument/2006/math">
+                    <m:r>
+                      <a:rPr lang="ru-RU" i="1" dirty="0" smtClean="0">
+                        <a:latin typeface="Cambria Math" panose="02040503050406030204" pitchFamily="18" charset="0"/>
+                        <a:cs typeface="Times New Roman" panose="02020603050405020304" pitchFamily="18" charset="0"/>
+                      </a:rPr>
+                      <m:t>0,87</m:t>
+                    </m:r>
+                  </m:oMath>
+                </a14:m>
+                <a:r>
+                  <a:rPr lang="ru-RU" dirty="0">
+                    <a:latin typeface="Times New Roman" panose="02020603050405020304" pitchFamily="18" charset="0"/>
+                    <a:cs typeface="Times New Roman" panose="02020603050405020304" pitchFamily="18" charset="0"/>
+                  </a:rPr>
+                  <a:t>;</a:t>
+                </a:r>
+              </a:p>
+              <a:p>
+                <a:pPr marL="285750" indent="-285750">
+                  <a:lnSpc>
+                    <a:spcPct val="150000"/>
+                  </a:lnSpc>
+                  <a:buFont typeface="Arial" panose="020B0604020202020204" pitchFamily="34" charset="0"/>
+                  <a:buChar char="•"/>
+                </a:pPr>
+                <a:r>
+                  <a:rPr lang="ru-RU" dirty="0">
+                    <a:latin typeface="Times New Roman" panose="02020603050405020304" pitchFamily="18" charset="0"/>
+                    <a:cs typeface="Times New Roman" panose="02020603050405020304" pitchFamily="18" charset="0"/>
+                  </a:rPr>
+                  <a:t>Среднее улучшение по </a:t>
+                </a:r>
+                <a:r>
+                  <a:rPr lang="en-US" dirty="0">
+                    <a:latin typeface="Times New Roman" panose="02020603050405020304" pitchFamily="18" charset="0"/>
+                    <a:cs typeface="Times New Roman" panose="02020603050405020304" pitchFamily="18" charset="0"/>
+                  </a:rPr>
+                  <a:t>IMSE </a:t>
+                </a:r>
+                <a14:m>
+                  <m:oMath xmlns:m="http://schemas.openxmlformats.org/officeDocument/2006/math">
+                    <m:r>
+                      <a:rPr lang="en-US" b="0" i="1" smtClean="0">
+                        <a:latin typeface="Cambria Math" panose="02040503050406030204" pitchFamily="18" charset="0"/>
+                        <a:cs typeface="Times New Roman" panose="02020603050405020304" pitchFamily="18" charset="0"/>
+                      </a:rPr>
+                      <m:t>95,9%</m:t>
+                    </m:r>
+                  </m:oMath>
+                </a14:m>
+                <a:r>
+                  <a:rPr lang="ru-RU" dirty="0">
+                    <a:latin typeface="Times New Roman" panose="02020603050405020304" pitchFamily="18" charset="0"/>
+                    <a:cs typeface="Times New Roman" panose="02020603050405020304" pitchFamily="18" charset="0"/>
+                  </a:rPr>
+                  <a:t>.</a:t>
+                </a:r>
+              </a:p>
+            </p:txBody>
+          </p:sp>
+        </mc:Choice>
+        <mc:Fallback xmlns="">
+          <p:sp>
+            <p:nvSpPr>
+              <p:cNvPr id="3" name="TextBox 2">
+                <a:extLst>
+                  <a:ext uri="{FF2B5EF4-FFF2-40B4-BE49-F238E27FC236}">
+                    <a16:creationId xmlns:a16="http://schemas.microsoft.com/office/drawing/2014/main" id="{06E52EA5-F14C-5529-A879-73D9A7899A90}"/>
+                  </a:ext>
+                </a:extLst>
+              </p:cNvPr>
+              <p:cNvSpPr txBox="1">
+                <a:spLocks noRot="1" noChangeAspect="1" noMove="1" noResize="1" noEditPoints="1" noAdjustHandles="1" noChangeArrowheads="1" noChangeShapeType="1" noTextEdit="1"/>
+              </p:cNvSpPr>
+              <p:nvPr/>
+            </p:nvSpPr>
+            <p:spPr>
+              <a:xfrm>
+                <a:off x="525098" y="730490"/>
+                <a:ext cx="11416420" cy="2120068"/>
+              </a:xfrm>
+              <a:prstGeom prst="rect">
+                <a:avLst/>
+              </a:prstGeom>
+              <a:blipFill>
+                <a:blip r:embed="rId2"/>
+                <a:stretch>
+                  <a:fillRect l="-427" b="-3736"/>
+                </a:stretch>
+              </a:blipFill>
+            </p:spPr>
+            <p:txBody>
+              <a:bodyPr/>
+              <a:lstStyle/>
+              <a:p>
+                <a:r>
+                  <a:rPr lang="ru-RU">
+                    <a:noFill/>
+                  </a:rPr>
+                  <a:t> </a:t>
+                </a:r>
+              </a:p>
+            </p:txBody>
+          </p:sp>
+        </mc:Fallback>
+      </mc:AlternateContent>
+      <p:sp>
+        <p:nvSpPr>
+          <p:cNvPr id="6" name="TextBox 5">
+            <a:extLst>
+              <a:ext uri="{FF2B5EF4-FFF2-40B4-BE49-F238E27FC236}">
+                <a16:creationId xmlns:a16="http://schemas.microsoft.com/office/drawing/2014/main" id="{AFE6FE7F-F128-49D0-1F99-DF46F2CF9BD3}"/>
+              </a:ext>
+            </a:extLst>
+          </p:cNvPr>
+          <p:cNvSpPr txBox="1"/>
+          <p:nvPr/>
+        </p:nvSpPr>
+        <p:spPr>
+          <a:xfrm>
+            <a:off x="525097" y="6304110"/>
+            <a:ext cx="11302725" cy="369332"/>
+          </a:xfrm>
+          <a:prstGeom prst="rect">
+            <a:avLst/>
+          </a:prstGeom>
+          <a:noFill/>
+        </p:spPr>
+        <p:txBody>
+          <a:bodyPr wrap="square">
+            <a:spAutoFit/>
+          </a:bodyPr>
+          <a:lstStyle/>
+          <a:p>
+            <a:pPr algn="ctr"/>
+            <a:r>
+              <a:rPr lang="ru-RU" sz="1800" dirty="0">
+                <a:effectLst/>
+                <a:latin typeface="Times New Roman" panose="02020603050405020304" pitchFamily="18" charset="0"/>
+                <a:ea typeface="Times New Roman" panose="02020603050405020304" pitchFamily="18" charset="0"/>
+              </a:rPr>
+              <a:t>Рис. 5. Сравнение лучших оценок ядерного и энтропийного подходов по </a:t>
+            </a:r>
+            <a:r>
+              <a:rPr lang="en-US" sz="1800" dirty="0">
+                <a:effectLst/>
+                <a:latin typeface="Times New Roman" panose="02020603050405020304" pitchFamily="18" charset="0"/>
+                <a:ea typeface="Times New Roman" panose="02020603050405020304" pitchFamily="18" charset="0"/>
+              </a:rPr>
+              <a:t>IMSE</a:t>
+            </a:r>
+            <a:r>
+              <a:rPr lang="ru-RU" sz="1800" dirty="0">
+                <a:effectLst/>
+                <a:latin typeface="Times New Roman" panose="02020603050405020304" pitchFamily="18" charset="0"/>
+                <a:ea typeface="Times New Roman" panose="02020603050405020304" pitchFamily="18" charset="0"/>
+              </a:rPr>
+              <a:t> на смесевых данных</a:t>
+            </a:r>
+            <a:endParaRPr lang="ru-RU" dirty="0"/>
+          </a:p>
+        </p:txBody>
+      </p:sp>
+      <p:sp>
+        <p:nvSpPr>
+          <p:cNvPr id="8" name="TextBox 7">
+            <a:extLst>
+              <a:ext uri="{FF2B5EF4-FFF2-40B4-BE49-F238E27FC236}">
+                <a16:creationId xmlns:a16="http://schemas.microsoft.com/office/drawing/2014/main" id="{8728353B-CDBF-4943-B93E-8C7A426BB39D}"/>
+              </a:ext>
+            </a:extLst>
+          </p:cNvPr>
+          <p:cNvSpPr txBox="1"/>
+          <p:nvPr/>
+        </p:nvSpPr>
+        <p:spPr>
+          <a:xfrm>
+            <a:off x="3030444" y="0"/>
+            <a:ext cx="5086008" cy="523220"/>
+          </a:xfrm>
+          <a:prstGeom prst="rect">
+            <a:avLst/>
+          </a:prstGeom>
+          <a:noFill/>
+        </p:spPr>
+        <p:txBody>
+          <a:bodyPr wrap="none" rtlCol="0">
+            <a:spAutoFit/>
+          </a:bodyPr>
+          <a:lstStyle/>
+          <a:p>
+            <a:r>
+              <a:rPr lang="ru-RU" sz="2800" b="1" dirty="0">
+                <a:latin typeface="Times New Roman" panose="02020603050405020304" pitchFamily="18" charset="0"/>
+                <a:cs typeface="Times New Roman" panose="02020603050405020304" pitchFamily="18" charset="0"/>
+              </a:rPr>
+              <a:t>Результаты: смесевые данные</a:t>
+            </a:r>
+          </a:p>
+        </p:txBody>
+      </p:sp>
+      <p:pic>
+        <p:nvPicPr>
+          <p:cNvPr id="9" name="Рисунок 8">
+            <a:extLst>
+              <a:ext uri="{FF2B5EF4-FFF2-40B4-BE49-F238E27FC236}">
+                <a16:creationId xmlns:a16="http://schemas.microsoft.com/office/drawing/2014/main" id="{5C0F1C16-0002-4222-B891-07BAC41C30B0}"/>
+              </a:ext>
+            </a:extLst>
+          </p:cNvPr>
+          <p:cNvPicPr/>
+          <p:nvPr/>
+        </p:nvPicPr>
+        <p:blipFill>
+          <a:blip r:embed="rId3"/>
+          <a:stretch>
+            <a:fillRect/>
+          </a:stretch>
+        </p:blipFill>
+        <p:spPr>
+          <a:xfrm>
+            <a:off x="525097" y="3057828"/>
+            <a:ext cx="11302725" cy="3188593"/>
+          </a:xfrm>
+          <a:prstGeom prst="rect">
+            <a:avLst/>
+          </a:prstGeom>
+        </p:spPr>
+      </p:pic>
+    </p:spTree>
+    <p:extLst>
+      <p:ext uri="{BB962C8B-B14F-4D97-AF65-F5344CB8AC3E}">
+        <p14:creationId xmlns:p14="http://schemas.microsoft.com/office/powerpoint/2010/main" val="474091416"/>
+      </p:ext>
+    </p:extLst>
+  </p:cSld>
+  <p:clrMapOvr>
+    <a:masterClrMapping/>
+  </p:clrMapOvr>
+</p:sld>
+</file>
+
+<file path=ppt/slides/slide15.xml><?xml version="1.0" encoding="utf-8"?>
+<p:sld xmlns:a="http://schemas.openxmlformats.org/drawingml/2006/main" xmlns:r="http://schemas.openxmlformats.org/officeDocument/2006/relationships" xmlns:p="http://schemas.openxmlformats.org/presentationml/2006/main">
+  <p:cSld>
+    <p:spTree>
+      <p:nvGrpSpPr>
+        <p:cNvPr id="1" name="">
+          <a:extLst>
+            <a:ext uri="{FF2B5EF4-FFF2-40B4-BE49-F238E27FC236}">
+              <a16:creationId xmlns:a16="http://schemas.microsoft.com/office/drawing/2014/main" id="{0C52211F-D840-3878-739B-16E35221D39E}"/>
+            </a:ext>
+          </a:extLst>
+        </p:cNvPr>
+        <p:cNvGrpSpPr/>
+        <p:nvPr/>
+      </p:nvGrpSpPr>
+      <p:grpSpPr>
+        <a:xfrm>
+          <a:off x="0" y="0"/>
+          <a:ext cx="0" cy="0"/>
+          <a:chOff x="0" y="0"/>
+          <a:chExt cx="0" cy="0"/>
+        </a:xfrm>
+      </p:grpSpPr>
+      <p:sp>
+        <p:nvSpPr>
+          <p:cNvPr id="3" name="TextBox 2">
+            <a:extLst>
+              <a:ext uri="{FF2B5EF4-FFF2-40B4-BE49-F238E27FC236}">
+                <a16:creationId xmlns:a16="http://schemas.microsoft.com/office/drawing/2014/main" id="{06E52EA5-F14C-5529-A879-73D9A7899A90}"/>
+              </a:ext>
+            </a:extLst>
+          </p:cNvPr>
+          <p:cNvSpPr txBox="1"/>
+          <p:nvPr/>
+        </p:nvSpPr>
+        <p:spPr>
+          <a:xfrm>
+            <a:off x="387790" y="5444394"/>
+            <a:ext cx="11416420" cy="873572"/>
+          </a:xfrm>
+          <a:prstGeom prst="rect">
+            <a:avLst/>
+          </a:prstGeom>
+          <a:noFill/>
+        </p:spPr>
+        <p:txBody>
+          <a:bodyPr wrap="square" rtlCol="0">
+            <a:spAutoFit/>
+          </a:bodyPr>
+          <a:lstStyle/>
+          <a:p>
+            <a:pPr>
+              <a:lnSpc>
+                <a:spcPct val="150000"/>
+              </a:lnSpc>
+            </a:pPr>
+            <a:r>
+              <a:rPr lang="ru-RU" b="1" dirty="0">
+                <a:latin typeface="Times New Roman" panose="02020603050405020304" pitchFamily="18" charset="0"/>
+                <a:cs typeface="Times New Roman" panose="02020603050405020304" pitchFamily="18" charset="0"/>
+              </a:rPr>
+              <a:t>Основные наблюдения:  </a:t>
+            </a:r>
+          </a:p>
+          <a:p>
+            <a:pPr marL="285750" indent="-285750">
+              <a:lnSpc>
+                <a:spcPct val="150000"/>
+              </a:lnSpc>
+              <a:buFont typeface="Arial" panose="020B0604020202020204" pitchFamily="34" charset="0"/>
+              <a:buChar char="•"/>
+            </a:pPr>
+            <a:r>
+              <a:rPr lang="ru-RU" dirty="0">
+                <a:latin typeface="Times New Roman" panose="02020603050405020304" pitchFamily="18" charset="0"/>
+                <a:cs typeface="Times New Roman" panose="02020603050405020304" pitchFamily="18" charset="0"/>
+              </a:rPr>
+              <a:t> ядерные методы показали чуть лучшие значения метрик (разница 3–4%);</a:t>
+            </a:r>
+          </a:p>
+        </p:txBody>
+      </p:sp>
+      <p:sp>
+        <p:nvSpPr>
+          <p:cNvPr id="8" name="TextBox 7">
+            <a:extLst>
+              <a:ext uri="{FF2B5EF4-FFF2-40B4-BE49-F238E27FC236}">
+                <a16:creationId xmlns:a16="http://schemas.microsoft.com/office/drawing/2014/main" id="{8728353B-CDBF-4943-B93E-8C7A426BB39D}"/>
+              </a:ext>
+            </a:extLst>
+          </p:cNvPr>
+          <p:cNvSpPr txBox="1"/>
+          <p:nvPr/>
+        </p:nvSpPr>
+        <p:spPr>
+          <a:xfrm>
+            <a:off x="3524527" y="0"/>
+            <a:ext cx="5142946" cy="523220"/>
+          </a:xfrm>
+          <a:prstGeom prst="rect">
+            <a:avLst/>
+          </a:prstGeom>
+          <a:noFill/>
+        </p:spPr>
+        <p:txBody>
+          <a:bodyPr wrap="none" rtlCol="0">
+            <a:spAutoFit/>
+          </a:bodyPr>
+          <a:lstStyle/>
+          <a:p>
+            <a:r>
+              <a:rPr lang="ru-RU" sz="2800" b="1" dirty="0">
+                <a:latin typeface="Times New Roman" panose="02020603050405020304" pitchFamily="18" charset="0"/>
+                <a:cs typeface="Times New Roman" panose="02020603050405020304" pitchFamily="18" charset="0"/>
+              </a:rPr>
+              <a:t>Результаты: реальные данные</a:t>
+            </a:r>
+          </a:p>
+        </p:txBody>
+      </p:sp>
+      <mc:AlternateContent xmlns:mc="http://schemas.openxmlformats.org/markup-compatibility/2006">
+        <mc:Choice xmlns:a14="http://schemas.microsoft.com/office/drawing/2010/main" Requires="a14">
+          <p:graphicFrame>
+            <p:nvGraphicFramePr>
+              <p:cNvPr id="2" name="Таблица 3">
+                <a:extLst>
+                  <a:ext uri="{FF2B5EF4-FFF2-40B4-BE49-F238E27FC236}">
+                    <a16:creationId xmlns:a16="http://schemas.microsoft.com/office/drawing/2014/main" id="{4173D68B-D144-4F2D-AD35-008D4CDE9DD9}"/>
+                  </a:ext>
+                </a:extLst>
+              </p:cNvPr>
+              <p:cNvGraphicFramePr>
+                <a:graphicFrameLocks noGrp="1"/>
+              </p:cNvGraphicFramePr>
+              <p:nvPr>
+                <p:extLst>
+                  <p:ext uri="{D42A27DB-BD31-4B8C-83A1-F6EECF244321}">
+                    <p14:modId xmlns:p14="http://schemas.microsoft.com/office/powerpoint/2010/main" val="377333928"/>
+                  </p:ext>
+                </p:extLst>
+              </p:nvPr>
+            </p:nvGraphicFramePr>
+            <p:xfrm>
+              <a:off x="601354" y="1128760"/>
+              <a:ext cx="10989292" cy="4125465"/>
+            </p:xfrm>
+            <a:graphic>
+              <a:graphicData uri="http://schemas.openxmlformats.org/drawingml/2006/table">
+                <a:tbl>
+                  <a:tblPr firstRow="1" bandRow="1">
+                    <a:tableStyleId>{21E4AEA4-8DFA-4A89-87EB-49C32662AFE0}</a:tableStyleId>
+                  </a:tblPr>
+                  <a:tblGrid>
+                    <a:gridCol w="2747323">
+                      <a:extLst>
+                        <a:ext uri="{9D8B030D-6E8A-4147-A177-3AD203B41FA5}">
+                          <a16:colId xmlns:a16="http://schemas.microsoft.com/office/drawing/2014/main" val="2582575054"/>
+                        </a:ext>
+                      </a:extLst>
+                    </a:gridCol>
+                    <a:gridCol w="2747323">
+                      <a:extLst>
+                        <a:ext uri="{9D8B030D-6E8A-4147-A177-3AD203B41FA5}">
+                          <a16:colId xmlns:a16="http://schemas.microsoft.com/office/drawing/2014/main" val="2884779805"/>
+                        </a:ext>
+                      </a:extLst>
+                    </a:gridCol>
+                    <a:gridCol w="2747323">
+                      <a:extLst>
+                        <a:ext uri="{9D8B030D-6E8A-4147-A177-3AD203B41FA5}">
+                          <a16:colId xmlns:a16="http://schemas.microsoft.com/office/drawing/2014/main" val="3311561349"/>
+                        </a:ext>
+                      </a:extLst>
+                    </a:gridCol>
+                    <a:gridCol w="2747323">
+                      <a:extLst>
+                        <a:ext uri="{9D8B030D-6E8A-4147-A177-3AD203B41FA5}">
+                          <a16:colId xmlns:a16="http://schemas.microsoft.com/office/drawing/2014/main" val="780616856"/>
+                        </a:ext>
+                      </a:extLst>
+                    </a:gridCol>
+                  </a:tblGrid>
+                  <a:tr h="825093">
+                    <a:tc>
+                      <a:txBody>
+                        <a:bodyPr/>
+                        <a:lstStyle/>
+                        <a:p>
+                          <a:pPr indent="450215" algn="ctr">
+                            <a:lnSpc>
+                              <a:spcPct val="150000"/>
+                            </a:lnSpc>
+                            <a:spcAft>
+                              <a:spcPts val="800"/>
+                            </a:spcAft>
+                          </a:pPr>
+                          <a:r>
+                            <a:rPr lang="en-US" sz="1400" b="1" dirty="0">
+                              <a:solidFill>
+                                <a:schemeClr val="tx1"/>
+                              </a:solidFill>
+                              <a:effectLst/>
+                              <a:latin typeface="Times New Roman" panose="02020603050405020304" pitchFamily="18" charset="0"/>
+                              <a:ea typeface="Calibri" panose="020F0502020204030204" pitchFamily="34" charset="0"/>
+                              <a:cs typeface="Times New Roman" panose="02020603050405020304" pitchFamily="18" charset="0"/>
+                            </a:rPr>
+                            <a:t>Method</a:t>
+                          </a:r>
+                          <a:endParaRPr lang="ru-RU" sz="1400" b="1" dirty="0">
+                            <a:solidFill>
+                              <a:schemeClr val="tx1"/>
+                            </a:solidFill>
+                            <a:effectLst/>
+                            <a:latin typeface="Times New Roman" panose="02020603050405020304" pitchFamily="18" charset="0"/>
+                            <a:ea typeface="Calibri" panose="020F0502020204030204" pitchFamily="34" charset="0"/>
+                            <a:cs typeface="Times New Roman" panose="02020603050405020304" pitchFamily="18" charset="0"/>
+                          </a:endParaRPr>
+                        </a:p>
+                      </a:txBody>
+                      <a:tcPr marL="68580" marR="68580" marT="0" marB="0" anchor="ctr"/>
+                    </a:tc>
+                    <a:tc>
+                      <a:txBody>
+                        <a:bodyPr/>
+                        <a:lstStyle/>
+                        <a:p>
+                          <a:pPr indent="450215" algn="ctr">
+                            <a:lnSpc>
+                              <a:spcPct val="150000"/>
+                            </a:lnSpc>
+                            <a:spcAft>
+                              <a:spcPts val="800"/>
+                            </a:spcAft>
+                          </a:pPr>
+                          <a14:m>
+                            <m:oMathPara xmlns:m="http://schemas.openxmlformats.org/officeDocument/2006/math">
+                              <m:oMathParaPr>
+                                <m:jc m:val="centerGroup"/>
+                              </m:oMathParaPr>
+                              <m:oMath xmlns:m="http://schemas.openxmlformats.org/officeDocument/2006/math">
+                                <m:r>
+                                  <a:rPr lang="en-US" sz="1400" b="1" i="1" smtClean="0">
+                                    <a:solidFill>
+                                      <a:schemeClr val="tx1"/>
+                                    </a:solidFill>
+                                    <a:effectLst/>
+                                    <a:latin typeface="Cambria Math" panose="02040503050406030204" pitchFamily="18" charset="0"/>
+                                    <a:ea typeface="Calibri" panose="020F0502020204030204" pitchFamily="34" charset="0"/>
+                                    <a:cs typeface="Times New Roman" panose="02020603050405020304" pitchFamily="18" charset="0"/>
+                                  </a:rPr>
+                                  <m:t>𝑹𝑴𝑺</m:t>
+                                </m:r>
+                                <m:sSub>
+                                  <m:sSubPr>
+                                    <m:ctrlPr>
+                                      <a:rPr lang="ru-RU" sz="1400" b="1" i="1">
+                                        <a:solidFill>
+                                          <a:schemeClr val="tx1"/>
+                                        </a:solidFill>
+                                        <a:effectLst/>
+                                        <a:latin typeface="Cambria Math" panose="02040503050406030204" pitchFamily="18" charset="0"/>
+                                        <a:ea typeface="Calibri" panose="020F0502020204030204" pitchFamily="34" charset="0"/>
+                                        <a:cs typeface="Times New Roman" panose="02020603050405020304" pitchFamily="18" charset="0"/>
+                                      </a:rPr>
+                                    </m:ctrlPr>
+                                  </m:sSubPr>
+                                  <m:e>
+                                    <m:r>
+                                      <a:rPr lang="en-US" sz="1400" b="1" i="1">
+                                        <a:solidFill>
+                                          <a:schemeClr val="tx1"/>
+                                        </a:solidFill>
+                                        <a:effectLst/>
+                                        <a:latin typeface="Cambria Math" panose="02040503050406030204" pitchFamily="18" charset="0"/>
+                                        <a:ea typeface="Calibri" panose="020F0502020204030204" pitchFamily="34" charset="0"/>
+                                        <a:cs typeface="Times New Roman" panose="02020603050405020304" pitchFamily="18" charset="0"/>
+                                      </a:rPr>
+                                      <m:t>𝑬</m:t>
+                                    </m:r>
+                                  </m:e>
+                                  <m:sub>
+                                    <m:r>
+                                      <a:rPr lang="en-US" sz="1400" b="1" i="1">
+                                        <a:solidFill>
+                                          <a:schemeClr val="tx1"/>
+                                        </a:solidFill>
+                                        <a:effectLst/>
+                                        <a:latin typeface="Cambria Math" panose="02040503050406030204" pitchFamily="18" charset="0"/>
+                                        <a:ea typeface="Calibri" panose="020F0502020204030204" pitchFamily="34" charset="0"/>
+                                        <a:cs typeface="Times New Roman" panose="02020603050405020304" pitchFamily="18" charset="0"/>
+                                      </a:rPr>
+                                      <m:t>𝑪𝑽</m:t>
+                                    </m:r>
+                                  </m:sub>
+                                </m:sSub>
+                              </m:oMath>
+                            </m:oMathPara>
+                          </a14:m>
+                          <a:endParaRPr lang="ru-RU" sz="1400" b="1" dirty="0">
+                            <a:solidFill>
+                              <a:schemeClr val="tx1"/>
+                            </a:solidFill>
+                            <a:effectLst/>
+                            <a:latin typeface="Times New Roman" panose="02020603050405020304" pitchFamily="18" charset="0"/>
+                            <a:ea typeface="Calibri" panose="020F0502020204030204" pitchFamily="34" charset="0"/>
+                            <a:cs typeface="Times New Roman" panose="02020603050405020304" pitchFamily="18" charset="0"/>
+                          </a:endParaRPr>
+                        </a:p>
+                      </a:txBody>
+                      <a:tcPr marL="68580" marR="68580" marT="0" marB="0" anchor="ctr"/>
+                    </a:tc>
+                    <a:tc>
+                      <a:txBody>
+                        <a:bodyPr/>
+                        <a:lstStyle/>
+                        <a:p>
+                          <a:pPr indent="450215" algn="ctr">
+                            <a:lnSpc>
+                              <a:spcPct val="150000"/>
+                            </a:lnSpc>
+                            <a:spcAft>
+                              <a:spcPts val="800"/>
+                            </a:spcAft>
+                          </a:pPr>
+                          <a14:m>
+                            <m:oMathPara xmlns:m="http://schemas.openxmlformats.org/officeDocument/2006/math">
+                              <m:oMathParaPr>
+                                <m:jc m:val="centerGroup"/>
+                              </m:oMathParaPr>
+                              <m:oMath xmlns:m="http://schemas.openxmlformats.org/officeDocument/2006/math">
+                                <m:sSub>
+                                  <m:sSubPr>
+                                    <m:ctrlPr>
+                                      <a:rPr lang="ru-RU" sz="1400" b="1" i="1" smtClean="0">
+                                        <a:solidFill>
+                                          <a:schemeClr val="tx1"/>
+                                        </a:solidFill>
+                                        <a:effectLst/>
+                                        <a:latin typeface="Cambria Math" panose="02040503050406030204" pitchFamily="18" charset="0"/>
+                                        <a:ea typeface="Calibri" panose="020F0502020204030204" pitchFamily="34" charset="0"/>
+                                        <a:cs typeface="Times New Roman" panose="02020603050405020304" pitchFamily="18" charset="0"/>
+                                      </a:rPr>
+                                    </m:ctrlPr>
+                                  </m:sSubPr>
+                                  <m:e>
+                                    <m:r>
+                                      <a:rPr lang="en-US" sz="1400" b="1" i="1">
+                                        <a:solidFill>
+                                          <a:schemeClr val="tx1"/>
+                                        </a:solidFill>
+                                        <a:effectLst/>
+                                        <a:latin typeface="Cambria Math" panose="02040503050406030204" pitchFamily="18" charset="0"/>
+                                        <a:ea typeface="Calibri" panose="020F0502020204030204" pitchFamily="34" charset="0"/>
+                                        <a:cs typeface="Times New Roman" panose="02020603050405020304" pitchFamily="18" charset="0"/>
+                                      </a:rPr>
+                                      <m:t>𝑴𝑨𝑬</m:t>
+                                    </m:r>
+                                  </m:e>
+                                  <m:sub>
+                                    <m:r>
+                                      <a:rPr lang="en-US" sz="1400" b="1" i="1">
+                                        <a:solidFill>
+                                          <a:schemeClr val="tx1"/>
+                                        </a:solidFill>
+                                        <a:effectLst/>
+                                        <a:latin typeface="Cambria Math" panose="02040503050406030204" pitchFamily="18" charset="0"/>
+                                        <a:ea typeface="Calibri" panose="020F0502020204030204" pitchFamily="34" charset="0"/>
+                                        <a:cs typeface="Times New Roman" panose="02020603050405020304" pitchFamily="18" charset="0"/>
+                                      </a:rPr>
+                                      <m:t>𝑪𝑽</m:t>
+                                    </m:r>
+                                  </m:sub>
+                                </m:sSub>
+                              </m:oMath>
+                            </m:oMathPara>
+                          </a14:m>
+                          <a:endParaRPr lang="ru-RU" sz="1400" b="1" dirty="0">
+                            <a:solidFill>
+                              <a:schemeClr val="tx1"/>
+                            </a:solidFill>
+                            <a:effectLst/>
+                            <a:latin typeface="Times New Roman" panose="02020603050405020304" pitchFamily="18" charset="0"/>
+                            <a:ea typeface="Calibri" panose="020F0502020204030204" pitchFamily="34" charset="0"/>
+                            <a:cs typeface="Times New Roman" panose="02020603050405020304" pitchFamily="18" charset="0"/>
+                          </a:endParaRPr>
+                        </a:p>
+                      </a:txBody>
+                      <a:tcPr marL="68580" marR="68580" marT="0" marB="0" anchor="ctr"/>
+                    </a:tc>
+                    <a:tc>
+                      <a:txBody>
+                        <a:bodyPr/>
+                        <a:lstStyle/>
+                        <a:p>
+                          <a:pPr indent="450215" algn="ctr">
+                            <a:lnSpc>
+                              <a:spcPct val="150000"/>
+                            </a:lnSpc>
+                            <a:spcAft>
+                              <a:spcPts val="800"/>
+                            </a:spcAft>
+                          </a:pPr>
+                          <a14:m>
+                            <m:oMathPara xmlns:m="http://schemas.openxmlformats.org/officeDocument/2006/math">
+                              <m:oMathParaPr>
+                                <m:jc m:val="centerGroup"/>
+                              </m:oMathParaPr>
+                              <m:oMath xmlns:m="http://schemas.openxmlformats.org/officeDocument/2006/math">
+                                <m:sSub>
+                                  <m:sSubPr>
+                                    <m:ctrlPr>
+                                      <a:rPr lang="ru-RU" sz="1400" b="1" i="1" smtClean="0">
+                                        <a:solidFill>
+                                          <a:schemeClr val="tx1"/>
+                                        </a:solidFill>
+                                        <a:effectLst/>
+                                        <a:latin typeface="Cambria Math" panose="02040503050406030204" pitchFamily="18" charset="0"/>
+                                        <a:ea typeface="Calibri" panose="020F0502020204030204" pitchFamily="34" charset="0"/>
+                                        <a:cs typeface="Times New Roman" panose="02020603050405020304" pitchFamily="18" charset="0"/>
+                                      </a:rPr>
+                                    </m:ctrlPr>
+                                  </m:sSubPr>
+                                  <m:e>
+                                    <m:r>
+                                      <a:rPr lang="en-US" sz="1400" b="1" i="1">
+                                        <a:solidFill>
+                                          <a:schemeClr val="tx1"/>
+                                        </a:solidFill>
+                                        <a:effectLst/>
+                                        <a:latin typeface="Cambria Math" panose="02040503050406030204" pitchFamily="18" charset="0"/>
+                                        <a:ea typeface="Calibri" panose="020F0502020204030204" pitchFamily="34" charset="0"/>
+                                        <a:cs typeface="Times New Roman" panose="02020603050405020304" pitchFamily="18" charset="0"/>
+                                      </a:rPr>
+                                      <m:t>𝑴𝒂𝒙𝑬𝒓𝒓</m:t>
+                                    </m:r>
+                                  </m:e>
+                                  <m:sub>
+                                    <m:r>
+                                      <a:rPr lang="en-US" sz="1400" b="1" i="1">
+                                        <a:solidFill>
+                                          <a:schemeClr val="tx1"/>
+                                        </a:solidFill>
+                                        <a:effectLst/>
+                                        <a:latin typeface="Cambria Math" panose="02040503050406030204" pitchFamily="18" charset="0"/>
+                                        <a:ea typeface="Calibri" panose="020F0502020204030204" pitchFamily="34" charset="0"/>
+                                        <a:cs typeface="Times New Roman" panose="02020603050405020304" pitchFamily="18" charset="0"/>
+                                      </a:rPr>
+                                      <m:t>𝑪𝑽</m:t>
+                                    </m:r>
+                                  </m:sub>
+                                </m:sSub>
+                              </m:oMath>
+                            </m:oMathPara>
+                          </a14:m>
+                          <a:endParaRPr lang="ru-RU" sz="1400" b="1" dirty="0">
+                            <a:solidFill>
+                              <a:schemeClr val="tx1"/>
+                            </a:solidFill>
+                            <a:effectLst/>
+                            <a:latin typeface="Times New Roman" panose="02020603050405020304" pitchFamily="18" charset="0"/>
+                            <a:ea typeface="Calibri" panose="020F0502020204030204" pitchFamily="34" charset="0"/>
+                            <a:cs typeface="Times New Roman" panose="02020603050405020304" pitchFamily="18" charset="0"/>
+                          </a:endParaRPr>
+                        </a:p>
+                      </a:txBody>
+                      <a:tcPr marL="68580" marR="68580" marT="0" marB="0" anchor="ctr"/>
+                    </a:tc>
+                    <a:extLst>
+                      <a:ext uri="{0D108BD9-81ED-4DB2-BD59-A6C34878D82A}">
+                        <a16:rowId xmlns:a16="http://schemas.microsoft.com/office/drawing/2014/main" val="3231595058"/>
+                      </a:ext>
+                    </a:extLst>
+                  </a:tr>
+                  <a:tr h="825093">
+                    <a:tc>
+                      <a:txBody>
+                        <a:bodyPr/>
+                        <a:lstStyle/>
+                        <a:p>
+                          <a:pPr indent="450215" algn="ctr">
+                            <a:lnSpc>
+                              <a:spcPct val="150000"/>
+                            </a:lnSpc>
+                            <a:spcAft>
+                              <a:spcPts val="800"/>
+                            </a:spcAft>
+                          </a:pPr>
+                          <a:r>
+                            <a:rPr lang="ru-RU" sz="1400">
+                              <a:effectLst/>
+                              <a:latin typeface="Times New Roman" panose="02020603050405020304" pitchFamily="18" charset="0"/>
+                              <a:ea typeface="Calibri" panose="020F0502020204030204" pitchFamily="34" charset="0"/>
+                              <a:cs typeface="Times New Roman" panose="02020603050405020304" pitchFamily="18" charset="0"/>
+                            </a:rPr>
+                            <a:t>Правило Сильвермана</a:t>
+                          </a:r>
+                        </a:p>
+                      </a:txBody>
+                      <a:tcPr marL="68580" marR="68580" marT="0" marB="0" anchor="ctr"/>
+                    </a:tc>
+                    <a:tc>
+                      <a:txBody>
+                        <a:bodyPr/>
+                        <a:lstStyle/>
+                        <a:p>
+                          <a:pPr indent="450215" algn="ctr">
+                            <a:lnSpc>
+                              <a:spcPct val="150000"/>
+                            </a:lnSpc>
+                            <a:spcAft>
+                              <a:spcPts val="800"/>
+                            </a:spcAft>
+                          </a:pPr>
+                          <a:r>
+                            <a:rPr lang="ru-RU" sz="1400" dirty="0">
+                              <a:effectLst/>
+                              <a:latin typeface="Times New Roman" panose="02020603050405020304" pitchFamily="18" charset="0"/>
+                              <a:ea typeface="Calibri" panose="020F0502020204030204" pitchFamily="34" charset="0"/>
+                              <a:cs typeface="Times New Roman" panose="02020603050405020304" pitchFamily="18" charset="0"/>
+                            </a:rPr>
+                            <a:t>0.385714</a:t>
+                          </a:r>
+                        </a:p>
+                      </a:txBody>
+                      <a:tcPr marL="68580" marR="68580" marT="0" marB="0" anchor="ctr"/>
+                    </a:tc>
+                    <a:tc>
+                      <a:txBody>
+                        <a:bodyPr/>
+                        <a:lstStyle/>
+                        <a:p>
+                          <a:pPr indent="450215" algn="ctr">
+                            <a:lnSpc>
+                              <a:spcPct val="150000"/>
+                            </a:lnSpc>
+                            <a:spcAft>
+                              <a:spcPts val="800"/>
+                            </a:spcAft>
+                          </a:pPr>
+                          <a:r>
+                            <a:rPr lang="ru-RU" sz="1400">
+                              <a:effectLst/>
+                              <a:latin typeface="Times New Roman" panose="02020603050405020304" pitchFamily="18" charset="0"/>
+                              <a:ea typeface="Calibri" panose="020F0502020204030204" pitchFamily="34" charset="0"/>
+                              <a:cs typeface="Times New Roman" panose="02020603050405020304" pitchFamily="18" charset="0"/>
+                            </a:rPr>
+                            <a:t>0.305371</a:t>
+                          </a:r>
+                        </a:p>
+                      </a:txBody>
+                      <a:tcPr marL="68580" marR="68580" marT="0" marB="0" anchor="ctr"/>
+                    </a:tc>
+                    <a:tc>
+                      <a:txBody>
+                        <a:bodyPr/>
+                        <a:lstStyle/>
+                        <a:p>
+                          <a:pPr indent="450215" algn="ctr">
+                            <a:lnSpc>
+                              <a:spcPct val="150000"/>
+                            </a:lnSpc>
+                            <a:spcAft>
+                              <a:spcPts val="800"/>
+                            </a:spcAft>
+                          </a:pPr>
+                          <a:r>
+                            <a:rPr lang="ru-RU" sz="1400" b="1" dirty="0">
+                              <a:effectLst/>
+                              <a:latin typeface="Times New Roman" panose="02020603050405020304" pitchFamily="18" charset="0"/>
+                              <a:ea typeface="Calibri" panose="020F0502020204030204" pitchFamily="34" charset="0"/>
+                              <a:cs typeface="Times New Roman" panose="02020603050405020304" pitchFamily="18" charset="0"/>
+                            </a:rPr>
+                            <a:t>1.040429</a:t>
+                          </a:r>
+                        </a:p>
+                      </a:txBody>
+                      <a:tcPr marL="68580" marR="68580" marT="0" marB="0" anchor="ctr"/>
+                    </a:tc>
+                    <a:extLst>
+                      <a:ext uri="{0D108BD9-81ED-4DB2-BD59-A6C34878D82A}">
+                        <a16:rowId xmlns:a16="http://schemas.microsoft.com/office/drawing/2014/main" val="1714726768"/>
+                      </a:ext>
+                    </a:extLst>
+                  </a:tr>
+                  <a:tr h="825093">
+                    <a:tc>
+                      <a:txBody>
+                        <a:bodyPr/>
+                        <a:lstStyle/>
+                        <a:p>
+                          <a:pPr indent="450215" algn="ctr">
+                            <a:lnSpc>
+                              <a:spcPct val="150000"/>
+                            </a:lnSpc>
+                            <a:spcAft>
+                              <a:spcPts val="800"/>
+                            </a:spcAft>
+                          </a:pPr>
+                          <a:r>
+                            <a:rPr lang="ru-RU" sz="1400">
+                              <a:effectLst/>
+                              <a:latin typeface="Times New Roman" panose="02020603050405020304" pitchFamily="18" charset="0"/>
+                              <a:ea typeface="Calibri" panose="020F0502020204030204" pitchFamily="34" charset="0"/>
+                              <a:cs typeface="Times New Roman" panose="02020603050405020304" pitchFamily="18" charset="0"/>
+                            </a:rPr>
+                            <a:t>5-</a:t>
+                          </a:r>
+                          <a:r>
+                            <a:rPr lang="en-US" sz="1400">
+                              <a:effectLst/>
+                              <a:latin typeface="Times New Roman" panose="02020603050405020304" pitchFamily="18" charset="0"/>
+                              <a:ea typeface="Calibri" panose="020F0502020204030204" pitchFamily="34" charset="0"/>
+                              <a:cs typeface="Times New Roman" panose="02020603050405020304" pitchFamily="18" charset="0"/>
+                            </a:rPr>
+                            <a:t>fold CV</a:t>
+                          </a:r>
+                          <a:endParaRPr lang="ru-RU" sz="1400">
+                            <a:effectLst/>
+                            <a:latin typeface="Times New Roman" panose="02020603050405020304" pitchFamily="18" charset="0"/>
+                            <a:ea typeface="Calibri" panose="020F0502020204030204" pitchFamily="34" charset="0"/>
+                            <a:cs typeface="Times New Roman" panose="02020603050405020304" pitchFamily="18" charset="0"/>
+                          </a:endParaRPr>
+                        </a:p>
+                      </a:txBody>
+                      <a:tcPr marL="68580" marR="68580" marT="0" marB="0" anchor="ctr"/>
+                    </a:tc>
+                    <a:tc>
+                      <a:txBody>
+                        <a:bodyPr/>
+                        <a:lstStyle/>
+                        <a:p>
+                          <a:pPr indent="450215" algn="ctr">
+                            <a:lnSpc>
+                              <a:spcPct val="150000"/>
+                            </a:lnSpc>
+                            <a:spcAft>
+                              <a:spcPts val="800"/>
+                            </a:spcAft>
+                          </a:pPr>
+                          <a:r>
+                            <a:rPr lang="ru-RU" sz="1400">
+                              <a:effectLst/>
+                              <a:latin typeface="Times New Roman" panose="02020603050405020304" pitchFamily="18" charset="0"/>
+                              <a:ea typeface="Calibri" panose="020F0502020204030204" pitchFamily="34" charset="0"/>
+                              <a:cs typeface="Times New Roman" panose="02020603050405020304" pitchFamily="18" charset="0"/>
+                            </a:rPr>
+                            <a:t>0.377969</a:t>
+                          </a:r>
+                        </a:p>
+                      </a:txBody>
+                      <a:tcPr marL="68580" marR="68580" marT="0" marB="0" anchor="ctr"/>
+                    </a:tc>
+                    <a:tc>
+                      <a:txBody>
+                        <a:bodyPr/>
+                        <a:lstStyle/>
+                        <a:p>
+                          <a:pPr indent="450215" algn="ctr">
+                            <a:lnSpc>
+                              <a:spcPct val="150000"/>
+                            </a:lnSpc>
+                            <a:spcAft>
+                              <a:spcPts val="800"/>
+                            </a:spcAft>
+                          </a:pPr>
+                          <a:r>
+                            <a:rPr lang="ru-RU" sz="1400" dirty="0">
+                              <a:effectLst/>
+                              <a:latin typeface="Times New Roman" panose="02020603050405020304" pitchFamily="18" charset="0"/>
+                              <a:ea typeface="Calibri" panose="020F0502020204030204" pitchFamily="34" charset="0"/>
+                              <a:cs typeface="Times New Roman" panose="02020603050405020304" pitchFamily="18" charset="0"/>
+                            </a:rPr>
+                            <a:t>0.296663</a:t>
+                          </a:r>
+                        </a:p>
+                      </a:txBody>
+                      <a:tcPr marL="68580" marR="68580" marT="0" marB="0" anchor="ctr"/>
+                    </a:tc>
+                    <a:tc>
+                      <a:txBody>
+                        <a:bodyPr/>
+                        <a:lstStyle/>
+                        <a:p>
+                          <a:pPr indent="450215" algn="ctr">
+                            <a:lnSpc>
+                              <a:spcPct val="150000"/>
+                            </a:lnSpc>
+                            <a:spcAft>
+                              <a:spcPts val="800"/>
+                            </a:spcAft>
+                          </a:pPr>
+                          <a:r>
+                            <a:rPr lang="ru-RU" sz="1400">
+                              <a:effectLst/>
+                              <a:latin typeface="Times New Roman" panose="02020603050405020304" pitchFamily="18" charset="0"/>
+                              <a:ea typeface="Calibri" panose="020F0502020204030204" pitchFamily="34" charset="0"/>
+                              <a:cs typeface="Times New Roman" panose="02020603050405020304" pitchFamily="18" charset="0"/>
+                            </a:rPr>
+                            <a:t>1.087792</a:t>
+                          </a:r>
+                        </a:p>
+                      </a:txBody>
+                      <a:tcPr marL="68580" marR="68580" marT="0" marB="0" anchor="ctr"/>
+                    </a:tc>
+                    <a:extLst>
+                      <a:ext uri="{0D108BD9-81ED-4DB2-BD59-A6C34878D82A}">
+                        <a16:rowId xmlns:a16="http://schemas.microsoft.com/office/drawing/2014/main" val="2774294336"/>
+                      </a:ext>
+                    </a:extLst>
+                  </a:tr>
+                  <a:tr h="825093">
+                    <a:tc>
+                      <a:txBody>
+                        <a:bodyPr/>
+                        <a:lstStyle/>
+                        <a:p>
+                          <a:pPr indent="450215" algn="ctr">
+                            <a:lnSpc>
+                              <a:spcPct val="150000"/>
+                            </a:lnSpc>
+                            <a:spcAft>
+                              <a:spcPts val="800"/>
+                            </a:spcAft>
+                          </a:pPr>
+                          <a:r>
+                            <a:rPr lang="en-US" sz="1400">
+                              <a:effectLst/>
+                              <a:latin typeface="Times New Roman" panose="02020603050405020304" pitchFamily="18" charset="0"/>
+                              <a:ea typeface="Calibri" panose="020F0502020204030204" pitchFamily="34" charset="0"/>
+                              <a:cs typeface="Times New Roman" panose="02020603050405020304" pitchFamily="18" charset="0"/>
+                            </a:rPr>
+                            <a:t>LOOCV</a:t>
+                          </a:r>
+                          <a:endParaRPr lang="ru-RU" sz="1400">
+                            <a:effectLst/>
+                            <a:latin typeface="Times New Roman" panose="02020603050405020304" pitchFamily="18" charset="0"/>
+                            <a:ea typeface="Calibri" panose="020F0502020204030204" pitchFamily="34" charset="0"/>
+                            <a:cs typeface="Times New Roman" panose="02020603050405020304" pitchFamily="18" charset="0"/>
+                          </a:endParaRPr>
+                        </a:p>
+                      </a:txBody>
+                      <a:tcPr marL="68580" marR="68580" marT="0" marB="0" anchor="ctr"/>
+                    </a:tc>
+                    <a:tc>
+                      <a:txBody>
+                        <a:bodyPr/>
+                        <a:lstStyle/>
+                        <a:p>
+                          <a:pPr indent="450215" algn="ctr">
+                            <a:lnSpc>
+                              <a:spcPct val="150000"/>
+                            </a:lnSpc>
+                            <a:spcAft>
+                              <a:spcPts val="800"/>
+                            </a:spcAft>
+                          </a:pPr>
+                          <a:r>
+                            <a:rPr lang="ru-RU" sz="1400" b="1" dirty="0">
+                              <a:effectLst/>
+                              <a:latin typeface="Times New Roman" panose="02020603050405020304" pitchFamily="18" charset="0"/>
+                              <a:ea typeface="Calibri" panose="020F0502020204030204" pitchFamily="34" charset="0"/>
+                              <a:cs typeface="Times New Roman" panose="02020603050405020304" pitchFamily="18" charset="0"/>
+                            </a:rPr>
+                            <a:t>0.377177</a:t>
+                          </a:r>
+                        </a:p>
+                      </a:txBody>
+                      <a:tcPr marL="68580" marR="68580" marT="0" marB="0" anchor="ctr"/>
+                    </a:tc>
+                    <a:tc>
+                      <a:txBody>
+                        <a:bodyPr/>
+                        <a:lstStyle/>
+                        <a:p>
+                          <a:pPr indent="450215" algn="ctr">
+                            <a:lnSpc>
+                              <a:spcPct val="150000"/>
+                            </a:lnSpc>
+                            <a:spcAft>
+                              <a:spcPts val="800"/>
+                            </a:spcAft>
+                          </a:pPr>
+                          <a:r>
+                            <a:rPr lang="ru-RU" sz="1400" b="1" dirty="0">
+                              <a:effectLst/>
+                              <a:latin typeface="Times New Roman" panose="02020603050405020304" pitchFamily="18" charset="0"/>
+                              <a:ea typeface="Calibri" panose="020F0502020204030204" pitchFamily="34" charset="0"/>
+                              <a:cs typeface="Times New Roman" panose="02020603050405020304" pitchFamily="18" charset="0"/>
+                            </a:rPr>
+                            <a:t>0.296323</a:t>
+                          </a:r>
+                        </a:p>
+                      </a:txBody>
+                      <a:tcPr marL="68580" marR="68580" marT="0" marB="0" anchor="ctr"/>
+                    </a:tc>
+                    <a:tc>
+                      <a:txBody>
+                        <a:bodyPr/>
+                        <a:lstStyle/>
+                        <a:p>
+                          <a:pPr indent="450215" algn="ctr">
+                            <a:lnSpc>
+                              <a:spcPct val="150000"/>
+                            </a:lnSpc>
+                            <a:spcAft>
+                              <a:spcPts val="800"/>
+                            </a:spcAft>
+                          </a:pPr>
+                          <a:r>
+                            <a:rPr lang="ru-RU" sz="1400" dirty="0">
+                              <a:effectLst/>
+                              <a:latin typeface="Times New Roman" panose="02020603050405020304" pitchFamily="18" charset="0"/>
+                              <a:ea typeface="Calibri" panose="020F0502020204030204" pitchFamily="34" charset="0"/>
+                              <a:cs typeface="Times New Roman" panose="02020603050405020304" pitchFamily="18" charset="0"/>
+                            </a:rPr>
+                            <a:t>1.088225</a:t>
+                          </a:r>
+                        </a:p>
+                      </a:txBody>
+                      <a:tcPr marL="68580" marR="68580" marT="0" marB="0" anchor="ctr"/>
+                    </a:tc>
+                    <a:extLst>
+                      <a:ext uri="{0D108BD9-81ED-4DB2-BD59-A6C34878D82A}">
+                        <a16:rowId xmlns:a16="http://schemas.microsoft.com/office/drawing/2014/main" val="1601136823"/>
+                      </a:ext>
+                    </a:extLst>
+                  </a:tr>
+                  <a:tr h="825093">
+                    <a:tc>
+                      <a:txBody>
+                        <a:bodyPr/>
+                        <a:lstStyle/>
+                        <a:p>
+                          <a:pPr indent="450215" algn="ctr">
+                            <a:lnSpc>
+                              <a:spcPct val="150000"/>
+                            </a:lnSpc>
+                            <a:spcAft>
+                              <a:spcPts val="800"/>
+                            </a:spcAft>
+                          </a:pPr>
+                          <a:r>
+                            <a:rPr lang="ru-RU" sz="1400">
+                              <a:effectLst/>
+                              <a:latin typeface="Times New Roman" panose="02020603050405020304" pitchFamily="18" charset="0"/>
+                              <a:ea typeface="Calibri" panose="020F0502020204030204" pitchFamily="34" charset="0"/>
+                              <a:cs typeface="Times New Roman" panose="02020603050405020304" pitchFamily="18" charset="0"/>
+                            </a:rPr>
+                            <a:t>Энтропийный подход</a:t>
+                          </a:r>
+                        </a:p>
+                      </a:txBody>
+                      <a:tcPr marL="68580" marR="68580" marT="0" marB="0" anchor="ctr"/>
+                    </a:tc>
+                    <a:tc>
+                      <a:txBody>
+                        <a:bodyPr/>
+                        <a:lstStyle/>
+                        <a:p>
+                          <a:pPr indent="450215" algn="ctr">
+                            <a:lnSpc>
+                              <a:spcPct val="150000"/>
+                            </a:lnSpc>
+                            <a:spcAft>
+                              <a:spcPts val="800"/>
+                            </a:spcAft>
+                          </a:pPr>
+                          <a:r>
+                            <a:rPr lang="ru-RU" sz="1400">
+                              <a:effectLst/>
+                              <a:latin typeface="Times New Roman" panose="02020603050405020304" pitchFamily="18" charset="0"/>
+                              <a:ea typeface="Calibri" panose="020F0502020204030204" pitchFamily="34" charset="0"/>
+                              <a:cs typeface="Times New Roman" panose="02020603050405020304" pitchFamily="18" charset="0"/>
+                            </a:rPr>
+                            <a:t>0.391797</a:t>
+                          </a:r>
+                        </a:p>
+                      </a:txBody>
+                      <a:tcPr marL="68580" marR="68580" marT="0" marB="0" anchor="ctr"/>
+                    </a:tc>
+                    <a:tc>
+                      <a:txBody>
+                        <a:bodyPr/>
+                        <a:lstStyle/>
+                        <a:p>
+                          <a:pPr indent="450215" algn="ctr">
+                            <a:lnSpc>
+                              <a:spcPct val="150000"/>
+                            </a:lnSpc>
+                            <a:spcAft>
+                              <a:spcPts val="800"/>
+                            </a:spcAft>
+                          </a:pPr>
+                          <a:r>
+                            <a:rPr lang="ru-RU" sz="1400">
+                              <a:effectLst/>
+                              <a:latin typeface="Times New Roman" panose="02020603050405020304" pitchFamily="18" charset="0"/>
+                              <a:ea typeface="Calibri" panose="020F0502020204030204" pitchFamily="34" charset="0"/>
+                              <a:cs typeface="Times New Roman" panose="02020603050405020304" pitchFamily="18" charset="0"/>
+                            </a:rPr>
+                            <a:t>0.304396</a:t>
+                          </a:r>
+                        </a:p>
+                      </a:txBody>
+                      <a:tcPr marL="68580" marR="68580" marT="0" marB="0" anchor="ctr"/>
+                    </a:tc>
+                    <a:tc>
+                      <a:txBody>
+                        <a:bodyPr/>
+                        <a:lstStyle/>
+                        <a:p>
+                          <a:pPr indent="450215" algn="ctr">
+                            <a:lnSpc>
+                              <a:spcPct val="150000"/>
+                            </a:lnSpc>
+                            <a:spcAft>
+                              <a:spcPts val="800"/>
+                            </a:spcAft>
+                          </a:pPr>
+                          <a:r>
+                            <a:rPr lang="ru-RU" sz="1400" dirty="0">
+                              <a:effectLst/>
+                              <a:latin typeface="Times New Roman" panose="02020603050405020304" pitchFamily="18" charset="0"/>
+                              <a:ea typeface="Calibri" panose="020F0502020204030204" pitchFamily="34" charset="0"/>
+                              <a:cs typeface="Times New Roman" panose="02020603050405020304" pitchFamily="18" charset="0"/>
+                            </a:rPr>
+                            <a:t>1.079564</a:t>
+                          </a:r>
+                        </a:p>
+                      </a:txBody>
+                      <a:tcPr marL="68580" marR="68580" marT="0" marB="0" anchor="ctr"/>
+                    </a:tc>
+                    <a:extLst>
+                      <a:ext uri="{0D108BD9-81ED-4DB2-BD59-A6C34878D82A}">
+                        <a16:rowId xmlns:a16="http://schemas.microsoft.com/office/drawing/2014/main" val="1058109007"/>
+                      </a:ext>
+                    </a:extLst>
+                  </a:tr>
+                </a:tbl>
+              </a:graphicData>
+            </a:graphic>
+          </p:graphicFrame>
+        </mc:Choice>
+        <mc:Fallback>
+          <p:graphicFrame>
+            <p:nvGraphicFramePr>
+              <p:cNvPr id="2" name="Таблица 3">
+                <a:extLst>
+                  <a:ext uri="{FF2B5EF4-FFF2-40B4-BE49-F238E27FC236}">
+                    <a16:creationId xmlns:a16="http://schemas.microsoft.com/office/drawing/2014/main" id="{4173D68B-D144-4F2D-AD35-008D4CDE9DD9}"/>
+                  </a:ext>
+                </a:extLst>
+              </p:cNvPr>
+              <p:cNvGraphicFramePr>
+                <a:graphicFrameLocks noGrp="1"/>
+              </p:cNvGraphicFramePr>
+              <p:nvPr>
+                <p:extLst>
+                  <p:ext uri="{D42A27DB-BD31-4B8C-83A1-F6EECF244321}">
+                    <p14:modId xmlns:p14="http://schemas.microsoft.com/office/powerpoint/2010/main" val="377333928"/>
+                  </p:ext>
+                </p:extLst>
+              </p:nvPr>
+            </p:nvGraphicFramePr>
+            <p:xfrm>
+              <a:off x="601354" y="1128760"/>
+              <a:ext cx="10989292" cy="4125465"/>
+            </p:xfrm>
+            <a:graphic>
+              <a:graphicData uri="http://schemas.openxmlformats.org/drawingml/2006/table">
+                <a:tbl>
+                  <a:tblPr firstRow="1" bandRow="1">
+                    <a:tableStyleId>{21E4AEA4-8DFA-4A89-87EB-49C32662AFE0}</a:tableStyleId>
+                  </a:tblPr>
+                  <a:tblGrid>
+                    <a:gridCol w="2747323">
+                      <a:extLst>
+                        <a:ext uri="{9D8B030D-6E8A-4147-A177-3AD203B41FA5}">
+                          <a16:colId xmlns:a16="http://schemas.microsoft.com/office/drawing/2014/main" val="2582575054"/>
+                        </a:ext>
+                      </a:extLst>
+                    </a:gridCol>
+                    <a:gridCol w="2747323">
+                      <a:extLst>
+                        <a:ext uri="{9D8B030D-6E8A-4147-A177-3AD203B41FA5}">
+                          <a16:colId xmlns:a16="http://schemas.microsoft.com/office/drawing/2014/main" val="2884779805"/>
+                        </a:ext>
+                      </a:extLst>
+                    </a:gridCol>
+                    <a:gridCol w="2747323">
+                      <a:extLst>
+                        <a:ext uri="{9D8B030D-6E8A-4147-A177-3AD203B41FA5}">
+                          <a16:colId xmlns:a16="http://schemas.microsoft.com/office/drawing/2014/main" val="3311561349"/>
+                        </a:ext>
+                      </a:extLst>
+                    </a:gridCol>
+                    <a:gridCol w="2747323">
+                      <a:extLst>
+                        <a:ext uri="{9D8B030D-6E8A-4147-A177-3AD203B41FA5}">
+                          <a16:colId xmlns:a16="http://schemas.microsoft.com/office/drawing/2014/main" val="780616856"/>
+                        </a:ext>
+                      </a:extLst>
+                    </a:gridCol>
+                  </a:tblGrid>
+                  <a:tr h="825093">
+                    <a:tc>
+                      <a:txBody>
+                        <a:bodyPr/>
+                        <a:lstStyle/>
+                        <a:p>
+                          <a:pPr indent="450215" algn="ctr">
+                            <a:lnSpc>
+                              <a:spcPct val="150000"/>
+                            </a:lnSpc>
+                            <a:spcAft>
+                              <a:spcPts val="800"/>
+                            </a:spcAft>
+                          </a:pPr>
+                          <a:r>
+                            <a:rPr lang="en-US" sz="1400" b="1" dirty="0">
+                              <a:solidFill>
+                                <a:schemeClr val="tx1"/>
+                              </a:solidFill>
+                              <a:effectLst/>
+                              <a:latin typeface="Times New Roman" panose="02020603050405020304" pitchFamily="18" charset="0"/>
+                              <a:ea typeface="Calibri" panose="020F0502020204030204" pitchFamily="34" charset="0"/>
+                              <a:cs typeface="Times New Roman" panose="02020603050405020304" pitchFamily="18" charset="0"/>
+                            </a:rPr>
+                            <a:t>Method</a:t>
+                          </a:r>
+                          <a:endParaRPr lang="ru-RU" sz="1400" b="1" dirty="0">
+                            <a:solidFill>
+                              <a:schemeClr val="tx1"/>
+                            </a:solidFill>
+                            <a:effectLst/>
+                            <a:latin typeface="Times New Roman" panose="02020603050405020304" pitchFamily="18" charset="0"/>
+                            <a:ea typeface="Calibri" panose="020F0502020204030204" pitchFamily="34" charset="0"/>
+                            <a:cs typeface="Times New Roman" panose="02020603050405020304" pitchFamily="18" charset="0"/>
+                          </a:endParaRPr>
+                        </a:p>
+                      </a:txBody>
+                      <a:tcPr marL="68580" marR="68580" marT="0" marB="0" anchor="ctr"/>
+                    </a:tc>
+                    <a:tc>
+                      <a:txBody>
+                        <a:bodyPr/>
+                        <a:lstStyle/>
+                        <a:p>
+                          <a:endParaRPr lang="ru-RU"/>
+                        </a:p>
+                      </a:txBody>
+                      <a:tcPr marL="68580" marR="68580" marT="0" marB="0" anchor="ctr">
+                        <a:blipFill>
+                          <a:blip r:embed="rId2"/>
+                          <a:stretch>
+                            <a:fillRect l="-100222" t="-741" r="-200887" b="-402963"/>
+                          </a:stretch>
+                        </a:blipFill>
+                      </a:tcPr>
+                    </a:tc>
+                    <a:tc>
+                      <a:txBody>
+                        <a:bodyPr/>
+                        <a:lstStyle/>
+                        <a:p>
+                          <a:endParaRPr lang="ru-RU"/>
+                        </a:p>
+                      </a:txBody>
+                      <a:tcPr marL="68580" marR="68580" marT="0" marB="0" anchor="ctr">
+                        <a:blipFill>
+                          <a:blip r:embed="rId2"/>
+                          <a:stretch>
+                            <a:fillRect l="-200222" t="-741" r="-100887" b="-402963"/>
+                          </a:stretch>
+                        </a:blipFill>
+                      </a:tcPr>
+                    </a:tc>
+                    <a:tc>
+                      <a:txBody>
+                        <a:bodyPr/>
+                        <a:lstStyle/>
+                        <a:p>
+                          <a:endParaRPr lang="ru-RU"/>
+                        </a:p>
+                      </a:txBody>
+                      <a:tcPr marL="68580" marR="68580" marT="0" marB="0" anchor="ctr">
+                        <a:blipFill>
+                          <a:blip r:embed="rId2"/>
+                          <a:stretch>
+                            <a:fillRect l="-300222" t="-741" r="-887" b="-402963"/>
+                          </a:stretch>
+                        </a:blipFill>
+                      </a:tcPr>
+                    </a:tc>
+                    <a:extLst>
+                      <a:ext uri="{0D108BD9-81ED-4DB2-BD59-A6C34878D82A}">
+                        <a16:rowId xmlns:a16="http://schemas.microsoft.com/office/drawing/2014/main" val="3231595058"/>
+                      </a:ext>
+                    </a:extLst>
+                  </a:tr>
+                  <a:tr h="825093">
+                    <a:tc>
+                      <a:txBody>
+                        <a:bodyPr/>
+                        <a:lstStyle/>
+                        <a:p>
+                          <a:pPr indent="450215" algn="ctr">
+                            <a:lnSpc>
+                              <a:spcPct val="150000"/>
+                            </a:lnSpc>
+                            <a:spcAft>
+                              <a:spcPts val="800"/>
+                            </a:spcAft>
+                          </a:pPr>
+                          <a:r>
+                            <a:rPr lang="ru-RU" sz="1400">
+                              <a:effectLst/>
+                              <a:latin typeface="Times New Roman" panose="02020603050405020304" pitchFamily="18" charset="0"/>
+                              <a:ea typeface="Calibri" panose="020F0502020204030204" pitchFamily="34" charset="0"/>
+                              <a:cs typeface="Times New Roman" panose="02020603050405020304" pitchFamily="18" charset="0"/>
+                            </a:rPr>
+                            <a:t>Правило Сильвермана</a:t>
+                          </a:r>
+                        </a:p>
+                      </a:txBody>
+                      <a:tcPr marL="68580" marR="68580" marT="0" marB="0" anchor="ctr"/>
+                    </a:tc>
+                    <a:tc>
+                      <a:txBody>
+                        <a:bodyPr/>
+                        <a:lstStyle/>
+                        <a:p>
+                          <a:pPr indent="450215" algn="ctr">
+                            <a:lnSpc>
+                              <a:spcPct val="150000"/>
+                            </a:lnSpc>
+                            <a:spcAft>
+                              <a:spcPts val="800"/>
+                            </a:spcAft>
+                          </a:pPr>
+                          <a:r>
+                            <a:rPr lang="ru-RU" sz="1400" dirty="0">
+                              <a:effectLst/>
+                              <a:latin typeface="Times New Roman" panose="02020603050405020304" pitchFamily="18" charset="0"/>
+                              <a:ea typeface="Calibri" panose="020F0502020204030204" pitchFamily="34" charset="0"/>
+                              <a:cs typeface="Times New Roman" panose="02020603050405020304" pitchFamily="18" charset="0"/>
+                            </a:rPr>
+                            <a:t>0.385714</a:t>
+                          </a:r>
+                        </a:p>
+                      </a:txBody>
+                      <a:tcPr marL="68580" marR="68580" marT="0" marB="0" anchor="ctr"/>
+                    </a:tc>
+                    <a:tc>
+                      <a:txBody>
+                        <a:bodyPr/>
+                        <a:lstStyle/>
+                        <a:p>
+                          <a:pPr indent="450215" algn="ctr">
+                            <a:lnSpc>
+                              <a:spcPct val="150000"/>
+                            </a:lnSpc>
+                            <a:spcAft>
+                              <a:spcPts val="800"/>
+                            </a:spcAft>
+                          </a:pPr>
+                          <a:r>
+                            <a:rPr lang="ru-RU" sz="1400">
+                              <a:effectLst/>
+                              <a:latin typeface="Times New Roman" panose="02020603050405020304" pitchFamily="18" charset="0"/>
+                              <a:ea typeface="Calibri" panose="020F0502020204030204" pitchFamily="34" charset="0"/>
+                              <a:cs typeface="Times New Roman" panose="02020603050405020304" pitchFamily="18" charset="0"/>
+                            </a:rPr>
+                            <a:t>0.305371</a:t>
+                          </a:r>
+                        </a:p>
+                      </a:txBody>
+                      <a:tcPr marL="68580" marR="68580" marT="0" marB="0" anchor="ctr"/>
+                    </a:tc>
+                    <a:tc>
+                      <a:txBody>
+                        <a:bodyPr/>
+                        <a:lstStyle/>
+                        <a:p>
+                          <a:pPr indent="450215" algn="ctr">
+                            <a:lnSpc>
+                              <a:spcPct val="150000"/>
+                            </a:lnSpc>
+                            <a:spcAft>
+                              <a:spcPts val="800"/>
+                            </a:spcAft>
+                          </a:pPr>
+                          <a:r>
+                            <a:rPr lang="ru-RU" sz="1400" b="1" dirty="0">
+                              <a:effectLst/>
+                              <a:latin typeface="Times New Roman" panose="02020603050405020304" pitchFamily="18" charset="0"/>
+                              <a:ea typeface="Calibri" panose="020F0502020204030204" pitchFamily="34" charset="0"/>
+                              <a:cs typeface="Times New Roman" panose="02020603050405020304" pitchFamily="18" charset="0"/>
+                            </a:rPr>
+                            <a:t>1.040429</a:t>
+                          </a:r>
+                        </a:p>
+                      </a:txBody>
+                      <a:tcPr marL="68580" marR="68580" marT="0" marB="0" anchor="ctr"/>
+                    </a:tc>
+                    <a:extLst>
+                      <a:ext uri="{0D108BD9-81ED-4DB2-BD59-A6C34878D82A}">
+                        <a16:rowId xmlns:a16="http://schemas.microsoft.com/office/drawing/2014/main" val="1714726768"/>
+                      </a:ext>
+                    </a:extLst>
+                  </a:tr>
+                  <a:tr h="825093">
+                    <a:tc>
+                      <a:txBody>
+                        <a:bodyPr/>
+                        <a:lstStyle/>
+                        <a:p>
+                          <a:pPr indent="450215" algn="ctr">
+                            <a:lnSpc>
+                              <a:spcPct val="150000"/>
+                            </a:lnSpc>
+                            <a:spcAft>
+                              <a:spcPts val="800"/>
+                            </a:spcAft>
+                          </a:pPr>
+                          <a:r>
+                            <a:rPr lang="ru-RU" sz="1400">
+                              <a:effectLst/>
+                              <a:latin typeface="Times New Roman" panose="02020603050405020304" pitchFamily="18" charset="0"/>
+                              <a:ea typeface="Calibri" panose="020F0502020204030204" pitchFamily="34" charset="0"/>
+                              <a:cs typeface="Times New Roman" panose="02020603050405020304" pitchFamily="18" charset="0"/>
+                            </a:rPr>
+                            <a:t>5-</a:t>
+                          </a:r>
+                          <a:r>
+                            <a:rPr lang="en-US" sz="1400">
+                              <a:effectLst/>
+                              <a:latin typeface="Times New Roman" panose="02020603050405020304" pitchFamily="18" charset="0"/>
+                              <a:ea typeface="Calibri" panose="020F0502020204030204" pitchFamily="34" charset="0"/>
+                              <a:cs typeface="Times New Roman" panose="02020603050405020304" pitchFamily="18" charset="0"/>
+                            </a:rPr>
+                            <a:t>fold CV</a:t>
+                          </a:r>
+                          <a:endParaRPr lang="ru-RU" sz="1400">
+                            <a:effectLst/>
+                            <a:latin typeface="Times New Roman" panose="02020603050405020304" pitchFamily="18" charset="0"/>
+                            <a:ea typeface="Calibri" panose="020F0502020204030204" pitchFamily="34" charset="0"/>
+                            <a:cs typeface="Times New Roman" panose="02020603050405020304" pitchFamily="18" charset="0"/>
+                          </a:endParaRPr>
+                        </a:p>
+                      </a:txBody>
+                      <a:tcPr marL="68580" marR="68580" marT="0" marB="0" anchor="ctr"/>
+                    </a:tc>
+                    <a:tc>
+                      <a:txBody>
+                        <a:bodyPr/>
+                        <a:lstStyle/>
+                        <a:p>
+                          <a:pPr indent="450215" algn="ctr">
+                            <a:lnSpc>
+                              <a:spcPct val="150000"/>
+                            </a:lnSpc>
+                            <a:spcAft>
+                              <a:spcPts val="800"/>
+                            </a:spcAft>
+                          </a:pPr>
+                          <a:r>
+                            <a:rPr lang="ru-RU" sz="1400">
+                              <a:effectLst/>
+                              <a:latin typeface="Times New Roman" panose="02020603050405020304" pitchFamily="18" charset="0"/>
+                              <a:ea typeface="Calibri" panose="020F0502020204030204" pitchFamily="34" charset="0"/>
+                              <a:cs typeface="Times New Roman" panose="02020603050405020304" pitchFamily="18" charset="0"/>
+                            </a:rPr>
+                            <a:t>0.377969</a:t>
+                          </a:r>
+                        </a:p>
+                      </a:txBody>
+                      <a:tcPr marL="68580" marR="68580" marT="0" marB="0" anchor="ctr"/>
+                    </a:tc>
+                    <a:tc>
+                      <a:txBody>
+                        <a:bodyPr/>
+                        <a:lstStyle/>
+                        <a:p>
+                          <a:pPr indent="450215" algn="ctr">
+                            <a:lnSpc>
+                              <a:spcPct val="150000"/>
+                            </a:lnSpc>
+                            <a:spcAft>
+                              <a:spcPts val="800"/>
+                            </a:spcAft>
+                          </a:pPr>
+                          <a:r>
+                            <a:rPr lang="ru-RU" sz="1400" dirty="0">
+                              <a:effectLst/>
+                              <a:latin typeface="Times New Roman" panose="02020603050405020304" pitchFamily="18" charset="0"/>
+                              <a:ea typeface="Calibri" panose="020F0502020204030204" pitchFamily="34" charset="0"/>
+                              <a:cs typeface="Times New Roman" panose="02020603050405020304" pitchFamily="18" charset="0"/>
+                            </a:rPr>
+                            <a:t>0.296663</a:t>
+                          </a:r>
+                        </a:p>
+                      </a:txBody>
+                      <a:tcPr marL="68580" marR="68580" marT="0" marB="0" anchor="ctr"/>
+                    </a:tc>
+                    <a:tc>
+                      <a:txBody>
+                        <a:bodyPr/>
+                        <a:lstStyle/>
+                        <a:p>
+                          <a:pPr indent="450215" algn="ctr">
+                            <a:lnSpc>
+                              <a:spcPct val="150000"/>
+                            </a:lnSpc>
+                            <a:spcAft>
+                              <a:spcPts val="800"/>
+                            </a:spcAft>
+                          </a:pPr>
+                          <a:r>
+                            <a:rPr lang="ru-RU" sz="1400">
+                              <a:effectLst/>
+                              <a:latin typeface="Times New Roman" panose="02020603050405020304" pitchFamily="18" charset="0"/>
+                              <a:ea typeface="Calibri" panose="020F0502020204030204" pitchFamily="34" charset="0"/>
+                              <a:cs typeface="Times New Roman" panose="02020603050405020304" pitchFamily="18" charset="0"/>
+                            </a:rPr>
+                            <a:t>1.087792</a:t>
+                          </a:r>
+                        </a:p>
+                      </a:txBody>
+                      <a:tcPr marL="68580" marR="68580" marT="0" marB="0" anchor="ctr"/>
+                    </a:tc>
+                    <a:extLst>
+                      <a:ext uri="{0D108BD9-81ED-4DB2-BD59-A6C34878D82A}">
+                        <a16:rowId xmlns:a16="http://schemas.microsoft.com/office/drawing/2014/main" val="2774294336"/>
+                      </a:ext>
+                    </a:extLst>
+                  </a:tr>
+                  <a:tr h="825093">
+                    <a:tc>
+                      <a:txBody>
+                        <a:bodyPr/>
+                        <a:lstStyle/>
+                        <a:p>
+                          <a:pPr indent="450215" algn="ctr">
+                            <a:lnSpc>
+                              <a:spcPct val="150000"/>
+                            </a:lnSpc>
+                            <a:spcAft>
+                              <a:spcPts val="800"/>
+                            </a:spcAft>
+                          </a:pPr>
+                          <a:r>
+                            <a:rPr lang="en-US" sz="1400">
+                              <a:effectLst/>
+                              <a:latin typeface="Times New Roman" panose="02020603050405020304" pitchFamily="18" charset="0"/>
+                              <a:ea typeface="Calibri" panose="020F0502020204030204" pitchFamily="34" charset="0"/>
+                              <a:cs typeface="Times New Roman" panose="02020603050405020304" pitchFamily="18" charset="0"/>
+                            </a:rPr>
+                            <a:t>LOOCV</a:t>
+                          </a:r>
+                          <a:endParaRPr lang="ru-RU" sz="1400">
+                            <a:effectLst/>
+                            <a:latin typeface="Times New Roman" panose="02020603050405020304" pitchFamily="18" charset="0"/>
+                            <a:ea typeface="Calibri" panose="020F0502020204030204" pitchFamily="34" charset="0"/>
+                            <a:cs typeface="Times New Roman" panose="02020603050405020304" pitchFamily="18" charset="0"/>
+                          </a:endParaRPr>
+                        </a:p>
+                      </a:txBody>
+                      <a:tcPr marL="68580" marR="68580" marT="0" marB="0" anchor="ctr"/>
+                    </a:tc>
+                    <a:tc>
+                      <a:txBody>
+                        <a:bodyPr/>
+                        <a:lstStyle/>
+                        <a:p>
+                          <a:pPr indent="450215" algn="ctr">
+                            <a:lnSpc>
+                              <a:spcPct val="150000"/>
+                            </a:lnSpc>
+                            <a:spcAft>
+                              <a:spcPts val="800"/>
+                            </a:spcAft>
+                          </a:pPr>
+                          <a:r>
+                            <a:rPr lang="ru-RU" sz="1400" b="1" dirty="0">
+                              <a:effectLst/>
+                              <a:latin typeface="Times New Roman" panose="02020603050405020304" pitchFamily="18" charset="0"/>
+                              <a:ea typeface="Calibri" panose="020F0502020204030204" pitchFamily="34" charset="0"/>
+                              <a:cs typeface="Times New Roman" panose="02020603050405020304" pitchFamily="18" charset="0"/>
+                            </a:rPr>
+                            <a:t>0.377177</a:t>
+                          </a:r>
+                        </a:p>
+                      </a:txBody>
+                      <a:tcPr marL="68580" marR="68580" marT="0" marB="0" anchor="ctr"/>
+                    </a:tc>
+                    <a:tc>
+                      <a:txBody>
+                        <a:bodyPr/>
+                        <a:lstStyle/>
+                        <a:p>
+                          <a:pPr indent="450215" algn="ctr">
+                            <a:lnSpc>
+                              <a:spcPct val="150000"/>
+                            </a:lnSpc>
+                            <a:spcAft>
+                              <a:spcPts val="800"/>
+                            </a:spcAft>
+                          </a:pPr>
+                          <a:r>
+                            <a:rPr lang="ru-RU" sz="1400" b="1" dirty="0">
+                              <a:effectLst/>
+                              <a:latin typeface="Times New Roman" panose="02020603050405020304" pitchFamily="18" charset="0"/>
+                              <a:ea typeface="Calibri" panose="020F0502020204030204" pitchFamily="34" charset="0"/>
+                              <a:cs typeface="Times New Roman" panose="02020603050405020304" pitchFamily="18" charset="0"/>
+                            </a:rPr>
+                            <a:t>0.296323</a:t>
+                          </a:r>
+                        </a:p>
+                      </a:txBody>
+                      <a:tcPr marL="68580" marR="68580" marT="0" marB="0" anchor="ctr"/>
+                    </a:tc>
+                    <a:tc>
+                      <a:txBody>
+                        <a:bodyPr/>
+                        <a:lstStyle/>
+                        <a:p>
+                          <a:pPr indent="450215" algn="ctr">
+                            <a:lnSpc>
+                              <a:spcPct val="150000"/>
+                            </a:lnSpc>
+                            <a:spcAft>
+                              <a:spcPts val="800"/>
+                            </a:spcAft>
+                          </a:pPr>
+                          <a:r>
+                            <a:rPr lang="ru-RU" sz="1400" dirty="0">
+                              <a:effectLst/>
+                              <a:latin typeface="Times New Roman" panose="02020603050405020304" pitchFamily="18" charset="0"/>
+                              <a:ea typeface="Calibri" panose="020F0502020204030204" pitchFamily="34" charset="0"/>
+                              <a:cs typeface="Times New Roman" panose="02020603050405020304" pitchFamily="18" charset="0"/>
+                            </a:rPr>
+                            <a:t>1.088225</a:t>
+                          </a:r>
+                        </a:p>
+                      </a:txBody>
+                      <a:tcPr marL="68580" marR="68580" marT="0" marB="0" anchor="ctr"/>
+                    </a:tc>
+                    <a:extLst>
+                      <a:ext uri="{0D108BD9-81ED-4DB2-BD59-A6C34878D82A}">
+                        <a16:rowId xmlns:a16="http://schemas.microsoft.com/office/drawing/2014/main" val="1601136823"/>
+                      </a:ext>
+                    </a:extLst>
+                  </a:tr>
+                  <a:tr h="825093">
+                    <a:tc>
+                      <a:txBody>
+                        <a:bodyPr/>
+                        <a:lstStyle/>
+                        <a:p>
+                          <a:pPr indent="450215" algn="ctr">
+                            <a:lnSpc>
+                              <a:spcPct val="150000"/>
+                            </a:lnSpc>
+                            <a:spcAft>
+                              <a:spcPts val="800"/>
+                            </a:spcAft>
+                          </a:pPr>
+                          <a:r>
+                            <a:rPr lang="ru-RU" sz="1400">
+                              <a:effectLst/>
+                              <a:latin typeface="Times New Roman" panose="02020603050405020304" pitchFamily="18" charset="0"/>
+                              <a:ea typeface="Calibri" panose="020F0502020204030204" pitchFamily="34" charset="0"/>
+                              <a:cs typeface="Times New Roman" panose="02020603050405020304" pitchFamily="18" charset="0"/>
+                            </a:rPr>
+                            <a:t>Энтропийный подход</a:t>
+                          </a:r>
+                        </a:p>
+                      </a:txBody>
+                      <a:tcPr marL="68580" marR="68580" marT="0" marB="0" anchor="ctr"/>
+                    </a:tc>
+                    <a:tc>
+                      <a:txBody>
+                        <a:bodyPr/>
+                        <a:lstStyle/>
+                        <a:p>
+                          <a:pPr indent="450215" algn="ctr">
+                            <a:lnSpc>
+                              <a:spcPct val="150000"/>
+                            </a:lnSpc>
+                            <a:spcAft>
+                              <a:spcPts val="800"/>
+                            </a:spcAft>
+                          </a:pPr>
+                          <a:r>
+                            <a:rPr lang="ru-RU" sz="1400">
+                              <a:effectLst/>
+                              <a:latin typeface="Times New Roman" panose="02020603050405020304" pitchFamily="18" charset="0"/>
+                              <a:ea typeface="Calibri" panose="020F0502020204030204" pitchFamily="34" charset="0"/>
+                              <a:cs typeface="Times New Roman" panose="02020603050405020304" pitchFamily="18" charset="0"/>
+                            </a:rPr>
+                            <a:t>0.391797</a:t>
+                          </a:r>
+                        </a:p>
+                      </a:txBody>
+                      <a:tcPr marL="68580" marR="68580" marT="0" marB="0" anchor="ctr"/>
+                    </a:tc>
+                    <a:tc>
+                      <a:txBody>
+                        <a:bodyPr/>
+                        <a:lstStyle/>
+                        <a:p>
+                          <a:pPr indent="450215" algn="ctr">
+                            <a:lnSpc>
+                              <a:spcPct val="150000"/>
+                            </a:lnSpc>
+                            <a:spcAft>
+                              <a:spcPts val="800"/>
+                            </a:spcAft>
+                          </a:pPr>
+                          <a:r>
+                            <a:rPr lang="ru-RU" sz="1400">
+                              <a:effectLst/>
+                              <a:latin typeface="Times New Roman" panose="02020603050405020304" pitchFamily="18" charset="0"/>
+                              <a:ea typeface="Calibri" panose="020F0502020204030204" pitchFamily="34" charset="0"/>
+                              <a:cs typeface="Times New Roman" panose="02020603050405020304" pitchFamily="18" charset="0"/>
+                            </a:rPr>
+                            <a:t>0.304396</a:t>
+                          </a:r>
+                        </a:p>
+                      </a:txBody>
+                      <a:tcPr marL="68580" marR="68580" marT="0" marB="0" anchor="ctr"/>
+                    </a:tc>
+                    <a:tc>
+                      <a:txBody>
+                        <a:bodyPr/>
+                        <a:lstStyle/>
+                        <a:p>
+                          <a:pPr indent="450215" algn="ctr">
+                            <a:lnSpc>
+                              <a:spcPct val="150000"/>
+                            </a:lnSpc>
+                            <a:spcAft>
+                              <a:spcPts val="800"/>
+                            </a:spcAft>
+                          </a:pPr>
+                          <a:r>
+                            <a:rPr lang="ru-RU" sz="1400" dirty="0">
+                              <a:effectLst/>
+                              <a:latin typeface="Times New Roman" panose="02020603050405020304" pitchFamily="18" charset="0"/>
+                              <a:ea typeface="Calibri" panose="020F0502020204030204" pitchFamily="34" charset="0"/>
+                              <a:cs typeface="Times New Roman" panose="02020603050405020304" pitchFamily="18" charset="0"/>
+                            </a:rPr>
+                            <a:t>1.079564</a:t>
+                          </a:r>
+                        </a:p>
+                      </a:txBody>
+                      <a:tcPr marL="68580" marR="68580" marT="0" marB="0" anchor="ctr"/>
+                    </a:tc>
+                    <a:extLst>
+                      <a:ext uri="{0D108BD9-81ED-4DB2-BD59-A6C34878D82A}">
+                        <a16:rowId xmlns:a16="http://schemas.microsoft.com/office/drawing/2014/main" val="1058109007"/>
+                      </a:ext>
+                    </a:extLst>
+                  </a:tr>
+                </a:tbl>
+              </a:graphicData>
+            </a:graphic>
+          </p:graphicFrame>
+        </mc:Fallback>
+      </mc:AlternateContent>
+      <p:sp>
+        <p:nvSpPr>
+          <p:cNvPr id="10" name="TextBox 9">
+            <a:extLst>
+              <a:ext uri="{FF2B5EF4-FFF2-40B4-BE49-F238E27FC236}">
+                <a16:creationId xmlns:a16="http://schemas.microsoft.com/office/drawing/2014/main" id="{EDF80D5F-1788-4E2A-B437-D602366824D4}"/>
+              </a:ext>
+            </a:extLst>
+          </p:cNvPr>
+          <p:cNvSpPr txBox="1"/>
+          <p:nvPr/>
+        </p:nvSpPr>
+        <p:spPr>
+          <a:xfrm>
+            <a:off x="2495550" y="617787"/>
+            <a:ext cx="7200900" cy="369332"/>
+          </a:xfrm>
+          <a:prstGeom prst="rect">
+            <a:avLst/>
+          </a:prstGeom>
+          <a:noFill/>
+        </p:spPr>
+        <p:txBody>
+          <a:bodyPr wrap="square">
+            <a:spAutoFit/>
+          </a:bodyPr>
+          <a:lstStyle/>
+          <a:p>
+            <a:r>
+              <a:rPr lang="ru-RU" sz="1800" dirty="0">
+                <a:effectLst/>
+                <a:latin typeface="Times New Roman" panose="02020603050405020304" pitchFamily="18" charset="0"/>
+                <a:ea typeface="Calibri" panose="020F0502020204030204" pitchFamily="34" charset="0"/>
+              </a:rPr>
+              <a:t>Таблица – 1. Результаты оценки качества методов на реальных данных.</a:t>
+            </a:r>
+            <a:endParaRPr lang="ru-RU" dirty="0"/>
+          </a:p>
+        </p:txBody>
+      </p:sp>
+    </p:spTree>
+    <p:extLst>
+      <p:ext uri="{BB962C8B-B14F-4D97-AF65-F5344CB8AC3E}">
+        <p14:creationId xmlns:p14="http://schemas.microsoft.com/office/powerpoint/2010/main" val="3983507138"/>
+      </p:ext>
+    </p:extLst>
+  </p:cSld>
+  <p:clrMapOvr>
+    <a:masterClrMapping/>
+  </p:clrMapOvr>
+</p:sld>
+</file>
+
+<file path=ppt/slides/slide16.xml><?xml version="1.0" encoding="utf-8"?>
+<p:sld xmlns:a="http://schemas.openxmlformats.org/drawingml/2006/main" xmlns:r="http://schemas.openxmlformats.org/officeDocument/2006/relationships" xmlns:p="http://schemas.openxmlformats.org/presentationml/2006/main">
+  <p:cSld>
+    <p:spTree>
+      <p:nvGrpSpPr>
+        <p:cNvPr id="1" name="">
+          <a:extLst>
+            <a:ext uri="{FF2B5EF4-FFF2-40B4-BE49-F238E27FC236}">
+              <a16:creationId xmlns:a16="http://schemas.microsoft.com/office/drawing/2014/main" id="{37A17CF9-11BB-8E92-9837-8CEB23243A2C}"/>
+            </a:ext>
+          </a:extLst>
+        </p:cNvPr>
+        <p:cNvGrpSpPr/>
+        <p:nvPr/>
+      </p:nvGrpSpPr>
+      <p:grpSpPr>
+        <a:xfrm>
+          <a:off x="0" y="0"/>
+          <a:ext cx="0" cy="0"/>
+          <a:chOff x="0" y="0"/>
+          <a:chExt cx="0" cy="0"/>
+        </a:xfrm>
+      </p:grpSpPr>
+      <p:sp>
+        <p:nvSpPr>
+          <p:cNvPr id="2" name="TextBox 1">
+            <a:extLst>
+              <a:ext uri="{FF2B5EF4-FFF2-40B4-BE49-F238E27FC236}">
+                <a16:creationId xmlns:a16="http://schemas.microsoft.com/office/drawing/2014/main" id="{0D52EBD2-34A3-7824-147E-0C9CB9A9B380}"/>
+              </a:ext>
+            </a:extLst>
+          </p:cNvPr>
+          <p:cNvSpPr txBox="1"/>
+          <p:nvPr/>
+        </p:nvSpPr>
+        <p:spPr>
+          <a:xfrm>
+            <a:off x="3127270" y="0"/>
+            <a:ext cx="5937459" cy="523220"/>
+          </a:xfrm>
+          <a:prstGeom prst="rect">
+            <a:avLst/>
+          </a:prstGeom>
+          <a:noFill/>
+        </p:spPr>
+        <p:txBody>
+          <a:bodyPr wrap="none" rtlCol="0">
+            <a:spAutoFit/>
+          </a:bodyPr>
+          <a:lstStyle/>
+          <a:p>
+            <a:r>
+              <a:rPr lang="ru-RU" sz="2800" b="1" dirty="0">
+                <a:latin typeface="Times New Roman" panose="02020603050405020304" pitchFamily="18" charset="0"/>
+                <a:cs typeface="Times New Roman" panose="02020603050405020304" pitchFamily="18" charset="0"/>
+              </a:rPr>
+              <a:t>Ограничения энтропийного метода</a:t>
+            </a:r>
+          </a:p>
+        </p:txBody>
+      </p:sp>
+      <p:sp>
+        <p:nvSpPr>
+          <p:cNvPr id="3" name="TextBox 2">
+            <a:extLst>
+              <a:ext uri="{FF2B5EF4-FFF2-40B4-BE49-F238E27FC236}">
+                <a16:creationId xmlns:a16="http://schemas.microsoft.com/office/drawing/2014/main" id="{5C119950-4F22-A952-AE41-BFD3A317FB05}"/>
+              </a:ext>
+            </a:extLst>
+          </p:cNvPr>
+          <p:cNvSpPr txBox="1"/>
+          <p:nvPr/>
+        </p:nvSpPr>
+        <p:spPr>
+          <a:xfrm>
+            <a:off x="387790" y="523220"/>
+            <a:ext cx="11416420" cy="665823"/>
+          </a:xfrm>
+          <a:prstGeom prst="rect">
+            <a:avLst/>
+          </a:prstGeom>
+          <a:noFill/>
+        </p:spPr>
+        <p:txBody>
+          <a:bodyPr wrap="square" rtlCol="0">
+            <a:spAutoFit/>
+          </a:bodyPr>
+          <a:lstStyle/>
+          <a:p>
+            <a:pPr>
+              <a:lnSpc>
+                <a:spcPct val="250000"/>
+              </a:lnSpc>
+            </a:pPr>
+            <a:r>
+              <a:rPr lang="ru-RU" b="1" dirty="0">
+                <a:latin typeface="Times New Roman" panose="02020603050405020304" pitchFamily="18" charset="0"/>
+                <a:cs typeface="Times New Roman" panose="02020603050405020304" pitchFamily="18" charset="0"/>
+              </a:rPr>
+              <a:t>Основное ограничение: </a:t>
+            </a:r>
+            <a:r>
+              <a:rPr lang="ru-RU" sz="1800" dirty="0">
+                <a:effectLst/>
+                <a:latin typeface="Times New Roman" panose="02020603050405020304" pitchFamily="18" charset="0"/>
+                <a:ea typeface="Calibri" panose="020F0502020204030204" pitchFamily="34" charset="0"/>
+              </a:rPr>
+              <a:t>склонность к консервативному выбору моделей (так называемая «перестраховка»)</a:t>
+            </a:r>
+            <a:endParaRPr lang="ru-RU" b="1" dirty="0">
+              <a:latin typeface="Times New Roman" panose="02020603050405020304" pitchFamily="18" charset="0"/>
+              <a:cs typeface="Times New Roman" panose="02020603050405020304" pitchFamily="18" charset="0"/>
+            </a:endParaRPr>
+          </a:p>
+        </p:txBody>
+      </p:sp>
+      <p:pic>
+        <p:nvPicPr>
+          <p:cNvPr id="4" name="Рисунок 3">
+            <a:extLst>
+              <a:ext uri="{FF2B5EF4-FFF2-40B4-BE49-F238E27FC236}">
+                <a16:creationId xmlns:a16="http://schemas.microsoft.com/office/drawing/2014/main" id="{109E51E8-1CEA-4008-B2F0-BE4B12E5DAED}"/>
+              </a:ext>
+            </a:extLst>
+          </p:cNvPr>
+          <p:cNvPicPr/>
+          <p:nvPr/>
+        </p:nvPicPr>
+        <p:blipFill>
+          <a:blip r:embed="rId2"/>
+          <a:stretch>
+            <a:fillRect/>
+          </a:stretch>
+        </p:blipFill>
+        <p:spPr>
+          <a:xfrm>
+            <a:off x="925743" y="1308501"/>
+            <a:ext cx="10340513" cy="4960965"/>
+          </a:xfrm>
+          <a:prstGeom prst="rect">
+            <a:avLst/>
+          </a:prstGeom>
+        </p:spPr>
+      </p:pic>
+      <p:sp>
+        <p:nvSpPr>
+          <p:cNvPr id="6" name="TextBox 5">
+            <a:extLst>
+              <a:ext uri="{FF2B5EF4-FFF2-40B4-BE49-F238E27FC236}">
+                <a16:creationId xmlns:a16="http://schemas.microsoft.com/office/drawing/2014/main" id="{B3ECE366-A848-4291-B57A-665B2B55E3BA}"/>
+              </a:ext>
+            </a:extLst>
+          </p:cNvPr>
+          <p:cNvSpPr txBox="1"/>
+          <p:nvPr/>
+        </p:nvSpPr>
+        <p:spPr>
+          <a:xfrm>
+            <a:off x="1517442" y="6334780"/>
+            <a:ext cx="9157114" cy="369332"/>
+          </a:xfrm>
+          <a:prstGeom prst="rect">
+            <a:avLst/>
+          </a:prstGeom>
+          <a:noFill/>
+        </p:spPr>
+        <p:txBody>
+          <a:bodyPr wrap="square">
+            <a:spAutoFit/>
+          </a:bodyPr>
+          <a:lstStyle/>
+          <a:p>
+            <a:r>
+              <a:rPr lang="ru-RU" sz="1800" dirty="0">
+                <a:effectLst/>
+                <a:latin typeface="Times New Roman" panose="02020603050405020304" pitchFamily="18" charset="0"/>
+                <a:ea typeface="DengXian" panose="02010600030101010101" pitchFamily="2" charset="-122"/>
+              </a:rPr>
+              <a:t>Рис. 6. Систематическое смещение подбора степени полинома в энтропийном подходе.</a:t>
+            </a:r>
+            <a:endParaRPr lang="ru-RU" dirty="0"/>
+          </a:p>
+        </p:txBody>
+      </p:sp>
+    </p:spTree>
+    <p:extLst>
+      <p:ext uri="{BB962C8B-B14F-4D97-AF65-F5344CB8AC3E}">
+        <p14:creationId xmlns:p14="http://schemas.microsoft.com/office/powerpoint/2010/main" val="2777467436"/>
+      </p:ext>
+    </p:extLst>
+  </p:cSld>
+  <p:clrMapOvr>
+    <a:masterClrMapping/>
+  </p:clrMapOvr>
+</p:sld>
+</file>
+
+<file path=ppt/slides/slide17.xml><?xml version="1.0" encoding="utf-8"?>
+<p:sld xmlns:a="http://schemas.openxmlformats.org/drawingml/2006/main" xmlns:r="http://schemas.openxmlformats.org/officeDocument/2006/relationships" xmlns:p="http://schemas.openxmlformats.org/presentationml/2006/main">
+  <p:cSld>
+    <p:spTree>
+      <p:nvGrpSpPr>
+        <p:cNvPr id="1" name="">
+          <a:extLst>
+            <a:ext uri="{FF2B5EF4-FFF2-40B4-BE49-F238E27FC236}">
+              <a16:creationId xmlns:a16="http://schemas.microsoft.com/office/drawing/2014/main" id="{37A17CF9-11BB-8E92-9837-8CEB23243A2C}"/>
+            </a:ext>
+          </a:extLst>
+        </p:cNvPr>
+        <p:cNvGrpSpPr/>
+        <p:nvPr/>
+      </p:nvGrpSpPr>
+      <p:grpSpPr>
+        <a:xfrm>
+          <a:off x="0" y="0"/>
+          <a:ext cx="0" cy="0"/>
+          <a:chOff x="0" y="0"/>
+          <a:chExt cx="0" cy="0"/>
+        </a:xfrm>
+      </p:grpSpPr>
+      <p:sp>
+        <p:nvSpPr>
+          <p:cNvPr id="2" name="TextBox 1">
+            <a:extLst>
+              <a:ext uri="{FF2B5EF4-FFF2-40B4-BE49-F238E27FC236}">
+                <a16:creationId xmlns:a16="http://schemas.microsoft.com/office/drawing/2014/main" id="{0D52EBD2-34A3-7824-147E-0C9CB9A9B380}"/>
+              </a:ext>
+            </a:extLst>
+          </p:cNvPr>
+          <p:cNvSpPr txBox="1"/>
+          <p:nvPr/>
+        </p:nvSpPr>
+        <p:spPr>
+          <a:xfrm>
+            <a:off x="5018237" y="0"/>
+            <a:ext cx="2155526" cy="523220"/>
+          </a:xfrm>
+          <a:prstGeom prst="rect">
+            <a:avLst/>
+          </a:prstGeom>
+          <a:noFill/>
+        </p:spPr>
+        <p:txBody>
+          <a:bodyPr wrap="none" rtlCol="0">
+            <a:spAutoFit/>
+          </a:bodyPr>
+          <a:lstStyle/>
+          <a:p>
+            <a:r>
+              <a:rPr lang="ru-RU" sz="2800" b="1" dirty="0">
+                <a:latin typeface="Times New Roman" panose="02020603050405020304" pitchFamily="18" charset="0"/>
+                <a:cs typeface="Times New Roman" panose="02020603050405020304" pitchFamily="18" charset="0"/>
+              </a:rPr>
+              <a:t>Заключение</a:t>
+            </a:r>
+          </a:p>
+        </p:txBody>
+      </p:sp>
+      <mc:AlternateContent xmlns:mc="http://schemas.openxmlformats.org/markup-compatibility/2006" xmlns:a14="http://schemas.microsoft.com/office/drawing/2010/main">
+        <mc:Choice Requires="a14">
+          <p:sp>
+            <p:nvSpPr>
+              <p:cNvPr id="3" name="TextBox 2">
+                <a:extLst>
+                  <a:ext uri="{FF2B5EF4-FFF2-40B4-BE49-F238E27FC236}">
+                    <a16:creationId xmlns:a16="http://schemas.microsoft.com/office/drawing/2014/main" id="{5C119950-4F22-A952-AE41-BFD3A317FB05}"/>
+                  </a:ext>
+                </a:extLst>
+              </p:cNvPr>
+              <p:cNvSpPr txBox="1"/>
+              <p:nvPr/>
+            </p:nvSpPr>
+            <p:spPr>
+              <a:xfrm>
+                <a:off x="387790" y="523220"/>
+                <a:ext cx="11416420" cy="4907113"/>
+              </a:xfrm>
+              <a:prstGeom prst="rect">
+                <a:avLst/>
+              </a:prstGeom>
+              <a:noFill/>
+            </p:spPr>
+            <p:txBody>
+              <a:bodyPr wrap="square" rtlCol="0">
+                <a:spAutoFit/>
+              </a:bodyPr>
+              <a:lstStyle/>
+              <a:p>
+                <a:pPr>
+                  <a:lnSpc>
+                    <a:spcPct val="250000"/>
+                  </a:lnSpc>
+                </a:pPr>
+                <a:r>
+                  <a:rPr lang="ru-RU" b="1" dirty="0">
+                    <a:latin typeface="Times New Roman" panose="02020603050405020304" pitchFamily="18" charset="0"/>
+                    <a:cs typeface="Times New Roman" panose="02020603050405020304" pitchFamily="18" charset="0"/>
+                  </a:rPr>
+                  <a:t>Выводы:</a:t>
+                </a:r>
+              </a:p>
+              <a:p>
+                <a:pPr marL="285750" indent="-285750">
+                  <a:lnSpc>
+                    <a:spcPct val="250000"/>
+                  </a:lnSpc>
+                  <a:buFont typeface="Arial" panose="020B0604020202020204" pitchFamily="34" charset="0"/>
+                  <a:buChar char="•"/>
+                </a:pPr>
+                <a:r>
+                  <a:rPr lang="ru-RU" dirty="0">
+                    <a:latin typeface="Times New Roman" panose="02020603050405020304" pitchFamily="18" charset="0"/>
+                    <a:cs typeface="Times New Roman" panose="02020603050405020304" pitchFamily="18" charset="0"/>
+                  </a:rPr>
+                  <a:t>Энтропийный метод с «мягкой» рандомизацией </a:t>
+                </a:r>
+                <a:r>
+                  <a:rPr lang="ru-RU" b="1" dirty="0">
+                    <a:latin typeface="Times New Roman" panose="02020603050405020304" pitchFamily="18" charset="0"/>
+                    <a:cs typeface="Times New Roman" panose="02020603050405020304" pitchFamily="18" charset="0"/>
+                  </a:rPr>
+                  <a:t>эффективен на малых выборках </a:t>
+                </a:r>
+                <a:r>
+                  <a:rPr lang="ru-RU" dirty="0">
+                    <a:latin typeface="Times New Roman" panose="02020603050405020304" pitchFamily="18" charset="0"/>
+                    <a:cs typeface="Times New Roman" panose="02020603050405020304" pitchFamily="18" charset="0"/>
+                  </a:rPr>
+                  <a:t>и </a:t>
+                </a:r>
+                <a:r>
+                  <a:rPr lang="ru-RU" b="1" dirty="0">
+                    <a:latin typeface="Times New Roman" panose="02020603050405020304" pitchFamily="18" charset="0"/>
+                    <a:cs typeface="Times New Roman" panose="02020603050405020304" pitchFamily="18" charset="0"/>
+                  </a:rPr>
+                  <a:t>робастен к распределению ошибок</a:t>
+                </a:r>
+                <a:r>
+                  <a:rPr lang="en-US" dirty="0">
+                    <a:latin typeface="Times New Roman" panose="02020603050405020304" pitchFamily="18" charset="0"/>
+                    <a:cs typeface="Times New Roman" panose="02020603050405020304" pitchFamily="18" charset="0"/>
+                  </a:rPr>
+                  <a:t>;</a:t>
+                </a:r>
+              </a:p>
+              <a:p>
+                <a:pPr marL="285750" indent="-285750">
+                  <a:lnSpc>
+                    <a:spcPct val="250000"/>
+                  </a:lnSpc>
+                  <a:buFont typeface="Arial" panose="020B0604020202020204" pitchFamily="34" charset="0"/>
+                  <a:buChar char="•"/>
+                </a:pPr>
+                <a:r>
+                  <a:rPr lang="ru-RU" dirty="0">
+                    <a:latin typeface="Times New Roman" panose="02020603050405020304" pitchFamily="18" charset="0"/>
+                    <a:cs typeface="Times New Roman" panose="02020603050405020304" pitchFamily="18" charset="0"/>
+                  </a:rPr>
+                  <a:t>На синтетических данных метод статистически значимо превосходит ядерную регрессию </a:t>
+                </a:r>
+                <a:r>
+                  <a:rPr lang="ru-RU" b="1" dirty="0">
+                    <a:latin typeface="Times New Roman" panose="02020603050405020304" pitchFamily="18" charset="0"/>
+                    <a:cs typeface="Times New Roman" panose="02020603050405020304" pitchFamily="18" charset="0"/>
+                  </a:rPr>
+                  <a:t>на уровне</a:t>
+                </a:r>
+                <a:r>
+                  <a:rPr lang="en-US" b="1" dirty="0">
+                    <a:latin typeface="Times New Roman" panose="02020603050405020304" pitchFamily="18" charset="0"/>
+                    <a:cs typeface="Times New Roman" panose="02020603050405020304" pitchFamily="18" charset="0"/>
+                  </a:rPr>
+                  <a:t> </a:t>
+                </a:r>
+                <a:r>
+                  <a:rPr lang="ru-RU" b="1" dirty="0">
+                    <a:latin typeface="Times New Roman" panose="02020603050405020304" pitchFamily="18" charset="0"/>
+                    <a:cs typeface="Times New Roman" panose="02020603050405020304" pitchFamily="18" charset="0"/>
+                  </a:rPr>
+                  <a:t>значимости </a:t>
+                </a:r>
+                <a14:m>
+                  <m:oMath xmlns:m="http://schemas.openxmlformats.org/officeDocument/2006/math">
+                    <m:r>
+                      <a:rPr lang="ru-RU" b="1" i="1" smtClean="0">
+                        <a:latin typeface="Cambria Math" panose="02040503050406030204" pitchFamily="18" charset="0"/>
+                      </a:rPr>
+                      <m:t>𝟎</m:t>
+                    </m:r>
+                    <m:r>
+                      <a:rPr lang="ru-RU" b="1" i="1" smtClean="0">
+                        <a:latin typeface="Cambria Math" panose="02040503050406030204" pitchFamily="18" charset="0"/>
+                      </a:rPr>
+                      <m:t>,</m:t>
+                    </m:r>
+                    <m:r>
+                      <a:rPr lang="ru-RU" b="1" i="1" smtClean="0">
+                        <a:latin typeface="Cambria Math" panose="02040503050406030204" pitchFamily="18" charset="0"/>
+                      </a:rPr>
+                      <m:t>𝟏</m:t>
+                    </m:r>
+                    <m:r>
+                      <a:rPr lang="ru-RU" b="1" i="1" smtClean="0">
+                        <a:latin typeface="Cambria Math" panose="02040503050406030204" pitchFamily="18" charset="0"/>
+                      </a:rPr>
+                      <m:t>% </m:t>
+                    </m:r>
+                  </m:oMath>
+                </a14:m>
+                <a:r>
+                  <a:rPr lang="ru-RU" dirty="0">
+                    <a:latin typeface="Times New Roman" panose="02020603050405020304" pitchFamily="18" charset="0"/>
+                    <a:cs typeface="Times New Roman" panose="02020603050405020304" pitchFamily="18" charset="0"/>
+                  </a:rPr>
+                  <a:t>в подавляющем большинстве конфигураций</a:t>
+                </a:r>
+                <a:r>
+                  <a:rPr lang="en-US" dirty="0">
+                    <a:latin typeface="Times New Roman" panose="02020603050405020304" pitchFamily="18" charset="0"/>
+                    <a:cs typeface="Times New Roman" panose="02020603050405020304" pitchFamily="18" charset="0"/>
+                  </a:rPr>
+                  <a:t>;</a:t>
+                </a:r>
+              </a:p>
+              <a:p>
+                <a:pPr marL="285750" indent="-285750">
+                  <a:lnSpc>
+                    <a:spcPct val="250000"/>
+                  </a:lnSpc>
+                  <a:buFont typeface="Arial" panose="020B0604020202020204" pitchFamily="34" charset="0"/>
+                  <a:buChar char="•"/>
+                </a:pPr>
+                <a:r>
+                  <a:rPr lang="ru-RU" b="0" i="0" dirty="0">
+                    <a:solidFill>
+                      <a:srgbClr val="1D1D1F"/>
+                    </a:solidFill>
+                    <a:effectLst/>
+                    <a:latin typeface="Times New Roman" panose="02020603050405020304" pitchFamily="18" charset="0"/>
+                    <a:cs typeface="Times New Roman" panose="02020603050405020304" pitchFamily="18" charset="0"/>
+                  </a:rPr>
+                  <a:t>На реальных данных метод конкурентоспособен, уступая лишь на 3–4% в задачах с большой выборкой;</a:t>
+                </a:r>
+              </a:p>
+              <a:p>
+                <a:pPr marL="285750" indent="-285750">
+                  <a:lnSpc>
+                    <a:spcPct val="250000"/>
+                  </a:lnSpc>
+                  <a:buFont typeface="Arial" panose="020B0604020202020204" pitchFamily="34" charset="0"/>
+                  <a:buChar char="•"/>
+                </a:pPr>
+                <a:r>
+                  <a:rPr lang="ru-RU" dirty="0">
+                    <a:latin typeface="Times New Roman" panose="02020603050405020304" pitchFamily="18" charset="0"/>
+                    <a:cs typeface="Times New Roman" panose="02020603050405020304" pitchFamily="18" charset="0"/>
+                  </a:rPr>
+                  <a:t>Наибольший выигрыш для </a:t>
+                </a:r>
+                <a:r>
+                  <a:rPr lang="ru-RU" b="1" dirty="0">
+                    <a:latin typeface="Times New Roman" panose="02020603050405020304" pitchFamily="18" charset="0"/>
+                    <a:cs typeface="Times New Roman" panose="02020603050405020304" pitchFamily="18" charset="0"/>
+                  </a:rPr>
+                  <a:t>низкого уровня шума </a:t>
+                </a:r>
+                <a14:m>
+                  <m:oMath xmlns:m="http://schemas.openxmlformats.org/officeDocument/2006/math">
+                    <m:d>
+                      <m:dPr>
+                        <m:ctrlPr>
+                          <a:rPr lang="en-US" b="1" i="1" smtClean="0">
+                            <a:latin typeface="Cambria Math" panose="02040503050406030204" pitchFamily="18" charset="0"/>
+                          </a:rPr>
+                        </m:ctrlPr>
+                      </m:dPr>
+                      <m:e>
+                        <m:sSup>
+                          <m:sSupPr>
+                            <m:ctrlPr>
+                              <a:rPr lang="en-US" b="1" i="1" smtClean="0">
+                                <a:latin typeface="Cambria Math" panose="02040503050406030204" pitchFamily="18" charset="0"/>
+                              </a:rPr>
+                            </m:ctrlPr>
+                          </m:sSupPr>
+                          <m:e>
+                            <m:r>
+                              <a:rPr lang="en-US" b="1" i="1" smtClean="0">
+                                <a:latin typeface="Cambria Math" panose="02040503050406030204" pitchFamily="18" charset="0"/>
+                              </a:rPr>
+                              <m:t>𝑹</m:t>
+                            </m:r>
+                          </m:e>
+                          <m:sup>
+                            <m:r>
+                              <a:rPr lang="en-US" b="1" i="1" smtClean="0">
+                                <a:latin typeface="Cambria Math" panose="02040503050406030204" pitchFamily="18" charset="0"/>
+                              </a:rPr>
+                              <m:t>𝟐</m:t>
+                            </m:r>
+                          </m:sup>
+                        </m:sSup>
+                        <m:r>
+                          <a:rPr lang="en-US" b="1" i="1" smtClean="0">
+                            <a:latin typeface="Cambria Math" panose="02040503050406030204" pitchFamily="18" charset="0"/>
+                          </a:rPr>
+                          <m:t>=</m:t>
+                        </m:r>
+                        <m:r>
+                          <a:rPr lang="en-US" b="1" i="1" smtClean="0">
+                            <a:latin typeface="Cambria Math" panose="02040503050406030204" pitchFamily="18" charset="0"/>
+                          </a:rPr>
+                          <m:t>𝟎</m:t>
+                        </m:r>
+                        <m:r>
+                          <a:rPr lang="en-US" b="1" i="1" smtClean="0">
+                            <a:latin typeface="Cambria Math" panose="02040503050406030204" pitchFamily="18" charset="0"/>
+                          </a:rPr>
+                          <m:t>.</m:t>
+                        </m:r>
+                        <m:r>
+                          <a:rPr lang="en-US" b="1" i="1" smtClean="0">
+                            <a:latin typeface="Cambria Math" panose="02040503050406030204" pitchFamily="18" charset="0"/>
+                          </a:rPr>
+                          <m:t>𝟗𝟓</m:t>
+                        </m:r>
+                      </m:e>
+                    </m:d>
+                  </m:oMath>
+                </a14:m>
+                <a:r>
+                  <a:rPr lang="ru-RU" b="1" dirty="0">
+                    <a:latin typeface="Times New Roman" panose="02020603050405020304" pitchFamily="18" charset="0"/>
+                    <a:cs typeface="Times New Roman" panose="02020603050405020304" pitchFamily="18" charset="0"/>
+                  </a:rPr>
+                  <a:t> </a:t>
+                </a:r>
+                <a:r>
+                  <a:rPr lang="ru-RU" dirty="0">
+                    <a:latin typeface="Times New Roman" panose="02020603050405020304" pitchFamily="18" charset="0"/>
+                    <a:cs typeface="Times New Roman" panose="02020603050405020304" pitchFamily="18" charset="0"/>
+                  </a:rPr>
+                  <a:t>и</a:t>
+                </a:r>
+                <a:r>
+                  <a:rPr lang="ru-RU" b="1" dirty="0">
+                    <a:latin typeface="Times New Roman" panose="02020603050405020304" pitchFamily="18" charset="0"/>
+                    <a:cs typeface="Times New Roman" panose="02020603050405020304" pitchFamily="18" charset="0"/>
+                  </a:rPr>
+                  <a:t> полиномов низкой степени</a:t>
+                </a:r>
+                <a:r>
+                  <a:rPr lang="ru-RU" dirty="0">
+                    <a:latin typeface="Times New Roman" panose="02020603050405020304" pitchFamily="18" charset="0"/>
+                    <a:cs typeface="Times New Roman" panose="02020603050405020304" pitchFamily="18" charset="0"/>
+                  </a:rPr>
+                  <a:t> </a:t>
+                </a:r>
+                <a:r>
+                  <a:rPr lang="ru-RU" b="1" dirty="0">
+                    <a:latin typeface="Times New Roman" panose="02020603050405020304" pitchFamily="18" charset="0"/>
+                    <a:cs typeface="Times New Roman" panose="02020603050405020304" pitchFamily="18" charset="0"/>
+                  </a:rPr>
+                  <a:t>(</a:t>
+                </a:r>
+                <a:r>
+                  <a:rPr lang="en-US" b="1" dirty="0">
+                    <a:latin typeface="Times New Roman" panose="02020603050405020304" pitchFamily="18" charset="0"/>
+                    <a:cs typeface="Times New Roman" panose="02020603050405020304" pitchFamily="18" charset="0"/>
+                  </a:rPr>
+                  <a:t>2-3</a:t>
+                </a:r>
+                <a:r>
+                  <a:rPr lang="ru-RU" b="1" dirty="0">
+                    <a:latin typeface="Times New Roman" panose="02020603050405020304" pitchFamily="18" charset="0"/>
+                    <a:cs typeface="Times New Roman" panose="02020603050405020304" pitchFamily="18" charset="0"/>
+                  </a:rPr>
+                  <a:t>)</a:t>
+                </a:r>
+                <a:r>
+                  <a:rPr lang="ru-RU" dirty="0">
+                    <a:latin typeface="Times New Roman" panose="02020603050405020304" pitchFamily="18" charset="0"/>
+                    <a:cs typeface="Times New Roman" panose="02020603050405020304" pitchFamily="18" charset="0"/>
+                  </a:rPr>
+                  <a:t>.</a:t>
+                </a:r>
+              </a:p>
+            </p:txBody>
+          </p:sp>
+        </mc:Choice>
+        <mc:Fallback xmlns="">
+          <p:sp>
+            <p:nvSpPr>
+              <p:cNvPr id="3" name="TextBox 2">
+                <a:extLst>
+                  <a:ext uri="{FF2B5EF4-FFF2-40B4-BE49-F238E27FC236}">
+                    <a16:creationId xmlns:a16="http://schemas.microsoft.com/office/drawing/2014/main" id="{5C119950-4F22-A952-AE41-BFD3A317FB05}"/>
+                  </a:ext>
+                </a:extLst>
+              </p:cNvPr>
+              <p:cNvSpPr txBox="1">
+                <a:spLocks noRot="1" noChangeAspect="1" noMove="1" noResize="1" noEditPoints="1" noAdjustHandles="1" noChangeArrowheads="1" noChangeShapeType="1" noTextEdit="1"/>
+              </p:cNvSpPr>
+              <p:nvPr/>
+            </p:nvSpPr>
+            <p:spPr>
+              <a:xfrm>
+                <a:off x="387790" y="523220"/>
+                <a:ext cx="11416420" cy="4907113"/>
+              </a:xfrm>
+              <a:prstGeom prst="rect">
+                <a:avLst/>
+              </a:prstGeom>
+              <a:blipFill>
+                <a:blip r:embed="rId2"/>
+                <a:stretch>
+                  <a:fillRect l="-481" b="-621"/>
+                </a:stretch>
+              </a:blipFill>
+            </p:spPr>
+            <p:txBody>
+              <a:bodyPr/>
+              <a:lstStyle/>
+              <a:p>
+                <a:r>
+                  <a:rPr lang="ru-RU">
+                    <a:noFill/>
+                  </a:rPr>
+                  <a:t> </a:t>
+                </a:r>
+              </a:p>
+            </p:txBody>
+          </p:sp>
+        </mc:Fallback>
+      </mc:AlternateContent>
+    </p:spTree>
+    <p:extLst>
+      <p:ext uri="{BB962C8B-B14F-4D97-AF65-F5344CB8AC3E}">
+        <p14:creationId xmlns:p14="http://schemas.microsoft.com/office/powerpoint/2010/main" val="4081014741"/>
+      </p:ext>
+    </p:extLst>
+  </p:cSld>
+  <p:clrMapOvr>
+    <a:masterClrMapping/>
+  </p:clrMapOvr>
+</p:sld>
+</file>
+
+<file path=ppt/slides/slide18.xml><?xml version="1.0" encoding="utf-8"?>
+<p:sld xmlns:a="http://schemas.openxmlformats.org/drawingml/2006/main" xmlns:r="http://schemas.openxmlformats.org/officeDocument/2006/relationships" xmlns:p="http://schemas.openxmlformats.org/presentationml/2006/main">
+  <p:cSld>
+    <p:spTree>
+      <p:nvGrpSpPr>
+        <p:cNvPr id="1" name="">
+          <a:extLst>
+            <a:ext uri="{FF2B5EF4-FFF2-40B4-BE49-F238E27FC236}">
+              <a16:creationId xmlns:a16="http://schemas.microsoft.com/office/drawing/2014/main" id="{37A17CF9-11BB-8E92-9837-8CEB23243A2C}"/>
+            </a:ext>
+          </a:extLst>
+        </p:cNvPr>
+        <p:cNvGrpSpPr/>
+        <p:nvPr/>
+      </p:nvGrpSpPr>
+      <p:grpSpPr>
+        <a:xfrm>
+          <a:off x="0" y="0"/>
+          <a:ext cx="0" cy="0"/>
+          <a:chOff x="0" y="0"/>
+          <a:chExt cx="0" cy="0"/>
+        </a:xfrm>
+      </p:grpSpPr>
+      <p:sp>
+        <p:nvSpPr>
+          <p:cNvPr id="2" name="TextBox 1">
+            <a:extLst>
+              <a:ext uri="{FF2B5EF4-FFF2-40B4-BE49-F238E27FC236}">
+                <a16:creationId xmlns:a16="http://schemas.microsoft.com/office/drawing/2014/main" id="{0D52EBD2-34A3-7824-147E-0C9CB9A9B380}"/>
+              </a:ext>
+            </a:extLst>
+          </p:cNvPr>
+          <p:cNvSpPr txBox="1"/>
+          <p:nvPr/>
+        </p:nvSpPr>
+        <p:spPr>
+          <a:xfrm>
+            <a:off x="4094490" y="0"/>
+            <a:ext cx="4003019" cy="523220"/>
+          </a:xfrm>
+          <a:prstGeom prst="rect">
+            <a:avLst/>
+          </a:prstGeom>
+          <a:noFill/>
+        </p:spPr>
+        <p:txBody>
+          <a:bodyPr wrap="none" rtlCol="0">
+            <a:spAutoFit/>
+          </a:bodyPr>
+          <a:lstStyle/>
+          <a:p>
+            <a:r>
+              <a:rPr lang="ru-RU" sz="2800" b="1" dirty="0">
+                <a:latin typeface="Times New Roman" panose="02020603050405020304" pitchFamily="18" charset="0"/>
+                <a:cs typeface="Times New Roman" panose="02020603050405020304" pitchFamily="18" charset="0"/>
+              </a:rPr>
+              <a:t>Перспективы развития</a:t>
+            </a:r>
+          </a:p>
+        </p:txBody>
+      </p:sp>
+      <p:sp>
+        <p:nvSpPr>
+          <p:cNvPr id="3" name="TextBox 2">
+            <a:extLst>
+              <a:ext uri="{FF2B5EF4-FFF2-40B4-BE49-F238E27FC236}">
+                <a16:creationId xmlns:a16="http://schemas.microsoft.com/office/drawing/2014/main" id="{5C119950-4F22-A952-AE41-BFD3A317FB05}"/>
+              </a:ext>
+            </a:extLst>
+          </p:cNvPr>
+          <p:cNvSpPr txBox="1"/>
+          <p:nvPr/>
+        </p:nvSpPr>
+        <p:spPr>
+          <a:xfrm>
+            <a:off x="387790" y="523220"/>
+            <a:ext cx="11416420" cy="3441135"/>
+          </a:xfrm>
+          <a:prstGeom prst="rect">
+            <a:avLst/>
+          </a:prstGeom>
+          <a:noFill/>
+        </p:spPr>
+        <p:txBody>
+          <a:bodyPr wrap="square" rtlCol="0">
+            <a:spAutoFit/>
+          </a:bodyPr>
+          <a:lstStyle/>
+          <a:p>
+            <a:pPr>
+              <a:lnSpc>
+                <a:spcPct val="250000"/>
+              </a:lnSpc>
+            </a:pPr>
+            <a:r>
+              <a:rPr lang="ru-RU" b="1" dirty="0">
+                <a:latin typeface="Times New Roman" panose="02020603050405020304" pitchFamily="18" charset="0"/>
+                <a:cs typeface="Times New Roman" panose="02020603050405020304" pitchFamily="18" charset="0"/>
+              </a:rPr>
+              <a:t>Возможные направления:</a:t>
+            </a:r>
+          </a:p>
+          <a:p>
+            <a:pPr marL="285750" indent="-285750">
+              <a:lnSpc>
+                <a:spcPct val="250000"/>
+              </a:lnSpc>
+              <a:buFont typeface="Arial" panose="020B0604020202020204" pitchFamily="34" charset="0"/>
+              <a:buChar char="•"/>
+            </a:pPr>
+            <a:r>
+              <a:rPr lang="ru-RU" b="0" i="0" dirty="0">
+                <a:solidFill>
+                  <a:srgbClr val="1D1D1F"/>
+                </a:solidFill>
+                <a:effectLst/>
+                <a:latin typeface="Times New Roman" panose="02020603050405020304" pitchFamily="18" charset="0"/>
+                <a:cs typeface="Times New Roman" panose="02020603050405020304" pitchFamily="18" charset="0"/>
+              </a:rPr>
+              <a:t>Разработка </a:t>
+            </a:r>
+            <a:r>
+              <a:rPr lang="ru-RU" b="1" i="0" dirty="0">
+                <a:solidFill>
+                  <a:srgbClr val="1D1D1F"/>
+                </a:solidFill>
+                <a:effectLst/>
+                <a:latin typeface="Times New Roman" panose="02020603050405020304" pitchFamily="18" charset="0"/>
+                <a:cs typeface="Times New Roman" panose="02020603050405020304" pitchFamily="18" charset="0"/>
+              </a:rPr>
+              <a:t>гибридного подхода</a:t>
+            </a:r>
+            <a:r>
+              <a:rPr lang="ru-RU" b="0" i="0" dirty="0">
+                <a:solidFill>
+                  <a:srgbClr val="1D1D1F"/>
+                </a:solidFill>
+                <a:effectLst/>
+                <a:latin typeface="Times New Roman" panose="02020603050405020304" pitchFamily="18" charset="0"/>
+                <a:cs typeface="Times New Roman" panose="02020603050405020304" pitchFamily="18" charset="0"/>
+              </a:rPr>
+              <a:t>, сочетающего устойчивость энтропийного метода и гибкость ядерного сглаживания</a:t>
+            </a:r>
+            <a:r>
+              <a:rPr lang="en-US" dirty="0">
+                <a:latin typeface="Times New Roman" panose="02020603050405020304" pitchFamily="18" charset="0"/>
+                <a:cs typeface="Times New Roman" panose="02020603050405020304" pitchFamily="18" charset="0"/>
+              </a:rPr>
+              <a:t>;</a:t>
+            </a:r>
+          </a:p>
+          <a:p>
+            <a:pPr marL="285750" indent="-285750">
+              <a:lnSpc>
+                <a:spcPct val="250000"/>
+              </a:lnSpc>
+              <a:buFont typeface="Arial" panose="020B0604020202020204" pitchFamily="34" charset="0"/>
+              <a:buChar char="•"/>
+            </a:pPr>
+            <a:r>
+              <a:rPr lang="ru-RU" dirty="0">
+                <a:latin typeface="Times New Roman" panose="02020603050405020304" pitchFamily="18" charset="0"/>
+                <a:cs typeface="Times New Roman" panose="02020603050405020304" pitchFamily="18" charset="0"/>
+              </a:rPr>
+              <a:t>Оптимизация вычислительной сложности для работы с многомерными данными</a:t>
+            </a:r>
+            <a:r>
+              <a:rPr lang="en-US" dirty="0">
+                <a:latin typeface="Times New Roman" panose="02020603050405020304" pitchFamily="18" charset="0"/>
+                <a:cs typeface="Times New Roman" panose="02020603050405020304" pitchFamily="18" charset="0"/>
+              </a:rPr>
+              <a:t>;</a:t>
+            </a:r>
+          </a:p>
+          <a:p>
+            <a:pPr marL="285750" indent="-285750">
+              <a:lnSpc>
+                <a:spcPct val="250000"/>
+              </a:lnSpc>
+              <a:buFont typeface="Arial" panose="020B0604020202020204" pitchFamily="34" charset="0"/>
+              <a:buChar char="•"/>
+            </a:pPr>
+            <a:r>
+              <a:rPr lang="ru-RU" b="0" i="0" dirty="0">
+                <a:solidFill>
+                  <a:srgbClr val="1D1D1F"/>
+                </a:solidFill>
+                <a:effectLst/>
+                <a:latin typeface="Times New Roman" panose="02020603050405020304" pitchFamily="18" charset="0"/>
+                <a:cs typeface="Times New Roman" panose="02020603050405020304" pitchFamily="18" charset="0"/>
+              </a:rPr>
+              <a:t>Расширение класса </a:t>
+            </a:r>
+            <a:r>
+              <a:rPr lang="ru-RU" b="0" i="0" dirty="0" err="1">
+                <a:solidFill>
+                  <a:srgbClr val="1D1D1F"/>
+                </a:solidFill>
+                <a:effectLst/>
+                <a:latin typeface="Times New Roman" panose="02020603050405020304" pitchFamily="18" charset="0"/>
+                <a:cs typeface="Times New Roman" panose="02020603050405020304" pitchFamily="18" charset="0"/>
+              </a:rPr>
+              <a:t>параметризаций</a:t>
+            </a:r>
+            <a:r>
+              <a:rPr lang="ru-RU" b="0" i="0" dirty="0">
+                <a:solidFill>
+                  <a:srgbClr val="1D1D1F"/>
+                </a:solidFill>
+                <a:effectLst/>
+                <a:latin typeface="Times New Roman" panose="02020603050405020304" pitchFamily="18" charset="0"/>
+                <a:cs typeface="Times New Roman" panose="02020603050405020304" pitchFamily="18" charset="0"/>
+              </a:rPr>
+              <a:t> (сплайны, базисные функции)</a:t>
+            </a:r>
+            <a:r>
+              <a:rPr lang="ru-RU" dirty="0">
+                <a:solidFill>
+                  <a:srgbClr val="1D1D1F"/>
+                </a:solidFill>
+                <a:latin typeface="Times New Roman" panose="02020603050405020304" pitchFamily="18" charset="0"/>
+                <a:cs typeface="Times New Roman" panose="02020603050405020304" pitchFamily="18" charset="0"/>
+              </a:rPr>
+              <a:t>.</a:t>
+            </a:r>
+            <a:endParaRPr lang="ru-RU" b="0" i="0" dirty="0">
+              <a:solidFill>
+                <a:srgbClr val="1D1D1F"/>
+              </a:solidFill>
+              <a:effectLst/>
+              <a:latin typeface="Times New Roman" panose="02020603050405020304" pitchFamily="18" charset="0"/>
+              <a:cs typeface="Times New Roman" panose="02020603050405020304" pitchFamily="18" charset="0"/>
+            </a:endParaRPr>
+          </a:p>
+        </p:txBody>
+      </p:sp>
+    </p:spTree>
+    <p:extLst>
+      <p:ext uri="{BB962C8B-B14F-4D97-AF65-F5344CB8AC3E}">
+        <p14:creationId xmlns:p14="http://schemas.microsoft.com/office/powerpoint/2010/main" val="2272045682"/>
+      </p:ext>
+    </p:extLst>
+  </p:cSld>
+  <p:clrMapOvr>
+    <a:masterClrMapping/>
+  </p:clrMapOvr>
+</p:sld>
+</file>
+
+<file path=ppt/slides/slide19.xml><?xml version="1.0" encoding="utf-8"?>
+<p:sld xmlns:a="http://schemas.openxmlformats.org/drawingml/2006/main" xmlns:r="http://schemas.openxmlformats.org/officeDocument/2006/relationships" xmlns:p="http://schemas.openxmlformats.org/presentationml/2006/main">
+  <p:cSld>
+    <p:bg>
+      <p:bgPr>
+        <a:solidFill>
+          <a:schemeClr val="accent2"/>
+        </a:solidFill>
+        <a:effectLst/>
+      </p:bgPr>
+    </p:bg>
+    <p:spTree>
+      <p:nvGrpSpPr>
+        <p:cNvPr id="1" name="">
+          <a:extLst>
+            <a:ext uri="{FF2B5EF4-FFF2-40B4-BE49-F238E27FC236}">
+              <a16:creationId xmlns:a16="http://schemas.microsoft.com/office/drawing/2014/main" id="{07F67235-B120-5DC2-02D3-EDE466B4EA3C}"/>
+            </a:ext>
+          </a:extLst>
+        </p:cNvPr>
+        <p:cNvGrpSpPr/>
+        <p:nvPr/>
+      </p:nvGrpSpPr>
+      <p:grpSpPr>
+        <a:xfrm>
+          <a:off x="0" y="0"/>
+          <a:ext cx="0" cy="0"/>
+          <a:chOff x="0" y="0"/>
+          <a:chExt cx="0" cy="0"/>
+        </a:xfrm>
+      </p:grpSpPr>
+      <p:sp>
+        <p:nvSpPr>
+          <p:cNvPr id="8" name="Rectangle 7">
+            <a:extLst>
+              <a:ext uri="{FF2B5EF4-FFF2-40B4-BE49-F238E27FC236}">
+                <a16:creationId xmlns:a16="http://schemas.microsoft.com/office/drawing/2014/main" id="{2CD6835F-F652-25A6-F645-2290179685E3}"/>
+              </a:ext>
+              <a:ext uri="{C183D7F6-B498-43B3-948B-1728B52AA6E4}">
+                <adec:decorative xmlns:adec="http://schemas.microsoft.com/office/drawing/2017/decorative" val="1"/>
+              </a:ext>
+            </a:extLst>
+          </p:cNvPr>
+          <p:cNvSpPr>
+            <a:spLocks noGrp="1" noRot="1" noChangeAspect="1" noMove="1" noResize="1" noEditPoints="1" noAdjustHandles="1" noChangeArrowheads="1" noChangeShapeType="1" noTextEdit="1"/>
+          </p:cNvSpPr>
+          <p:nvPr>
+            <p:extLst>
+              <p:ext uri="{386F3935-93C4-4BCD-93E2-E3B085C9AB24}">
+                <p16:designElem xmlns:p16="http://schemas.microsoft.com/office/powerpoint/2015/main" val="1"/>
+              </p:ext>
+            </p:extLst>
+          </p:nvPr>
+        </p:nvSpPr>
+        <p:spPr>
+          <a:xfrm>
+            <a:off x="640068" y="640080"/>
+            <a:ext cx="10911865" cy="4626864"/>
+          </a:xfrm>
+          <a:prstGeom prst="rect">
+            <a:avLst/>
+          </a:prstGeom>
+          <a:noFill/>
+          <a:ln w="31750" cap="sq">
+            <a:solidFill>
+              <a:srgbClr val="FFFFFF"/>
+            </a:solidFill>
+            <a:miter lim="800000"/>
+          </a:ln>
+        </p:spPr>
+        <p:style>
+          <a:lnRef idx="2">
+            <a:schemeClr val="accent1">
+              <a:shade val="50000"/>
+            </a:schemeClr>
+          </a:lnRef>
+          <a:fillRef idx="1">
+            <a:schemeClr val="accent1"/>
+          </a:fillRef>
+          <a:effectRef idx="0">
+            <a:schemeClr val="accent1"/>
+          </a:effectRef>
+          <a:fontRef idx="minor">
+            <a:schemeClr val="lt1"/>
+          </a:fontRef>
+        </p:style>
+        <p:txBody>
+          <a:bodyPr rtlCol="0" anchor="ctr"/>
+          <a:lstStyle/>
+          <a:p>
+            <a:pPr marL="0" marR="0" lvl="0" indent="0" algn="ctr" defTabSz="457200" rtl="0" eaLnBrk="1" fontAlgn="auto" latinLnBrk="0" hangingPunct="1">
+              <a:lnSpc>
+                <a:spcPct val="100000"/>
+              </a:lnSpc>
+              <a:spcBef>
+                <a:spcPts val="0"/>
+              </a:spcBef>
+              <a:spcAft>
+                <a:spcPts val="0"/>
+              </a:spcAft>
+              <a:buClrTx/>
+              <a:buSzTx/>
+              <a:buFontTx/>
+              <a:buNone/>
+              <a:tabLst/>
+              <a:defRPr/>
+            </a:pPr>
+            <a:endParaRPr kumimoji="0" lang="en-US" sz="1800" b="0" i="0" u="none" strike="noStrike" kern="1200" cap="none" spc="0" normalizeH="0" baseline="0" noProof="0" dirty="0">
+              <a:ln>
+                <a:noFill/>
+              </a:ln>
+              <a:solidFill>
+                <a:srgbClr val="FFFFFF"/>
+              </a:solidFill>
+              <a:effectLst/>
+              <a:uLnTx/>
+              <a:uFillTx/>
+              <a:latin typeface="Gill Sans MT" panose="020B0502020104020203"/>
+              <a:ea typeface="+mn-ea"/>
+              <a:cs typeface="+mn-cs"/>
+            </a:endParaRPr>
+          </a:p>
+        </p:txBody>
+      </p:sp>
+      <p:sp>
+        <p:nvSpPr>
+          <p:cNvPr id="10" name="Rectangle 9">
+            <a:extLst>
+              <a:ext uri="{FF2B5EF4-FFF2-40B4-BE49-F238E27FC236}">
+                <a16:creationId xmlns:a16="http://schemas.microsoft.com/office/drawing/2014/main" id="{9612F587-5BFE-2158-1B6E-84D728510F17}"/>
+              </a:ext>
+              <a:ext uri="{C183D7F6-B498-43B3-948B-1728B52AA6E4}">
+                <adec:decorative xmlns:adec="http://schemas.microsoft.com/office/drawing/2017/decorative" val="1"/>
+              </a:ext>
+            </a:extLst>
+          </p:cNvPr>
+          <p:cNvSpPr>
+            <a:spLocks noGrp="1" noRot="1" noChangeAspect="1" noMove="1" noResize="1" noEditPoints="1" noAdjustHandles="1" noChangeArrowheads="1" noChangeShapeType="1" noTextEdit="1"/>
+          </p:cNvSpPr>
+          <p:nvPr>
+            <p:extLst>
+              <p:ext uri="{386F3935-93C4-4BCD-93E2-E3B085C9AB24}">
+                <p16:designElem xmlns:p16="http://schemas.microsoft.com/office/powerpoint/2015/main" val="1"/>
+              </p:ext>
+            </p:extLst>
+          </p:nvPr>
+        </p:nvSpPr>
+        <p:spPr>
+          <a:xfrm>
+            <a:off x="806196" y="804672"/>
+            <a:ext cx="10579608" cy="4297680"/>
+          </a:xfrm>
+          <a:prstGeom prst="rect">
+            <a:avLst/>
+          </a:prstGeom>
+          <a:solidFill>
+            <a:srgbClr val="FFFFFF"/>
+          </a:solidFill>
+          <a:ln>
+            <a:noFill/>
+          </a:ln>
+        </p:spPr>
+        <p:style>
+          <a:lnRef idx="2">
+            <a:schemeClr val="accent1">
+              <a:shade val="50000"/>
+            </a:schemeClr>
+          </a:lnRef>
+          <a:fillRef idx="1">
+            <a:schemeClr val="accent1"/>
+          </a:fillRef>
+          <a:effectRef idx="0">
+            <a:schemeClr val="accent1"/>
+          </a:effectRef>
+          <a:fontRef idx="minor">
+            <a:schemeClr val="lt1"/>
+          </a:fontRef>
+        </p:style>
+        <p:txBody>
+          <a:bodyPr rtlCol="0" anchor="ctr"/>
+          <a:lstStyle/>
+          <a:p>
+            <a:pPr marL="0" marR="0" lvl="0" indent="0" algn="ctr" defTabSz="457200" rtl="0" eaLnBrk="1" fontAlgn="auto" latinLnBrk="0" hangingPunct="1">
+              <a:lnSpc>
+                <a:spcPct val="100000"/>
+              </a:lnSpc>
+              <a:spcBef>
+                <a:spcPts val="0"/>
+              </a:spcBef>
+              <a:spcAft>
+                <a:spcPts val="0"/>
+              </a:spcAft>
+              <a:buClrTx/>
+              <a:buSzTx/>
+              <a:buFontTx/>
+              <a:buNone/>
+              <a:tabLst/>
+              <a:defRPr/>
+            </a:pPr>
+            <a:endParaRPr kumimoji="0" lang="en-US" sz="1800" b="0" i="0" u="none" strike="noStrike" kern="1200" cap="none" spc="0" normalizeH="0" baseline="0" noProof="0">
+              <a:ln>
+                <a:noFill/>
+              </a:ln>
+              <a:solidFill>
+                <a:srgbClr val="FFFFFF"/>
+              </a:solidFill>
+              <a:effectLst/>
+              <a:uLnTx/>
+              <a:uFillTx/>
+              <a:latin typeface="Gill Sans MT" panose="020B0502020104020203"/>
+              <a:ea typeface="+mn-ea"/>
+              <a:cs typeface="+mn-cs"/>
+            </a:endParaRPr>
+          </a:p>
+        </p:txBody>
+      </p:sp>
+      <p:sp>
+        <p:nvSpPr>
+          <p:cNvPr id="2" name="Заголовок 1">
+            <a:extLst>
+              <a:ext uri="{FF2B5EF4-FFF2-40B4-BE49-F238E27FC236}">
+                <a16:creationId xmlns:a16="http://schemas.microsoft.com/office/drawing/2014/main" id="{2ABE410B-DACE-F062-AFA8-296F905A2251}"/>
+              </a:ext>
+            </a:extLst>
+          </p:cNvPr>
+          <p:cNvSpPr>
+            <a:spLocks noGrp="1"/>
+          </p:cNvSpPr>
+          <p:nvPr>
+            <p:ph type="title"/>
+          </p:nvPr>
+        </p:nvSpPr>
+        <p:spPr>
+          <a:xfrm>
+            <a:off x="1262729" y="1289303"/>
+            <a:ext cx="9638443" cy="3339303"/>
+          </a:xfrm>
+          <a:ln>
+            <a:noFill/>
+          </a:ln>
+        </p:spPr>
+        <p:txBody>
+          <a:bodyPr vert="horz" lIns="274320" tIns="182880" rIns="274320" bIns="182880" rtlCol="0" anchor="ctr" anchorCtr="1">
+            <a:noAutofit/>
+          </a:bodyPr>
+          <a:lstStyle/>
+          <a:p>
+            <a:r>
+              <a:rPr lang="ru-RU" sz="3200" dirty="0"/>
+              <a:t>Спасибо за внимание</a:t>
+            </a:r>
+            <a:endParaRPr lang="en-US" sz="3200" kern="1200" cap="all" spc="200" baseline="0" dirty="0">
+              <a:solidFill>
+                <a:srgbClr val="262626"/>
+              </a:solidFill>
+              <a:latin typeface="+mj-lt"/>
+              <a:ea typeface="+mj-ea"/>
+              <a:cs typeface="+mj-cs"/>
+            </a:endParaRPr>
+          </a:p>
+        </p:txBody>
+      </p:sp>
+    </p:spTree>
+    <p:extLst>
+      <p:ext uri="{BB962C8B-B14F-4D97-AF65-F5344CB8AC3E}">
+        <p14:creationId xmlns:p14="http://schemas.microsoft.com/office/powerpoint/2010/main" val="1282713940"/>
       </p:ext>
     </p:extLst>
   </p:cSld>
@@ -4488,6 +8693,261 @@
     <p:extLst>
       <p:ext uri="{BB962C8B-B14F-4D97-AF65-F5344CB8AC3E}">
         <p14:creationId xmlns:p14="http://schemas.microsoft.com/office/powerpoint/2010/main" val="2029585990"/>
+      </p:ext>
+    </p:extLst>
+  </p:cSld>
+  <p:clrMapOvr>
+    <a:masterClrMapping/>
+  </p:clrMapOvr>
+</p:sld>
+</file>
+
+<file path=ppt/slides/slide20.xml><?xml version="1.0" encoding="utf-8"?>
+<p:sld xmlns:a="http://schemas.openxmlformats.org/drawingml/2006/main" xmlns:r="http://schemas.openxmlformats.org/officeDocument/2006/relationships" xmlns:p="http://schemas.openxmlformats.org/presentationml/2006/main">
+  <p:cSld>
+    <p:spTree>
+      <p:nvGrpSpPr>
+        <p:cNvPr id="1" name="">
+          <a:extLst>
+            <a:ext uri="{FF2B5EF4-FFF2-40B4-BE49-F238E27FC236}">
+              <a16:creationId xmlns:a16="http://schemas.microsoft.com/office/drawing/2014/main" id="{6EE088B1-270F-467A-485B-FE41C3B705F8}"/>
+            </a:ext>
+          </a:extLst>
+        </p:cNvPr>
+        <p:cNvGrpSpPr/>
+        <p:nvPr/>
+      </p:nvGrpSpPr>
+      <p:grpSpPr>
+        <a:xfrm>
+          <a:off x="0" y="0"/>
+          <a:ext cx="0" cy="0"/>
+          <a:chOff x="0" y="0"/>
+          <a:chExt cx="0" cy="0"/>
+        </a:xfrm>
+      </p:grpSpPr>
+      <p:sp>
+        <p:nvSpPr>
+          <p:cNvPr id="2" name="TextBox 1">
+            <a:extLst>
+              <a:ext uri="{FF2B5EF4-FFF2-40B4-BE49-F238E27FC236}">
+                <a16:creationId xmlns:a16="http://schemas.microsoft.com/office/drawing/2014/main" id="{CA506851-A264-79D0-5147-2CE6E03FBAAF}"/>
+              </a:ext>
+            </a:extLst>
+          </p:cNvPr>
+          <p:cNvSpPr txBox="1"/>
+          <p:nvPr/>
+        </p:nvSpPr>
+        <p:spPr>
+          <a:xfrm>
+            <a:off x="4376426" y="0"/>
+            <a:ext cx="3439147" cy="523220"/>
+          </a:xfrm>
+          <a:prstGeom prst="rect">
+            <a:avLst/>
+          </a:prstGeom>
+          <a:noFill/>
+        </p:spPr>
+        <p:txBody>
+          <a:bodyPr wrap="none" rtlCol="0">
+            <a:spAutoFit/>
+          </a:bodyPr>
+          <a:lstStyle/>
+          <a:p>
+            <a:r>
+              <a:rPr lang="ru-RU" sz="2800" b="1" dirty="0">
+                <a:latin typeface="Times New Roman" panose="02020603050405020304" pitchFamily="18" charset="0"/>
+                <a:cs typeface="Times New Roman" panose="02020603050405020304" pitchFamily="18" charset="0"/>
+              </a:rPr>
+              <a:t>Список литературы</a:t>
+            </a:r>
+          </a:p>
+        </p:txBody>
+      </p:sp>
+      <p:sp>
+        <p:nvSpPr>
+          <p:cNvPr id="3" name="TextBox 2">
+            <a:extLst>
+              <a:ext uri="{FF2B5EF4-FFF2-40B4-BE49-F238E27FC236}">
+                <a16:creationId xmlns:a16="http://schemas.microsoft.com/office/drawing/2014/main" id="{6837EB01-75EB-F47F-3EB8-B95AA247CC82}"/>
+              </a:ext>
+            </a:extLst>
+          </p:cNvPr>
+          <p:cNvSpPr txBox="1"/>
+          <p:nvPr/>
+        </p:nvSpPr>
+        <p:spPr>
+          <a:xfrm>
+            <a:off x="387790" y="523220"/>
+            <a:ext cx="11416420" cy="6211316"/>
+          </a:xfrm>
+          <a:prstGeom prst="rect">
+            <a:avLst/>
+          </a:prstGeom>
+          <a:noFill/>
+        </p:spPr>
+        <p:txBody>
+          <a:bodyPr wrap="square" rtlCol="0">
+            <a:spAutoFit/>
+          </a:bodyPr>
+          <a:lstStyle/>
+          <a:p>
+            <a:pPr marL="342900" indent="-342900">
+              <a:lnSpc>
+                <a:spcPct val="250000"/>
+              </a:lnSpc>
+              <a:buFont typeface="+mj-lt"/>
+              <a:buAutoNum type="arabicPeriod"/>
+            </a:pPr>
+            <a:r>
+              <a:rPr lang="ru-RU" i="1" dirty="0">
+                <a:latin typeface="Times New Roman" panose="02020603050405020304" pitchFamily="18" charset="0"/>
+                <a:cs typeface="Times New Roman" panose="02020603050405020304" pitchFamily="18" charset="0"/>
+              </a:rPr>
+              <a:t>Дубнов Ю. А., Булычев А. В. </a:t>
+            </a:r>
+            <a:r>
+              <a:rPr lang="ru-RU" dirty="0">
+                <a:latin typeface="Times New Roman" panose="02020603050405020304" pitchFamily="18" charset="0"/>
+                <a:cs typeface="Times New Roman" panose="02020603050405020304" pitchFamily="18" charset="0"/>
+              </a:rPr>
+              <a:t>Приближенное оценивание с помощью ускоренного метода наибольшей энтропии. Часть 1. Постановка задачи и реализация для задачи регрессии // Информационные технологии и вычислительные системы. 2022. </a:t>
+            </a:r>
+            <a:r>
+              <a:rPr lang="en-US" dirty="0">
+                <a:latin typeface="Times New Roman" panose="02020603050405020304" pitchFamily="18" charset="0"/>
+                <a:cs typeface="Times New Roman" panose="02020603050405020304" pitchFamily="18" charset="0"/>
+              </a:rPr>
+              <a:t>№ 4. С. 69–80.</a:t>
+            </a:r>
+            <a:endParaRPr lang="ru-RU" dirty="0">
+              <a:latin typeface="Times New Roman" panose="02020603050405020304" pitchFamily="18" charset="0"/>
+              <a:cs typeface="Times New Roman" panose="02020603050405020304" pitchFamily="18" charset="0"/>
+            </a:endParaRPr>
+          </a:p>
+          <a:p>
+            <a:pPr marL="342900" indent="-342900">
+              <a:lnSpc>
+                <a:spcPct val="250000"/>
+              </a:lnSpc>
+              <a:buFont typeface="+mj-lt"/>
+              <a:buAutoNum type="arabicPeriod"/>
+            </a:pPr>
+            <a:r>
+              <a:rPr lang="en-US" i="1" dirty="0">
+                <a:latin typeface="Times New Roman" panose="02020603050405020304" pitchFamily="18" charset="0"/>
+                <a:cs typeface="Times New Roman" panose="02020603050405020304" pitchFamily="18" charset="0"/>
+              </a:rPr>
+              <a:t>Golan A., Judge G. G., Miller D. </a:t>
+            </a:r>
+            <a:r>
+              <a:rPr lang="en-US" dirty="0">
+                <a:latin typeface="Times New Roman" panose="02020603050405020304" pitchFamily="18" charset="0"/>
+                <a:cs typeface="Times New Roman" panose="02020603050405020304" pitchFamily="18" charset="0"/>
+              </a:rPr>
+              <a:t>Maximum Entropy Econometrics: Robust Estimation with Limited Data. — Chichester: John Wiley and Sons Ltd., 1996.</a:t>
+            </a:r>
+            <a:endParaRPr lang="ru-RU" dirty="0">
+              <a:latin typeface="Times New Roman" panose="02020603050405020304" pitchFamily="18" charset="0"/>
+              <a:cs typeface="Times New Roman" panose="02020603050405020304" pitchFamily="18" charset="0"/>
+            </a:endParaRPr>
+          </a:p>
+          <a:p>
+            <a:pPr marL="342900" indent="-342900">
+              <a:lnSpc>
+                <a:spcPct val="250000"/>
+              </a:lnSpc>
+              <a:buFont typeface="+mj-lt"/>
+              <a:buAutoNum type="arabicPeriod"/>
+            </a:pPr>
+            <a:r>
+              <a:rPr lang="ru-RU" i="1" dirty="0">
+                <a:latin typeface="Times New Roman" panose="02020603050405020304" pitchFamily="18" charset="0"/>
+                <a:cs typeface="Times New Roman" panose="02020603050405020304" pitchFamily="18" charset="0"/>
+              </a:rPr>
+              <a:t>Воеводин В. В., Кузнецов Ю. А. </a:t>
+            </a:r>
+            <a:r>
+              <a:rPr lang="ru-RU" dirty="0">
+                <a:latin typeface="Times New Roman" panose="02020603050405020304" pitchFamily="18" charset="0"/>
+                <a:cs typeface="Times New Roman" panose="02020603050405020304" pitchFamily="18" charset="0"/>
+              </a:rPr>
+              <a:t>Матрицы и вычисления. — М.: Наука, 1984.</a:t>
+            </a:r>
+          </a:p>
+          <a:p>
+            <a:pPr marL="342900" indent="-342900">
+              <a:lnSpc>
+                <a:spcPct val="250000"/>
+              </a:lnSpc>
+              <a:buFont typeface="+mj-lt"/>
+              <a:buAutoNum type="arabicPeriod"/>
+            </a:pPr>
+            <a:r>
+              <a:rPr lang="ru-RU" i="1" dirty="0">
+                <a:latin typeface="Times New Roman" panose="02020603050405020304" pitchFamily="18" charset="0"/>
+                <a:cs typeface="Times New Roman" panose="02020603050405020304" pitchFamily="18" charset="0"/>
+              </a:rPr>
+              <a:t>Цыпкин Я. З. </a:t>
+            </a:r>
+            <a:r>
+              <a:rPr lang="ru-RU" dirty="0">
+                <a:latin typeface="Times New Roman" panose="02020603050405020304" pitchFamily="18" charset="0"/>
+                <a:cs typeface="Times New Roman" panose="02020603050405020304" pitchFamily="18" charset="0"/>
+              </a:rPr>
+              <a:t>Основы теории обучающихся систем. — М.: Наука, 1970.</a:t>
+            </a:r>
+            <a:endParaRPr lang="en-US" dirty="0">
+              <a:latin typeface="Times New Roman" panose="02020603050405020304" pitchFamily="18" charset="0"/>
+              <a:cs typeface="Times New Roman" panose="02020603050405020304" pitchFamily="18" charset="0"/>
+            </a:endParaRPr>
+          </a:p>
+          <a:p>
+            <a:pPr marL="342900" indent="-342900">
+              <a:lnSpc>
+                <a:spcPct val="250000"/>
+              </a:lnSpc>
+              <a:buFont typeface="+mj-lt"/>
+              <a:buAutoNum type="arabicPeriod"/>
+            </a:pPr>
+            <a:r>
+              <a:rPr lang="en-US" i="1" dirty="0">
+                <a:latin typeface="Times New Roman" panose="02020603050405020304" pitchFamily="18" charset="0"/>
+                <a:cs typeface="Times New Roman" panose="02020603050405020304" pitchFamily="18" charset="0"/>
+              </a:rPr>
+              <a:t>Efron B., </a:t>
+            </a:r>
+            <a:r>
+              <a:rPr lang="en-US" i="1" dirty="0" err="1">
+                <a:latin typeface="Times New Roman" panose="02020603050405020304" pitchFamily="18" charset="0"/>
+                <a:cs typeface="Times New Roman" panose="02020603050405020304" pitchFamily="18" charset="0"/>
+              </a:rPr>
+              <a:t>Tibshirani</a:t>
+            </a:r>
+            <a:r>
+              <a:rPr lang="en-US" i="1" dirty="0">
+                <a:latin typeface="Times New Roman" panose="02020603050405020304" pitchFamily="18" charset="0"/>
+                <a:cs typeface="Times New Roman" panose="02020603050405020304" pitchFamily="18" charset="0"/>
+              </a:rPr>
+              <a:t> R. </a:t>
+            </a:r>
+            <a:r>
+              <a:rPr lang="en-US" dirty="0">
+                <a:latin typeface="Times New Roman" panose="02020603050405020304" pitchFamily="18" charset="0"/>
+                <a:cs typeface="Times New Roman" panose="02020603050405020304" pitchFamily="18" charset="0"/>
+              </a:rPr>
+              <a:t>Improvements on cross-validation: the 632+ bootstrap method // J. Am. Stat. Assoc. 1997. V. 92(438). P. 548–560.</a:t>
+            </a:r>
+            <a:endParaRPr lang="ru-RU" dirty="0">
+              <a:latin typeface="Times New Roman" panose="02020603050405020304" pitchFamily="18" charset="0"/>
+              <a:cs typeface="Times New Roman" panose="02020603050405020304" pitchFamily="18" charset="0"/>
+            </a:endParaRPr>
+          </a:p>
+        </p:txBody>
+      </p:sp>
+    </p:spTree>
+    <p:extLst>
+      <p:ext uri="{BB962C8B-B14F-4D97-AF65-F5344CB8AC3E}">
+        <p14:creationId xmlns:p14="http://schemas.microsoft.com/office/powerpoint/2010/main" val="611517564"/>
       </p:ext>
     </p:extLst>
   </p:cSld>
@@ -4735,7 +9195,2314 @@
         </p:nvSpPr>
         <p:spPr>
           <a:xfrm>
-            <a:off x="3239542" y="0"/>
+            <a:off x="3752217" y="0"/>
+            <a:ext cx="4687565" cy="523220"/>
+          </a:xfrm>
+          <a:prstGeom prst="rect">
+            <a:avLst/>
+          </a:prstGeom>
+          <a:noFill/>
+        </p:spPr>
+        <p:txBody>
+          <a:bodyPr wrap="none" rtlCol="0">
+            <a:spAutoFit/>
+          </a:bodyPr>
+          <a:lstStyle/>
+          <a:p>
+            <a:r>
+              <a:rPr lang="ru-RU" sz="2800" b="1" dirty="0">
+                <a:latin typeface="Times New Roman" panose="02020603050405020304" pitchFamily="18" charset="0"/>
+                <a:cs typeface="Times New Roman" panose="02020603050405020304" pitchFamily="18" charset="0"/>
+              </a:rPr>
+              <a:t>Непараметрический подход</a:t>
+            </a:r>
+          </a:p>
+        </p:txBody>
+      </p:sp>
+      <mc:AlternateContent xmlns:mc="http://schemas.openxmlformats.org/markup-compatibility/2006" xmlns:a14="http://schemas.microsoft.com/office/drawing/2010/main">
+        <mc:Choice Requires="a14">
+          <p:sp>
+            <p:nvSpPr>
+              <p:cNvPr id="3" name="TextBox 2">
+                <a:extLst>
+                  <a:ext uri="{FF2B5EF4-FFF2-40B4-BE49-F238E27FC236}">
+                    <a16:creationId xmlns:a16="http://schemas.microsoft.com/office/drawing/2014/main" id="{3C4E704A-6A1F-5F99-7A11-9B32B46C3D6D}"/>
+                  </a:ext>
+                </a:extLst>
+              </p:cNvPr>
+              <p:cNvSpPr txBox="1"/>
+              <p:nvPr/>
+            </p:nvSpPr>
+            <p:spPr>
+              <a:xfrm>
+                <a:off x="525100" y="599122"/>
+                <a:ext cx="11416420" cy="5279843"/>
+              </a:xfrm>
+              <a:prstGeom prst="rect">
+                <a:avLst/>
+              </a:prstGeom>
+              <a:noFill/>
+            </p:spPr>
+            <p:txBody>
+              <a:bodyPr wrap="square" rtlCol="0">
+                <a:spAutoFit/>
+              </a:bodyPr>
+              <a:lstStyle/>
+              <a:p>
+                <a:pPr>
+                  <a:lnSpc>
+                    <a:spcPct val="150000"/>
+                  </a:lnSpc>
+                </a:pPr>
+                <a:r>
+                  <a:rPr lang="ru-RU" b="1" dirty="0">
+                    <a:latin typeface="Times New Roman" panose="02020603050405020304" pitchFamily="18" charset="0"/>
+                    <a:cs typeface="Times New Roman" panose="02020603050405020304" pitchFamily="18" charset="0"/>
+                  </a:rPr>
+                  <a:t>Основы классического ядерного сглаживания: </a:t>
+                </a:r>
+              </a:p>
+              <a:p>
+                <a:pPr>
+                  <a:lnSpc>
+                    <a:spcPct val="150000"/>
+                  </a:lnSpc>
+                </a:pPr>
+                <a:r>
+                  <a:rPr lang="en-US" dirty="0">
+                    <a:latin typeface="Times New Roman" panose="02020603050405020304" pitchFamily="18" charset="0"/>
+                    <a:cs typeface="Times New Roman" panose="02020603050405020304" pitchFamily="18" charset="0"/>
+                  </a:rPr>
+                  <a:t>	</a:t>
+                </a:r>
+                <a:r>
+                  <a:rPr lang="ru-RU" dirty="0">
+                    <a:latin typeface="Times New Roman" panose="02020603050405020304" pitchFamily="18" charset="0"/>
+                    <a:cs typeface="Times New Roman" panose="02020603050405020304" pitchFamily="18" charset="0"/>
+                  </a:rPr>
+                  <a:t>В каждой точке вычисляется сглаженная оценка функции плотности с помощью весов, определяемых ядром и полосой пропускания (окном) по формуле </a:t>
+                </a:r>
+                <a:r>
+                  <a:rPr lang="ru-RU" dirty="0" err="1">
+                    <a:latin typeface="Times New Roman" panose="02020603050405020304" pitchFamily="18" charset="0"/>
+                    <a:cs typeface="Times New Roman" panose="02020603050405020304" pitchFamily="18" charset="0"/>
+                  </a:rPr>
+                  <a:t>Розенблата-Парзена</a:t>
+                </a:r>
+                <a:r>
+                  <a:rPr lang="ru-RU" dirty="0">
+                    <a:latin typeface="Times New Roman" panose="02020603050405020304" pitchFamily="18" charset="0"/>
+                    <a:cs typeface="Times New Roman" panose="02020603050405020304" pitchFamily="18" charset="0"/>
+                  </a:rPr>
+                  <a:t> </a:t>
+                </a:r>
+                <a:r>
+                  <a:rPr lang="en-US" dirty="0">
+                    <a:latin typeface="Times New Roman" panose="02020603050405020304" pitchFamily="18" charset="0"/>
+                    <a:cs typeface="Times New Roman" panose="02020603050405020304" pitchFamily="18" charset="0"/>
+                  </a:rPr>
+                  <a:t>[dd]</a:t>
+                </a:r>
+                <a:r>
+                  <a:rPr lang="ru-RU" dirty="0">
+                    <a:latin typeface="Times New Roman" panose="02020603050405020304" pitchFamily="18" charset="0"/>
+                    <a:cs typeface="Times New Roman" panose="02020603050405020304" pitchFamily="18" charset="0"/>
+                  </a:rPr>
+                  <a:t>:</a:t>
+                </a:r>
+                <a:endParaRPr lang="ru-RU" dirty="0">
+                  <a:latin typeface="Times New Roman" panose="02020603050405020304" pitchFamily="18" charset="0"/>
+                  <a:ea typeface="Calibri" panose="020F0502020204030204" pitchFamily="34" charset="0"/>
+                  <a:cs typeface="Times New Roman" panose="02020603050405020304" pitchFamily="18" charset="0"/>
+                </a:endParaRPr>
+              </a:p>
+              <a:p>
+                <a:pPr>
+                  <a:lnSpc>
+                    <a:spcPct val="150000"/>
+                  </a:lnSpc>
+                </a:pPr>
+                <a14:m>
+                  <m:oMathPara xmlns:m="http://schemas.openxmlformats.org/officeDocument/2006/math">
+                    <m:oMathParaPr>
+                      <m:jc m:val="centerGroup"/>
+                    </m:oMathParaPr>
+                    <m:oMath xmlns:m="http://schemas.openxmlformats.org/officeDocument/2006/math">
+                      <m:acc>
+                        <m:accPr>
+                          <m:chr m:val="̂"/>
+                          <m:ctrlPr>
+                            <a:rPr lang="ru-RU" sz="1400" i="1" smtClean="0">
+                              <a:solidFill>
+                                <a:srgbClr val="836967"/>
+                              </a:solidFill>
+                              <a:latin typeface="Cambria Math" panose="02040503050406030204" pitchFamily="18" charset="0"/>
+                            </a:rPr>
+                          </m:ctrlPr>
+                        </m:accPr>
+                        <m:e>
+                          <m:r>
+                            <a:rPr lang="ru-RU" sz="1400" i="1">
+                              <a:latin typeface="Cambria Math" panose="02040503050406030204" pitchFamily="18" charset="0"/>
+                            </a:rPr>
+                            <m:t>𝑓</m:t>
+                          </m:r>
+                          <m:d>
+                            <m:dPr>
+                              <m:ctrlPr>
+                                <a:rPr lang="ru-RU" sz="1400" i="1">
+                                  <a:solidFill>
+                                    <a:srgbClr val="836967"/>
+                                  </a:solidFill>
+                                  <a:latin typeface="Cambria Math" panose="02040503050406030204" pitchFamily="18" charset="0"/>
+                                </a:rPr>
+                              </m:ctrlPr>
+                            </m:dPr>
+                            <m:e>
+                              <m:r>
+                                <a:rPr lang="ru-RU" sz="1400" i="1">
+                                  <a:latin typeface="Cambria Math" panose="02040503050406030204" pitchFamily="18" charset="0"/>
+                                </a:rPr>
+                                <m:t>𝑥</m:t>
+                              </m:r>
+                            </m:e>
+                          </m:d>
+                        </m:e>
+                      </m:acc>
+                      <m:r>
+                        <a:rPr lang="ru-RU" sz="1400" i="0">
+                          <a:latin typeface="Cambria Math" panose="02040503050406030204" pitchFamily="18" charset="0"/>
+                        </a:rPr>
+                        <m:t>=</m:t>
+                      </m:r>
+                      <m:f>
+                        <m:fPr>
+                          <m:ctrlPr>
+                            <a:rPr lang="ru-RU" sz="1400" i="1">
+                              <a:solidFill>
+                                <a:srgbClr val="836967"/>
+                              </a:solidFill>
+                              <a:latin typeface="Cambria Math" panose="02040503050406030204" pitchFamily="18" charset="0"/>
+                            </a:rPr>
+                          </m:ctrlPr>
+                        </m:fPr>
+                        <m:num>
+                          <m:r>
+                            <a:rPr lang="ru-RU" sz="1400" i="0">
+                              <a:latin typeface="Cambria Math" panose="02040503050406030204" pitchFamily="18" charset="0"/>
+                            </a:rPr>
+                            <m:t>1</m:t>
+                          </m:r>
+                        </m:num>
+                        <m:den>
+                          <m:r>
+                            <a:rPr lang="ru-RU" sz="1400" i="1">
+                              <a:latin typeface="Cambria Math" panose="02040503050406030204" pitchFamily="18" charset="0"/>
+                            </a:rPr>
+                            <m:t>𝑛h</m:t>
+                          </m:r>
+                        </m:den>
+                      </m:f>
+                      <m:nary>
+                        <m:naryPr>
+                          <m:chr m:val="∑"/>
+                          <m:limLoc m:val="undOvr"/>
+                          <m:ctrlPr>
+                            <a:rPr lang="ru-RU" sz="1400" i="1">
+                              <a:latin typeface="Cambria Math" panose="02040503050406030204" pitchFamily="18" charset="0"/>
+                            </a:rPr>
+                          </m:ctrlPr>
+                        </m:naryPr>
+                        <m:sub>
+                          <m:r>
+                            <a:rPr lang="ru-RU" sz="1400" i="1">
+                              <a:latin typeface="Cambria Math" panose="02040503050406030204" pitchFamily="18" charset="0"/>
+                            </a:rPr>
+                            <m:t>𝑖</m:t>
+                          </m:r>
+                          <m:r>
+                            <a:rPr lang="ru-RU" sz="1400" i="0">
+                              <a:latin typeface="Cambria Math" panose="02040503050406030204" pitchFamily="18" charset="0"/>
+                            </a:rPr>
+                            <m:t>=1</m:t>
+                          </m:r>
+                        </m:sub>
+                        <m:sup>
+                          <m:r>
+                            <a:rPr lang="ru-RU" sz="1400" i="1">
+                              <a:latin typeface="Cambria Math" panose="02040503050406030204" pitchFamily="18" charset="0"/>
+                            </a:rPr>
+                            <m:t>𝑛</m:t>
+                          </m:r>
+                        </m:sup>
+                        <m:e>
+                          <m:r>
+                            <a:rPr lang="ru-RU" sz="1400" i="1">
+                              <a:latin typeface="Cambria Math" panose="02040503050406030204" pitchFamily="18" charset="0"/>
+                            </a:rPr>
+                            <m:t>𝐾</m:t>
+                          </m:r>
+                          <m:d>
+                            <m:dPr>
+                              <m:ctrlPr>
+                                <a:rPr lang="ru-RU" sz="1400" i="1">
+                                  <a:solidFill>
+                                    <a:srgbClr val="836967"/>
+                                  </a:solidFill>
+                                  <a:latin typeface="Cambria Math" panose="02040503050406030204" pitchFamily="18" charset="0"/>
+                                </a:rPr>
+                              </m:ctrlPr>
+                            </m:dPr>
+                            <m:e>
+                              <m:f>
+                                <m:fPr>
+                                  <m:ctrlPr>
+                                    <a:rPr lang="ru-RU" sz="1400" i="1">
+                                      <a:solidFill>
+                                        <a:srgbClr val="836967"/>
+                                      </a:solidFill>
+                                      <a:latin typeface="Cambria Math" panose="02040503050406030204" pitchFamily="18" charset="0"/>
+                                    </a:rPr>
+                                  </m:ctrlPr>
+                                </m:fPr>
+                                <m:num>
+                                  <m:r>
+                                    <a:rPr lang="ru-RU" sz="1400" i="1">
+                                      <a:latin typeface="Cambria Math" panose="02040503050406030204" pitchFamily="18" charset="0"/>
+                                    </a:rPr>
+                                    <m:t>𝑥</m:t>
+                                  </m:r>
+                                  <m:r>
+                                    <a:rPr lang="ru-RU" sz="1400" i="0">
+                                      <a:latin typeface="Cambria Math" panose="02040503050406030204" pitchFamily="18" charset="0"/>
+                                    </a:rPr>
+                                    <m:t>−</m:t>
+                                  </m:r>
+                                  <m:sSub>
+                                    <m:sSubPr>
+                                      <m:ctrlPr>
+                                        <a:rPr lang="ru-RU" sz="1400" i="1">
+                                          <a:solidFill>
+                                            <a:srgbClr val="836967"/>
+                                          </a:solidFill>
+                                          <a:latin typeface="Cambria Math" panose="02040503050406030204" pitchFamily="18" charset="0"/>
+                                        </a:rPr>
+                                      </m:ctrlPr>
+                                    </m:sSubPr>
+                                    <m:e>
+                                      <m:r>
+                                        <a:rPr lang="ru-RU" sz="1400" i="1">
+                                          <a:latin typeface="Cambria Math" panose="02040503050406030204" pitchFamily="18" charset="0"/>
+                                        </a:rPr>
+                                        <m:t>𝑥</m:t>
+                                      </m:r>
+                                    </m:e>
+                                    <m:sub>
+                                      <m:r>
+                                        <a:rPr lang="ru-RU" sz="1400" i="1">
+                                          <a:latin typeface="Cambria Math" panose="02040503050406030204" pitchFamily="18" charset="0"/>
+                                        </a:rPr>
+                                        <m:t>𝑖</m:t>
+                                      </m:r>
+                                    </m:sub>
+                                  </m:sSub>
+                                </m:num>
+                                <m:den>
+                                  <m:r>
+                                    <a:rPr lang="ru-RU" sz="1400" i="1">
+                                      <a:latin typeface="Cambria Math" panose="02040503050406030204" pitchFamily="18" charset="0"/>
+                                    </a:rPr>
+                                    <m:t>h</m:t>
+                                  </m:r>
+                                </m:den>
+                              </m:f>
+                            </m:e>
+                          </m:d>
+                          <m:r>
+                            <a:rPr lang="ru-RU" sz="1400" i="0">
+                              <a:latin typeface="Cambria Math" panose="02040503050406030204" pitchFamily="18" charset="0"/>
+                            </a:rPr>
+                            <m:t> </m:t>
+                          </m:r>
+                        </m:e>
+                      </m:nary>
+                    </m:oMath>
+                  </m:oMathPara>
+                </a14:m>
+                <a:endParaRPr lang="ru-RU" sz="1800" dirty="0">
+                  <a:effectLst/>
+                  <a:latin typeface="Times New Roman" panose="02020603050405020304" pitchFamily="18" charset="0"/>
+                  <a:ea typeface="Calibri" panose="020F0502020204030204" pitchFamily="34" charset="0"/>
+                  <a:cs typeface="Times New Roman" panose="02020603050405020304" pitchFamily="18" charset="0"/>
+                </a:endParaRPr>
+              </a:p>
+              <a:p>
+                <a:pPr>
+                  <a:lnSpc>
+                    <a:spcPct val="150000"/>
+                  </a:lnSpc>
+                </a:pPr>
+                <a:r>
+                  <a:rPr lang="ru-RU" sz="1800" dirty="0">
+                    <a:effectLst/>
+                    <a:latin typeface="Times New Roman" panose="02020603050405020304" pitchFamily="18" charset="0"/>
+                    <a:ea typeface="Calibri" panose="020F0502020204030204" pitchFamily="34" charset="0"/>
+                    <a:cs typeface="Times New Roman" panose="02020603050405020304" pitchFamily="18" charset="0"/>
+                  </a:rPr>
+                  <a:t>где </a:t>
+                </a:r>
+                <a14:m>
+                  <m:oMath xmlns:m="http://schemas.openxmlformats.org/officeDocument/2006/math">
+                    <m:sSub>
+                      <m:sSubPr>
+                        <m:ctrlPr>
+                          <a:rPr lang="ru-RU" sz="1800" i="1">
+                            <a:effectLst/>
+                            <a:latin typeface="Cambria Math" panose="02040503050406030204" pitchFamily="18" charset="0"/>
+                            <a:ea typeface="Calibri" panose="020F0502020204030204" pitchFamily="34" charset="0"/>
+                            <a:cs typeface="Times New Roman" panose="02020603050405020304" pitchFamily="18" charset="0"/>
+                          </a:rPr>
+                        </m:ctrlPr>
+                      </m:sSubPr>
+                      <m:e>
+                        <m:r>
+                          <a:rPr lang="ru-RU" sz="1800" i="1">
+                            <a:effectLst/>
+                            <a:latin typeface="Cambria Math" panose="02040503050406030204" pitchFamily="18" charset="0"/>
+                            <a:ea typeface="Calibri" panose="020F0502020204030204" pitchFamily="34" charset="0"/>
+                            <a:cs typeface="Times New Roman" panose="02020603050405020304" pitchFamily="18" charset="0"/>
+                          </a:rPr>
+                          <m:t>𝑥</m:t>
+                        </m:r>
+                      </m:e>
+                      <m:sub>
+                        <m:r>
+                          <a:rPr lang="en-US" sz="1800" i="1">
+                            <a:effectLst/>
+                            <a:latin typeface="Cambria Math" panose="02040503050406030204" pitchFamily="18" charset="0"/>
+                            <a:ea typeface="Calibri" panose="020F0502020204030204" pitchFamily="34" charset="0"/>
+                            <a:cs typeface="Times New Roman" panose="02020603050405020304" pitchFamily="18" charset="0"/>
+                          </a:rPr>
+                          <m:t>𝑖</m:t>
+                        </m:r>
+                      </m:sub>
+                    </m:sSub>
+                    <m:r>
+                      <a:rPr lang="ru-RU" sz="1800" i="1">
+                        <a:effectLst/>
+                        <a:latin typeface="Cambria Math" panose="02040503050406030204" pitchFamily="18" charset="0"/>
+                        <a:ea typeface="Calibri" panose="020F0502020204030204" pitchFamily="34" charset="0"/>
+                        <a:cs typeface="Times New Roman" panose="02020603050405020304" pitchFamily="18" charset="0"/>
+                      </a:rPr>
+                      <m:t>− </m:t>
+                    </m:r>
+                  </m:oMath>
+                </a14:m>
+                <a:r>
+                  <a:rPr lang="ru-RU" sz="1800" dirty="0">
+                    <a:effectLst/>
+                    <a:latin typeface="Times New Roman" panose="02020603050405020304" pitchFamily="18" charset="0"/>
+                    <a:ea typeface="DengXian" panose="02010600030101010101" pitchFamily="2" charset="-122"/>
+                    <a:cs typeface="Times New Roman" panose="02020603050405020304" pitchFamily="18" charset="0"/>
+                  </a:rPr>
+                  <a:t>элементы выборки, </a:t>
+                </a:r>
+                <a14:m>
+                  <m:oMath xmlns:m="http://schemas.openxmlformats.org/officeDocument/2006/math">
+                    <m:r>
+                      <a:rPr lang="ru-RU" sz="1800" i="1">
+                        <a:effectLst/>
+                        <a:latin typeface="Cambria Math" panose="02040503050406030204" pitchFamily="18" charset="0"/>
+                        <a:ea typeface="Calibri" panose="020F0502020204030204" pitchFamily="34" charset="0"/>
+                        <a:cs typeface="Times New Roman" panose="02020603050405020304" pitchFamily="18" charset="0"/>
+                      </a:rPr>
+                      <m:t>𝐾</m:t>
+                    </m:r>
+                    <m:d>
+                      <m:dPr>
+                        <m:ctrlPr>
+                          <a:rPr lang="ru-RU" sz="1800" i="1">
+                            <a:effectLst/>
+                            <a:latin typeface="Cambria Math" panose="02040503050406030204" pitchFamily="18" charset="0"/>
+                            <a:ea typeface="Calibri" panose="020F0502020204030204" pitchFamily="34" charset="0"/>
+                            <a:cs typeface="Times New Roman" panose="02020603050405020304" pitchFamily="18" charset="0"/>
+                          </a:rPr>
+                        </m:ctrlPr>
+                      </m:dPr>
+                      <m:e>
+                        <m:r>
+                          <a:rPr lang="en-US" sz="1800" i="1">
+                            <a:effectLst/>
+                            <a:latin typeface="Cambria Math" panose="02040503050406030204" pitchFamily="18" charset="0"/>
+                            <a:ea typeface="Calibri" panose="020F0502020204030204" pitchFamily="34" charset="0"/>
+                            <a:cs typeface="Times New Roman" panose="02020603050405020304" pitchFamily="18" charset="0"/>
+                          </a:rPr>
+                          <m:t>𝑥</m:t>
+                        </m:r>
+                      </m:e>
+                    </m:d>
+                    <m:r>
+                      <a:rPr lang="ru-RU" sz="1800" i="1">
+                        <a:effectLst/>
+                        <a:latin typeface="Cambria Math" panose="02040503050406030204" pitchFamily="18" charset="0"/>
+                        <a:ea typeface="DengXian" panose="02010600030101010101" pitchFamily="2" charset="-122"/>
+                        <a:cs typeface="Times New Roman" panose="02020603050405020304" pitchFamily="18" charset="0"/>
+                      </a:rPr>
+                      <m:t>−</m:t>
+                    </m:r>
+                  </m:oMath>
+                </a14:m>
+                <a:r>
+                  <a:rPr lang="ru-RU" sz="1800" dirty="0">
+                    <a:effectLst/>
+                    <a:latin typeface="Times New Roman" panose="02020603050405020304" pitchFamily="18" charset="0"/>
+                    <a:ea typeface="Calibri" panose="020F0502020204030204" pitchFamily="34" charset="0"/>
+                    <a:cs typeface="Times New Roman" panose="02020603050405020304" pitchFamily="18" charset="0"/>
+                  </a:rPr>
+                  <a:t> ядерная функция, </a:t>
+                </a:r>
+                <a14:m>
+                  <m:oMath xmlns:m="http://schemas.openxmlformats.org/officeDocument/2006/math">
+                    <m:r>
+                      <a:rPr lang="ru-RU" sz="1800" b="0" i="0" smtClean="0">
+                        <a:effectLst/>
+                        <a:latin typeface="Cambria Math" panose="02040503050406030204" pitchFamily="18" charset="0"/>
+                        <a:ea typeface="Calibri" panose="020F0502020204030204" pitchFamily="34" charset="0"/>
+                        <a:cs typeface="Times New Roman" panose="02020603050405020304" pitchFamily="18" charset="0"/>
+                      </a:rPr>
+                      <m:t> </m:t>
+                    </m:r>
+                    <m:r>
+                      <a:rPr lang="ru-RU" sz="1800" i="1">
+                        <a:effectLst/>
+                        <a:latin typeface="Cambria Math" panose="02040503050406030204" pitchFamily="18" charset="0"/>
+                        <a:ea typeface="Calibri" panose="020F0502020204030204" pitchFamily="34" charset="0"/>
+                        <a:cs typeface="Times New Roman" panose="02020603050405020304" pitchFamily="18" charset="0"/>
+                      </a:rPr>
+                      <m:t>h</m:t>
+                    </m:r>
+                    <m:r>
+                      <a:rPr lang="ru-RU" sz="1800" i="1">
+                        <a:effectLst/>
+                        <a:latin typeface="Cambria Math" panose="02040503050406030204" pitchFamily="18" charset="0"/>
+                        <a:ea typeface="Calibri" panose="020F0502020204030204" pitchFamily="34" charset="0"/>
+                        <a:cs typeface="Times New Roman" panose="02020603050405020304" pitchFamily="18" charset="0"/>
+                      </a:rPr>
+                      <m:t>−</m:t>
+                    </m:r>
+                  </m:oMath>
+                </a14:m>
+                <a:r>
+                  <a:rPr lang="ru-RU" sz="1800" dirty="0">
+                    <a:effectLst/>
+                    <a:latin typeface="Times New Roman" panose="02020603050405020304" pitchFamily="18" charset="0"/>
+                    <a:ea typeface="Calibri" panose="020F0502020204030204" pitchFamily="34" charset="0"/>
+                    <a:cs typeface="Times New Roman" panose="02020603050405020304" pitchFamily="18" charset="0"/>
+                  </a:rPr>
+                  <a:t> полоса пропускания (окно сглаживания).</a:t>
+                </a:r>
+              </a:p>
+              <a:p>
+                <a:pPr>
+                  <a:lnSpc>
+                    <a:spcPct val="150000"/>
+                  </a:lnSpc>
+                </a:pPr>
+                <a:r>
+                  <a:rPr lang="ru-RU" sz="1800" dirty="0">
+                    <a:effectLst/>
+                    <a:latin typeface="Times New Roman" panose="02020603050405020304" pitchFamily="18" charset="0"/>
+                    <a:ea typeface="Calibri" panose="020F0502020204030204" pitchFamily="34" charset="0"/>
+                  </a:rPr>
+                  <a:t>	В задаче регрессии оценка плотности используется для вычисления ядерных весов:</a:t>
+                </a:r>
+                <a:endParaRPr lang="en-US" sz="1800" dirty="0">
+                  <a:effectLst/>
+                  <a:latin typeface="Times New Roman" panose="02020603050405020304" pitchFamily="18" charset="0"/>
+                  <a:ea typeface="Calibri" panose="020F0502020204030204" pitchFamily="34" charset="0"/>
+                </a:endParaRPr>
+              </a:p>
+              <a:p>
+                <a:pPr>
+                  <a:lnSpc>
+                    <a:spcPct val="150000"/>
+                  </a:lnSpc>
+                </a:pPr>
+                <a14:m>
+                  <m:oMathPara xmlns:m="http://schemas.openxmlformats.org/officeDocument/2006/math">
+                    <m:oMathParaPr>
+                      <m:jc m:val="centerGroup"/>
+                    </m:oMathParaPr>
+                    <m:oMath xmlns:m="http://schemas.openxmlformats.org/officeDocument/2006/math">
+                      <m:sSub>
+                        <m:sSubPr>
+                          <m:ctrlPr>
+                            <a:rPr lang="ru-RU" sz="1400" i="1" smtClean="0">
+                              <a:solidFill>
+                                <a:srgbClr val="836967"/>
+                              </a:solidFill>
+                              <a:latin typeface="Cambria Math" panose="02040503050406030204" pitchFamily="18" charset="0"/>
+                            </a:rPr>
+                          </m:ctrlPr>
+                        </m:sSubPr>
+                        <m:e>
+                          <m:r>
+                            <a:rPr lang="ru-RU" sz="1400" i="1">
+                              <a:latin typeface="Cambria Math" panose="02040503050406030204" pitchFamily="18" charset="0"/>
+                            </a:rPr>
+                            <m:t>𝑊</m:t>
+                          </m:r>
+                        </m:e>
+                        <m:sub>
+                          <m:r>
+                            <a:rPr lang="ru-RU" sz="1400" i="1">
+                              <a:latin typeface="Cambria Math" panose="02040503050406030204" pitchFamily="18" charset="0"/>
+                            </a:rPr>
+                            <m:t>𝑛𝑖</m:t>
+                          </m:r>
+                        </m:sub>
+                      </m:sSub>
+                      <m:d>
+                        <m:dPr>
+                          <m:ctrlPr>
+                            <a:rPr lang="ru-RU" sz="1400" i="1">
+                              <a:solidFill>
+                                <a:srgbClr val="836967"/>
+                              </a:solidFill>
+                              <a:latin typeface="Cambria Math" panose="02040503050406030204" pitchFamily="18" charset="0"/>
+                            </a:rPr>
+                          </m:ctrlPr>
+                        </m:dPr>
+                        <m:e>
+                          <m:r>
+                            <a:rPr lang="ru-RU" sz="1400" i="1">
+                              <a:latin typeface="Cambria Math" panose="02040503050406030204" pitchFamily="18" charset="0"/>
+                            </a:rPr>
+                            <m:t>𝑥</m:t>
+                          </m:r>
+                        </m:e>
+                      </m:d>
+                      <m:r>
+                        <a:rPr lang="ru-RU" sz="1400" i="0">
+                          <a:latin typeface="Cambria Math" panose="02040503050406030204" pitchFamily="18" charset="0"/>
+                        </a:rPr>
+                        <m:t>=</m:t>
+                      </m:r>
+                      <m:f>
+                        <m:fPr>
+                          <m:ctrlPr>
+                            <a:rPr lang="ru-RU" sz="1400" i="1">
+                              <a:solidFill>
+                                <a:srgbClr val="836967"/>
+                              </a:solidFill>
+                              <a:latin typeface="Cambria Math" panose="02040503050406030204" pitchFamily="18" charset="0"/>
+                            </a:rPr>
+                          </m:ctrlPr>
+                        </m:fPr>
+                        <m:num>
+                          <m:sSub>
+                            <m:sSubPr>
+                              <m:ctrlPr>
+                                <a:rPr lang="ru-RU" sz="1400" i="1">
+                                  <a:solidFill>
+                                    <a:srgbClr val="836967"/>
+                                  </a:solidFill>
+                                  <a:latin typeface="Cambria Math" panose="02040503050406030204" pitchFamily="18" charset="0"/>
+                                </a:rPr>
+                              </m:ctrlPr>
+                            </m:sSubPr>
+                            <m:e>
+                              <m:r>
+                                <a:rPr lang="ru-RU" sz="1400" i="1">
+                                  <a:latin typeface="Cambria Math" panose="02040503050406030204" pitchFamily="18" charset="0"/>
+                                </a:rPr>
+                                <m:t>𝐾</m:t>
+                              </m:r>
+                            </m:e>
+                            <m:sub>
+                              <m:sSub>
+                                <m:sSubPr>
+                                  <m:ctrlPr>
+                                    <a:rPr lang="ru-RU" sz="1400" i="1">
+                                      <a:solidFill>
+                                        <a:srgbClr val="836967"/>
+                                      </a:solidFill>
+                                      <a:latin typeface="Cambria Math" panose="02040503050406030204" pitchFamily="18" charset="0"/>
+                                    </a:rPr>
+                                  </m:ctrlPr>
+                                </m:sSubPr>
+                                <m:e>
+                                  <m:r>
+                                    <a:rPr lang="ru-RU" sz="1400" i="1">
+                                      <a:latin typeface="Cambria Math" panose="02040503050406030204" pitchFamily="18" charset="0"/>
+                                    </a:rPr>
+                                    <m:t>h</m:t>
+                                  </m:r>
+                                </m:e>
+                                <m:sub>
+                                  <m:r>
+                                    <a:rPr lang="ru-RU" sz="1400" i="1">
+                                      <a:latin typeface="Cambria Math" panose="02040503050406030204" pitchFamily="18" charset="0"/>
+                                    </a:rPr>
+                                    <m:t>𝑛</m:t>
+                                  </m:r>
+                                </m:sub>
+                              </m:sSub>
+                            </m:sub>
+                          </m:sSub>
+                          <m:d>
+                            <m:dPr>
+                              <m:ctrlPr>
+                                <a:rPr lang="ru-RU" sz="1400" i="1">
+                                  <a:solidFill>
+                                    <a:srgbClr val="836967"/>
+                                  </a:solidFill>
+                                  <a:latin typeface="Cambria Math" panose="02040503050406030204" pitchFamily="18" charset="0"/>
+                                </a:rPr>
+                              </m:ctrlPr>
+                            </m:dPr>
+                            <m:e>
+                              <m:r>
+                                <a:rPr lang="ru-RU" sz="1400" i="1">
+                                  <a:latin typeface="Cambria Math" panose="02040503050406030204" pitchFamily="18" charset="0"/>
+                                </a:rPr>
+                                <m:t>𝑥</m:t>
+                              </m:r>
+                              <m:r>
+                                <a:rPr lang="ru-RU" sz="1400" i="0">
+                                  <a:latin typeface="Cambria Math" panose="02040503050406030204" pitchFamily="18" charset="0"/>
+                                </a:rPr>
+                                <m:t>−</m:t>
+                              </m:r>
+                              <m:sSub>
+                                <m:sSubPr>
+                                  <m:ctrlPr>
+                                    <a:rPr lang="ru-RU" sz="1400" i="1">
+                                      <a:solidFill>
+                                        <a:srgbClr val="836967"/>
+                                      </a:solidFill>
+                                      <a:latin typeface="Cambria Math" panose="02040503050406030204" pitchFamily="18" charset="0"/>
+                                    </a:rPr>
+                                  </m:ctrlPr>
+                                </m:sSubPr>
+                                <m:e>
+                                  <m:r>
+                                    <a:rPr lang="ru-RU" sz="1400" i="1">
+                                      <a:latin typeface="Cambria Math" panose="02040503050406030204" pitchFamily="18" charset="0"/>
+                                    </a:rPr>
+                                    <m:t>𝑥</m:t>
+                                  </m:r>
+                                </m:e>
+                                <m:sub>
+                                  <m:r>
+                                    <a:rPr lang="ru-RU" sz="1400" i="1">
+                                      <a:latin typeface="Cambria Math" panose="02040503050406030204" pitchFamily="18" charset="0"/>
+                                    </a:rPr>
+                                    <m:t>𝑖</m:t>
+                                  </m:r>
+                                </m:sub>
+                              </m:sSub>
+                            </m:e>
+                          </m:d>
+                        </m:num>
+                        <m:den>
+                          <m:acc>
+                            <m:accPr>
+                              <m:chr m:val="̂"/>
+                              <m:ctrlPr>
+                                <a:rPr lang="ru-RU" sz="1400" i="1">
+                                  <a:solidFill>
+                                    <a:srgbClr val="836967"/>
+                                  </a:solidFill>
+                                  <a:latin typeface="Cambria Math" panose="02040503050406030204" pitchFamily="18" charset="0"/>
+                                </a:rPr>
+                              </m:ctrlPr>
+                            </m:accPr>
+                            <m:e>
+                              <m:sSub>
+                                <m:sSubPr>
+                                  <m:ctrlPr>
+                                    <a:rPr lang="ru-RU" sz="1400" i="1">
+                                      <a:solidFill>
+                                        <a:srgbClr val="836967"/>
+                                      </a:solidFill>
+                                      <a:latin typeface="Cambria Math" panose="02040503050406030204" pitchFamily="18" charset="0"/>
+                                    </a:rPr>
+                                  </m:ctrlPr>
+                                </m:sSubPr>
+                                <m:e>
+                                  <m:r>
+                                    <a:rPr lang="ru-RU" sz="1400" i="1">
+                                      <a:latin typeface="Cambria Math" panose="02040503050406030204" pitchFamily="18" charset="0"/>
+                                    </a:rPr>
+                                    <m:t>𝑓</m:t>
+                                  </m:r>
+                                </m:e>
+                                <m:sub>
+                                  <m:sSub>
+                                    <m:sSubPr>
+                                      <m:ctrlPr>
+                                        <a:rPr lang="ru-RU" sz="1400" i="1">
+                                          <a:solidFill>
+                                            <a:srgbClr val="836967"/>
+                                          </a:solidFill>
+                                          <a:latin typeface="Cambria Math" panose="02040503050406030204" pitchFamily="18" charset="0"/>
+                                        </a:rPr>
+                                      </m:ctrlPr>
+                                    </m:sSubPr>
+                                    <m:e>
+                                      <m:r>
+                                        <a:rPr lang="ru-RU" sz="1400" i="1">
+                                          <a:latin typeface="Cambria Math" panose="02040503050406030204" pitchFamily="18" charset="0"/>
+                                        </a:rPr>
+                                        <m:t>h</m:t>
+                                      </m:r>
+                                    </m:e>
+                                    <m:sub>
+                                      <m:r>
+                                        <a:rPr lang="ru-RU" sz="1400" i="1">
+                                          <a:latin typeface="Cambria Math" panose="02040503050406030204" pitchFamily="18" charset="0"/>
+                                        </a:rPr>
+                                        <m:t>𝑛</m:t>
+                                      </m:r>
+                                    </m:sub>
+                                  </m:sSub>
+                                </m:sub>
+                              </m:sSub>
+                            </m:e>
+                          </m:acc>
+                          <m:d>
+                            <m:dPr>
+                              <m:ctrlPr>
+                                <a:rPr lang="ru-RU" sz="1400" i="1">
+                                  <a:solidFill>
+                                    <a:srgbClr val="836967"/>
+                                  </a:solidFill>
+                                  <a:latin typeface="Cambria Math" panose="02040503050406030204" pitchFamily="18" charset="0"/>
+                                </a:rPr>
+                              </m:ctrlPr>
+                            </m:dPr>
+                            <m:e>
+                              <m:r>
+                                <a:rPr lang="ru-RU" sz="1400" i="1">
+                                  <a:latin typeface="Cambria Math" panose="02040503050406030204" pitchFamily="18" charset="0"/>
+                                </a:rPr>
+                                <m:t>𝑥</m:t>
+                              </m:r>
+                            </m:e>
+                          </m:d>
+                        </m:den>
+                      </m:f>
+                    </m:oMath>
+                  </m:oMathPara>
+                </a14:m>
+                <a:endParaRPr lang="en-US" dirty="0">
+                  <a:latin typeface="Times New Roman" panose="02020603050405020304" pitchFamily="18" charset="0"/>
+                  <a:cs typeface="Times New Roman" panose="02020603050405020304" pitchFamily="18" charset="0"/>
+                </a:endParaRPr>
+              </a:p>
+              <a:p>
+                <a:pPr>
+                  <a:lnSpc>
+                    <a:spcPct val="150000"/>
+                  </a:lnSpc>
+                </a:pPr>
+                <a:r>
+                  <a:rPr lang="ru-RU" sz="1800" dirty="0">
+                    <a:effectLst/>
+                    <a:latin typeface="Times New Roman" panose="02020603050405020304" pitchFamily="18" charset="0"/>
+                    <a:ea typeface="Calibri" panose="020F0502020204030204" pitchFamily="34" charset="0"/>
+                  </a:rPr>
+                  <a:t>где </a:t>
+                </a:r>
+                <a14:m>
+                  <m:oMath xmlns:m="http://schemas.openxmlformats.org/officeDocument/2006/math">
+                    <m:sSub>
+                      <m:sSubPr>
+                        <m:ctrlPr>
+                          <a:rPr lang="ru-RU" i="1">
+                            <a:effectLst/>
+                            <a:latin typeface="Cambria Math" panose="02040503050406030204" pitchFamily="18" charset="0"/>
+                            <a:cs typeface="Times New Roman" panose="02020603050405020304" pitchFamily="18" charset="0"/>
+                          </a:rPr>
+                        </m:ctrlPr>
+                      </m:sSubPr>
+                      <m:e>
+                        <m:r>
+                          <a:rPr lang="ru-RU" sz="1800" i="1">
+                            <a:effectLst/>
+                            <a:latin typeface="Cambria Math" panose="02040503050406030204" pitchFamily="18" charset="0"/>
+                            <a:ea typeface="Calibri" panose="020F0502020204030204" pitchFamily="34" charset="0"/>
+                            <a:cs typeface="Times New Roman" panose="02020603050405020304" pitchFamily="18" charset="0"/>
+                          </a:rPr>
+                          <m:t>𝐾</m:t>
+                        </m:r>
+                      </m:e>
+                      <m:sub>
+                        <m:r>
+                          <a:rPr lang="ru-RU" sz="1800" i="1">
+                            <a:effectLst/>
+                            <a:latin typeface="Cambria Math" panose="02040503050406030204" pitchFamily="18" charset="0"/>
+                            <a:ea typeface="Calibri" panose="020F0502020204030204" pitchFamily="34" charset="0"/>
+                            <a:cs typeface="Times New Roman" panose="02020603050405020304" pitchFamily="18" charset="0"/>
+                          </a:rPr>
+                          <m:t>h</m:t>
+                        </m:r>
+                      </m:sub>
+                    </m:sSub>
+                    <m:d>
+                      <m:dPr>
+                        <m:ctrlPr>
+                          <a:rPr lang="ru-RU" i="1">
+                            <a:effectLst/>
+                            <a:latin typeface="Cambria Math" panose="02040503050406030204" pitchFamily="18" charset="0"/>
+                            <a:cs typeface="Times New Roman" panose="02020603050405020304" pitchFamily="18" charset="0"/>
+                          </a:rPr>
+                        </m:ctrlPr>
+                      </m:dPr>
+                      <m:e>
+                        <m:r>
+                          <a:rPr lang="ru-RU" sz="1800" i="1">
+                            <a:effectLst/>
+                            <a:latin typeface="Cambria Math" panose="02040503050406030204" pitchFamily="18" charset="0"/>
+                            <a:ea typeface="Calibri" panose="020F0502020204030204" pitchFamily="34" charset="0"/>
+                            <a:cs typeface="Times New Roman" panose="02020603050405020304" pitchFamily="18" charset="0"/>
+                          </a:rPr>
+                          <m:t>𝑥</m:t>
+                        </m:r>
+                      </m:e>
+                    </m:d>
+                    <m:r>
+                      <a:rPr lang="ru-RU" sz="1800" i="1">
+                        <a:effectLst/>
+                        <a:latin typeface="Cambria Math" panose="02040503050406030204" pitchFamily="18" charset="0"/>
+                        <a:ea typeface="Calibri" panose="020F0502020204030204" pitchFamily="34" charset="0"/>
+                        <a:cs typeface="Times New Roman" panose="02020603050405020304" pitchFamily="18" charset="0"/>
+                      </a:rPr>
+                      <m:t>=</m:t>
+                    </m:r>
+                    <m:f>
+                      <m:fPr>
+                        <m:ctrlPr>
+                          <a:rPr lang="ru-RU" i="1">
+                            <a:effectLst/>
+                            <a:latin typeface="Cambria Math" panose="02040503050406030204" pitchFamily="18" charset="0"/>
+                            <a:cs typeface="Times New Roman" panose="02020603050405020304" pitchFamily="18" charset="0"/>
+                          </a:rPr>
+                        </m:ctrlPr>
+                      </m:fPr>
+                      <m:num>
+                        <m:r>
+                          <a:rPr lang="ru-RU" sz="1800" i="1">
+                            <a:effectLst/>
+                            <a:latin typeface="Cambria Math" panose="02040503050406030204" pitchFamily="18" charset="0"/>
+                            <a:ea typeface="Calibri" panose="020F0502020204030204" pitchFamily="34" charset="0"/>
+                            <a:cs typeface="Times New Roman" panose="02020603050405020304" pitchFamily="18" charset="0"/>
+                          </a:rPr>
+                          <m:t>1</m:t>
+                        </m:r>
+                      </m:num>
+                      <m:den>
+                        <m:r>
+                          <a:rPr lang="ru-RU" sz="1800" i="1">
+                            <a:effectLst/>
+                            <a:latin typeface="Cambria Math" panose="02040503050406030204" pitchFamily="18" charset="0"/>
+                            <a:ea typeface="Calibri" panose="020F0502020204030204" pitchFamily="34" charset="0"/>
+                            <a:cs typeface="Times New Roman" panose="02020603050405020304" pitchFamily="18" charset="0"/>
+                          </a:rPr>
+                          <m:t>h</m:t>
+                        </m:r>
+                      </m:den>
+                    </m:f>
+                    <m:r>
+                      <a:rPr lang="ru-RU" sz="1800" i="1">
+                        <a:effectLst/>
+                        <a:latin typeface="Cambria Math" panose="02040503050406030204" pitchFamily="18" charset="0"/>
+                        <a:ea typeface="Calibri" panose="020F0502020204030204" pitchFamily="34" charset="0"/>
+                        <a:cs typeface="Times New Roman" panose="02020603050405020304" pitchFamily="18" charset="0"/>
+                      </a:rPr>
+                      <m:t>𝐾</m:t>
+                    </m:r>
+                    <m:d>
+                      <m:dPr>
+                        <m:ctrlPr>
+                          <a:rPr lang="ru-RU" i="1">
+                            <a:effectLst/>
+                            <a:latin typeface="Cambria Math" panose="02040503050406030204" pitchFamily="18" charset="0"/>
+                            <a:cs typeface="Times New Roman" panose="02020603050405020304" pitchFamily="18" charset="0"/>
+                          </a:rPr>
+                        </m:ctrlPr>
+                      </m:dPr>
+                      <m:e>
+                        <m:f>
+                          <m:fPr>
+                            <m:ctrlPr>
+                              <a:rPr lang="ru-RU" i="1">
+                                <a:effectLst/>
+                                <a:latin typeface="Cambria Math" panose="02040503050406030204" pitchFamily="18" charset="0"/>
+                                <a:cs typeface="Times New Roman" panose="02020603050405020304" pitchFamily="18" charset="0"/>
+                              </a:rPr>
+                            </m:ctrlPr>
+                          </m:fPr>
+                          <m:num>
+                            <m:r>
+                              <a:rPr lang="ru-RU" sz="1800" i="1">
+                                <a:effectLst/>
+                                <a:latin typeface="Cambria Math" panose="02040503050406030204" pitchFamily="18" charset="0"/>
+                                <a:ea typeface="Calibri" panose="020F0502020204030204" pitchFamily="34" charset="0"/>
+                                <a:cs typeface="Times New Roman" panose="02020603050405020304" pitchFamily="18" charset="0"/>
+                              </a:rPr>
+                              <m:t>𝑥</m:t>
+                            </m:r>
+                          </m:num>
+                          <m:den>
+                            <m:r>
+                              <a:rPr lang="ru-RU" sz="1800" i="1">
+                                <a:effectLst/>
+                                <a:latin typeface="Cambria Math" panose="02040503050406030204" pitchFamily="18" charset="0"/>
+                                <a:ea typeface="Calibri" panose="020F0502020204030204" pitchFamily="34" charset="0"/>
+                                <a:cs typeface="Times New Roman" panose="02020603050405020304" pitchFamily="18" charset="0"/>
+                              </a:rPr>
+                              <m:t>h</m:t>
+                            </m:r>
+                          </m:den>
+                        </m:f>
+                      </m:e>
+                    </m:d>
+                    <m:r>
+                      <a:rPr lang="ru-RU" sz="1800" i="1">
+                        <a:effectLst/>
+                        <a:latin typeface="Cambria Math" panose="02040503050406030204" pitchFamily="18" charset="0"/>
+                        <a:ea typeface="Calibri" panose="020F0502020204030204" pitchFamily="34" charset="0"/>
+                        <a:cs typeface="Times New Roman" panose="02020603050405020304" pitchFamily="18" charset="0"/>
+                      </a:rPr>
+                      <m:t>,</m:t>
+                    </m:r>
+                  </m:oMath>
+                </a14:m>
+                <a:r>
+                  <a:rPr lang="ru-RU" sz="1800" dirty="0">
+                    <a:effectLst/>
+                    <a:latin typeface="Times New Roman" panose="02020603050405020304" pitchFamily="18" charset="0"/>
+                    <a:ea typeface="DengXian" panose="02010600030101010101" pitchFamily="2" charset="-122"/>
+                  </a:rPr>
+                  <a:t> а</a:t>
+                </a:r>
+                <a:r>
+                  <a:rPr lang="ru-RU" sz="1800" dirty="0">
+                    <a:effectLst/>
+                    <a:latin typeface="Times New Roman" panose="02020603050405020304" pitchFamily="18" charset="0"/>
+                    <a:ea typeface="Calibri" panose="020F0502020204030204" pitchFamily="34" charset="0"/>
+                  </a:rPr>
+                  <a:t> ширина окна </a:t>
+                </a:r>
+                <a14:m>
+                  <m:oMath xmlns:m="http://schemas.openxmlformats.org/officeDocument/2006/math">
+                    <m:r>
+                      <a:rPr lang="ru-RU" sz="1800" i="1">
+                        <a:effectLst/>
+                        <a:latin typeface="Cambria Math" panose="02040503050406030204" pitchFamily="18" charset="0"/>
+                        <a:ea typeface="Calibri" panose="020F0502020204030204" pitchFamily="34" charset="0"/>
+                        <a:cs typeface="Times New Roman" panose="02020603050405020304" pitchFamily="18" charset="0"/>
+                      </a:rPr>
+                      <m:t>h</m:t>
+                    </m:r>
+                    <m:r>
+                      <a:rPr lang="ru-RU" sz="1800" i="1">
+                        <a:effectLst/>
+                        <a:latin typeface="Cambria Math" panose="02040503050406030204" pitchFamily="18" charset="0"/>
+                        <a:ea typeface="Calibri" panose="020F0502020204030204" pitchFamily="34" charset="0"/>
+                        <a:cs typeface="Times New Roman" panose="02020603050405020304" pitchFamily="18" charset="0"/>
+                      </a:rPr>
+                      <m:t>=</m:t>
+                    </m:r>
+                    <m:sSub>
+                      <m:sSubPr>
+                        <m:ctrlPr>
+                          <a:rPr lang="ru-RU" i="1">
+                            <a:effectLst/>
+                            <a:latin typeface="Cambria Math" panose="02040503050406030204" pitchFamily="18" charset="0"/>
+                            <a:cs typeface="Times New Roman" panose="02020603050405020304" pitchFamily="18" charset="0"/>
+                          </a:rPr>
+                        </m:ctrlPr>
+                      </m:sSubPr>
+                      <m:e>
+                        <m:r>
+                          <a:rPr lang="ru-RU" sz="1800" i="1">
+                            <a:effectLst/>
+                            <a:latin typeface="Cambria Math" panose="02040503050406030204" pitchFamily="18" charset="0"/>
+                            <a:ea typeface="Calibri" panose="020F0502020204030204" pitchFamily="34" charset="0"/>
+                            <a:cs typeface="Times New Roman" panose="02020603050405020304" pitchFamily="18" charset="0"/>
+                          </a:rPr>
+                          <m:t>h</m:t>
+                        </m:r>
+                      </m:e>
+                      <m:sub>
+                        <m:r>
+                          <a:rPr lang="ru-RU" sz="1800" i="1">
+                            <a:effectLst/>
+                            <a:latin typeface="Cambria Math" panose="02040503050406030204" pitchFamily="18" charset="0"/>
+                            <a:ea typeface="Calibri" panose="020F0502020204030204" pitchFamily="34" charset="0"/>
+                            <a:cs typeface="Times New Roman" panose="02020603050405020304" pitchFamily="18" charset="0"/>
+                          </a:rPr>
+                          <m:t>𝑛</m:t>
+                        </m:r>
+                      </m:sub>
+                    </m:sSub>
+                  </m:oMath>
+                </a14:m>
+                <a:r>
+                  <a:rPr lang="ru-RU" sz="1800" dirty="0">
+                    <a:effectLst/>
+                    <a:latin typeface="Times New Roman" panose="02020603050405020304" pitchFamily="18" charset="0"/>
+                    <a:ea typeface="DengXian" panose="02010600030101010101" pitchFamily="2" charset="-122"/>
+                  </a:rPr>
+                  <a:t> зависит от объёма выборки.</a:t>
+                </a:r>
+                <a:endParaRPr lang="en-US" dirty="0">
+                  <a:latin typeface="Times New Roman" panose="02020603050405020304" pitchFamily="18" charset="0"/>
+                  <a:cs typeface="Times New Roman" panose="02020603050405020304" pitchFamily="18" charset="0"/>
+                </a:endParaRPr>
+              </a:p>
+              <a:p>
+                <a:pPr>
+                  <a:lnSpc>
+                    <a:spcPct val="150000"/>
+                  </a:lnSpc>
+                </a:pPr>
+                <a:r>
+                  <a:rPr lang="en-US" dirty="0">
+                    <a:latin typeface="Times New Roman" panose="02020603050405020304" pitchFamily="18" charset="0"/>
+                    <a:cs typeface="Times New Roman" panose="02020603050405020304" pitchFamily="18" charset="0"/>
+                  </a:rPr>
+                  <a:t>	</a:t>
+                </a:r>
+                <a:r>
+                  <a:rPr lang="ru-RU" dirty="0">
+                    <a:latin typeface="Times New Roman" panose="02020603050405020304" pitchFamily="18" charset="0"/>
+                    <a:cs typeface="Times New Roman" panose="02020603050405020304" pitchFamily="18" charset="0"/>
+                  </a:rPr>
+                  <a:t>Данная весовая схема применяется для оценки условного математического ожидания </a:t>
+                </a:r>
+                <a14:m>
+                  <m:oMath xmlns:m="http://schemas.openxmlformats.org/officeDocument/2006/math">
+                    <m:r>
+                      <a:rPr lang="ru-RU" i="1" dirty="0" smtClean="0">
+                        <a:latin typeface="Cambria Math" panose="02040503050406030204" pitchFamily="18" charset="0"/>
+                        <a:cs typeface="Times New Roman" panose="02020603050405020304" pitchFamily="18" charset="0"/>
+                      </a:rPr>
+                      <m:t>𝐸</m:t>
+                    </m:r>
+                    <m:d>
+                      <m:dPr>
+                        <m:ctrlPr>
+                          <a:rPr lang="ru-RU" i="1" dirty="0" smtClean="0">
+                            <a:latin typeface="Cambria Math" panose="02040503050406030204" pitchFamily="18" charset="0"/>
+                            <a:cs typeface="Times New Roman" panose="02020603050405020304" pitchFamily="18" charset="0"/>
+                          </a:rPr>
+                        </m:ctrlPr>
+                      </m:dPr>
+                      <m:e>
+                        <m:r>
+                          <a:rPr lang="ru-RU" i="1" dirty="0" err="1" smtClean="0">
+                            <a:latin typeface="Cambria Math" panose="02040503050406030204" pitchFamily="18" charset="0"/>
+                            <a:cs typeface="Times New Roman" panose="02020603050405020304" pitchFamily="18" charset="0"/>
+                          </a:rPr>
+                          <m:t>𝑦</m:t>
+                        </m:r>
+                      </m:e>
+                      <m:e>
+                        <m:r>
+                          <a:rPr lang="ru-RU" i="1" dirty="0" err="1" smtClean="0">
+                            <a:latin typeface="Cambria Math" panose="02040503050406030204" pitchFamily="18" charset="0"/>
+                            <a:cs typeface="Times New Roman" panose="02020603050405020304" pitchFamily="18" charset="0"/>
+                          </a:rPr>
+                          <m:t>𝑥</m:t>
+                        </m:r>
+                      </m:e>
+                    </m:d>
+                    <m:r>
+                      <a:rPr lang="ru-RU" i="1" dirty="0" smtClean="0">
+                        <a:latin typeface="Cambria Math" panose="02040503050406030204" pitchFamily="18" charset="0"/>
+                        <a:cs typeface="Times New Roman" panose="02020603050405020304" pitchFamily="18" charset="0"/>
+                      </a:rPr>
+                      <m:t>, </m:t>
+                    </m:r>
+                  </m:oMath>
+                </a14:m>
+                <a:r>
+                  <a:rPr lang="ru-RU" dirty="0">
+                    <a:latin typeface="Times New Roman" panose="02020603050405020304" pitchFamily="18" charset="0"/>
+                    <a:cs typeface="Times New Roman" panose="02020603050405020304" pitchFamily="18" charset="0"/>
+                  </a:rPr>
+                  <a:t>по формуле </a:t>
+                </a:r>
+                <a:r>
+                  <a:rPr lang="ru-RU" dirty="0" err="1">
+                    <a:latin typeface="Times New Roman" panose="02020603050405020304" pitchFamily="18" charset="0"/>
+                    <a:cs typeface="Times New Roman" panose="02020603050405020304" pitchFamily="18" charset="0"/>
+                  </a:rPr>
+                  <a:t>Надарая</a:t>
+                </a:r>
+                <a:r>
+                  <a:rPr lang="ru-RU" dirty="0">
+                    <a:latin typeface="Times New Roman" panose="02020603050405020304" pitchFamily="18" charset="0"/>
+                    <a:cs typeface="Times New Roman" panose="02020603050405020304" pitchFamily="18" charset="0"/>
+                  </a:rPr>
+                  <a:t>-Ватсона</a:t>
+                </a:r>
+                <a:r>
+                  <a:rPr lang="en-US" dirty="0">
+                    <a:latin typeface="Times New Roman" panose="02020603050405020304" pitchFamily="18" charset="0"/>
+                    <a:cs typeface="Times New Roman" panose="02020603050405020304" pitchFamily="18" charset="0"/>
+                  </a:rPr>
+                  <a:t> [34, 34]</a:t>
+                </a:r>
+                <a:r>
+                  <a:rPr lang="ru-RU" dirty="0">
+                    <a:latin typeface="Times New Roman" panose="02020603050405020304" pitchFamily="18" charset="0"/>
+                    <a:cs typeface="Times New Roman" panose="02020603050405020304" pitchFamily="18" charset="0"/>
+                  </a:rPr>
+                  <a:t>:</a:t>
+                </a:r>
+                <a:endParaRPr lang="en-US" dirty="0">
+                  <a:latin typeface="Times New Roman" panose="02020603050405020304" pitchFamily="18" charset="0"/>
+                  <a:cs typeface="Times New Roman" panose="02020603050405020304" pitchFamily="18" charset="0"/>
+                </a:endParaRPr>
+              </a:p>
+            </p:txBody>
+          </p:sp>
+        </mc:Choice>
+        <mc:Fallback xmlns="">
+          <p:sp>
+            <p:nvSpPr>
+              <p:cNvPr id="3" name="TextBox 2">
+                <a:extLst>
+                  <a:ext uri="{FF2B5EF4-FFF2-40B4-BE49-F238E27FC236}">
+                    <a16:creationId xmlns:a16="http://schemas.microsoft.com/office/drawing/2014/main" id="{3C4E704A-6A1F-5F99-7A11-9B32B46C3D6D}"/>
+                  </a:ext>
+                </a:extLst>
+              </p:cNvPr>
+              <p:cNvSpPr txBox="1">
+                <a:spLocks noRot="1" noChangeAspect="1" noMove="1" noResize="1" noEditPoints="1" noAdjustHandles="1" noChangeArrowheads="1" noChangeShapeType="1" noTextEdit="1"/>
+              </p:cNvSpPr>
+              <p:nvPr/>
+            </p:nvSpPr>
+            <p:spPr>
+              <a:xfrm>
+                <a:off x="525100" y="599122"/>
+                <a:ext cx="11416420" cy="5279843"/>
+              </a:xfrm>
+              <a:prstGeom prst="rect">
+                <a:avLst/>
+              </a:prstGeom>
+              <a:blipFill>
+                <a:blip r:embed="rId2"/>
+                <a:stretch>
+                  <a:fillRect l="-427" r="-908"/>
+                </a:stretch>
+              </a:blipFill>
+            </p:spPr>
+            <p:txBody>
+              <a:bodyPr/>
+              <a:lstStyle/>
+              <a:p>
+                <a:r>
+                  <a:rPr lang="ru-RU">
+                    <a:noFill/>
+                  </a:rPr>
+                  <a:t> </a:t>
+                </a:r>
+              </a:p>
+            </p:txBody>
+          </p:sp>
+        </mc:Fallback>
+      </mc:AlternateContent>
+      <mc:AlternateContent xmlns:mc="http://schemas.openxmlformats.org/markup-compatibility/2006" xmlns:a14="http://schemas.microsoft.com/office/drawing/2010/main">
+        <mc:Choice Requires="a14">
+          <p:sp>
+            <p:nvSpPr>
+              <p:cNvPr id="17" name="TextBox 16">
+                <a:extLst>
+                  <a:ext uri="{FF2B5EF4-FFF2-40B4-BE49-F238E27FC236}">
+                    <a16:creationId xmlns:a16="http://schemas.microsoft.com/office/drawing/2014/main" id="{36DABECC-B604-46B6-B164-CCE20BAE3B3F}"/>
+                  </a:ext>
+                </a:extLst>
+              </p:cNvPr>
+              <p:cNvSpPr txBox="1"/>
+              <p:nvPr/>
+            </p:nvSpPr>
+            <p:spPr>
+              <a:xfrm>
+                <a:off x="3048494" y="5816063"/>
+                <a:ext cx="6095010" cy="811761"/>
+              </a:xfrm>
+              <a:prstGeom prst="rect">
+                <a:avLst/>
+              </a:prstGeom>
+              <a:noFill/>
+            </p:spPr>
+            <p:txBody>
+              <a:bodyPr wrap="square">
+                <a:spAutoFit/>
+              </a:bodyPr>
+              <a:lstStyle/>
+              <a:p>
+                <a:pPr/>
+                <a14:m>
+                  <m:oMathPara xmlns:m="http://schemas.openxmlformats.org/officeDocument/2006/math">
+                    <m:oMathParaPr>
+                      <m:jc m:val="centerGroup"/>
+                    </m:oMathParaPr>
+                    <m:oMath xmlns:m="http://schemas.openxmlformats.org/officeDocument/2006/math">
+                      <m:acc>
+                        <m:accPr>
+                          <m:chr m:val="̂"/>
+                          <m:ctrlPr>
+                            <a:rPr lang="ru-RU" sz="1400" i="1" smtClean="0">
+                              <a:effectLst/>
+                              <a:latin typeface="Cambria Math" panose="02040503050406030204" pitchFamily="18" charset="0"/>
+                              <a:cs typeface="Times New Roman" panose="02020603050405020304" pitchFamily="18" charset="0"/>
+                            </a:rPr>
+                          </m:ctrlPr>
+                        </m:accPr>
+                        <m:e>
+                          <m:sSub>
+                            <m:sSubPr>
+                              <m:ctrlPr>
+                                <a:rPr lang="ru-RU" sz="1400" i="1">
+                                  <a:effectLst/>
+                                  <a:latin typeface="Cambria Math" panose="02040503050406030204" pitchFamily="18" charset="0"/>
+                                  <a:cs typeface="Times New Roman" panose="02020603050405020304" pitchFamily="18" charset="0"/>
+                                </a:rPr>
+                              </m:ctrlPr>
+                            </m:sSubPr>
+                            <m:e>
+                              <m:r>
+                                <a:rPr lang="en-US" sz="1400" i="1">
+                                  <a:effectLst/>
+                                  <a:latin typeface="Cambria Math" panose="02040503050406030204" pitchFamily="18" charset="0"/>
+                                  <a:ea typeface="Calibri" panose="020F0502020204030204" pitchFamily="34" charset="0"/>
+                                  <a:cs typeface="Times New Roman" panose="02020603050405020304" pitchFamily="18" charset="0"/>
+                                </a:rPr>
+                                <m:t>𝑔</m:t>
+                              </m:r>
+                            </m:e>
+                            <m:sub>
+                              <m:r>
+                                <a:rPr lang="ru-RU" sz="1400" i="1">
+                                  <a:effectLst/>
+                                  <a:latin typeface="Cambria Math" panose="02040503050406030204" pitchFamily="18" charset="0"/>
+                                  <a:ea typeface="Calibri" panose="020F0502020204030204" pitchFamily="34" charset="0"/>
+                                  <a:cs typeface="Times New Roman" panose="02020603050405020304" pitchFamily="18" charset="0"/>
+                                </a:rPr>
+                                <m:t>h</m:t>
+                              </m:r>
+                            </m:sub>
+                          </m:sSub>
+                        </m:e>
+                      </m:acc>
+                      <m:d>
+                        <m:dPr>
+                          <m:ctrlPr>
+                            <a:rPr lang="ru-RU" sz="1400" i="1">
+                              <a:effectLst/>
+                              <a:latin typeface="Cambria Math" panose="02040503050406030204" pitchFamily="18" charset="0"/>
+                              <a:cs typeface="Times New Roman" panose="02020603050405020304" pitchFamily="18" charset="0"/>
+                            </a:rPr>
+                          </m:ctrlPr>
+                        </m:dPr>
+                        <m:e>
+                          <m:r>
+                            <a:rPr lang="en-US" sz="1400" i="1">
+                              <a:effectLst/>
+                              <a:latin typeface="Cambria Math" panose="02040503050406030204" pitchFamily="18" charset="0"/>
+                              <a:ea typeface="Calibri" panose="020F0502020204030204" pitchFamily="34" charset="0"/>
+                              <a:cs typeface="Times New Roman" panose="02020603050405020304" pitchFamily="18" charset="0"/>
+                            </a:rPr>
+                            <m:t>𝑥</m:t>
+                          </m:r>
+                        </m:e>
+                      </m:d>
+                      <m:r>
+                        <a:rPr lang="ru-RU" sz="1400" i="1">
+                          <a:effectLst/>
+                          <a:latin typeface="Cambria Math" panose="02040503050406030204" pitchFamily="18" charset="0"/>
+                          <a:ea typeface="Calibri" panose="020F0502020204030204" pitchFamily="34" charset="0"/>
+                          <a:cs typeface="Times New Roman" panose="02020603050405020304" pitchFamily="18" charset="0"/>
+                        </a:rPr>
+                        <m:t>=</m:t>
+                      </m:r>
+                      <m:f>
+                        <m:fPr>
+                          <m:ctrlPr>
+                            <a:rPr lang="ru-RU" sz="1400" i="1">
+                              <a:effectLst/>
+                              <a:latin typeface="Cambria Math" panose="02040503050406030204" pitchFamily="18" charset="0"/>
+                              <a:cs typeface="Times New Roman" panose="02020603050405020304" pitchFamily="18" charset="0"/>
+                            </a:rPr>
+                          </m:ctrlPr>
+                        </m:fPr>
+                        <m:num>
+                          <m:f>
+                            <m:fPr>
+                              <m:ctrlPr>
+                                <a:rPr lang="ru-RU" sz="1400" i="1">
+                                  <a:effectLst/>
+                                  <a:latin typeface="Cambria Math" panose="02040503050406030204" pitchFamily="18" charset="0"/>
+                                  <a:cs typeface="Times New Roman" panose="02020603050405020304" pitchFamily="18" charset="0"/>
+                                </a:rPr>
+                              </m:ctrlPr>
+                            </m:fPr>
+                            <m:num>
+                              <m:r>
+                                <a:rPr lang="ru-RU" sz="1400" i="1">
+                                  <a:effectLst/>
+                                  <a:latin typeface="Cambria Math" panose="02040503050406030204" pitchFamily="18" charset="0"/>
+                                  <a:ea typeface="Calibri" panose="020F0502020204030204" pitchFamily="34" charset="0"/>
+                                  <a:cs typeface="Times New Roman" panose="02020603050405020304" pitchFamily="18" charset="0"/>
+                                </a:rPr>
+                                <m:t>1</m:t>
+                              </m:r>
+                            </m:num>
+                            <m:den>
+                              <m:r>
+                                <a:rPr lang="en-US" sz="1400" i="1">
+                                  <a:effectLst/>
+                                  <a:latin typeface="Cambria Math" panose="02040503050406030204" pitchFamily="18" charset="0"/>
+                                  <a:ea typeface="Calibri" panose="020F0502020204030204" pitchFamily="34" charset="0"/>
+                                  <a:cs typeface="Times New Roman" panose="02020603050405020304" pitchFamily="18" charset="0"/>
+                                </a:rPr>
+                                <m:t>𝑛</m:t>
+                              </m:r>
+                            </m:den>
+                          </m:f>
+                          <m:nary>
+                            <m:naryPr>
+                              <m:chr m:val="∑"/>
+                              <m:limLoc m:val="undOvr"/>
+                              <m:ctrlPr>
+                                <a:rPr lang="ru-RU" sz="1400" i="1">
+                                  <a:effectLst/>
+                                  <a:latin typeface="Cambria Math" panose="02040503050406030204" pitchFamily="18" charset="0"/>
+                                  <a:cs typeface="Times New Roman" panose="02020603050405020304" pitchFamily="18" charset="0"/>
+                                </a:rPr>
+                              </m:ctrlPr>
+                            </m:naryPr>
+                            <m:sub>
+                              <m:r>
+                                <a:rPr lang="en-US" sz="1400" i="1">
+                                  <a:effectLst/>
+                                  <a:latin typeface="Cambria Math" panose="02040503050406030204" pitchFamily="18" charset="0"/>
+                                  <a:ea typeface="Calibri" panose="020F0502020204030204" pitchFamily="34" charset="0"/>
+                                  <a:cs typeface="Times New Roman" panose="02020603050405020304" pitchFamily="18" charset="0"/>
+                                </a:rPr>
+                                <m:t>𝑖</m:t>
+                              </m:r>
+                              <m:r>
+                                <a:rPr lang="ru-RU" sz="1400" i="1">
+                                  <a:effectLst/>
+                                  <a:latin typeface="Cambria Math" panose="02040503050406030204" pitchFamily="18" charset="0"/>
+                                  <a:ea typeface="Calibri" panose="020F0502020204030204" pitchFamily="34" charset="0"/>
+                                  <a:cs typeface="Times New Roman" panose="02020603050405020304" pitchFamily="18" charset="0"/>
+                                </a:rPr>
+                                <m:t>=1</m:t>
+                              </m:r>
+                            </m:sub>
+                            <m:sup>
+                              <m:r>
+                                <a:rPr lang="en-US" sz="1400" i="1">
+                                  <a:effectLst/>
+                                  <a:latin typeface="Cambria Math" panose="02040503050406030204" pitchFamily="18" charset="0"/>
+                                  <a:ea typeface="Calibri" panose="020F0502020204030204" pitchFamily="34" charset="0"/>
+                                  <a:cs typeface="Times New Roman" panose="02020603050405020304" pitchFamily="18" charset="0"/>
+                                </a:rPr>
+                                <m:t>𝑛</m:t>
+                              </m:r>
+                            </m:sup>
+                            <m:e>
+                              <m:sSub>
+                                <m:sSubPr>
+                                  <m:ctrlPr>
+                                    <a:rPr lang="ru-RU" sz="1400" i="1">
+                                      <a:effectLst/>
+                                      <a:latin typeface="Cambria Math" panose="02040503050406030204" pitchFamily="18" charset="0"/>
+                                      <a:cs typeface="Times New Roman" panose="02020603050405020304" pitchFamily="18" charset="0"/>
+                                    </a:rPr>
+                                  </m:ctrlPr>
+                                </m:sSubPr>
+                                <m:e>
+                                  <m:r>
+                                    <a:rPr lang="en-US" sz="1400" i="1">
+                                      <a:effectLst/>
+                                      <a:latin typeface="Cambria Math" panose="02040503050406030204" pitchFamily="18" charset="0"/>
+                                      <a:ea typeface="Calibri" panose="020F0502020204030204" pitchFamily="34" charset="0"/>
+                                      <a:cs typeface="Times New Roman" panose="02020603050405020304" pitchFamily="18" charset="0"/>
+                                    </a:rPr>
+                                    <m:t>𝑦</m:t>
+                                  </m:r>
+                                </m:e>
+                                <m:sub>
+                                  <m:r>
+                                    <a:rPr lang="en-US" sz="1400" i="1">
+                                      <a:effectLst/>
+                                      <a:latin typeface="Cambria Math" panose="02040503050406030204" pitchFamily="18" charset="0"/>
+                                      <a:ea typeface="Calibri" panose="020F0502020204030204" pitchFamily="34" charset="0"/>
+                                      <a:cs typeface="Times New Roman" panose="02020603050405020304" pitchFamily="18" charset="0"/>
+                                    </a:rPr>
+                                    <m:t>𝑖</m:t>
+                                  </m:r>
+                                </m:sub>
+                              </m:sSub>
+                              <m:sSub>
+                                <m:sSubPr>
+                                  <m:ctrlPr>
+                                    <a:rPr lang="ru-RU" sz="1400" i="1">
+                                      <a:effectLst/>
+                                      <a:latin typeface="Cambria Math" panose="02040503050406030204" pitchFamily="18" charset="0"/>
+                                      <a:cs typeface="Times New Roman" panose="02020603050405020304" pitchFamily="18" charset="0"/>
+                                    </a:rPr>
+                                  </m:ctrlPr>
+                                </m:sSubPr>
+                                <m:e>
+                                  <m:r>
+                                    <a:rPr lang="en-US" sz="1400" i="1">
+                                      <a:effectLst/>
+                                      <a:latin typeface="Cambria Math" panose="02040503050406030204" pitchFamily="18" charset="0"/>
+                                      <a:ea typeface="Calibri" panose="020F0502020204030204" pitchFamily="34" charset="0"/>
+                                      <a:cs typeface="Times New Roman" panose="02020603050405020304" pitchFamily="18" charset="0"/>
+                                    </a:rPr>
+                                    <m:t>𝐾</m:t>
+                                  </m:r>
+                                </m:e>
+                                <m:sub>
+                                  <m:sSub>
+                                    <m:sSubPr>
+                                      <m:ctrlPr>
+                                        <a:rPr lang="ru-RU" sz="1400" i="1">
+                                          <a:effectLst/>
+                                          <a:latin typeface="Cambria Math" panose="02040503050406030204" pitchFamily="18" charset="0"/>
+                                          <a:cs typeface="Times New Roman" panose="02020603050405020304" pitchFamily="18" charset="0"/>
+                                        </a:rPr>
+                                      </m:ctrlPr>
+                                    </m:sSubPr>
+                                    <m:e>
+                                      <m:r>
+                                        <a:rPr lang="ru-RU" sz="1400" i="1">
+                                          <a:effectLst/>
+                                          <a:latin typeface="Cambria Math" panose="02040503050406030204" pitchFamily="18" charset="0"/>
+                                          <a:ea typeface="Calibri" panose="020F0502020204030204" pitchFamily="34" charset="0"/>
+                                          <a:cs typeface="Times New Roman" panose="02020603050405020304" pitchFamily="18" charset="0"/>
+                                        </a:rPr>
+                                        <m:t>h</m:t>
+                                      </m:r>
+                                    </m:e>
+                                    <m:sub>
+                                      <m:r>
+                                        <a:rPr lang="en-US" sz="1400" i="1">
+                                          <a:effectLst/>
+                                          <a:latin typeface="Cambria Math" panose="02040503050406030204" pitchFamily="18" charset="0"/>
+                                          <a:ea typeface="Calibri" panose="020F0502020204030204" pitchFamily="34" charset="0"/>
+                                          <a:cs typeface="Times New Roman" panose="02020603050405020304" pitchFamily="18" charset="0"/>
+                                        </a:rPr>
+                                        <m:t>𝑛</m:t>
+                                      </m:r>
+                                    </m:sub>
+                                  </m:sSub>
+                                </m:sub>
+                              </m:sSub>
+                              <m:d>
+                                <m:dPr>
+                                  <m:ctrlPr>
+                                    <a:rPr lang="ru-RU" sz="1400" i="1">
+                                      <a:effectLst/>
+                                      <a:latin typeface="Cambria Math" panose="02040503050406030204" pitchFamily="18" charset="0"/>
+                                      <a:cs typeface="Times New Roman" panose="02020603050405020304" pitchFamily="18" charset="0"/>
+                                    </a:rPr>
+                                  </m:ctrlPr>
+                                </m:dPr>
+                                <m:e>
+                                  <m:r>
+                                    <a:rPr lang="en-US" sz="1400" i="1">
+                                      <a:effectLst/>
+                                      <a:latin typeface="Cambria Math" panose="02040503050406030204" pitchFamily="18" charset="0"/>
+                                      <a:ea typeface="Calibri" panose="020F0502020204030204" pitchFamily="34" charset="0"/>
+                                      <a:cs typeface="Times New Roman" panose="02020603050405020304" pitchFamily="18" charset="0"/>
+                                    </a:rPr>
+                                    <m:t>𝑥</m:t>
+                                  </m:r>
+                                  <m:r>
+                                    <a:rPr lang="ru-RU" sz="1400" i="1">
+                                      <a:effectLst/>
+                                      <a:latin typeface="Cambria Math" panose="02040503050406030204" pitchFamily="18" charset="0"/>
+                                      <a:ea typeface="Calibri" panose="020F0502020204030204" pitchFamily="34" charset="0"/>
+                                      <a:cs typeface="Times New Roman" panose="02020603050405020304" pitchFamily="18" charset="0"/>
+                                    </a:rPr>
+                                    <m:t>−</m:t>
+                                  </m:r>
+                                  <m:sSub>
+                                    <m:sSubPr>
+                                      <m:ctrlPr>
+                                        <a:rPr lang="ru-RU" sz="1400" i="1">
+                                          <a:effectLst/>
+                                          <a:latin typeface="Cambria Math" panose="02040503050406030204" pitchFamily="18" charset="0"/>
+                                          <a:cs typeface="Times New Roman" panose="02020603050405020304" pitchFamily="18" charset="0"/>
+                                        </a:rPr>
+                                      </m:ctrlPr>
+                                    </m:sSubPr>
+                                    <m:e>
+                                      <m:r>
+                                        <a:rPr lang="en-US" sz="1400" i="1">
+                                          <a:effectLst/>
+                                          <a:latin typeface="Cambria Math" panose="02040503050406030204" pitchFamily="18" charset="0"/>
+                                          <a:ea typeface="Calibri" panose="020F0502020204030204" pitchFamily="34" charset="0"/>
+                                          <a:cs typeface="Times New Roman" panose="02020603050405020304" pitchFamily="18" charset="0"/>
+                                        </a:rPr>
+                                        <m:t>𝑥</m:t>
+                                      </m:r>
+                                    </m:e>
+                                    <m:sub>
+                                      <m:r>
+                                        <a:rPr lang="en-US" sz="1400" i="1">
+                                          <a:effectLst/>
+                                          <a:latin typeface="Cambria Math" panose="02040503050406030204" pitchFamily="18" charset="0"/>
+                                          <a:ea typeface="Calibri" panose="020F0502020204030204" pitchFamily="34" charset="0"/>
+                                          <a:cs typeface="Times New Roman" panose="02020603050405020304" pitchFamily="18" charset="0"/>
+                                        </a:rPr>
+                                        <m:t>𝑖</m:t>
+                                      </m:r>
+                                    </m:sub>
+                                  </m:sSub>
+                                </m:e>
+                              </m:d>
+                            </m:e>
+                          </m:nary>
+                        </m:num>
+                        <m:den>
+                          <m:f>
+                            <m:fPr>
+                              <m:ctrlPr>
+                                <a:rPr lang="ru-RU" sz="1400" i="1">
+                                  <a:effectLst/>
+                                  <a:latin typeface="Cambria Math" panose="02040503050406030204" pitchFamily="18" charset="0"/>
+                                  <a:cs typeface="Times New Roman" panose="02020603050405020304" pitchFamily="18" charset="0"/>
+                                </a:rPr>
+                              </m:ctrlPr>
+                            </m:fPr>
+                            <m:num>
+                              <m:r>
+                                <a:rPr lang="ru-RU" sz="1400" i="1">
+                                  <a:effectLst/>
+                                  <a:latin typeface="Cambria Math" panose="02040503050406030204" pitchFamily="18" charset="0"/>
+                                  <a:ea typeface="Calibri" panose="020F0502020204030204" pitchFamily="34" charset="0"/>
+                                  <a:cs typeface="Times New Roman" panose="02020603050405020304" pitchFamily="18" charset="0"/>
+                                </a:rPr>
+                                <m:t>1</m:t>
+                              </m:r>
+                            </m:num>
+                            <m:den>
+                              <m:r>
+                                <a:rPr lang="en-US" sz="1400" i="1">
+                                  <a:effectLst/>
+                                  <a:latin typeface="Cambria Math" panose="02040503050406030204" pitchFamily="18" charset="0"/>
+                                  <a:ea typeface="Calibri" panose="020F0502020204030204" pitchFamily="34" charset="0"/>
+                                  <a:cs typeface="Times New Roman" panose="02020603050405020304" pitchFamily="18" charset="0"/>
+                                </a:rPr>
+                                <m:t>𝑛</m:t>
+                              </m:r>
+                            </m:den>
+                          </m:f>
+                          <m:nary>
+                            <m:naryPr>
+                              <m:chr m:val="∑"/>
+                              <m:limLoc m:val="undOvr"/>
+                              <m:ctrlPr>
+                                <a:rPr lang="ru-RU" sz="1400" i="1">
+                                  <a:effectLst/>
+                                  <a:latin typeface="Cambria Math" panose="02040503050406030204" pitchFamily="18" charset="0"/>
+                                  <a:cs typeface="Times New Roman" panose="02020603050405020304" pitchFamily="18" charset="0"/>
+                                </a:rPr>
+                              </m:ctrlPr>
+                            </m:naryPr>
+                            <m:sub>
+                              <m:r>
+                                <a:rPr lang="en-US" sz="1400" i="1">
+                                  <a:effectLst/>
+                                  <a:latin typeface="Cambria Math" panose="02040503050406030204" pitchFamily="18" charset="0"/>
+                                  <a:ea typeface="Calibri" panose="020F0502020204030204" pitchFamily="34" charset="0"/>
+                                  <a:cs typeface="Times New Roman" panose="02020603050405020304" pitchFamily="18" charset="0"/>
+                                </a:rPr>
+                                <m:t>𝑖</m:t>
+                              </m:r>
+                              <m:r>
+                                <a:rPr lang="ru-RU" sz="1400" i="1">
+                                  <a:effectLst/>
+                                  <a:latin typeface="Cambria Math" panose="02040503050406030204" pitchFamily="18" charset="0"/>
+                                  <a:ea typeface="Calibri" panose="020F0502020204030204" pitchFamily="34" charset="0"/>
+                                  <a:cs typeface="Times New Roman" panose="02020603050405020304" pitchFamily="18" charset="0"/>
+                                </a:rPr>
+                                <m:t>=1</m:t>
+                              </m:r>
+                            </m:sub>
+                            <m:sup>
+                              <m:r>
+                                <a:rPr lang="en-US" sz="1400" i="1">
+                                  <a:effectLst/>
+                                  <a:latin typeface="Cambria Math" panose="02040503050406030204" pitchFamily="18" charset="0"/>
+                                  <a:ea typeface="Calibri" panose="020F0502020204030204" pitchFamily="34" charset="0"/>
+                                  <a:cs typeface="Times New Roman" panose="02020603050405020304" pitchFamily="18" charset="0"/>
+                                </a:rPr>
+                                <m:t>𝑛</m:t>
+                              </m:r>
+                            </m:sup>
+                            <m:e>
+                              <m:sSub>
+                                <m:sSubPr>
+                                  <m:ctrlPr>
+                                    <a:rPr lang="ru-RU" sz="1400" i="1">
+                                      <a:effectLst/>
+                                      <a:latin typeface="Cambria Math" panose="02040503050406030204" pitchFamily="18" charset="0"/>
+                                      <a:cs typeface="Times New Roman" panose="02020603050405020304" pitchFamily="18" charset="0"/>
+                                    </a:rPr>
+                                  </m:ctrlPr>
+                                </m:sSubPr>
+                                <m:e>
+                                  <m:r>
+                                    <a:rPr lang="en-US" sz="1400" i="1">
+                                      <a:effectLst/>
+                                      <a:latin typeface="Cambria Math" panose="02040503050406030204" pitchFamily="18" charset="0"/>
+                                      <a:ea typeface="Calibri" panose="020F0502020204030204" pitchFamily="34" charset="0"/>
+                                      <a:cs typeface="Times New Roman" panose="02020603050405020304" pitchFamily="18" charset="0"/>
+                                    </a:rPr>
+                                    <m:t>𝐾</m:t>
+                                  </m:r>
+                                </m:e>
+                                <m:sub>
+                                  <m:sSub>
+                                    <m:sSubPr>
+                                      <m:ctrlPr>
+                                        <a:rPr lang="ru-RU" sz="1400" i="1">
+                                          <a:effectLst/>
+                                          <a:latin typeface="Cambria Math" panose="02040503050406030204" pitchFamily="18" charset="0"/>
+                                          <a:cs typeface="Times New Roman" panose="02020603050405020304" pitchFamily="18" charset="0"/>
+                                        </a:rPr>
+                                      </m:ctrlPr>
+                                    </m:sSubPr>
+                                    <m:e>
+                                      <m:r>
+                                        <a:rPr lang="ru-RU" sz="1400" i="1">
+                                          <a:effectLst/>
+                                          <a:latin typeface="Cambria Math" panose="02040503050406030204" pitchFamily="18" charset="0"/>
+                                          <a:ea typeface="Calibri" panose="020F0502020204030204" pitchFamily="34" charset="0"/>
+                                          <a:cs typeface="Times New Roman" panose="02020603050405020304" pitchFamily="18" charset="0"/>
+                                        </a:rPr>
+                                        <m:t>h</m:t>
+                                      </m:r>
+                                    </m:e>
+                                    <m:sub>
+                                      <m:r>
+                                        <a:rPr lang="en-US" sz="1400" i="1">
+                                          <a:effectLst/>
+                                          <a:latin typeface="Cambria Math" panose="02040503050406030204" pitchFamily="18" charset="0"/>
+                                          <a:ea typeface="Calibri" panose="020F0502020204030204" pitchFamily="34" charset="0"/>
+                                          <a:cs typeface="Times New Roman" panose="02020603050405020304" pitchFamily="18" charset="0"/>
+                                        </a:rPr>
+                                        <m:t>𝑛</m:t>
+                                      </m:r>
+                                    </m:sub>
+                                  </m:sSub>
+                                </m:sub>
+                              </m:sSub>
+                              <m:d>
+                                <m:dPr>
+                                  <m:ctrlPr>
+                                    <a:rPr lang="ru-RU" sz="1400" i="1">
+                                      <a:effectLst/>
+                                      <a:latin typeface="Cambria Math" panose="02040503050406030204" pitchFamily="18" charset="0"/>
+                                      <a:cs typeface="Times New Roman" panose="02020603050405020304" pitchFamily="18" charset="0"/>
+                                    </a:rPr>
+                                  </m:ctrlPr>
+                                </m:dPr>
+                                <m:e>
+                                  <m:r>
+                                    <a:rPr lang="en-US" sz="1400" i="1">
+                                      <a:effectLst/>
+                                      <a:latin typeface="Cambria Math" panose="02040503050406030204" pitchFamily="18" charset="0"/>
+                                      <a:ea typeface="Calibri" panose="020F0502020204030204" pitchFamily="34" charset="0"/>
+                                      <a:cs typeface="Times New Roman" panose="02020603050405020304" pitchFamily="18" charset="0"/>
+                                    </a:rPr>
+                                    <m:t>𝑥</m:t>
+                                  </m:r>
+                                  <m:r>
+                                    <a:rPr lang="ru-RU" sz="1400" i="1">
+                                      <a:effectLst/>
+                                      <a:latin typeface="Cambria Math" panose="02040503050406030204" pitchFamily="18" charset="0"/>
+                                      <a:ea typeface="Calibri" panose="020F0502020204030204" pitchFamily="34" charset="0"/>
+                                      <a:cs typeface="Times New Roman" panose="02020603050405020304" pitchFamily="18" charset="0"/>
+                                    </a:rPr>
+                                    <m:t>−</m:t>
+                                  </m:r>
+                                  <m:sSub>
+                                    <m:sSubPr>
+                                      <m:ctrlPr>
+                                        <a:rPr lang="ru-RU" sz="1400" i="1">
+                                          <a:effectLst/>
+                                          <a:latin typeface="Cambria Math" panose="02040503050406030204" pitchFamily="18" charset="0"/>
+                                          <a:cs typeface="Times New Roman" panose="02020603050405020304" pitchFamily="18" charset="0"/>
+                                        </a:rPr>
+                                      </m:ctrlPr>
+                                    </m:sSubPr>
+                                    <m:e>
+                                      <m:r>
+                                        <a:rPr lang="en-US" sz="1400" i="1">
+                                          <a:effectLst/>
+                                          <a:latin typeface="Cambria Math" panose="02040503050406030204" pitchFamily="18" charset="0"/>
+                                          <a:ea typeface="Calibri" panose="020F0502020204030204" pitchFamily="34" charset="0"/>
+                                          <a:cs typeface="Times New Roman" panose="02020603050405020304" pitchFamily="18" charset="0"/>
+                                        </a:rPr>
+                                        <m:t>𝑥</m:t>
+                                      </m:r>
+                                    </m:e>
+                                    <m:sub>
+                                      <m:r>
+                                        <a:rPr lang="en-US" sz="1400" i="1">
+                                          <a:effectLst/>
+                                          <a:latin typeface="Cambria Math" panose="02040503050406030204" pitchFamily="18" charset="0"/>
+                                          <a:ea typeface="Calibri" panose="020F0502020204030204" pitchFamily="34" charset="0"/>
+                                          <a:cs typeface="Times New Roman" panose="02020603050405020304" pitchFamily="18" charset="0"/>
+                                        </a:rPr>
+                                        <m:t>𝑖</m:t>
+                                      </m:r>
+                                    </m:sub>
+                                  </m:sSub>
+                                </m:e>
+                              </m:d>
+                            </m:e>
+                          </m:nary>
+                        </m:den>
+                      </m:f>
+                    </m:oMath>
+                  </m:oMathPara>
+                </a14:m>
+                <a:endParaRPr lang="ru-RU" sz="1400" dirty="0"/>
+              </a:p>
+            </p:txBody>
+          </p:sp>
+        </mc:Choice>
+        <mc:Fallback xmlns="">
+          <p:sp>
+            <p:nvSpPr>
+              <p:cNvPr id="17" name="TextBox 16">
+                <a:extLst>
+                  <a:ext uri="{FF2B5EF4-FFF2-40B4-BE49-F238E27FC236}">
+                    <a16:creationId xmlns:a16="http://schemas.microsoft.com/office/drawing/2014/main" id="{36DABECC-B604-46B6-B164-CCE20BAE3B3F}"/>
+                  </a:ext>
+                </a:extLst>
+              </p:cNvPr>
+              <p:cNvSpPr txBox="1">
+                <a:spLocks noRot="1" noChangeAspect="1" noMove="1" noResize="1" noEditPoints="1" noAdjustHandles="1" noChangeArrowheads="1" noChangeShapeType="1" noTextEdit="1"/>
+              </p:cNvSpPr>
+              <p:nvPr/>
+            </p:nvSpPr>
+            <p:spPr>
+              <a:xfrm>
+                <a:off x="3048494" y="5816063"/>
+                <a:ext cx="6095010" cy="811761"/>
+              </a:xfrm>
+              <a:prstGeom prst="rect">
+                <a:avLst/>
+              </a:prstGeom>
+              <a:blipFill>
+                <a:blip r:embed="rId3"/>
+                <a:stretch>
+                  <a:fillRect/>
+                </a:stretch>
+              </a:blipFill>
+            </p:spPr>
+            <p:txBody>
+              <a:bodyPr/>
+              <a:lstStyle/>
+              <a:p>
+                <a:r>
+                  <a:rPr lang="ru-RU">
+                    <a:noFill/>
+                  </a:rPr>
+                  <a:t> </a:t>
+                </a:r>
+              </a:p>
+            </p:txBody>
+          </p:sp>
+        </mc:Fallback>
+      </mc:AlternateContent>
+    </p:spTree>
+    <p:extLst>
+      <p:ext uri="{BB962C8B-B14F-4D97-AF65-F5344CB8AC3E}">
+        <p14:creationId xmlns:p14="http://schemas.microsoft.com/office/powerpoint/2010/main" val="3237042138"/>
+      </p:ext>
+    </p:extLst>
+  </p:cSld>
+  <p:clrMapOvr>
+    <a:masterClrMapping/>
+  </p:clrMapOvr>
+</p:sld>
+</file>
+
+<file path=ppt/slides/slide5.xml><?xml version="1.0" encoding="utf-8"?>
+<p:sld xmlns:a="http://schemas.openxmlformats.org/drawingml/2006/main" xmlns:r="http://schemas.openxmlformats.org/officeDocument/2006/relationships" xmlns:p="http://schemas.openxmlformats.org/presentationml/2006/main">
+  <p:cSld>
+    <p:spTree>
+      <p:nvGrpSpPr>
+        <p:cNvPr id="1" name="">
+          <a:extLst>
+            <a:ext uri="{FF2B5EF4-FFF2-40B4-BE49-F238E27FC236}">
+              <a16:creationId xmlns:a16="http://schemas.microsoft.com/office/drawing/2014/main" id="{71A8A7F7-59A6-4C32-9FB4-373DFE454DB1}"/>
+            </a:ext>
+          </a:extLst>
+        </p:cNvPr>
+        <p:cNvGrpSpPr/>
+        <p:nvPr/>
+      </p:nvGrpSpPr>
+      <p:grpSpPr>
+        <a:xfrm>
+          <a:off x="0" y="0"/>
+          <a:ext cx="0" cy="0"/>
+          <a:chOff x="0" y="0"/>
+          <a:chExt cx="0" cy="0"/>
+        </a:xfrm>
+      </p:grpSpPr>
+      <p:sp>
+        <p:nvSpPr>
+          <p:cNvPr id="2" name="TextBox 1">
+            <a:extLst>
+              <a:ext uri="{FF2B5EF4-FFF2-40B4-BE49-F238E27FC236}">
+                <a16:creationId xmlns:a16="http://schemas.microsoft.com/office/drawing/2014/main" id="{3378B456-C065-EBF3-B7B7-9D07C5DA29C2}"/>
+              </a:ext>
+            </a:extLst>
+          </p:cNvPr>
+          <p:cNvSpPr txBox="1"/>
+          <p:nvPr/>
+        </p:nvSpPr>
+        <p:spPr>
+          <a:xfrm>
+            <a:off x="3752217" y="0"/>
+            <a:ext cx="4687565" cy="523220"/>
+          </a:xfrm>
+          <a:prstGeom prst="rect">
+            <a:avLst/>
+          </a:prstGeom>
+          <a:noFill/>
+        </p:spPr>
+        <p:txBody>
+          <a:bodyPr wrap="none" rtlCol="0">
+            <a:spAutoFit/>
+          </a:bodyPr>
+          <a:lstStyle/>
+          <a:p>
+            <a:r>
+              <a:rPr lang="ru-RU" sz="2800" b="1" dirty="0">
+                <a:latin typeface="Times New Roman" panose="02020603050405020304" pitchFamily="18" charset="0"/>
+                <a:cs typeface="Times New Roman" panose="02020603050405020304" pitchFamily="18" charset="0"/>
+              </a:rPr>
+              <a:t>Непараметрический подход</a:t>
+            </a:r>
+          </a:p>
+        </p:txBody>
+      </p:sp>
+      <mc:AlternateContent xmlns:mc="http://schemas.openxmlformats.org/markup-compatibility/2006" xmlns:a14="http://schemas.microsoft.com/office/drawing/2010/main">
+        <mc:Choice Requires="a14">
+          <p:sp>
+            <p:nvSpPr>
+              <p:cNvPr id="3" name="TextBox 2">
+                <a:extLst>
+                  <a:ext uri="{FF2B5EF4-FFF2-40B4-BE49-F238E27FC236}">
+                    <a16:creationId xmlns:a16="http://schemas.microsoft.com/office/drawing/2014/main" id="{3C4E704A-6A1F-5F99-7A11-9B32B46C3D6D}"/>
+                  </a:ext>
+                </a:extLst>
+              </p:cNvPr>
+              <p:cNvSpPr txBox="1"/>
+              <p:nvPr/>
+            </p:nvSpPr>
+            <p:spPr>
+              <a:xfrm>
+                <a:off x="525100" y="599122"/>
+                <a:ext cx="11416420" cy="4439933"/>
+              </a:xfrm>
+              <a:prstGeom prst="rect">
+                <a:avLst/>
+              </a:prstGeom>
+              <a:noFill/>
+            </p:spPr>
+            <p:txBody>
+              <a:bodyPr wrap="square" rtlCol="0">
+                <a:spAutoFit/>
+              </a:bodyPr>
+              <a:lstStyle/>
+              <a:p>
+                <a:pPr>
+                  <a:lnSpc>
+                    <a:spcPct val="200000"/>
+                  </a:lnSpc>
+                </a:pPr>
+                <a:r>
+                  <a:rPr lang="ru-RU" b="1" dirty="0">
+                    <a:latin typeface="Times New Roman" panose="02020603050405020304" pitchFamily="18" charset="0"/>
+                    <a:cs typeface="Times New Roman" panose="02020603050405020304" pitchFamily="18" charset="0"/>
+                  </a:rPr>
+                  <a:t>Выбор ширины окна: </a:t>
+                </a:r>
+              </a:p>
+              <a:p>
+                <a:pPr>
+                  <a:lnSpc>
+                    <a:spcPct val="200000"/>
+                  </a:lnSpc>
+                </a:pPr>
+                <a:r>
+                  <a:rPr lang="en-US" dirty="0">
+                    <a:latin typeface="Times New Roman" panose="02020603050405020304" pitchFamily="18" charset="0"/>
+                    <a:cs typeface="Times New Roman" panose="02020603050405020304" pitchFamily="18" charset="0"/>
+                  </a:rPr>
+                  <a:t>	</a:t>
+                </a:r>
+                <a:r>
+                  <a:rPr lang="ru-RU" dirty="0">
+                    <a:latin typeface="Times New Roman" panose="02020603050405020304" pitchFamily="18" charset="0"/>
+                    <a:cs typeface="Times New Roman" panose="02020603050405020304" pitchFamily="18" charset="0"/>
+                  </a:rPr>
+                  <a:t>В работе используются три подхода:</a:t>
+                </a:r>
+              </a:p>
+              <a:p>
+                <a:pPr marL="342900" indent="-342900">
+                  <a:lnSpc>
+                    <a:spcPct val="200000"/>
+                  </a:lnSpc>
+                  <a:buFont typeface="+mj-lt"/>
+                  <a:buAutoNum type="arabicPeriod"/>
+                </a:pPr>
+                <a:r>
+                  <a:rPr lang="ru-RU" b="1" dirty="0">
+                    <a:latin typeface="Times New Roman" panose="02020603050405020304" pitchFamily="18" charset="0"/>
+                    <a:cs typeface="Times New Roman" panose="02020603050405020304" pitchFamily="18" charset="0"/>
+                  </a:rPr>
+                  <a:t>Правило </a:t>
+                </a:r>
+                <a:r>
+                  <a:rPr lang="ru-RU" b="1" dirty="0" err="1">
+                    <a:latin typeface="Times New Roman" panose="02020603050405020304" pitchFamily="18" charset="0"/>
+                    <a:cs typeface="Times New Roman" panose="02020603050405020304" pitchFamily="18" charset="0"/>
+                  </a:rPr>
+                  <a:t>Сильвермана</a:t>
+                </a:r>
+                <a:r>
+                  <a:rPr lang="ru-RU" b="1" dirty="0">
+                    <a:latin typeface="Times New Roman" panose="02020603050405020304" pitchFamily="18" charset="0"/>
+                    <a:cs typeface="Times New Roman" panose="02020603050405020304" pitchFamily="18" charset="0"/>
+                  </a:rPr>
+                  <a:t> </a:t>
+                </a:r>
+                <a:r>
+                  <a:rPr lang="ru-RU" dirty="0">
+                    <a:latin typeface="Times New Roman" panose="02020603050405020304" pitchFamily="18" charset="0"/>
+                    <a:cs typeface="Times New Roman" panose="02020603050405020304" pitchFamily="18" charset="0"/>
+                  </a:rPr>
+                  <a:t>– эмпирическое правило, не зависит от </a:t>
+                </a:r>
+                <a14:m>
+                  <m:oMath xmlns:m="http://schemas.openxmlformats.org/officeDocument/2006/math">
+                    <m:r>
+                      <a:rPr lang="en-US" b="0" i="1" smtClean="0">
+                        <a:latin typeface="Cambria Math" panose="02040503050406030204" pitchFamily="18" charset="0"/>
+                        <a:cs typeface="Times New Roman" panose="02020603050405020304" pitchFamily="18" charset="0"/>
+                      </a:rPr>
+                      <m:t>𝑦</m:t>
+                    </m:r>
+                  </m:oMath>
+                </a14:m>
+                <a:r>
+                  <a:rPr lang="ru-RU" b="0" dirty="0">
+                    <a:latin typeface="Times New Roman" panose="02020603050405020304" pitchFamily="18" charset="0"/>
+                    <a:cs typeface="Times New Roman" panose="02020603050405020304" pitchFamily="18" charset="0"/>
+                  </a:rPr>
+                  <a:t>. </a:t>
+                </a:r>
+                <a:r>
+                  <a:rPr lang="ru-RU" dirty="0">
+                    <a:latin typeface="Times New Roman" panose="02020603050405020304" pitchFamily="18" charset="0"/>
+                    <a:cs typeface="Times New Roman" panose="02020603050405020304" pitchFamily="18" charset="0"/>
+                  </a:rPr>
+                  <a:t>Используется как </a:t>
+                </a:r>
+                <a:r>
+                  <a:rPr lang="en-US" dirty="0">
+                    <a:latin typeface="Times New Roman" panose="02020603050405020304" pitchFamily="18" charset="0"/>
+                    <a:cs typeface="Times New Roman" panose="02020603050405020304" pitchFamily="18" charset="0"/>
+                  </a:rPr>
+                  <a:t>baseline;</a:t>
+                </a:r>
+                <a:endParaRPr lang="en-US" b="0" dirty="0">
+                  <a:latin typeface="Times New Roman" panose="02020603050405020304" pitchFamily="18" charset="0"/>
+                  <a:cs typeface="Times New Roman" panose="02020603050405020304" pitchFamily="18" charset="0"/>
+                </a:endParaRPr>
+              </a:p>
+              <a:p>
+                <a:pPr marL="342900" indent="-342900">
+                  <a:lnSpc>
+                    <a:spcPct val="200000"/>
+                  </a:lnSpc>
+                  <a:buFont typeface="+mj-lt"/>
+                  <a:buAutoNum type="arabicPeriod"/>
+                </a:pPr>
+                <a:r>
+                  <a:rPr lang="en-US" b="1" dirty="0">
+                    <a:latin typeface="Times New Roman" panose="02020603050405020304" pitchFamily="18" charset="0"/>
+                    <a:cs typeface="Times New Roman" panose="02020603050405020304" pitchFamily="18" charset="0"/>
+                  </a:rPr>
+                  <a:t>5-fold </a:t>
+                </a:r>
+                <a:r>
+                  <a:rPr lang="ru-RU" b="1" dirty="0">
+                    <a:latin typeface="Times New Roman" panose="02020603050405020304" pitchFamily="18" charset="0"/>
+                    <a:cs typeface="Times New Roman" panose="02020603050405020304" pitchFamily="18" charset="0"/>
+                  </a:rPr>
+                  <a:t>кросс-валидация</a:t>
+                </a:r>
+                <a:r>
+                  <a:rPr lang="en-US" b="1" dirty="0">
+                    <a:latin typeface="Times New Roman" panose="02020603050405020304" pitchFamily="18" charset="0"/>
+                    <a:cs typeface="Times New Roman" panose="02020603050405020304" pitchFamily="18" charset="0"/>
+                  </a:rPr>
+                  <a:t> </a:t>
+                </a:r>
+                <a:r>
+                  <a:rPr lang="ru-RU" dirty="0">
+                    <a:latin typeface="Times New Roman" panose="02020603050405020304" pitchFamily="18" charset="0"/>
+                    <a:cs typeface="Times New Roman" panose="02020603050405020304" pitchFamily="18" charset="0"/>
+                  </a:rPr>
+                  <a:t>– делит выборку на </a:t>
+                </a:r>
+                <a:r>
+                  <a:rPr lang="en-US" dirty="0">
+                    <a:latin typeface="Times New Roman" panose="02020603050405020304" pitchFamily="18" charset="0"/>
+                    <a:cs typeface="Times New Roman" panose="02020603050405020304" pitchFamily="18" charset="0"/>
+                  </a:rPr>
+                  <a:t>5 </a:t>
+                </a:r>
+                <a:r>
+                  <a:rPr lang="ru-RU" dirty="0">
+                    <a:latin typeface="Times New Roman" panose="02020603050405020304" pitchFamily="18" charset="0"/>
+                    <a:cs typeface="Times New Roman" panose="02020603050405020304" pitchFamily="18" charset="0"/>
+                  </a:rPr>
+                  <a:t>частей, минимизирует усреднённую по </a:t>
+                </a:r>
+                <a:r>
+                  <a:rPr lang="ru-RU" dirty="0" err="1">
+                    <a:latin typeface="Times New Roman" panose="02020603050405020304" pitchFamily="18" charset="0"/>
+                    <a:cs typeface="Times New Roman" panose="02020603050405020304" pitchFamily="18" charset="0"/>
+                  </a:rPr>
+                  <a:t>фолдам</a:t>
+                </a:r>
+                <a:r>
+                  <a:rPr lang="ru-RU" dirty="0">
+                    <a:latin typeface="Times New Roman" panose="02020603050405020304" pitchFamily="18" charset="0"/>
+                    <a:cs typeface="Times New Roman" panose="02020603050405020304" pitchFamily="18" charset="0"/>
+                  </a:rPr>
+                  <a:t> </a:t>
+                </a:r>
+                <a:r>
+                  <a:rPr lang="en-US" dirty="0">
+                    <a:latin typeface="Times New Roman" panose="02020603050405020304" pitchFamily="18" charset="0"/>
+                    <a:cs typeface="Times New Roman" panose="02020603050405020304" pitchFamily="18" charset="0"/>
+                  </a:rPr>
+                  <a:t>MSE;</a:t>
+                </a:r>
+              </a:p>
+              <a:p>
+                <a:pPr marL="342900" indent="-342900">
+                  <a:lnSpc>
+                    <a:spcPct val="200000"/>
+                  </a:lnSpc>
+                  <a:buFont typeface="+mj-lt"/>
+                  <a:buAutoNum type="arabicPeriod"/>
+                </a:pPr>
+                <a:r>
+                  <a:rPr lang="ru-RU" b="1" dirty="0">
+                    <a:latin typeface="Times New Roman" panose="02020603050405020304" pitchFamily="18" charset="0"/>
+                    <a:cs typeface="Times New Roman" panose="02020603050405020304" pitchFamily="18" charset="0"/>
+                  </a:rPr>
+                  <a:t>LOOCV (</a:t>
+                </a:r>
+                <a:r>
+                  <a:rPr lang="ru-RU" b="1" dirty="0" err="1">
+                    <a:latin typeface="Times New Roman" panose="02020603050405020304" pitchFamily="18" charset="0"/>
+                    <a:cs typeface="Times New Roman" panose="02020603050405020304" pitchFamily="18" charset="0"/>
+                  </a:rPr>
+                  <a:t>leave-one-out</a:t>
+                </a:r>
+                <a:r>
+                  <a:rPr lang="ru-RU" b="1" dirty="0">
+                    <a:latin typeface="Times New Roman" panose="02020603050405020304" pitchFamily="18" charset="0"/>
+                    <a:cs typeface="Times New Roman" panose="02020603050405020304" pitchFamily="18" charset="0"/>
+                  </a:rPr>
+                  <a:t>) </a:t>
+                </a:r>
+                <a:r>
+                  <a:rPr lang="ru-RU" dirty="0">
+                    <a:latin typeface="Times New Roman" panose="02020603050405020304" pitchFamily="18" charset="0"/>
+                    <a:cs typeface="Times New Roman" panose="02020603050405020304" pitchFamily="18" charset="0"/>
+                  </a:rPr>
+                  <a:t>– </a:t>
+                </a:r>
+                <a:r>
+                  <a:rPr lang="ru-RU" b="1" dirty="0">
+                    <a:latin typeface="Times New Roman" panose="02020603050405020304" pitchFamily="18" charset="0"/>
+                    <a:cs typeface="Times New Roman" panose="02020603050405020304" pitchFamily="18" charset="0"/>
+                  </a:rPr>
+                  <a:t> </a:t>
+                </a:r>
+                <a:r>
+                  <a:rPr lang="ru-RU" dirty="0">
+                    <a:latin typeface="Times New Roman" panose="02020603050405020304" pitchFamily="18" charset="0"/>
+                    <a:cs typeface="Times New Roman" panose="02020603050405020304" pitchFamily="18" charset="0"/>
+                  </a:rPr>
+                  <a:t>последовательно оставляет по одной точке для тестирования, обучается на остальных и усредняет ошибку по всем итерациям.</a:t>
+                </a:r>
+              </a:p>
+              <a:p>
+                <a:pPr>
+                  <a:lnSpc>
+                    <a:spcPct val="200000"/>
+                  </a:lnSpc>
+                </a:pPr>
+                <a:endParaRPr lang="ru-RU" dirty="0">
+                  <a:latin typeface="Times New Roman" panose="02020603050405020304" pitchFamily="18" charset="0"/>
+                  <a:cs typeface="Times New Roman" panose="02020603050405020304" pitchFamily="18" charset="0"/>
+                </a:endParaRPr>
+              </a:p>
+              <a:p>
+                <a:pPr>
+                  <a:lnSpc>
+                    <a:spcPct val="200000"/>
+                  </a:lnSpc>
+                </a:pPr>
+                <a:r>
+                  <a:rPr lang="ru-RU" b="1" dirty="0">
+                    <a:latin typeface="Times New Roman" panose="02020603050405020304" pitchFamily="18" charset="0"/>
+                    <a:cs typeface="Times New Roman" panose="02020603050405020304" pitchFamily="18" charset="0"/>
+                  </a:rPr>
+                  <a:t>Ключевое ограничение: </a:t>
+                </a:r>
+                <a:r>
+                  <a:rPr lang="ru-RU" dirty="0">
+                    <a:latin typeface="Times New Roman" panose="02020603050405020304" pitchFamily="18" charset="0"/>
+                    <a:cs typeface="Times New Roman" panose="02020603050405020304" pitchFamily="18" charset="0"/>
+                  </a:rPr>
+                  <a:t>нестабильность на малых выборках.</a:t>
+                </a:r>
+                <a:endParaRPr lang="en-US" b="1" dirty="0">
+                  <a:latin typeface="Times New Roman" panose="02020603050405020304" pitchFamily="18" charset="0"/>
+                  <a:cs typeface="Times New Roman" panose="02020603050405020304" pitchFamily="18" charset="0"/>
+                </a:endParaRPr>
+              </a:p>
+            </p:txBody>
+          </p:sp>
+        </mc:Choice>
+        <mc:Fallback xmlns="">
+          <p:sp>
+            <p:nvSpPr>
+              <p:cNvPr id="3" name="TextBox 2">
+                <a:extLst>
+                  <a:ext uri="{FF2B5EF4-FFF2-40B4-BE49-F238E27FC236}">
+                    <a16:creationId xmlns:a16="http://schemas.microsoft.com/office/drawing/2014/main" id="{3C4E704A-6A1F-5F99-7A11-9B32B46C3D6D}"/>
+                  </a:ext>
+                </a:extLst>
+              </p:cNvPr>
+              <p:cNvSpPr txBox="1">
+                <a:spLocks noRot="1" noChangeAspect="1" noMove="1" noResize="1" noEditPoints="1" noAdjustHandles="1" noChangeArrowheads="1" noChangeShapeType="1" noTextEdit="1"/>
+              </p:cNvSpPr>
+              <p:nvPr/>
+            </p:nvSpPr>
+            <p:spPr>
+              <a:xfrm>
+                <a:off x="525100" y="599122"/>
+                <a:ext cx="11416420" cy="4439933"/>
+              </a:xfrm>
+              <a:prstGeom prst="rect">
+                <a:avLst/>
+              </a:prstGeom>
+              <a:blipFill>
+                <a:blip r:embed="rId2"/>
+                <a:stretch>
+                  <a:fillRect l="-427" b="-1235"/>
+                </a:stretch>
+              </a:blipFill>
+            </p:spPr>
+            <p:txBody>
+              <a:bodyPr/>
+              <a:lstStyle/>
+              <a:p>
+                <a:r>
+                  <a:rPr lang="ru-RU">
+                    <a:noFill/>
+                  </a:rPr>
+                  <a:t> </a:t>
+                </a:r>
+              </a:p>
+            </p:txBody>
+          </p:sp>
+        </mc:Fallback>
+      </mc:AlternateContent>
+    </p:spTree>
+    <p:extLst>
+      <p:ext uri="{BB962C8B-B14F-4D97-AF65-F5344CB8AC3E}">
+        <p14:creationId xmlns:p14="http://schemas.microsoft.com/office/powerpoint/2010/main" val="3591256533"/>
+      </p:ext>
+    </p:extLst>
+  </p:cSld>
+  <p:clrMapOvr>
+    <a:masterClrMapping/>
+  </p:clrMapOvr>
+</p:sld>
+</file>
+
+<file path=ppt/slides/slide6.xml><?xml version="1.0" encoding="utf-8"?>
+<p:sld xmlns:a="http://schemas.openxmlformats.org/drawingml/2006/main" xmlns:r="http://schemas.openxmlformats.org/officeDocument/2006/relationships" xmlns:p="http://schemas.openxmlformats.org/presentationml/2006/main">
+  <p:cSld>
+    <p:spTree>
+      <p:nvGrpSpPr>
+        <p:cNvPr id="1" name="">
+          <a:extLst>
+            <a:ext uri="{FF2B5EF4-FFF2-40B4-BE49-F238E27FC236}">
+              <a16:creationId xmlns:a16="http://schemas.microsoft.com/office/drawing/2014/main" id="{71A8A7F7-59A6-4C32-9FB4-373DFE454DB1}"/>
+            </a:ext>
+          </a:extLst>
+        </p:cNvPr>
+        <p:cNvGrpSpPr/>
+        <p:nvPr/>
+      </p:nvGrpSpPr>
+      <p:grpSpPr>
+        <a:xfrm>
+          <a:off x="0" y="0"/>
+          <a:ext cx="0" cy="0"/>
+          <a:chOff x="0" y="0"/>
+          <a:chExt cx="0" cy="0"/>
+        </a:xfrm>
+      </p:grpSpPr>
+      <p:sp>
+        <p:nvSpPr>
+          <p:cNvPr id="2" name="TextBox 1">
+            <a:extLst>
+              <a:ext uri="{FF2B5EF4-FFF2-40B4-BE49-F238E27FC236}">
+                <a16:creationId xmlns:a16="http://schemas.microsoft.com/office/drawing/2014/main" id="{3378B456-C065-EBF3-B7B7-9D07C5DA29C2}"/>
+              </a:ext>
+            </a:extLst>
+          </p:cNvPr>
+          <p:cNvSpPr txBox="1"/>
+          <p:nvPr/>
+        </p:nvSpPr>
+        <p:spPr>
+          <a:xfrm>
+            <a:off x="4259343" y="0"/>
             <a:ext cx="3673313" cy="523220"/>
           </a:xfrm>
           <a:prstGeom prst="rect">
@@ -5849,7 +12616,7 @@
 </p:sld>
 </file>
 
-<file path=ppt/slides/slide5.xml><?xml version="1.0" encoding="utf-8"?>
+<file path=ppt/slides/slide7.xml><?xml version="1.0" encoding="utf-8"?>
 <p:sld xmlns:a="http://schemas.openxmlformats.org/drawingml/2006/main" xmlns:r="http://schemas.openxmlformats.org/officeDocument/2006/relationships" xmlns:p="http://schemas.openxmlformats.org/presentationml/2006/main">
   <p:cSld>
     <p:spTree>
@@ -5886,7 +12653,7 @@
         </p:nvSpPr>
         <p:spPr>
           <a:xfrm>
-            <a:off x="3239542" y="0"/>
+            <a:off x="4209650" y="0"/>
             <a:ext cx="3772699" cy="523220"/>
           </a:xfrm>
           <a:prstGeom prst="rect">
@@ -7766,7 +14533,7 @@
 </p:sld>
 </file>
 
-<file path=ppt/slides/slide6.xml><?xml version="1.0" encoding="utf-8"?>
+<file path=ppt/slides/slide8.xml><?xml version="1.0" encoding="utf-8"?>
 <p:sld xmlns:a="http://schemas.openxmlformats.org/drawingml/2006/main" xmlns:r="http://schemas.openxmlformats.org/officeDocument/2006/relationships" xmlns:p="http://schemas.openxmlformats.org/presentationml/2006/main">
   <p:cSld>
     <p:spTree>
@@ -7844,14 +14611,14 @@
               <p:nvPr>
                 <p:extLst>
                   <p:ext uri="{D42A27DB-BD31-4B8C-83A1-F6EECF244321}">
-                    <p14:modId xmlns:p14="http://schemas.microsoft.com/office/powerpoint/2010/main" val="2522752531"/>
+                    <p14:modId xmlns:p14="http://schemas.microsoft.com/office/powerpoint/2010/main" val="1750430563"/>
                   </p:ext>
                 </p:extLst>
               </p:nvPr>
             </p:nvGraphicFramePr>
             <p:xfrm>
               <a:off x="597528" y="719666"/>
-              <a:ext cx="11362100" cy="4905756"/>
+              <a:ext cx="11362100" cy="4409948"/>
             </p:xfrm>
             <a:graphic>
               <a:graphicData uri="http://schemas.openxmlformats.org/drawingml/2006/table">
@@ -8004,7 +14771,7 @@
                               <a:latin typeface="Times New Roman" panose="02020603050405020304" pitchFamily="18" charset="0"/>
                               <a:cs typeface="Times New Roman" panose="02020603050405020304" pitchFamily="18" charset="0"/>
                             </a:rPr>
-                            <a:t>Степени полинома</a:t>
+                            <a:t>Модели регрессии</a:t>
                           </a:r>
                         </a:p>
                       </a:txBody>
@@ -8028,7 +14795,118 @@
                               <a:latin typeface="Times New Roman" panose="02020603050405020304" pitchFamily="18" charset="0"/>
                               <a:cs typeface="Times New Roman" panose="02020603050405020304" pitchFamily="18" charset="0"/>
                             </a:rPr>
-                            <a:t>1-6</a:t>
+                            <a:t>Полиномы 1-6 степени</a:t>
+                          </a:r>
+                          <a:r>
+                            <a:rPr lang="en-US" dirty="0">
+                              <a:solidFill>
+                                <a:schemeClr val="tx1"/>
+                              </a:solidFill>
+                              <a:latin typeface="Times New Roman" panose="02020603050405020304" pitchFamily="18" charset="0"/>
+                              <a:cs typeface="Times New Roman" panose="02020603050405020304" pitchFamily="18" charset="0"/>
+                            </a:rPr>
+                            <a:t>;</a:t>
+                          </a:r>
+                        </a:p>
+                        <a:p>
+                          <a:pPr>
+                            <a:lnSpc>
+                              <a:spcPct val="150000"/>
+                            </a:lnSpc>
+                          </a:pPr>
+                          <a:r>
+                            <a:rPr lang="ru-RU" dirty="0">
+                              <a:solidFill>
+                                <a:schemeClr val="tx1"/>
+                              </a:solidFill>
+                              <a:latin typeface="Times New Roman" panose="02020603050405020304" pitchFamily="18" charset="0"/>
+                              <a:cs typeface="Times New Roman" panose="02020603050405020304" pitchFamily="18" charset="0"/>
+                            </a:rPr>
+                            <a:t>Двумерная смесь нормальных распределений (</a:t>
+                          </a:r>
+                          <a14:m>
+                            <m:oMath xmlns:m="http://schemas.openxmlformats.org/officeDocument/2006/math">
+                              <m:r>
+                                <a:rPr lang="en-US" i="1" dirty="0" smtClean="0">
+                                  <a:solidFill>
+                                    <a:schemeClr val="tx1"/>
+                                  </a:solidFill>
+                                  <a:latin typeface="Cambria Math" panose="02040503050406030204" pitchFamily="18" charset="0"/>
+                                  <a:cs typeface="Times New Roman" panose="02020603050405020304" pitchFamily="18" charset="0"/>
+                                </a:rPr>
+                                <m:t>𝐸</m:t>
+                              </m:r>
+                              <m:r>
+                                <a:rPr lang="en-US" i="1" dirty="0" smtClean="0">
+                                  <a:solidFill>
+                                    <a:schemeClr val="tx1"/>
+                                  </a:solidFill>
+                                  <a:latin typeface="Cambria Math" panose="02040503050406030204" pitchFamily="18" charset="0"/>
+                                  <a:cs typeface="Times New Roman" panose="02020603050405020304" pitchFamily="18" charset="0"/>
+                                </a:rPr>
+                                <m:t>(</m:t>
+                              </m:r>
+                              <m:r>
+                                <a:rPr lang="en-US" i="1" dirty="0" err="1" smtClean="0">
+                                  <a:solidFill>
+                                    <a:schemeClr val="tx1"/>
+                                  </a:solidFill>
+                                  <a:latin typeface="Cambria Math" panose="02040503050406030204" pitchFamily="18" charset="0"/>
+                                  <a:cs typeface="Times New Roman" panose="02020603050405020304" pitchFamily="18" charset="0"/>
+                                </a:rPr>
+                                <m:t>𝑦</m:t>
+                              </m:r>
+                              <m:r>
+                                <a:rPr lang="en-US" i="1" dirty="0" err="1" smtClean="0">
+                                  <a:solidFill>
+                                    <a:schemeClr val="tx1"/>
+                                  </a:solidFill>
+                                  <a:latin typeface="Cambria Math" panose="02040503050406030204" pitchFamily="18" charset="0"/>
+                                  <a:cs typeface="Times New Roman" panose="02020603050405020304" pitchFamily="18" charset="0"/>
+                                </a:rPr>
+                                <m:t>|</m:t>
+                              </m:r>
+                              <m:r>
+                                <a:rPr lang="en-US" i="1" dirty="0" err="1" smtClean="0">
+                                  <a:solidFill>
+                                    <a:schemeClr val="tx1"/>
+                                  </a:solidFill>
+                                  <a:latin typeface="Cambria Math" panose="02040503050406030204" pitchFamily="18" charset="0"/>
+                                  <a:cs typeface="Times New Roman" panose="02020603050405020304" pitchFamily="18" charset="0"/>
+                                </a:rPr>
+                                <m:t>𝑥</m:t>
+                              </m:r>
+                              <m:r>
+                                <a:rPr lang="en-US" i="1" dirty="0" smtClean="0">
+                                  <a:solidFill>
+                                    <a:schemeClr val="tx1"/>
+                                  </a:solidFill>
+                                  <a:latin typeface="Cambria Math" panose="02040503050406030204" pitchFamily="18" charset="0"/>
+                                  <a:cs typeface="Times New Roman" panose="02020603050405020304" pitchFamily="18" charset="0"/>
+                                </a:rPr>
+                                <m:t>)</m:t>
+                              </m:r>
+                            </m:oMath>
+                          </a14:m>
+                          <a:r>
+                            <a:rPr lang="en-US" dirty="0">
+                              <a:solidFill>
+                                <a:schemeClr val="tx1"/>
+                              </a:solidFill>
+                              <a:latin typeface="Times New Roman" panose="02020603050405020304" pitchFamily="18" charset="0"/>
+                              <a:cs typeface="Times New Roman" panose="02020603050405020304" pitchFamily="18" charset="0"/>
+                            </a:rPr>
+                            <a:t>)</a:t>
+                          </a:r>
+                          <a:r>
+                            <a:rPr lang="ru-RU" dirty="0">
+                              <a:solidFill>
+                                <a:schemeClr val="tx1"/>
+                              </a:solidFill>
+                              <a:latin typeface="Times New Roman" panose="02020603050405020304" pitchFamily="18" charset="0"/>
+                              <a:cs typeface="Times New Roman" panose="02020603050405020304" pitchFamily="18" charset="0"/>
+                            </a:rPr>
+                            <a:t> </a:t>
                           </a:r>
                         </a:p>
                       </a:txBody>
@@ -8037,212 +14915,6 @@
                     <a:extLst>
                       <a:ext uri="{0D108BD9-81ED-4DB2-BD59-A6C34878D82A}">
                         <a16:rowId xmlns:a16="http://schemas.microsoft.com/office/drawing/2014/main" val="1245780984"/>
-                      </a:ext>
-                    </a:extLst>
-                  </a:tr>
-                  <a:tr h="370840">
-                    <a:tc>
-                      <a:txBody>
-                        <a:bodyPr/>
-                        <a:lstStyle/>
-                        <a:p>
-                          <a:pPr>
-                            <a:lnSpc>
-                              <a:spcPct val="150000"/>
-                            </a:lnSpc>
-                          </a:pPr>
-                          <a:r>
-                            <a:rPr lang="ru-RU" sz="1800" b="0" i="0" kern="1200" dirty="0">
-                              <a:solidFill>
-                                <a:schemeClr val="dk1"/>
-                              </a:solidFill>
-                              <a:effectLst/>
-                              <a:latin typeface="Times New Roman" panose="02020603050405020304" pitchFamily="18" charset="0"/>
-                              <a:ea typeface="+mn-ea"/>
-                              <a:cs typeface="Times New Roman" panose="02020603050405020304" pitchFamily="18" charset="0"/>
-                            </a:rPr>
-                            <a:t>Распределения ошибок</a:t>
-                          </a:r>
-                          <a:endParaRPr lang="ru-RU" dirty="0">
-                            <a:solidFill>
-                              <a:schemeClr val="tx1"/>
-                            </a:solidFill>
-                            <a:latin typeface="Times New Roman" panose="02020603050405020304" pitchFamily="18" charset="0"/>
-                            <a:cs typeface="Times New Roman" panose="02020603050405020304" pitchFamily="18" charset="0"/>
-                          </a:endParaRPr>
-                        </a:p>
-                      </a:txBody>
-                      <a:tcPr/>
-                    </a:tc>
-                    <a:tc>
-                      <a:txBody>
-                        <a:bodyPr/>
-                        <a:lstStyle/>
-                        <a:p>
-                          <a:pPr>
-                            <a:lnSpc>
-                              <a:spcPct val="150000"/>
-                            </a:lnSpc>
-                          </a:pPr>
-                          <a:r>
-                            <a:rPr lang="ru-RU" sz="1800" b="0" i="0" kern="1200" dirty="0">
-                              <a:solidFill>
-                                <a:schemeClr val="dk1"/>
-                              </a:solidFill>
-                              <a:effectLst/>
-                              <a:latin typeface="Times New Roman" panose="02020603050405020304" pitchFamily="18" charset="0"/>
-                              <a:ea typeface="+mn-ea"/>
-                              <a:cs typeface="Times New Roman" panose="02020603050405020304" pitchFamily="18" charset="0"/>
-                            </a:rPr>
-                            <a:t>Лапласа, </a:t>
-                          </a:r>
-                          <a:r>
-                            <a:rPr lang="ru-RU" sz="1800" b="0" i="0" kern="1200" dirty="0" err="1">
-                              <a:solidFill>
-                                <a:schemeClr val="dk1"/>
-                              </a:solidFill>
-                              <a:effectLst/>
-                              <a:latin typeface="Times New Roman" panose="02020603050405020304" pitchFamily="18" charset="0"/>
-                              <a:ea typeface="+mn-ea"/>
-                              <a:cs typeface="Times New Roman" panose="02020603050405020304" pitchFamily="18" charset="0"/>
-                            </a:rPr>
-                            <a:t>Гумбеля</a:t>
-                          </a:r>
-                          <a:r>
-                            <a:rPr lang="ru-RU" sz="1800" b="0" i="0" kern="1200" dirty="0">
-                              <a:solidFill>
-                                <a:schemeClr val="dk1"/>
-                              </a:solidFill>
-                              <a:effectLst/>
-                              <a:latin typeface="Times New Roman" panose="02020603050405020304" pitchFamily="18" charset="0"/>
-                              <a:ea typeface="+mn-ea"/>
-                              <a:cs typeface="Times New Roman" panose="02020603050405020304" pitchFamily="18" charset="0"/>
-                            </a:rPr>
-                            <a:t>, </a:t>
-                          </a:r>
-                          <a:r>
-                            <a:rPr lang="ru-RU" sz="1800" b="0" i="0" kern="1200" dirty="0" err="1">
-                              <a:solidFill>
-                                <a:schemeClr val="dk1"/>
-                              </a:solidFill>
-                              <a:effectLst/>
-                              <a:latin typeface="Times New Roman" panose="02020603050405020304" pitchFamily="18" charset="0"/>
-                              <a:ea typeface="+mn-ea"/>
-                              <a:cs typeface="Times New Roman" panose="02020603050405020304" pitchFamily="18" charset="0"/>
-                            </a:rPr>
-                            <a:t>Тьюки</a:t>
-                          </a:r>
-                          <a:r>
-                            <a:rPr lang="ru-RU" sz="1800" b="0" i="0" kern="1200" dirty="0">
-                              <a:solidFill>
-                                <a:schemeClr val="dk1"/>
-                              </a:solidFill>
-                              <a:effectLst/>
-                              <a:latin typeface="Times New Roman" panose="02020603050405020304" pitchFamily="18" charset="0"/>
-                              <a:ea typeface="+mn-ea"/>
-                              <a:cs typeface="Times New Roman" panose="02020603050405020304" pitchFamily="18" charset="0"/>
-                            </a:rPr>
-                            <a:t> и др. (30 типов)</a:t>
-                          </a:r>
-                          <a:endParaRPr lang="ru-RU" dirty="0">
-                            <a:solidFill>
-                              <a:schemeClr val="tx1"/>
-                            </a:solidFill>
-                            <a:latin typeface="Times New Roman" panose="02020603050405020304" pitchFamily="18" charset="0"/>
-                            <a:cs typeface="Times New Roman" panose="02020603050405020304" pitchFamily="18" charset="0"/>
-                          </a:endParaRPr>
-                        </a:p>
-                      </a:txBody>
-                      <a:tcPr/>
-                    </a:tc>
-                    <a:extLst>
-                      <a:ext uri="{0D108BD9-81ED-4DB2-BD59-A6C34878D82A}">
-                        <a16:rowId xmlns:a16="http://schemas.microsoft.com/office/drawing/2014/main" val="2959901445"/>
-                      </a:ext>
-                    </a:extLst>
-                  </a:tr>
-                  <a:tr h="370840">
-                    <a:tc>
-                      <a:txBody>
-                        <a:bodyPr/>
-                        <a:lstStyle/>
-                        <a:p>
-                          <a:pPr>
-                            <a:lnSpc>
-                              <a:spcPct val="150000"/>
-                            </a:lnSpc>
-                          </a:pPr>
-                          <a:r>
-                            <a:rPr lang="ru-RU" sz="1800" b="0" i="0" kern="1200" dirty="0">
-                              <a:solidFill>
-                                <a:schemeClr val="dk1"/>
-                              </a:solidFill>
-                              <a:effectLst/>
-                              <a:latin typeface="Times New Roman" panose="02020603050405020304" pitchFamily="18" charset="0"/>
-                              <a:ea typeface="+mn-ea"/>
-                              <a:cs typeface="Times New Roman" panose="02020603050405020304" pitchFamily="18" charset="0"/>
-                            </a:rPr>
-                            <a:t>Уровни шума (коэффициент детерминации </a:t>
-                          </a:r>
-                          <a:r>
-                            <a:rPr lang="en-US" sz="1800" b="0" i="0" kern="1200" dirty="0">
-                              <a:solidFill>
-                                <a:schemeClr val="dk1"/>
-                              </a:solidFill>
-                              <a:effectLst/>
-                              <a:latin typeface="Times New Roman" panose="02020603050405020304" pitchFamily="18" charset="0"/>
-                              <a:ea typeface="+mn-ea"/>
-                              <a:cs typeface="Times New Roman" panose="02020603050405020304" pitchFamily="18" charset="0"/>
-                            </a:rPr>
-                            <a:t>R)</a:t>
-                          </a:r>
-                          <a:endParaRPr lang="ru-RU" dirty="0">
-                            <a:solidFill>
-                              <a:schemeClr val="tx1"/>
-                            </a:solidFill>
-                            <a:latin typeface="Times New Roman" panose="02020603050405020304" pitchFamily="18" charset="0"/>
-                            <a:cs typeface="Times New Roman" panose="02020603050405020304" pitchFamily="18" charset="0"/>
-                          </a:endParaRPr>
-                        </a:p>
-                      </a:txBody>
-                      <a:tcPr/>
-                    </a:tc>
-                    <a:tc>
-                      <a:txBody>
-                        <a:bodyPr/>
-                        <a:lstStyle/>
-                        <a:p>
-                          <a:pPr>
-                            <a:lnSpc>
-                              <a:spcPct val="150000"/>
-                            </a:lnSpc>
-                          </a:pPr>
-                          <a:r>
-                            <a:rPr lang="ru-RU" sz="1800" b="0" i="0" kern="1200" dirty="0">
-                              <a:solidFill>
-                                <a:schemeClr val="dk1"/>
-                              </a:solidFill>
-                              <a:effectLst/>
-                              <a:latin typeface="Times New Roman" panose="02020603050405020304" pitchFamily="18" charset="0"/>
-                              <a:ea typeface="+mn-ea"/>
-                              <a:cs typeface="Times New Roman" panose="02020603050405020304" pitchFamily="18" charset="0"/>
-                            </a:rPr>
-                            <a:t>0.95 (низкий), 0.9 (средний), 0.8 (высокий)</a:t>
-                          </a:r>
-                          <a:endParaRPr lang="ru-RU" dirty="0">
-                            <a:solidFill>
-                              <a:schemeClr val="tx1"/>
-                            </a:solidFill>
-                            <a:latin typeface="Times New Roman" panose="02020603050405020304" pitchFamily="18" charset="0"/>
-                            <a:cs typeface="Times New Roman" panose="02020603050405020304" pitchFamily="18" charset="0"/>
-                          </a:endParaRPr>
-                        </a:p>
-                      </a:txBody>
-                      <a:tcPr/>
-                    </a:tc>
-                    <a:extLst>
-                      <a:ext uri="{0D108BD9-81ED-4DB2-BD59-A6C34878D82A}">
-                        <a16:rowId xmlns:a16="http://schemas.microsoft.com/office/drawing/2014/main" val="3143267744"/>
                       </a:ext>
                     </a:extLst>
                   </a:tr>
@@ -8300,6 +14972,23 @@
                             </a:rPr>
                             <a:t>30</a:t>
                           </a:r>
+                          <a:r>
+                            <a:rPr lang="en-US" dirty="0">
+                              <a:solidFill>
+                                <a:schemeClr val="tx1"/>
+                              </a:solidFill>
+                              <a:latin typeface="Times New Roman" panose="02020603050405020304" pitchFamily="18" charset="0"/>
+                              <a:cs typeface="Times New Roman" panose="02020603050405020304" pitchFamily="18" charset="0"/>
+                            </a:rPr>
+                            <a:t>0</a:t>
+                          </a:r>
+                          <a:endParaRPr lang="ru-RU" dirty="0">
+                            <a:solidFill>
+                              <a:schemeClr val="tx1"/>
+                            </a:solidFill>
+                            <a:latin typeface="Times New Roman" panose="02020603050405020304" pitchFamily="18" charset="0"/>
+                            <a:cs typeface="Times New Roman" panose="02020603050405020304" pitchFamily="18" charset="0"/>
+                          </a:endParaRPr>
                         </a:p>
                       </a:txBody>
                       <a:tcPr/>
@@ -8734,14 +15423,14 @@
               <p:nvPr>
                 <p:extLst>
                   <p:ext uri="{D42A27DB-BD31-4B8C-83A1-F6EECF244321}">
-                    <p14:modId xmlns:p14="http://schemas.microsoft.com/office/powerpoint/2010/main" val="2522752531"/>
+                    <p14:modId xmlns:p14="http://schemas.microsoft.com/office/powerpoint/2010/main" val="1750430563"/>
                   </p:ext>
                 </p:extLst>
               </p:nvPr>
             </p:nvGraphicFramePr>
             <p:xfrm>
               <a:off x="597528" y="719666"/>
-              <a:ext cx="11362100" cy="4905756"/>
+              <a:ext cx="11362100" cy="4409948"/>
             </p:xfrm>
             <a:graphic>
               <a:graphicData uri="http://schemas.openxmlformats.org/drawingml/2006/table">
@@ -8875,7 +15564,7 @@
                       </a:ext>
                     </a:extLst>
                   </a:tr>
-                  <a:tr h="453644">
+                  <a:tr h="865124">
                     <a:tc>
                       <a:txBody>
                         <a:bodyPr/>
@@ -8894,7 +15583,7 @@
                               <a:latin typeface="Times New Roman" panose="02020603050405020304" pitchFamily="18" charset="0"/>
                               <a:cs typeface="Times New Roman" panose="02020603050405020304" pitchFamily="18" charset="0"/>
                             </a:rPr>
-                            <a:t>Степени полинома</a:t>
+                            <a:t>Модели регрессии</a:t>
                           </a:r>
                         </a:p>
                       </a:txBody>
@@ -8905,234 +15594,21 @@
                         <a:bodyPr/>
                         <a:lstStyle/>
                         <a:p>
-                          <a:pPr>
-                            <a:lnSpc>
-                              <a:spcPct val="150000"/>
-                            </a:lnSpc>
-                          </a:pPr>
-                          <a:r>
-                            <a:rPr lang="ru-RU" dirty="0">
-                              <a:solidFill>
-                                <a:schemeClr val="tx1"/>
-                              </a:solidFill>
-                              <a:latin typeface="Times New Roman" panose="02020603050405020304" pitchFamily="18" charset="0"/>
-                              <a:cs typeface="Times New Roman" panose="02020603050405020304" pitchFamily="18" charset="0"/>
-                            </a:rPr>
-                            <a:t>1-6</a:t>
-                          </a:r>
+                          <a:endParaRPr lang="ru-RU"/>
                         </a:p>
                       </a:txBody>
-                      <a:tcPr/>
+                      <a:tcPr>
+                        <a:blipFill>
+                          <a:blip r:embed="rId2"/>
+                          <a:stretch>
+                            <a:fillRect l="-100215" t="-105634" r="-536" b="-316197"/>
+                          </a:stretch>
+                        </a:blipFill>
+                      </a:tcPr>
                     </a:tc>
                     <a:extLst>
                       <a:ext uri="{0D108BD9-81ED-4DB2-BD59-A6C34878D82A}">
                         <a16:rowId xmlns:a16="http://schemas.microsoft.com/office/drawing/2014/main" val="1245780984"/>
-                      </a:ext>
-                    </a:extLst>
-                  </a:tr>
-                  <a:tr h="453644">
-                    <a:tc>
-                      <a:txBody>
-                        <a:bodyPr/>
-                        <a:lstStyle/>
-                        <a:p>
-                          <a:pPr>
-                            <a:lnSpc>
-                              <a:spcPct val="150000"/>
-                            </a:lnSpc>
-                          </a:pPr>
-                          <a:r>
-                            <a:rPr lang="ru-RU" sz="1800" b="0" i="0" kern="1200" dirty="0">
-                              <a:solidFill>
-                                <a:schemeClr val="dk1"/>
-                              </a:solidFill>
-                              <a:effectLst/>
-                              <a:latin typeface="Times New Roman" panose="02020603050405020304" pitchFamily="18" charset="0"/>
-                              <a:ea typeface="+mn-ea"/>
-                              <a:cs typeface="Times New Roman" panose="02020603050405020304" pitchFamily="18" charset="0"/>
-                            </a:rPr>
-                            <a:t>Распределения ошибок</a:t>
-                          </a:r>
-                          <a:endParaRPr lang="ru-RU" dirty="0">
-                            <a:solidFill>
-                              <a:schemeClr val="tx1"/>
-                            </a:solidFill>
-                            <a:latin typeface="Times New Roman" panose="02020603050405020304" pitchFamily="18" charset="0"/>
-                            <a:cs typeface="Times New Roman" panose="02020603050405020304" pitchFamily="18" charset="0"/>
-                          </a:endParaRPr>
-                        </a:p>
-                      </a:txBody>
-                      <a:tcPr/>
-                    </a:tc>
-                    <a:tc>
-                      <a:txBody>
-                        <a:bodyPr/>
-                        <a:lstStyle/>
-                        <a:p>
-                          <a:pPr>
-                            <a:lnSpc>
-                              <a:spcPct val="150000"/>
-                            </a:lnSpc>
-                          </a:pPr>
-                          <a:r>
-                            <a:rPr lang="ru-RU" sz="1800" b="0" i="0" kern="1200" dirty="0">
-                              <a:solidFill>
-                                <a:schemeClr val="dk1"/>
-                              </a:solidFill>
-                              <a:effectLst/>
-                              <a:latin typeface="Times New Roman" panose="02020603050405020304" pitchFamily="18" charset="0"/>
-                              <a:ea typeface="+mn-ea"/>
-                              <a:cs typeface="Times New Roman" panose="02020603050405020304" pitchFamily="18" charset="0"/>
-                            </a:rPr>
-                            <a:t>Лапласа, </a:t>
-                          </a:r>
-                          <a:r>
-                            <a:rPr lang="ru-RU" sz="1800" b="0" i="0" kern="1200" dirty="0" err="1">
-                              <a:solidFill>
-                                <a:schemeClr val="dk1"/>
-                              </a:solidFill>
-                              <a:effectLst/>
-                              <a:latin typeface="Times New Roman" panose="02020603050405020304" pitchFamily="18" charset="0"/>
-                              <a:ea typeface="+mn-ea"/>
-                              <a:cs typeface="Times New Roman" panose="02020603050405020304" pitchFamily="18" charset="0"/>
-                            </a:rPr>
-                            <a:t>Гумбеля</a:t>
-                          </a:r>
-                          <a:r>
-                            <a:rPr lang="ru-RU" sz="1800" b="0" i="0" kern="1200" dirty="0">
-                              <a:solidFill>
-                                <a:schemeClr val="dk1"/>
-                              </a:solidFill>
-                              <a:effectLst/>
-                              <a:latin typeface="Times New Roman" panose="02020603050405020304" pitchFamily="18" charset="0"/>
-                              <a:ea typeface="+mn-ea"/>
-                              <a:cs typeface="Times New Roman" panose="02020603050405020304" pitchFamily="18" charset="0"/>
-                            </a:rPr>
-                            <a:t>, </a:t>
-                          </a:r>
-                          <a:r>
-                            <a:rPr lang="ru-RU" sz="1800" b="0" i="0" kern="1200" dirty="0" err="1">
-                              <a:solidFill>
-                                <a:schemeClr val="dk1"/>
-                              </a:solidFill>
-                              <a:effectLst/>
-                              <a:latin typeface="Times New Roman" panose="02020603050405020304" pitchFamily="18" charset="0"/>
-                              <a:ea typeface="+mn-ea"/>
-                              <a:cs typeface="Times New Roman" panose="02020603050405020304" pitchFamily="18" charset="0"/>
-                            </a:rPr>
-                            <a:t>Тьюки</a:t>
-                          </a:r>
-                          <a:r>
-                            <a:rPr lang="ru-RU" sz="1800" b="0" i="0" kern="1200" dirty="0">
-                              <a:solidFill>
-                                <a:schemeClr val="dk1"/>
-                              </a:solidFill>
-                              <a:effectLst/>
-                              <a:latin typeface="Times New Roman" panose="02020603050405020304" pitchFamily="18" charset="0"/>
-                              <a:ea typeface="+mn-ea"/>
-                              <a:cs typeface="Times New Roman" panose="02020603050405020304" pitchFamily="18" charset="0"/>
-                            </a:rPr>
-                            <a:t> и др. (30 типов)</a:t>
-                          </a:r>
-                          <a:endParaRPr lang="ru-RU" dirty="0">
-                            <a:solidFill>
-                              <a:schemeClr val="tx1"/>
-                            </a:solidFill>
-                            <a:latin typeface="Times New Roman" panose="02020603050405020304" pitchFamily="18" charset="0"/>
-                            <a:cs typeface="Times New Roman" panose="02020603050405020304" pitchFamily="18" charset="0"/>
-                          </a:endParaRPr>
-                        </a:p>
-                      </a:txBody>
-                      <a:tcPr/>
-                    </a:tc>
-                    <a:extLst>
-                      <a:ext uri="{0D108BD9-81ED-4DB2-BD59-A6C34878D82A}">
-                        <a16:rowId xmlns:a16="http://schemas.microsoft.com/office/drawing/2014/main" val="2959901445"/>
-                      </a:ext>
-                    </a:extLst>
-                  </a:tr>
-                  <a:tr h="453644">
-                    <a:tc>
-                      <a:txBody>
-                        <a:bodyPr/>
-                        <a:lstStyle/>
-                        <a:p>
-                          <a:pPr>
-                            <a:lnSpc>
-                              <a:spcPct val="150000"/>
-                            </a:lnSpc>
-                          </a:pPr>
-                          <a:r>
-                            <a:rPr lang="ru-RU" sz="1800" b="0" i="0" kern="1200" dirty="0">
-                              <a:solidFill>
-                                <a:schemeClr val="dk1"/>
-                              </a:solidFill>
-                              <a:effectLst/>
-                              <a:latin typeface="Times New Roman" panose="02020603050405020304" pitchFamily="18" charset="0"/>
-                              <a:ea typeface="+mn-ea"/>
-                              <a:cs typeface="Times New Roman" panose="02020603050405020304" pitchFamily="18" charset="0"/>
-                            </a:rPr>
-                            <a:t>Уровни шума (коэффициент детерминации </a:t>
-                          </a:r>
-                          <a:r>
-                            <a:rPr lang="en-US" sz="1800" b="0" i="0" kern="1200" dirty="0">
-                              <a:solidFill>
-                                <a:schemeClr val="dk1"/>
-                              </a:solidFill>
-                              <a:effectLst/>
-                              <a:latin typeface="Times New Roman" panose="02020603050405020304" pitchFamily="18" charset="0"/>
-                              <a:ea typeface="+mn-ea"/>
-                              <a:cs typeface="Times New Roman" panose="02020603050405020304" pitchFamily="18" charset="0"/>
-                            </a:rPr>
-                            <a:t>R)</a:t>
-                          </a:r>
-                          <a:endParaRPr lang="ru-RU" dirty="0">
-                            <a:solidFill>
-                              <a:schemeClr val="tx1"/>
-                            </a:solidFill>
-                            <a:latin typeface="Times New Roman" panose="02020603050405020304" pitchFamily="18" charset="0"/>
-                            <a:cs typeface="Times New Roman" panose="02020603050405020304" pitchFamily="18" charset="0"/>
-                          </a:endParaRPr>
-                        </a:p>
-                      </a:txBody>
-                      <a:tcPr/>
-                    </a:tc>
-                    <a:tc>
-                      <a:txBody>
-                        <a:bodyPr/>
-                        <a:lstStyle/>
-                        <a:p>
-                          <a:pPr>
-                            <a:lnSpc>
-                              <a:spcPct val="150000"/>
-                            </a:lnSpc>
-                          </a:pPr>
-                          <a:r>
-                            <a:rPr lang="ru-RU" sz="1800" b="0" i="0" kern="1200" dirty="0">
-                              <a:solidFill>
-                                <a:schemeClr val="dk1"/>
-                              </a:solidFill>
-                              <a:effectLst/>
-                              <a:latin typeface="Times New Roman" panose="02020603050405020304" pitchFamily="18" charset="0"/>
-                              <a:ea typeface="+mn-ea"/>
-                              <a:cs typeface="Times New Roman" panose="02020603050405020304" pitchFamily="18" charset="0"/>
-                            </a:rPr>
-                            <a:t>0.95 (низкий), 0.9 (средний), 0.8 (высокий)</a:t>
-                          </a:r>
-                          <a:endParaRPr lang="ru-RU" dirty="0">
-                            <a:solidFill>
-                              <a:schemeClr val="tx1"/>
-                            </a:solidFill>
-                            <a:latin typeface="Times New Roman" panose="02020603050405020304" pitchFamily="18" charset="0"/>
-                            <a:cs typeface="Times New Roman" panose="02020603050405020304" pitchFamily="18" charset="0"/>
-                          </a:endParaRPr>
-                        </a:p>
-                      </a:txBody>
-                      <a:tcPr/>
-                    </a:tc>
-                    <a:extLst>
-                      <a:ext uri="{0D108BD9-81ED-4DB2-BD59-A6C34878D82A}">
-                        <a16:rowId xmlns:a16="http://schemas.microsoft.com/office/drawing/2014/main" val="3143267744"/>
                       </a:ext>
                     </a:extLst>
                   </a:tr>
@@ -9190,6 +15666,23 @@
                             </a:rPr>
                             <a:t>30</a:t>
                           </a:r>
+                          <a:r>
+                            <a:rPr lang="en-US" dirty="0">
+                              <a:solidFill>
+                                <a:schemeClr val="tx1"/>
+                              </a:solidFill>
+                              <a:latin typeface="Times New Roman" panose="02020603050405020304" pitchFamily="18" charset="0"/>
+                              <a:cs typeface="Times New Roman" panose="02020603050405020304" pitchFamily="18" charset="0"/>
+                            </a:rPr>
+                            <a:t>0</a:t>
+                          </a:r>
+                          <a:endParaRPr lang="ru-RU" dirty="0">
+                            <a:solidFill>
+                              <a:schemeClr val="tx1"/>
+                            </a:solidFill>
+                            <a:latin typeface="Times New Roman" panose="02020603050405020304" pitchFamily="18" charset="0"/>
+                            <a:cs typeface="Times New Roman" panose="02020603050405020304" pitchFamily="18" charset="0"/>
+                          </a:endParaRPr>
                         </a:p>
                       </a:txBody>
                       <a:tcPr/>
@@ -9285,7 +15778,7 @@
                         <a:blipFill>
                           <a:blip r:embed="rId2"/>
                           <a:stretch>
-                            <a:fillRect l="-215" t="-696000" r="-100536" b="-300000"/>
+                            <a:fillRect l="-215" t="-595946" r="-100536" b="-305405"/>
                           </a:stretch>
                         </a:blipFill>
                       </a:tcPr>
@@ -9509,6 +16002,341 @@
           </p:graphicFrame>
         </mc:Fallback>
       </mc:AlternateContent>
+      <p:graphicFrame>
+        <p:nvGraphicFramePr>
+          <p:cNvPr id="8" name="Таблица 7">
+            <a:extLst>
+              <a:ext uri="{FF2B5EF4-FFF2-40B4-BE49-F238E27FC236}">
+                <a16:creationId xmlns:a16="http://schemas.microsoft.com/office/drawing/2014/main" id="{3F38E1B3-473B-4B37-935D-0271D5F395AA}"/>
+              </a:ext>
+            </a:extLst>
+          </p:cNvPr>
+          <p:cNvGraphicFramePr>
+            <a:graphicFrameLocks noGrp="1"/>
+          </p:cNvGraphicFramePr>
+          <p:nvPr>
+            <p:extLst>
+              <p:ext uri="{D42A27DB-BD31-4B8C-83A1-F6EECF244321}">
+                <p14:modId xmlns:p14="http://schemas.microsoft.com/office/powerpoint/2010/main" val="3286950265"/>
+              </p:ext>
+            </p:extLst>
+          </p:nvPr>
+        </p:nvGraphicFramePr>
+        <p:xfrm>
+          <a:off x="597528" y="5129088"/>
+          <a:ext cx="11362100" cy="1360932"/>
+        </p:xfrm>
+        <a:graphic>
+          <a:graphicData uri="http://schemas.openxmlformats.org/drawingml/2006/table">
+            <a:tbl>
+              <a:tblPr firstRow="1" bandRow="1">
+                <a:tableStyleId>{21E4AEA4-8DFA-4A89-87EB-49C32662AFE0}</a:tableStyleId>
+              </a:tblPr>
+              <a:tblGrid>
+                <a:gridCol w="5681050">
+                  <a:extLst>
+                    <a:ext uri="{9D8B030D-6E8A-4147-A177-3AD203B41FA5}">
+                      <a16:colId xmlns:a16="http://schemas.microsoft.com/office/drawing/2014/main" val="189054888"/>
+                    </a:ext>
+                  </a:extLst>
+                </a:gridCol>
+                <a:gridCol w="5681050">
+                  <a:extLst>
+                    <a:ext uri="{9D8B030D-6E8A-4147-A177-3AD203B41FA5}">
+                      <a16:colId xmlns:a16="http://schemas.microsoft.com/office/drawing/2014/main" val="152570530"/>
+                    </a:ext>
+                  </a:extLst>
+                </a:gridCol>
+              </a:tblGrid>
+              <a:tr h="370840">
+                <a:tc gridSpan="2">
+                  <a:txBody>
+                    <a:bodyPr/>
+                    <a:lstStyle/>
+                    <a:p>
+                      <a:pPr algn="ctr">
+                        <a:lnSpc>
+                          <a:spcPct val="150000"/>
+                        </a:lnSpc>
+                      </a:pPr>
+                      <a:r>
+                        <a:rPr lang="ru-RU" dirty="0">
+                          <a:solidFill>
+                            <a:schemeClr val="tx1"/>
+                          </a:solidFill>
+                          <a:latin typeface="Times New Roman" panose="02020603050405020304" pitchFamily="18" charset="0"/>
+                          <a:cs typeface="Times New Roman" panose="02020603050405020304" pitchFamily="18" charset="0"/>
+                        </a:rPr>
+                        <a:t>Генерация ошибок для полиномов</a:t>
+                      </a:r>
+                    </a:p>
+                  </a:txBody>
+                  <a:tcPr/>
+                </a:tc>
+                <a:tc hMerge="1">
+                  <a:txBody>
+                    <a:bodyPr/>
+                    <a:lstStyle/>
+                    <a:p>
+                      <a:pPr algn="ctr">
+                        <a:lnSpc>
+                          <a:spcPct val="150000"/>
+                        </a:lnSpc>
+                      </a:pPr>
+                      <a:r>
+                        <a:rPr lang="ru-RU" dirty="0">
+                          <a:solidFill>
+                            <a:schemeClr val="tx1"/>
+                          </a:solidFill>
+                          <a:latin typeface="Times New Roman" panose="02020603050405020304" pitchFamily="18" charset="0"/>
+                          <a:cs typeface="Times New Roman" panose="02020603050405020304" pitchFamily="18" charset="0"/>
+                        </a:rPr>
+                        <a:t>Значение</a:t>
+                      </a:r>
+                    </a:p>
+                  </a:txBody>
+                  <a:tcPr/>
+                </a:tc>
+                <a:extLst>
+                  <a:ext uri="{0D108BD9-81ED-4DB2-BD59-A6C34878D82A}">
+                    <a16:rowId xmlns:a16="http://schemas.microsoft.com/office/drawing/2014/main" val="1364559575"/>
+                  </a:ext>
+                </a:extLst>
+              </a:tr>
+              <a:tr h="370840">
+                <a:tc>
+                  <a:txBody>
+                    <a:bodyPr/>
+                    <a:lstStyle/>
+                    <a:p>
+                      <a:pPr>
+                        <a:lnSpc>
+                          <a:spcPct val="150000"/>
+                        </a:lnSpc>
+                      </a:pPr>
+                      <a:r>
+                        <a:rPr lang="ru-RU" sz="1800" b="0" i="0" kern="1200" dirty="0">
+                          <a:solidFill>
+                            <a:schemeClr val="dk1"/>
+                          </a:solidFill>
+                          <a:effectLst/>
+                          <a:latin typeface="Times New Roman" panose="02020603050405020304" pitchFamily="18" charset="0"/>
+                          <a:ea typeface="+mn-ea"/>
+                          <a:cs typeface="Times New Roman" panose="02020603050405020304" pitchFamily="18" charset="0"/>
+                        </a:rPr>
+                        <a:t>Распределения ошибок</a:t>
+                      </a:r>
+                      <a:endParaRPr lang="ru-RU" dirty="0">
+                        <a:solidFill>
+                          <a:schemeClr val="tx1"/>
+                        </a:solidFill>
+                        <a:latin typeface="Times New Roman" panose="02020603050405020304" pitchFamily="18" charset="0"/>
+                        <a:cs typeface="Times New Roman" panose="02020603050405020304" pitchFamily="18" charset="0"/>
+                      </a:endParaRPr>
+                    </a:p>
+                  </a:txBody>
+                  <a:tcPr/>
+                </a:tc>
+                <a:tc>
+                  <a:txBody>
+                    <a:bodyPr/>
+                    <a:lstStyle/>
+                    <a:p>
+                      <a:pPr>
+                        <a:lnSpc>
+                          <a:spcPct val="150000"/>
+                        </a:lnSpc>
+                      </a:pPr>
+                      <a:r>
+                        <a:rPr lang="ru-RU" sz="1800" b="0" i="0" kern="1200" dirty="0">
+                          <a:solidFill>
+                            <a:schemeClr val="dk1"/>
+                          </a:solidFill>
+                          <a:effectLst/>
+                          <a:latin typeface="Times New Roman" panose="02020603050405020304" pitchFamily="18" charset="0"/>
+                          <a:ea typeface="+mn-ea"/>
+                          <a:cs typeface="Times New Roman" panose="02020603050405020304" pitchFamily="18" charset="0"/>
+                        </a:rPr>
+                        <a:t>Лапласа, </a:t>
+                      </a:r>
+                      <a:r>
+                        <a:rPr lang="ru-RU" sz="1800" b="0" i="0" kern="1200" dirty="0" err="1">
+                          <a:solidFill>
+                            <a:schemeClr val="dk1"/>
+                          </a:solidFill>
+                          <a:effectLst/>
+                          <a:latin typeface="Times New Roman" panose="02020603050405020304" pitchFamily="18" charset="0"/>
+                          <a:ea typeface="+mn-ea"/>
+                          <a:cs typeface="Times New Roman" panose="02020603050405020304" pitchFamily="18" charset="0"/>
+                        </a:rPr>
+                        <a:t>Гумбеля</a:t>
+                      </a:r>
+                      <a:r>
+                        <a:rPr lang="ru-RU" sz="1800" b="0" i="0" kern="1200" dirty="0">
+                          <a:solidFill>
+                            <a:schemeClr val="dk1"/>
+                          </a:solidFill>
+                          <a:effectLst/>
+                          <a:latin typeface="Times New Roman" panose="02020603050405020304" pitchFamily="18" charset="0"/>
+                          <a:ea typeface="+mn-ea"/>
+                          <a:cs typeface="Times New Roman" panose="02020603050405020304" pitchFamily="18" charset="0"/>
+                        </a:rPr>
+                        <a:t>, </a:t>
+                      </a:r>
+                      <a:r>
+                        <a:rPr lang="ru-RU" sz="1800" b="0" i="0" kern="1200" dirty="0" err="1">
+                          <a:solidFill>
+                            <a:schemeClr val="dk1"/>
+                          </a:solidFill>
+                          <a:effectLst/>
+                          <a:latin typeface="Times New Roman" panose="02020603050405020304" pitchFamily="18" charset="0"/>
+                          <a:ea typeface="+mn-ea"/>
+                          <a:cs typeface="Times New Roman" panose="02020603050405020304" pitchFamily="18" charset="0"/>
+                        </a:rPr>
+                        <a:t>Тьюки</a:t>
+                      </a:r>
+                      <a:r>
+                        <a:rPr lang="ru-RU" sz="1800" b="0" i="0" kern="1200" dirty="0">
+                          <a:solidFill>
+                            <a:schemeClr val="dk1"/>
+                          </a:solidFill>
+                          <a:effectLst/>
+                          <a:latin typeface="Times New Roman" panose="02020603050405020304" pitchFamily="18" charset="0"/>
+                          <a:ea typeface="+mn-ea"/>
+                          <a:cs typeface="Times New Roman" panose="02020603050405020304" pitchFamily="18" charset="0"/>
+                        </a:rPr>
+                        <a:t> и др. (30 типов)</a:t>
+                      </a:r>
+                      <a:endParaRPr lang="ru-RU" dirty="0">
+                        <a:solidFill>
+                          <a:schemeClr val="tx1"/>
+                        </a:solidFill>
+                        <a:latin typeface="Times New Roman" panose="02020603050405020304" pitchFamily="18" charset="0"/>
+                        <a:cs typeface="Times New Roman" panose="02020603050405020304" pitchFamily="18" charset="0"/>
+                      </a:endParaRPr>
+                    </a:p>
+                  </a:txBody>
+                  <a:tcPr/>
+                </a:tc>
+                <a:extLst>
+                  <a:ext uri="{0D108BD9-81ED-4DB2-BD59-A6C34878D82A}">
+                    <a16:rowId xmlns:a16="http://schemas.microsoft.com/office/drawing/2014/main" val="827921860"/>
+                  </a:ext>
+                </a:extLst>
+              </a:tr>
+              <a:tr h="370840">
+                <a:tc>
+                  <a:txBody>
+                    <a:bodyPr/>
+                    <a:lstStyle/>
+                    <a:p>
+                      <a:pPr>
+                        <a:lnSpc>
+                          <a:spcPct val="150000"/>
+                        </a:lnSpc>
+                      </a:pPr>
+                      <a:r>
+                        <a:rPr lang="ru-RU" sz="1800" b="0" i="0" kern="1200" dirty="0">
+                          <a:solidFill>
+                            <a:schemeClr val="dk1"/>
+                          </a:solidFill>
+                          <a:effectLst/>
+                          <a:latin typeface="Times New Roman" panose="02020603050405020304" pitchFamily="18" charset="0"/>
+                          <a:ea typeface="+mn-ea"/>
+                          <a:cs typeface="Times New Roman" panose="02020603050405020304" pitchFamily="18" charset="0"/>
+                        </a:rPr>
+                        <a:t>Уровни шума</a:t>
+                      </a:r>
+                      <a:r>
+                        <a:rPr lang="en-US" sz="1800" b="0" i="0" kern="1200" dirty="0">
+                          <a:solidFill>
+                            <a:schemeClr val="dk1"/>
+                          </a:solidFill>
+                          <a:effectLst/>
+                          <a:latin typeface="Times New Roman" panose="02020603050405020304" pitchFamily="18" charset="0"/>
+                          <a:ea typeface="+mn-ea"/>
+                          <a:cs typeface="Times New Roman" panose="02020603050405020304" pitchFamily="18" charset="0"/>
+                        </a:rPr>
+                        <a:t> </a:t>
+                      </a:r>
+                      <a:r>
+                        <a:rPr lang="ru-RU" sz="1800" b="0" i="0" kern="1200" dirty="0">
+                          <a:solidFill>
+                            <a:schemeClr val="dk1"/>
+                          </a:solidFill>
+                          <a:effectLst/>
+                          <a:latin typeface="Times New Roman" panose="02020603050405020304" pitchFamily="18" charset="0"/>
+                          <a:ea typeface="+mn-ea"/>
+                          <a:cs typeface="Times New Roman" panose="02020603050405020304" pitchFamily="18" charset="0"/>
+                        </a:rPr>
+                        <a:t>(коэффициент детерминации </a:t>
+                      </a:r>
+                      <a:r>
+                        <a:rPr lang="en-US" sz="1800" b="0" i="0" kern="1200" dirty="0">
+                          <a:solidFill>
+                            <a:schemeClr val="dk1"/>
+                          </a:solidFill>
+                          <a:effectLst/>
+                          <a:latin typeface="Times New Roman" panose="02020603050405020304" pitchFamily="18" charset="0"/>
+                          <a:ea typeface="+mn-ea"/>
+                          <a:cs typeface="Times New Roman" panose="02020603050405020304" pitchFamily="18" charset="0"/>
+                        </a:rPr>
+                        <a:t>R)</a:t>
+                      </a:r>
+                      <a:endParaRPr lang="ru-RU" dirty="0">
+                        <a:solidFill>
+                          <a:schemeClr val="tx1"/>
+                        </a:solidFill>
+                        <a:latin typeface="Times New Roman" panose="02020603050405020304" pitchFamily="18" charset="0"/>
+                        <a:cs typeface="Times New Roman" panose="02020603050405020304" pitchFamily="18" charset="0"/>
+                      </a:endParaRPr>
+                    </a:p>
+                  </a:txBody>
+                  <a:tcPr/>
+                </a:tc>
+                <a:tc>
+                  <a:txBody>
+                    <a:bodyPr/>
+                    <a:lstStyle/>
+                    <a:p>
+                      <a:pPr>
+                        <a:lnSpc>
+                          <a:spcPct val="150000"/>
+                        </a:lnSpc>
+                      </a:pPr>
+                      <a:r>
+                        <a:rPr lang="ru-RU" sz="1800" b="0" i="0" kern="1200" dirty="0">
+                          <a:solidFill>
+                            <a:schemeClr val="dk1"/>
+                          </a:solidFill>
+                          <a:effectLst/>
+                          <a:latin typeface="Times New Roman" panose="02020603050405020304" pitchFamily="18" charset="0"/>
+                          <a:ea typeface="+mn-ea"/>
+                          <a:cs typeface="Times New Roman" panose="02020603050405020304" pitchFamily="18" charset="0"/>
+                        </a:rPr>
+                        <a:t>0.95 (низкий), 0.9 (средний), 0.8 (высокий)</a:t>
+                      </a:r>
+                      <a:endParaRPr lang="ru-RU" dirty="0">
+                        <a:solidFill>
+                          <a:schemeClr val="tx1"/>
+                        </a:solidFill>
+                        <a:latin typeface="Times New Roman" panose="02020603050405020304" pitchFamily="18" charset="0"/>
+                        <a:cs typeface="Times New Roman" panose="02020603050405020304" pitchFamily="18" charset="0"/>
+                      </a:endParaRPr>
+                    </a:p>
+                  </a:txBody>
+                  <a:tcPr/>
+                </a:tc>
+                <a:extLst>
+                  <a:ext uri="{0D108BD9-81ED-4DB2-BD59-A6C34878D82A}">
+                    <a16:rowId xmlns:a16="http://schemas.microsoft.com/office/drawing/2014/main" val="1344421370"/>
+                  </a:ext>
+                </a:extLst>
+              </a:tr>
+            </a:tbl>
+          </a:graphicData>
+        </a:graphic>
+      </p:graphicFrame>
     </p:spTree>
     <p:extLst>
       <p:ext uri="{BB962C8B-B14F-4D97-AF65-F5344CB8AC3E}">
@@ -9522,7 +16350,7 @@
 </p:sld>
 </file>
 
-<file path=ppt/slides/slide7.xml><?xml version="1.0" encoding="utf-8"?>
+<file path=ppt/slides/slide9.xml><?xml version="1.0" encoding="utf-8"?>
 <p:sld xmlns:a="http://schemas.openxmlformats.org/drawingml/2006/main" xmlns:r="http://schemas.openxmlformats.org/officeDocument/2006/relationships" xmlns:p="http://schemas.openxmlformats.org/presentationml/2006/main">
   <p:cSld>
     <p:spTree>
@@ -9530,7 +16358,7 @@
         <p:cNvPr id="1" name="">
           <a:extLst>
             <a:ext uri="{FF2B5EF4-FFF2-40B4-BE49-F238E27FC236}">
-              <a16:creationId xmlns:a16="http://schemas.microsoft.com/office/drawing/2014/main" id="{0C52211F-D840-3878-739B-16E35221D39E}"/>
+              <a16:creationId xmlns:a16="http://schemas.microsoft.com/office/drawing/2014/main" id="{242BF301-507D-2287-D63E-51DCF91340F2}"/>
             </a:ext>
           </a:extLst>
         </p:cNvPr>
@@ -9550,7 +16378,7 @@
           <p:cNvPr id="2" name="TextBox 1">
             <a:extLst>
               <a:ext uri="{FF2B5EF4-FFF2-40B4-BE49-F238E27FC236}">
-                <a16:creationId xmlns:a16="http://schemas.microsoft.com/office/drawing/2014/main" id="{8995A710-51E0-CE7A-E81F-72C3AEBEF811}"/>
+                <a16:creationId xmlns:a16="http://schemas.microsoft.com/office/drawing/2014/main" id="{14AAFDB0-D9B3-1ED6-2B5C-222E641BBD8E}"/>
               </a:ext>
             </a:extLst>
           </p:cNvPr>
@@ -9559,8 +16387,8 @@
         </p:nvSpPr>
         <p:spPr>
           <a:xfrm>
-            <a:off x="5070591" y="0"/>
-            <a:ext cx="2050818" cy="523220"/>
+            <a:off x="4235426" y="0"/>
+            <a:ext cx="3721147" cy="523220"/>
           </a:xfrm>
           <a:prstGeom prst="rect">
             <a:avLst/>
@@ -9578,17 +16406,17 @@
                 <a:latin typeface="Times New Roman" panose="02020603050405020304" pitchFamily="18" charset="0"/>
                 <a:cs typeface="Times New Roman" panose="02020603050405020304" pitchFamily="18" charset="0"/>
               </a:rPr>
-              <a:t>Результаты</a:t>
+              <a:t>Дизайн эксперимента</a:t>
             </a:r>
           </a:p>
         </p:txBody>
       </p:sp>
       <p:sp>
         <p:nvSpPr>
-          <p:cNvPr id="3" name="TextBox 2">
+          <p:cNvPr id="6" name="TextBox 5">
             <a:extLst>
               <a:ext uri="{FF2B5EF4-FFF2-40B4-BE49-F238E27FC236}">
-                <a16:creationId xmlns:a16="http://schemas.microsoft.com/office/drawing/2014/main" id="{06E52EA5-F14C-5529-A879-73D9A7899A90}"/>
+                <a16:creationId xmlns:a16="http://schemas.microsoft.com/office/drawing/2014/main" id="{3CC7F687-33BE-4198-BCAC-5FD35E2891A2}"/>
               </a:ext>
             </a:extLst>
           </p:cNvPr>
@@ -9597,113 +16425,8 @@
         </p:nvSpPr>
         <p:spPr>
           <a:xfrm>
-            <a:off x="525101" y="932507"/>
-            <a:ext cx="11416420" cy="1294393"/>
-          </a:xfrm>
-          <a:prstGeom prst="rect">
-            <a:avLst/>
-          </a:prstGeom>
-          <a:noFill/>
-        </p:spPr>
-        <p:txBody>
-          <a:bodyPr wrap="square" rtlCol="0">
-            <a:spAutoFit/>
-          </a:bodyPr>
-          <a:lstStyle/>
-          <a:p>
-            <a:pPr>
-              <a:lnSpc>
-                <a:spcPct val="150000"/>
-              </a:lnSpc>
-            </a:pPr>
-            <a:r>
-              <a:rPr lang="ru-RU" b="1" dirty="0">
-                <a:latin typeface="Times New Roman" panose="02020603050405020304" pitchFamily="18" charset="0"/>
-                <a:cs typeface="Times New Roman" panose="02020603050405020304" pitchFamily="18" charset="0"/>
-              </a:rPr>
-              <a:t>Основные наблюдения:  </a:t>
-            </a:r>
-          </a:p>
-          <a:p>
-            <a:pPr marL="285750" indent="-285750">
-              <a:lnSpc>
-                <a:spcPct val="150000"/>
-              </a:lnSpc>
-              <a:buFont typeface="Arial" panose="020B0604020202020204" pitchFamily="34" charset="0"/>
-              <a:buChar char="•"/>
-            </a:pPr>
-            <a:r>
-              <a:rPr lang="ru-RU" dirty="0">
-                <a:latin typeface="Times New Roman" panose="02020603050405020304" pitchFamily="18" charset="0"/>
-                <a:cs typeface="Times New Roman" panose="02020603050405020304" pitchFamily="18" charset="0"/>
-              </a:rPr>
-              <a:t>Энтропийный метод демонстрирует эффективность при всех уровнях шума</a:t>
-            </a:r>
-          </a:p>
-          <a:p>
-            <a:pPr marL="285750" indent="-285750">
-              <a:lnSpc>
-                <a:spcPct val="150000"/>
-              </a:lnSpc>
-              <a:buFont typeface="Arial" panose="020B0604020202020204" pitchFamily="34" charset="0"/>
-              <a:buChar char="•"/>
-            </a:pPr>
-            <a:r>
-              <a:rPr lang="ru-RU" dirty="0">
-                <a:latin typeface="Times New Roman" panose="02020603050405020304" pitchFamily="18" charset="0"/>
-                <a:cs typeface="Times New Roman" panose="02020603050405020304" pitchFamily="18" charset="0"/>
-              </a:rPr>
-              <a:t>Наибольшее улучшение достигнуто для полинома 2-й степени (-63% к ядерной регрессии)</a:t>
-            </a:r>
-          </a:p>
-        </p:txBody>
-      </p:sp>
-      <p:pic>
-        <p:nvPicPr>
-          <p:cNvPr id="4" name="Рисунок 3" descr="Изображение выглядит как диаграмма, линия, График, текст&#10;&#10;Содержимое, созданное искусственным интеллектом, может быть неверным.">
-            <a:extLst>
-              <a:ext uri="{FF2B5EF4-FFF2-40B4-BE49-F238E27FC236}">
-                <a16:creationId xmlns:a16="http://schemas.microsoft.com/office/drawing/2014/main" id="{20A465BF-FA1C-A0CD-A6EE-6D6A9B3DCF52}"/>
-              </a:ext>
-            </a:extLst>
-          </p:cNvPr>
-          <p:cNvPicPr>
-            <a:picLocks noChangeAspect="1"/>
-          </p:cNvPicPr>
-          <p:nvPr/>
-        </p:nvPicPr>
-        <p:blipFill>
-          <a:blip r:embed="rId2"/>
-          <a:stretch>
-            <a:fillRect/>
-          </a:stretch>
-        </p:blipFill>
-        <p:spPr>
-          <a:xfrm>
-            <a:off x="431202" y="2444616"/>
-            <a:ext cx="11329595" cy="3734804"/>
-          </a:xfrm>
-          <a:prstGeom prst="rect">
-            <a:avLst/>
-          </a:prstGeom>
-        </p:spPr>
-      </p:pic>
-      <p:sp>
-        <p:nvSpPr>
-          <p:cNvPr id="6" name="TextBox 5">
-            <a:extLst>
-              <a:ext uri="{FF2B5EF4-FFF2-40B4-BE49-F238E27FC236}">
-                <a16:creationId xmlns:a16="http://schemas.microsoft.com/office/drawing/2014/main" id="{AFE6FE7F-F128-49D0-1F99-DF46F2CF9BD3}"/>
-              </a:ext>
-            </a:extLst>
-          </p:cNvPr>
-          <p:cNvSpPr txBox="1"/>
-          <p:nvPr/>
-        </p:nvSpPr>
-        <p:spPr>
-          <a:xfrm>
-            <a:off x="1995157" y="6179420"/>
-            <a:ext cx="8476307" cy="369332"/>
+            <a:off x="366897" y="523220"/>
+            <a:ext cx="11458204" cy="561949"/>
           </a:xfrm>
           <a:prstGeom prst="rect">
             <a:avLst/>
@@ -9716,68 +16439,69 @@
           </a:bodyPr>
           <a:lstStyle/>
           <a:p>
-            <a:r>
-              <a:rPr lang="ru-RU" sz="1800" dirty="0">
-                <a:effectLst/>
+            <a:pPr>
+              <a:lnSpc>
+                <a:spcPct val="200000"/>
+              </a:lnSpc>
+            </a:pPr>
+            <a:r>
+              <a:rPr lang="ru-RU" dirty="0">
                 <a:latin typeface="Times New Roman" panose="02020603050405020304" pitchFamily="18" charset="0"/>
-                <a:ea typeface="Times New Roman" panose="02020603050405020304" pitchFamily="18" charset="0"/>
+                <a:cs typeface="Times New Roman" panose="02020603050405020304" pitchFamily="18" charset="0"/>
               </a:rPr>
-              <a:t>Рис.1. Сравнение лучших оценок ядерного и энтропийного метода по </a:t>
-            </a:r>
-            <a:r>
-              <a:rPr lang="en-US" sz="1800" dirty="0">
-                <a:effectLst/>
+              <a:t>	Для проверки на реальных данных использовался </a:t>
+            </a:r>
+            <a:r>
+              <a:rPr lang="ru-RU" dirty="0" err="1">
                 <a:latin typeface="Times New Roman" panose="02020603050405020304" pitchFamily="18" charset="0"/>
-                <a:ea typeface="Times New Roman" panose="02020603050405020304" pitchFamily="18" charset="0"/>
+                <a:cs typeface="Times New Roman" panose="02020603050405020304" pitchFamily="18" charset="0"/>
               </a:rPr>
-              <a:t>IMSE</a:t>
-            </a:r>
-            <a:endParaRPr lang="ru-RU" dirty="0"/>
+              <a:t>датасет</a:t>
+            </a:r>
+            <a:r>
+              <a:rPr lang="ru-RU" dirty="0">
+                <a:latin typeface="Times New Roman" panose="02020603050405020304" pitchFamily="18" charset="0"/>
+                <a:cs typeface="Times New Roman" panose="02020603050405020304" pitchFamily="18" charset="0"/>
+              </a:rPr>
+              <a:t> по извержениям гейзера Старый служака. </a:t>
+            </a:r>
           </a:p>
         </p:txBody>
       </p:sp>
-    </p:spTree>
-    <p:extLst>
-      <p:ext uri="{BB962C8B-B14F-4D97-AF65-F5344CB8AC3E}">
-        <p14:creationId xmlns:p14="http://schemas.microsoft.com/office/powerpoint/2010/main" val="236382567"/>
-      </p:ext>
-    </p:extLst>
-  </p:cSld>
-  <p:clrMapOvr>
-    <a:masterClrMapping/>
-  </p:clrMapOvr>
-</p:sld>
-</file>
-
-<file path=ppt/slides/slide8.xml><?xml version="1.0" encoding="utf-8"?>
-<p:sld xmlns:a="http://schemas.openxmlformats.org/drawingml/2006/main" xmlns:r="http://schemas.openxmlformats.org/officeDocument/2006/relationships" xmlns:p="http://schemas.openxmlformats.org/presentationml/2006/main">
-  <p:cSld>
-    <p:spTree>
-      <p:nvGrpSpPr>
-        <p:cNvPr id="1" name="">
-          <a:extLst>
-            <a:ext uri="{FF2B5EF4-FFF2-40B4-BE49-F238E27FC236}">
-              <a16:creationId xmlns:a16="http://schemas.microsoft.com/office/drawing/2014/main" id="{37A17CF9-11BB-8E92-9837-8CEB23243A2C}"/>
-            </a:ext>
-          </a:extLst>
-        </p:cNvPr>
-        <p:cNvGrpSpPr/>
-        <p:nvPr/>
-      </p:nvGrpSpPr>
-      <p:grpSpPr>
-        <a:xfrm>
-          <a:off x="0" y="0"/>
-          <a:ext cx="0" cy="0"/>
-          <a:chOff x="0" y="0"/>
-          <a:chExt cx="0" cy="0"/>
-        </a:xfrm>
-      </p:grpSpPr>
+      <p:pic>
+        <p:nvPicPr>
+          <p:cNvPr id="7" name="Рисунок 6">
+            <a:extLst>
+              <a:ext uri="{FF2B5EF4-FFF2-40B4-BE49-F238E27FC236}">
+                <a16:creationId xmlns:a16="http://schemas.microsoft.com/office/drawing/2014/main" id="{957BC006-086D-47FD-B0B0-446DD214C5A8}"/>
+              </a:ext>
+            </a:extLst>
+          </p:cNvPr>
+          <p:cNvPicPr/>
+          <p:nvPr/>
+        </p:nvPicPr>
+        <p:blipFill>
+          <a:blip r:embed="rId2"/>
+          <a:stretch>
+            <a:fillRect/>
+          </a:stretch>
+        </p:blipFill>
+        <p:spPr>
+          <a:xfrm>
+            <a:off x="1813424" y="1201148"/>
+            <a:ext cx="8043096" cy="4789954"/>
+          </a:xfrm>
+          <a:prstGeom prst="rect">
+            <a:avLst/>
+          </a:prstGeom>
+        </p:spPr>
+      </p:pic>
       <p:sp>
         <p:nvSpPr>
-          <p:cNvPr id="2" name="TextBox 1">
+          <p:cNvPr id="9" name="TextBox 8">
             <a:extLst>
               <a:ext uri="{FF2B5EF4-FFF2-40B4-BE49-F238E27FC236}">
-                <a16:creationId xmlns:a16="http://schemas.microsoft.com/office/drawing/2014/main" id="{0D52EBD2-34A3-7824-147E-0C9CB9A9B380}"/>
+                <a16:creationId xmlns:a16="http://schemas.microsoft.com/office/drawing/2014/main" id="{D0A78459-8DF8-491A-BC9A-B12458B4E0B9}"/>
               </a:ext>
             </a:extLst>
           </p:cNvPr>
@@ -9786,8 +16510,8 @@
         </p:nvSpPr>
         <p:spPr>
           <a:xfrm>
-            <a:off x="5018237" y="0"/>
-            <a:ext cx="2155526" cy="523220"/>
+            <a:off x="150172" y="6011614"/>
+            <a:ext cx="11891654" cy="646331"/>
           </a:xfrm>
           <a:prstGeom prst="rect">
             <a:avLst/>
@@ -9795,583 +16519,28 @@
           <a:noFill/>
         </p:spPr>
         <p:txBody>
-          <a:bodyPr wrap="none" rtlCol="0">
+          <a:bodyPr wrap="square">
             <a:spAutoFit/>
           </a:bodyPr>
           <a:lstStyle/>
           <a:p>
-            <a:r>
-              <a:rPr lang="ru-RU" sz="2800" b="1" dirty="0">
+            <a:pPr algn="ctr"/>
+            <a:r>
+              <a:rPr lang="ru-RU" sz="1800" dirty="0">
+                <a:effectLst/>
                 <a:latin typeface="Times New Roman" panose="02020603050405020304" pitchFamily="18" charset="0"/>
-                <a:cs typeface="Times New Roman" panose="02020603050405020304" pitchFamily="18" charset="0"/>
+                <a:ea typeface="Calibri" panose="020F0502020204030204" pitchFamily="34" charset="0"/>
               </a:rPr>
-              <a:t>Заключение</a:t>
-            </a:r>
-          </a:p>
-        </p:txBody>
-      </p:sp>
-      <mc:AlternateContent xmlns:mc="http://schemas.openxmlformats.org/markup-compatibility/2006" xmlns:a14="http://schemas.microsoft.com/office/drawing/2010/main">
-        <mc:Choice Requires="a14">
-          <p:sp>
-            <p:nvSpPr>
-              <p:cNvPr id="3" name="TextBox 2">
-                <a:extLst>
-                  <a:ext uri="{FF2B5EF4-FFF2-40B4-BE49-F238E27FC236}">
-                    <a16:creationId xmlns:a16="http://schemas.microsoft.com/office/drawing/2014/main" id="{5C119950-4F22-A952-AE41-BFD3A317FB05}"/>
-                  </a:ext>
-                </a:extLst>
-              </p:cNvPr>
-              <p:cNvSpPr txBox="1"/>
-              <p:nvPr/>
-            </p:nvSpPr>
-            <p:spPr>
-              <a:xfrm>
-                <a:off x="387790" y="523220"/>
-                <a:ext cx="11416420" cy="4214615"/>
-              </a:xfrm>
-              <a:prstGeom prst="rect">
-                <a:avLst/>
-              </a:prstGeom>
-              <a:noFill/>
-            </p:spPr>
-            <p:txBody>
-              <a:bodyPr wrap="square" rtlCol="0">
-                <a:spAutoFit/>
-              </a:bodyPr>
-              <a:lstStyle/>
-              <a:p>
-                <a:pPr>
-                  <a:lnSpc>
-                    <a:spcPct val="250000"/>
-                  </a:lnSpc>
-                </a:pPr>
-                <a:r>
-                  <a:rPr lang="ru-RU" b="1" dirty="0">
-                    <a:latin typeface="Times New Roman" panose="02020603050405020304" pitchFamily="18" charset="0"/>
-                    <a:cs typeface="Times New Roman" panose="02020603050405020304" pitchFamily="18" charset="0"/>
-                  </a:rPr>
-                  <a:t>Выводы:</a:t>
-                </a:r>
-              </a:p>
-              <a:p>
-                <a:pPr marL="285750" indent="-285750">
-                  <a:lnSpc>
-                    <a:spcPct val="250000"/>
-                  </a:lnSpc>
-                  <a:buFont typeface="Arial" panose="020B0604020202020204" pitchFamily="34" charset="0"/>
-                  <a:buChar char="•"/>
-                </a:pPr>
-                <a:r>
-                  <a:rPr lang="ru-RU" dirty="0"/>
-                  <a:t>На малых выборках (n=30) кросс-валидация </a:t>
-                </a:r>
-                <a:r>
-                  <a:rPr lang="ru-RU" b="1" dirty="0"/>
-                  <a:t>нестабильна</a:t>
-                </a:r>
-                <a:r>
-                  <a:rPr lang="en-US" dirty="0"/>
-                  <a:t>;</a:t>
-                </a:r>
-              </a:p>
-              <a:p>
-                <a:pPr marL="285750" indent="-285750">
-                  <a:lnSpc>
-                    <a:spcPct val="250000"/>
-                  </a:lnSpc>
-                  <a:buFont typeface="Arial" panose="020B0604020202020204" pitchFamily="34" charset="0"/>
-                  <a:buChar char="•"/>
-                </a:pPr>
-                <a:r>
-                  <a:rPr lang="ru-RU" dirty="0"/>
-                  <a:t>Энтропийный метод статистически эффективнее в </a:t>
-                </a:r>
-                <a:r>
-                  <a:rPr lang="ru-RU" b="1" dirty="0"/>
-                  <a:t>большинстве конфигураций</a:t>
-                </a:r>
-                <a:endParaRPr lang="en-US" b="1" dirty="0"/>
-              </a:p>
-              <a:p>
-                <a:pPr marL="285750" indent="-285750">
-                  <a:lnSpc>
-                    <a:spcPct val="250000"/>
-                  </a:lnSpc>
-                  <a:buFont typeface="Arial" panose="020B0604020202020204" pitchFamily="34" charset="0"/>
-                  <a:buChar char="•"/>
-                </a:pPr>
-                <a:r>
-                  <a:rPr lang="ru-RU" dirty="0"/>
-                  <a:t>Метод </a:t>
-                </a:r>
-                <a:r>
-                  <a:rPr lang="ru-RU" b="1" dirty="0"/>
-                  <a:t>робастен</a:t>
-                </a:r>
-                <a:r>
-                  <a:rPr lang="ru-RU" dirty="0"/>
-                  <a:t> к распределению ошибок (не требует нормальности)</a:t>
-                </a:r>
-                <a:endParaRPr lang="en-US" dirty="0"/>
-              </a:p>
-              <a:p>
-                <a:pPr marL="285750" indent="-285750">
-                  <a:lnSpc>
-                    <a:spcPct val="250000"/>
-                  </a:lnSpc>
-                  <a:buFont typeface="Arial" panose="020B0604020202020204" pitchFamily="34" charset="0"/>
-                  <a:buChar char="•"/>
-                </a:pPr>
-                <a:r>
-                  <a:rPr lang="ru-RU" dirty="0"/>
-                  <a:t>Работает устойчиво при </a:t>
-                </a:r>
-                <a:r>
-                  <a:rPr lang="ru-RU" b="1" dirty="0"/>
-                  <a:t>малом объёме выборки</a:t>
-                </a:r>
-                <a:r>
-                  <a:rPr lang="ru-RU" dirty="0"/>
-                  <a:t> (n=30)</a:t>
-                </a:r>
-                <a:endParaRPr lang="en-US" dirty="0"/>
-              </a:p>
-              <a:p>
-                <a:pPr marL="285750" indent="-285750">
-                  <a:lnSpc>
-                    <a:spcPct val="250000"/>
-                  </a:lnSpc>
-                  <a:buFont typeface="Arial" panose="020B0604020202020204" pitchFamily="34" charset="0"/>
-                  <a:buChar char="•"/>
-                </a:pPr>
-                <a:r>
-                  <a:rPr lang="ru-RU" dirty="0"/>
-                  <a:t>Наибольший выигрыш для </a:t>
-                </a:r>
-                <a:r>
-                  <a:rPr lang="ru-RU" b="1" dirty="0"/>
-                  <a:t>низкого уровня шума </a:t>
-                </a:r>
-                <a14:m>
-                  <m:oMath xmlns:m="http://schemas.openxmlformats.org/officeDocument/2006/math">
-                    <m:d>
-                      <m:dPr>
-                        <m:ctrlPr>
-                          <a:rPr lang="en-US" b="1" i="1" smtClean="0">
-                            <a:latin typeface="Cambria Math" panose="02040503050406030204" pitchFamily="18" charset="0"/>
-                          </a:rPr>
-                        </m:ctrlPr>
-                      </m:dPr>
-                      <m:e>
-                        <m:sSup>
-                          <m:sSupPr>
-                            <m:ctrlPr>
-                              <a:rPr lang="en-US" b="1" i="1" smtClean="0">
-                                <a:latin typeface="Cambria Math" panose="02040503050406030204" pitchFamily="18" charset="0"/>
-                              </a:rPr>
-                            </m:ctrlPr>
-                          </m:sSupPr>
-                          <m:e>
-                            <m:r>
-                              <a:rPr lang="en-US" b="1" i="1" smtClean="0">
-                                <a:latin typeface="Cambria Math" panose="02040503050406030204" pitchFamily="18" charset="0"/>
-                              </a:rPr>
-                              <m:t>𝑹</m:t>
-                            </m:r>
-                          </m:e>
-                          <m:sup>
-                            <m:r>
-                              <a:rPr lang="en-US" b="1" i="1" smtClean="0">
-                                <a:latin typeface="Cambria Math" panose="02040503050406030204" pitchFamily="18" charset="0"/>
-                              </a:rPr>
-                              <m:t>𝟐</m:t>
-                            </m:r>
-                          </m:sup>
-                        </m:sSup>
-                        <m:r>
-                          <a:rPr lang="en-US" b="1" i="1" smtClean="0">
-                            <a:latin typeface="Cambria Math" panose="02040503050406030204" pitchFamily="18" charset="0"/>
-                          </a:rPr>
-                          <m:t>=</m:t>
-                        </m:r>
-                        <m:r>
-                          <a:rPr lang="en-US" b="1" i="1" smtClean="0">
-                            <a:latin typeface="Cambria Math" panose="02040503050406030204" pitchFamily="18" charset="0"/>
-                          </a:rPr>
-                          <m:t>𝟎</m:t>
-                        </m:r>
-                        <m:r>
-                          <a:rPr lang="en-US" b="1" i="1" smtClean="0">
-                            <a:latin typeface="Cambria Math" panose="02040503050406030204" pitchFamily="18" charset="0"/>
-                          </a:rPr>
-                          <m:t>.</m:t>
-                        </m:r>
-                        <m:r>
-                          <a:rPr lang="en-US" b="1" i="1" smtClean="0">
-                            <a:latin typeface="Cambria Math" panose="02040503050406030204" pitchFamily="18" charset="0"/>
-                          </a:rPr>
-                          <m:t>𝟗𝟓</m:t>
-                        </m:r>
-                      </m:e>
-                    </m:d>
-                  </m:oMath>
-                </a14:m>
-                <a:r>
-                  <a:rPr lang="ru-RU" b="1" dirty="0"/>
-                  <a:t> </a:t>
-                </a:r>
-                <a:r>
-                  <a:rPr lang="ru-RU" dirty="0"/>
-                  <a:t>и</a:t>
-                </a:r>
-                <a:r>
-                  <a:rPr lang="ru-RU" b="1" dirty="0"/>
-                  <a:t> полиномов низкой степени</a:t>
-                </a:r>
-                <a:r>
-                  <a:rPr lang="ru-RU" dirty="0"/>
-                  <a:t> </a:t>
-                </a:r>
-                <a:r>
-                  <a:rPr lang="ru-RU" b="1" dirty="0"/>
-                  <a:t>(</a:t>
-                </a:r>
-                <a:r>
-                  <a:rPr lang="en-US" b="1" dirty="0"/>
-                  <a:t>2-3</a:t>
-                </a:r>
-                <a:r>
-                  <a:rPr lang="ru-RU" b="1" dirty="0"/>
-                  <a:t>)</a:t>
-                </a:r>
-              </a:p>
-            </p:txBody>
-          </p:sp>
-        </mc:Choice>
-        <mc:Fallback xmlns="">
-          <p:sp>
-            <p:nvSpPr>
-              <p:cNvPr id="3" name="TextBox 2">
-                <a:extLst>
-                  <a:ext uri="{FF2B5EF4-FFF2-40B4-BE49-F238E27FC236}">
-                    <a16:creationId xmlns:a16="http://schemas.microsoft.com/office/drawing/2014/main" id="{5C119950-4F22-A952-AE41-BFD3A317FB05}"/>
-                  </a:ext>
-                </a:extLst>
-              </p:cNvPr>
-              <p:cNvSpPr txBox="1">
-                <a:spLocks noRot="1" noChangeAspect="1" noMove="1" noResize="1" noEditPoints="1" noAdjustHandles="1" noChangeArrowheads="1" noChangeShapeType="1" noTextEdit="1"/>
-              </p:cNvSpPr>
-              <p:nvPr/>
-            </p:nvSpPr>
-            <p:spPr>
-              <a:xfrm>
-                <a:off x="387790" y="523220"/>
-                <a:ext cx="11416420" cy="4214615"/>
-              </a:xfrm>
-              <a:prstGeom prst="rect">
-                <a:avLst/>
-              </a:prstGeom>
-              <a:blipFill>
-                <a:blip r:embed="rId2"/>
-                <a:stretch>
-                  <a:fillRect l="-481" b="-1158"/>
-                </a:stretch>
-              </a:blipFill>
-            </p:spPr>
-            <p:txBody>
-              <a:bodyPr/>
-              <a:lstStyle/>
-              <a:p>
-                <a:r>
-                  <a:rPr lang="ru-RU">
-                    <a:noFill/>
-                  </a:rPr>
-                  <a:t> </a:t>
-                </a:r>
-              </a:p>
-            </p:txBody>
-          </p:sp>
-        </mc:Fallback>
-      </mc:AlternateContent>
-    </p:spTree>
-    <p:extLst>
-      <p:ext uri="{BB962C8B-B14F-4D97-AF65-F5344CB8AC3E}">
-        <p14:creationId xmlns:p14="http://schemas.microsoft.com/office/powerpoint/2010/main" val="4081014741"/>
-      </p:ext>
-    </p:extLst>
-  </p:cSld>
-  <p:clrMapOvr>
-    <a:masterClrMapping/>
-  </p:clrMapOvr>
-</p:sld>
-</file>
-
-<file path=ppt/slides/slide9.xml><?xml version="1.0" encoding="utf-8"?>
-<p:sld xmlns:a="http://schemas.openxmlformats.org/drawingml/2006/main" xmlns:r="http://schemas.openxmlformats.org/officeDocument/2006/relationships" xmlns:p="http://schemas.openxmlformats.org/presentationml/2006/main">
-  <p:cSld>
-    <p:bg>
-      <p:bgPr>
-        <a:solidFill>
-          <a:schemeClr val="accent2"/>
-        </a:solidFill>
-        <a:effectLst/>
-      </p:bgPr>
-    </p:bg>
-    <p:spTree>
-      <p:nvGrpSpPr>
-        <p:cNvPr id="1" name="">
-          <a:extLst>
-            <a:ext uri="{FF2B5EF4-FFF2-40B4-BE49-F238E27FC236}">
-              <a16:creationId xmlns:a16="http://schemas.microsoft.com/office/drawing/2014/main" id="{07F67235-B120-5DC2-02D3-EDE466B4EA3C}"/>
-            </a:ext>
-          </a:extLst>
-        </p:cNvPr>
-        <p:cNvGrpSpPr/>
-        <p:nvPr/>
-      </p:nvGrpSpPr>
-      <p:grpSpPr>
-        <a:xfrm>
-          <a:off x="0" y="0"/>
-          <a:ext cx="0" cy="0"/>
-          <a:chOff x="0" y="0"/>
-          <a:chExt cx="0" cy="0"/>
-        </a:xfrm>
-      </p:grpSpPr>
-      <p:sp>
-        <p:nvSpPr>
-          <p:cNvPr id="8" name="Rectangle 7">
-            <a:extLst>
-              <a:ext uri="{FF2B5EF4-FFF2-40B4-BE49-F238E27FC236}">
-                <a16:creationId xmlns:a16="http://schemas.microsoft.com/office/drawing/2014/main" id="{2CD6835F-F652-25A6-F645-2290179685E3}"/>
-              </a:ext>
-              <a:ext uri="{C183D7F6-B498-43B3-948B-1728B52AA6E4}">
-                <adec:decorative xmlns:adec="http://schemas.microsoft.com/office/drawing/2017/decorative" val="1"/>
-              </a:ext>
-            </a:extLst>
-          </p:cNvPr>
-          <p:cNvSpPr>
-            <a:spLocks noGrp="1" noRot="1" noChangeAspect="1" noMove="1" noResize="1" noEditPoints="1" noAdjustHandles="1" noChangeArrowheads="1" noChangeShapeType="1" noTextEdit="1"/>
-          </p:cNvSpPr>
-          <p:nvPr>
-            <p:extLst>
-              <p:ext uri="{386F3935-93C4-4BCD-93E2-E3B085C9AB24}">
-                <p16:designElem xmlns:p16="http://schemas.microsoft.com/office/powerpoint/2015/main" val="1"/>
-              </p:ext>
-            </p:extLst>
-          </p:nvPr>
-        </p:nvSpPr>
-        <p:spPr>
-          <a:xfrm>
-            <a:off x="640068" y="640080"/>
-            <a:ext cx="10911865" cy="4626864"/>
-          </a:xfrm>
-          <a:prstGeom prst="rect">
-            <a:avLst/>
-          </a:prstGeom>
-          <a:noFill/>
-          <a:ln w="31750" cap="sq">
-            <a:solidFill>
-              <a:srgbClr val="FFFFFF"/>
-            </a:solidFill>
-            <a:miter lim="800000"/>
-          </a:ln>
-        </p:spPr>
-        <p:style>
-          <a:lnRef idx="2">
-            <a:schemeClr val="accent1">
-              <a:shade val="50000"/>
-            </a:schemeClr>
-          </a:lnRef>
-          <a:fillRef idx="1">
-            <a:schemeClr val="accent1"/>
-          </a:fillRef>
-          <a:effectRef idx="0">
-            <a:schemeClr val="accent1"/>
-          </a:effectRef>
-          <a:fontRef idx="minor">
-            <a:schemeClr val="lt1"/>
-          </a:fontRef>
-        </p:style>
-        <p:txBody>
-          <a:bodyPr rtlCol="0" anchor="ctr"/>
-          <a:lstStyle/>
-          <a:p>
-            <a:pPr marL="0" marR="0" lvl="0" indent="0" algn="ctr" defTabSz="457200" rtl="0" eaLnBrk="1" fontAlgn="auto" latinLnBrk="0" hangingPunct="1">
-              <a:lnSpc>
-                <a:spcPct val="100000"/>
-              </a:lnSpc>
-              <a:spcBef>
-                <a:spcPts val="0"/>
-              </a:spcBef>
-              <a:spcAft>
-                <a:spcPts val="0"/>
-              </a:spcAft>
-              <a:buClrTx/>
-              <a:buSzTx/>
-              <a:buFontTx/>
-              <a:buNone/>
-              <a:tabLst/>
-              <a:defRPr/>
-            </a:pPr>
-            <a:endParaRPr kumimoji="0" lang="en-US" sz="1800" b="0" i="0" u="none" strike="noStrike" kern="1200" cap="none" spc="0" normalizeH="0" baseline="0" noProof="0" dirty="0">
-              <a:ln>
-                <a:noFill/>
-              </a:ln>
-              <a:solidFill>
-                <a:srgbClr val="FFFFFF"/>
-              </a:solidFill>
-              <a:effectLst/>
-              <a:uLnTx/>
-              <a:uFillTx/>
-              <a:latin typeface="Gill Sans MT" panose="020B0502020104020203"/>
-              <a:ea typeface="+mn-ea"/>
-              <a:cs typeface="+mn-cs"/>
-            </a:endParaRPr>
-          </a:p>
-        </p:txBody>
-      </p:sp>
-      <p:sp>
-        <p:nvSpPr>
-          <p:cNvPr id="10" name="Rectangle 9">
-            <a:extLst>
-              <a:ext uri="{FF2B5EF4-FFF2-40B4-BE49-F238E27FC236}">
-                <a16:creationId xmlns:a16="http://schemas.microsoft.com/office/drawing/2014/main" id="{9612F587-5BFE-2158-1B6E-84D728510F17}"/>
-              </a:ext>
-              <a:ext uri="{C183D7F6-B498-43B3-948B-1728B52AA6E4}">
-                <adec:decorative xmlns:adec="http://schemas.microsoft.com/office/drawing/2017/decorative" val="1"/>
-              </a:ext>
-            </a:extLst>
-          </p:cNvPr>
-          <p:cNvSpPr>
-            <a:spLocks noGrp="1" noRot="1" noChangeAspect="1" noMove="1" noResize="1" noEditPoints="1" noAdjustHandles="1" noChangeArrowheads="1" noChangeShapeType="1" noTextEdit="1"/>
-          </p:cNvSpPr>
-          <p:nvPr>
-            <p:extLst>
-              <p:ext uri="{386F3935-93C4-4BCD-93E2-E3B085C9AB24}">
-                <p16:designElem xmlns:p16="http://schemas.microsoft.com/office/powerpoint/2015/main" val="1"/>
-              </p:ext>
-            </p:extLst>
-          </p:nvPr>
-        </p:nvSpPr>
-        <p:spPr>
-          <a:xfrm>
-            <a:off x="806196" y="804672"/>
-            <a:ext cx="10579608" cy="4297680"/>
-          </a:xfrm>
-          <a:prstGeom prst="rect">
-            <a:avLst/>
-          </a:prstGeom>
-          <a:solidFill>
-            <a:srgbClr val="FFFFFF"/>
-          </a:solidFill>
-          <a:ln>
-            <a:noFill/>
-          </a:ln>
-        </p:spPr>
-        <p:style>
-          <a:lnRef idx="2">
-            <a:schemeClr val="accent1">
-              <a:shade val="50000"/>
-            </a:schemeClr>
-          </a:lnRef>
-          <a:fillRef idx="1">
-            <a:schemeClr val="accent1"/>
-          </a:fillRef>
-          <a:effectRef idx="0">
-            <a:schemeClr val="accent1"/>
-          </a:effectRef>
-          <a:fontRef idx="minor">
-            <a:schemeClr val="lt1"/>
-          </a:fontRef>
-        </p:style>
-        <p:txBody>
-          <a:bodyPr rtlCol="0" anchor="ctr"/>
-          <a:lstStyle/>
-          <a:p>
-            <a:pPr marL="0" marR="0" lvl="0" indent="0" algn="ctr" defTabSz="457200" rtl="0" eaLnBrk="1" fontAlgn="auto" latinLnBrk="0" hangingPunct="1">
-              <a:lnSpc>
-                <a:spcPct val="100000"/>
-              </a:lnSpc>
-              <a:spcBef>
-                <a:spcPts val="0"/>
-              </a:spcBef>
-              <a:spcAft>
-                <a:spcPts val="0"/>
-              </a:spcAft>
-              <a:buClrTx/>
-              <a:buSzTx/>
-              <a:buFontTx/>
-              <a:buNone/>
-              <a:tabLst/>
-              <a:defRPr/>
-            </a:pPr>
-            <a:endParaRPr kumimoji="0" lang="en-US" sz="1800" b="0" i="0" u="none" strike="noStrike" kern="1200" cap="none" spc="0" normalizeH="0" baseline="0" noProof="0">
-              <a:ln>
-                <a:noFill/>
-              </a:ln>
-              <a:solidFill>
-                <a:srgbClr val="FFFFFF"/>
-              </a:solidFill>
-              <a:effectLst/>
-              <a:uLnTx/>
-              <a:uFillTx/>
-              <a:latin typeface="Gill Sans MT" panose="020B0502020104020203"/>
-              <a:ea typeface="+mn-ea"/>
-              <a:cs typeface="+mn-cs"/>
-            </a:endParaRPr>
-          </a:p>
-        </p:txBody>
-      </p:sp>
-      <p:sp>
-        <p:nvSpPr>
-          <p:cNvPr id="2" name="Заголовок 1">
-            <a:extLst>
-              <a:ext uri="{FF2B5EF4-FFF2-40B4-BE49-F238E27FC236}">
-                <a16:creationId xmlns:a16="http://schemas.microsoft.com/office/drawing/2014/main" id="{2ABE410B-DACE-F062-AFA8-296F905A2251}"/>
-              </a:ext>
-            </a:extLst>
-          </p:cNvPr>
-          <p:cNvSpPr>
-            <a:spLocks noGrp="1"/>
-          </p:cNvSpPr>
-          <p:nvPr>
-            <p:ph type="title"/>
-          </p:nvPr>
-        </p:nvSpPr>
-        <p:spPr>
-          <a:xfrm>
-            <a:off x="1262729" y="1289303"/>
-            <a:ext cx="9638443" cy="3339303"/>
-          </a:xfrm>
-          <a:ln>
-            <a:noFill/>
-          </a:ln>
-        </p:spPr>
-        <p:txBody>
-          <a:bodyPr vert="horz" lIns="274320" tIns="182880" rIns="274320" bIns="182880" rtlCol="0" anchor="ctr" anchorCtr="1">
-            <a:noAutofit/>
-          </a:bodyPr>
-          <a:lstStyle/>
-          <a:p>
-            <a:r>
-              <a:rPr lang="ru-RU" sz="3200" dirty="0"/>
-              <a:t>Спасибо за внимание</a:t>
-            </a:r>
-            <a:endParaRPr lang="en-US" sz="3200" kern="1200" cap="all" spc="200" baseline="0" dirty="0">
-              <a:solidFill>
-                <a:srgbClr val="262626"/>
-              </a:solidFill>
-              <a:latin typeface="+mj-lt"/>
-              <a:ea typeface="+mj-ea"/>
-              <a:cs typeface="+mj-cs"/>
-            </a:endParaRPr>
+              <a:t>Рис. 1. Зависимость между продолжительностью извержения и временем ожидания, Гейзер "Старый Служака" (Озеро Йеллоустон).</a:t>
+            </a:r>
+            <a:endParaRPr lang="ru-RU" dirty="0"/>
           </a:p>
         </p:txBody>
       </p:sp>
     </p:spTree>
     <p:extLst>
       <p:ext uri="{BB962C8B-B14F-4D97-AF65-F5344CB8AC3E}">
-        <p14:creationId xmlns:p14="http://schemas.microsoft.com/office/powerpoint/2010/main" val="1282713940"/>
+        <p14:creationId xmlns:p14="http://schemas.microsoft.com/office/powerpoint/2010/main" val="1314019891"/>
       </p:ext>
     </p:extLst>
   </p:cSld>
